--- a/deliverables/chem-u02/SHULL_CHEM_Slides_U02_S02.4.pptx
+++ b/deliverables/chem-u02/SHULL_CHEM_Slides_U02_S02.4.pptx
@@ -523,7 +523,7 @@
           <a:p>
             <a:r>
               <a:rPr lang="en-US" dirty="0"/>
-              <a:t/>
+              <a:t>Section title. PROVISIONAL/OPEN: verbatim DECISIONS title now in the panel (see build report for fit). Scope boundary: S2.4 owns what an ion's configuration IS; U3.7 owns which charge an element forms and the energetics. Not taught here: Lewis dot preview (PROVISIONAL, omitted; belongs to a later unit). Transition-metal valence counting (PROVISIONAL, brief slide 6) also omitted. Image slot empty. Prompt subject: a glass tube of neon gas glowing orange on a dark bench.</a:t>
             </a:r>
             <a:endParaRPr lang="en-US" dirty="0"/>
           </a:p>
@@ -611,7 +611,7 @@
           <a:p>
             <a:r>
               <a:rPr lang="en-US" dirty="0"/>
-              <a:t/>
+              <a:t>Na loses 3s1, leaving the neon configuration. Highest n comes off first.</a:t>
             </a:r>
             <a:endParaRPr lang="en-US" dirty="0"/>
           </a:p>
@@ -699,7 +699,7 @@
           <a:p>
             <a:r>
               <a:rPr lang="en-US" dirty="0"/>
-              <a:t/>
+              <a:t>Mg, Al, Ca all lose their outer electrons. Do not explain why these charges form; that is U3.7. Image slot empty. Prompt subject: a strip of magnesium ribbon coiled on a dark bench.</a:t>
             </a:r>
             <a:endParaRPr lang="en-US" dirty="0"/>
           </a:p>
@@ -787,7 +787,7 @@
           <a:p>
             <a:r>
               <a:rPr lang="en-US" dirty="0"/>
-              <a:t/>
+              <a:t>The added electron goes into the open 3p spot, not a new level. Result matches argon.</a:t>
             </a:r>
             <a:endParaRPr lang="en-US" dirty="0"/>
           </a:p>
@@ -875,7 +875,7 @@
           <a:p>
             <a:r>
               <a:rPr lang="en-US" dirty="0"/>
-              <a:t/>
+              <a:t>Anions fill open s and p spots. Br keeps its full 3d10. Image slot empty. Prompt subject: a sealed ampoule of dark red-brown liquid bromine in a rack.</a:t>
             </a:r>
             <a:endParaRPr lang="en-US" dirty="0"/>
           </a:p>
@@ -963,7 +963,7 @@
           <a:p>
             <a:r>
               <a:rPr lang="en-US" dirty="0"/>
-              <a:t/>
+              <a:t>Isoelectronic = same electron count and configuration. Sizes differ; the reason is Unit 3, only pointed to here.</a:t>
             </a:r>
             <a:endParaRPr lang="en-US" dirty="0"/>
           </a:p>
@@ -1051,7 +1051,7 @@
           <a:p>
             <a:r>
               <a:rPr lang="en-US" dirty="0"/>
-              <a:t/>
+              <a:t>Worked example, do together. Image slot empty. Prompt subject: a sample of magnesium sulfate crystals on a watch glass.</a:t>
             </a:r>
             <a:endParaRPr lang="en-US" dirty="0"/>
           </a:p>
@@ -1139,7 +1139,7 @@
           <a:p>
             <a:r>
               <a:rPr lang="en-US" dirty="0"/>
-              <a:t/>
+              <a:t>Mg 12 to 10 electrons = [Ne]. S 16 to 18 electrons = [Ar]. Image slot empty. Prompt subject: an analytical balance display in a darkened lab.</a:t>
             </a:r>
             <a:endParaRPr lang="en-US" dirty="0"/>
           </a:p>
@@ -1227,7 +1227,7 @@
           <a:p>
             <a:r>
               <a:rPr lang="en-US" dirty="0"/>
-              <a:t/>
+              <a:t>PROVISIONAL (simplified): 'why 4s leaves first' is a student-language account (once 3d has electrons it sits lower than 4s). It is not a full energetics explanation; do not extend it. Matches S2.3 wording. Image slot empty. Prompt subject: a polished iron nail and a copper coin on dark slate.</a:t>
             </a:r>
             <a:endParaRPr lang="en-US" dirty="0"/>
           </a:p>
@@ -1315,7 +1315,7 @@
           <a:p>
             <a:r>
               <a:rPr lang="en-US" dirty="0"/>
-              <a:t/>
+              <a:t>Fe 26, Fe2+ 24 [Ar]3d6, Fe3+ 23 [Ar]3d5. Present 3d5 as an observed electron count, not proof of a cause.</a:t>
             </a:r>
             <a:endParaRPr lang="en-US" dirty="0"/>
           </a:p>
@@ -1403,7 +1403,7 @@
           <a:p>
             <a:r>
               <a:rPr lang="en-US" dirty="0"/>
-              <a:t/>
+              <a:t>Same rule as iron. Cu is the taught exception: [Ar] 4s1 3d10. Image slot empty. Prompt subject: a galvanized zinc sheet beside a length of copper wire.</a:t>
             </a:r>
             <a:endParaRPr lang="en-US" dirty="0"/>
           </a:p>
@@ -1491,7 +1491,7 @@
           <a:p>
             <a:r>
               <a:rPr lang="en-US" dirty="0"/>
-              <a:t/>
+              <a:t>Hook. Ask first, answer later. Do not say 'want' or 'need' of atoms; describe outcomes. Image slot empty. Prompt subject: a row of glowing noble gas discharge tubes against a dark background.</a:t>
             </a:r>
             <a:endParaRPr lang="en-US" dirty="0"/>
           </a:p>
@@ -1579,7 +1579,7 @@
           <a:p>
             <a:r>
               <a:rPr lang="en-US" dirty="0"/>
-              <a:t/>
+              <a:t>Zn2+ = Cu+ = [Ar] 3d10 (28 e). Cu2+ = [Ar] 3d9 (27 e). Not noble-gas configurations; these are stable anyway. Image slot empty. Prompt subject: a pencil resting on a page of handwritten calculations.</a:t>
             </a:r>
             <a:endParaRPr lang="en-US" dirty="0"/>
           </a:p>
@@ -1667,7 +1667,7 @@
           <a:p>
             <a:r>
               <a:rPr lang="en-US" dirty="0"/>
-              <a:t/>
+              <a:t>Answers. 1) Al 3, Se 6, Xe 8. 2) Ca2+: 20 to 18 electrons, 1s2 2s2 2p6 3s2 3p6 = [Ar], argon. 3) O2-: 10 electrons, 1s2 2s2 2p6. 4) Fe3+: [Ar] 3d5; the two 4s electrons leave first, then one 3d. (The 'which leave first' part is not printed on the tile.) 5) Cu2+ [Ar] 3d9 (27 e); Zn2+ [Ar] 3d10 (28 e). The slide tile 4 carries Fe3+, Cu2+, Zn2+ together, so items 4 and 5 share one tile. Image slot empty. Prompt subject: a periodic table wall chart photographed at a shallow angle.</a:t>
             </a:r>
             <a:endParaRPr lang="en-US" dirty="0"/>
           </a:p>
@@ -1755,7 +1755,7 @@
           <a:p>
             <a:r>
               <a:rPr lang="en-US" dirty="0"/>
-              <a:t/>
+              <a:t>Boundary: S2.4 stops at what an ion's configuration is. Which charge forms and the energy it takes: U3.4, U3.7. Image slot empty. Prompt subject: a long laboratory bench receding into shadow.</a:t>
             </a:r>
             <a:endParaRPr lang="en-US" dirty="0"/>
           </a:p>
@@ -1843,7 +1843,7 @@
           <a:p>
             <a:r>
               <a:rPr lang="en-US" dirty="0"/>
-              <a:t/>
+              <a:t>Students write the three terms. Noble gas configuration = outer s and p sublevels full (2 for He, 8 for the rest); say 'full' means s and p, not the whole shell. Image slot empty. Prompt subject: a worn chemistry notebook open to a hand-ruled page.</a:t>
             </a:r>
             <a:endParaRPr lang="en-US" dirty="0"/>
           </a:p>
@@ -1931,7 +1931,7 @@
           <a:p>
             <a:r>
               <a:rPr lang="en-US" dirty="0"/>
-              <a:t/>
+              <a:t>Cl: 10 core + 7 valence = 17. Valence = highest n only. Figure shows the split.</a:t>
             </a:r>
             <a:endParaRPr lang="en-US" dirty="0"/>
           </a:p>
@@ -2019,7 +2019,7 @@
           <a:p>
             <a:r>
               <a:rPr lang="en-US" dirty="0"/>
-              <a:t/>
+              <a:t>Main-group only. PROVISIONAL: transition-metal valence counting is deliberately left out (brief slide 6; Matt to decide whether d electrons count). Say only that their ions lose the outer s electrons first (slide 17). Lewis dot preview omitted: belongs to a later unit (S5.1), PROVISIONAL.</a:t>
             </a:r>
             <a:endParaRPr lang="en-US" dirty="0"/>
           </a:p>
@@ -2107,7 +2107,7 @@
           <a:p>
             <a:r>
               <a:rPr lang="en-US" dirty="0"/>
-              <a:t/>
+              <a:t>Worked example, do together. Answers on next slide. Image slot empty. Prompt subject: a block of red phosphorus beside a piece of calcium metal.</a:t>
             </a:r>
             <a:endParaRPr lang="en-US" dirty="0"/>
           </a:p>
@@ -2195,7 +2195,7 @@
           <a:p>
             <a:r>
               <a:rPr lang="en-US" dirty="0"/>
-              <a:t/>
+              <a:t>P: n = 3, 3s2 3p3 = 5. Ca: n = 4, 4s2 = 2. Both agree with group number. Image slot empty. Prompt subject: a pencil resting on a page of handwritten configurations.</a:t>
             </a:r>
             <a:endParaRPr lang="en-US" dirty="0"/>
           </a:p>
@@ -2283,7 +2283,7 @@
           <a:p>
             <a:r>
               <a:rPr lang="en-US" dirty="0"/>
-              <a:t/>
+              <a:t>Full means outer s and p. Argon's 3d is empty, so n = 3 is not completely full; this fixes the 'full shell = 8' misconception. Avoid personifying atoms.</a:t>
             </a:r>
             <a:endParaRPr lang="en-US" dirty="0"/>
           </a:p>
@@ -2371,7 +2371,7 @@
           <a:p>
             <a:r>
               <a:rPr lang="en-US" dirty="0"/>
-              <a:t/>
+              <a:t>Electrons = atomic number minus charge. Protons never change. Boundary: do not predict which charge forms (U3.7). Image slot empty. Prompt subject: a bowl of table salt crystals on dark slate.</a:t>
             </a:r>
             <a:endParaRPr lang="en-US" dirty="0"/>
           </a:p>
@@ -13218,7 +13218,7 @@
                 <a:ea typeface="Trade Gothic Next" pitchFamily="34" charset="-122"/>
                 <a:cs typeface="Trade Gothic Next" pitchFamily="34" charset="-120"/>
               </a:rPr>
-              <a:t>04</a:t>
+              <a:t>2.4</a:t>
             </a:r>
             <a:endParaRPr lang="en-US" sz="4400" dirty="0"/>
           </a:p>
@@ -13262,7 +13262,7 @@
                 <a:ea typeface="Trade Gothic Next" pitchFamily="34" charset="-122"/>
                 <a:cs typeface="Trade Gothic Next" pitchFamily="34" charset="-120"/>
               </a:rPr>
-              <a:t>2.4</a:t>
+              <a:t>Electron</a:t>
             </a:r>
             <a:endParaRPr lang="en-US" sz="2800" dirty="0"/>
           </a:p>
@@ -13282,7 +13282,7 @@
                 <a:ea typeface="Trade Gothic Next" pitchFamily="34" charset="-122"/>
                 <a:cs typeface="Trade Gothic Next" pitchFamily="34" charset="-120"/>
               </a:rPr>
-              <a:t>Valence Electrons</a:t>
+              <a:t>Stability &amp;</a:t>
             </a:r>
             <a:endParaRPr lang="en-US" sz="2800" dirty="0"/>
           </a:p>
@@ -13302,7 +13302,27 @@
                 <a:ea typeface="Trade Gothic Next" pitchFamily="34" charset="-122"/>
                 <a:cs typeface="Trade Gothic Next" pitchFamily="34" charset="-120"/>
               </a:rPr>
-              <a:t>&amp; Stability</a:t>
+              <a:t>Valence</a:t>
+            </a:r>
+            <a:endParaRPr lang="en-US" sz="2800" dirty="0"/>
+          </a:p>
+          <a:p>
+            <a:pPr algn="l" indent="0" marL="0">
+              <a:lnSpc>
+                <a:spcPct val="106000"/>
+              </a:lnSpc>
+              <a:buNone/>
+            </a:pPr>
+            <a:r>
+              <a:rPr lang="en-US" sz="2800" b="1" dirty="0">
+                <a:solidFill>
+                  <a:srgbClr val="14161B"/>
+                </a:solidFill>
+                <a:latin typeface="Trade Gothic Next" pitchFamily="34" charset="0"/>
+                <a:ea typeface="Trade Gothic Next" pitchFamily="34" charset="-122"/>
+                <a:cs typeface="Trade Gothic Next" pitchFamily="34" charset="-120"/>
+              </a:rPr>
+              <a:t>Electrons</a:t>
             </a:r>
             <a:endParaRPr lang="en-US" sz="2800" dirty="0"/>
           </a:p>
@@ -13392,7 +13412,7 @@
       </p:sp>
       <p:sp>
         <p:nvSpPr>
-          <p:cNvPr id="6" name="Text 3"/>
+          <p:cNvPr id="7" name="Text 3"/>
           <p:cNvSpPr txBox="1"/>
           <p:nvPr>
             <p:ph idx="103" hasCustomPrompt="1"/>
@@ -13504,7 +13524,21 @@
                 <a:ea typeface="Trade Gothic Next" pitchFamily="34" charset="-122"/>
                 <a:cs typeface="Trade Gothic Next" pitchFamily="34" charset="-120"/>
               </a:rPr>
-              <a:t>Na Becomes Na+</a:t>
+              <a:t>Na Becomes Na</a:t>
+            </a:r>
+            <a:pPr algn="l" indent="0" marL="0">
+              <a:buNone/>
+            </a:pPr>
+            <a:r>
+              <a:rPr lang="en-US" sz="2800" b="1" baseline="30000" dirty="0">
+                <a:solidFill>
+                  <a:srgbClr val="14161B"/>
+                </a:solidFill>
+                <a:latin typeface="Trade Gothic Next" pitchFamily="34" charset="0"/>
+                <a:ea typeface="Trade Gothic Next" pitchFamily="34" charset="-122"/>
+                <a:cs typeface="Trade Gothic Next" pitchFamily="34" charset="-120"/>
+              </a:rPr>
+              <a:t>+</a:t>
             </a:r>
             <a:endParaRPr lang="en-US" sz="2800" dirty="0"/>
           </a:p>
@@ -13627,7 +13661,105 @@
                 <a:ea typeface="Trade Gothic Next" pitchFamily="34" charset="-122"/>
                 <a:cs typeface="Trade Gothic Next" pitchFamily="34" charset="-120"/>
               </a:rPr>
-              <a:t>Na: 1s² 2s² 2p⁶ 3s¹</a:t>
+              <a:t>Na: 1s</a:t>
+            </a:r>
+            <a:pPr indent="0" marL="0">
+              <a:buNone/>
+            </a:pPr>
+            <a:r>
+              <a:rPr lang="en-US" sz="1600" baseline="30000" dirty="0">
+                <a:solidFill>
+                  <a:srgbClr val="14161B"/>
+                </a:solidFill>
+                <a:latin typeface="Trade Gothic Next" pitchFamily="34" charset="0"/>
+                <a:ea typeface="Trade Gothic Next" pitchFamily="34" charset="-122"/>
+                <a:cs typeface="Trade Gothic Next" pitchFamily="34" charset="-120"/>
+              </a:rPr>
+              <a:t>2</a:t>
+            </a:r>
+            <a:pPr indent="0" marL="0">
+              <a:buNone/>
+            </a:pPr>
+            <a:r>
+              <a:rPr lang="en-US" sz="1600" dirty="0">
+                <a:solidFill>
+                  <a:srgbClr val="14161B"/>
+                </a:solidFill>
+                <a:latin typeface="Trade Gothic Next" pitchFamily="34" charset="0"/>
+                <a:ea typeface="Trade Gothic Next" pitchFamily="34" charset="-122"/>
+                <a:cs typeface="Trade Gothic Next" pitchFamily="34" charset="-120"/>
+              </a:rPr>
+              <a:t> 2s</a:t>
+            </a:r>
+            <a:pPr indent="0" marL="0">
+              <a:buNone/>
+            </a:pPr>
+            <a:r>
+              <a:rPr lang="en-US" sz="1600" baseline="30000" dirty="0">
+                <a:solidFill>
+                  <a:srgbClr val="14161B"/>
+                </a:solidFill>
+                <a:latin typeface="Trade Gothic Next" pitchFamily="34" charset="0"/>
+                <a:ea typeface="Trade Gothic Next" pitchFamily="34" charset="-122"/>
+                <a:cs typeface="Trade Gothic Next" pitchFamily="34" charset="-120"/>
+              </a:rPr>
+              <a:t>2</a:t>
+            </a:r>
+            <a:pPr indent="0" marL="0">
+              <a:buNone/>
+            </a:pPr>
+            <a:r>
+              <a:rPr lang="en-US" sz="1600" dirty="0">
+                <a:solidFill>
+                  <a:srgbClr val="14161B"/>
+                </a:solidFill>
+                <a:latin typeface="Trade Gothic Next" pitchFamily="34" charset="0"/>
+                <a:ea typeface="Trade Gothic Next" pitchFamily="34" charset="-122"/>
+                <a:cs typeface="Trade Gothic Next" pitchFamily="34" charset="-120"/>
+              </a:rPr>
+              <a:t> 2p</a:t>
+            </a:r>
+            <a:pPr indent="0" marL="0">
+              <a:buNone/>
+            </a:pPr>
+            <a:r>
+              <a:rPr lang="en-US" sz="1600" baseline="30000" dirty="0">
+                <a:solidFill>
+                  <a:srgbClr val="14161B"/>
+                </a:solidFill>
+                <a:latin typeface="Trade Gothic Next" pitchFamily="34" charset="0"/>
+                <a:ea typeface="Trade Gothic Next" pitchFamily="34" charset="-122"/>
+                <a:cs typeface="Trade Gothic Next" pitchFamily="34" charset="-120"/>
+              </a:rPr>
+              <a:t>6</a:t>
+            </a:r>
+            <a:pPr indent="0" marL="0">
+              <a:buNone/>
+            </a:pPr>
+            <a:r>
+              <a:rPr lang="en-US" sz="1600" dirty="0">
+                <a:solidFill>
+                  <a:srgbClr val="14161B"/>
+                </a:solidFill>
+                <a:latin typeface="Trade Gothic Next" pitchFamily="34" charset="0"/>
+                <a:ea typeface="Trade Gothic Next" pitchFamily="34" charset="-122"/>
+                <a:cs typeface="Trade Gothic Next" pitchFamily="34" charset="-120"/>
+              </a:rPr>
+              <a:t> 3s</a:t>
+            </a:r>
+            <a:pPr indent="0" marL="0">
+              <a:buNone/>
+            </a:pPr>
+            <a:r>
+              <a:rPr lang="en-US" sz="1600" baseline="30000" dirty="0">
+                <a:solidFill>
+                  <a:srgbClr val="14161B"/>
+                </a:solidFill>
+                <a:latin typeface="Trade Gothic Next" pitchFamily="34" charset="0"/>
+                <a:ea typeface="Trade Gothic Next" pitchFamily="34" charset="-122"/>
+                <a:cs typeface="Trade Gothic Next" pitchFamily="34" charset="-120"/>
+              </a:rPr>
+              <a:t>1</a:t>
             </a:r>
             <a:endParaRPr lang="en-US" sz="1600" dirty="0"/>
           </a:p>
@@ -13726,7 +13858,105 @@
                 <a:ea typeface="Trade Gothic Next" pitchFamily="34" charset="-122"/>
                 <a:cs typeface="Trade Gothic Next" pitchFamily="34" charset="-120"/>
               </a:rPr>
-              <a:t>Na+: 1s² 2s² 2p⁶</a:t>
+              <a:t>Na</a:t>
+            </a:r>
+            <a:pPr indent="0" marL="0">
+              <a:buNone/>
+            </a:pPr>
+            <a:r>
+              <a:rPr lang="en-US" sz="1600" baseline="30000" dirty="0">
+                <a:solidFill>
+                  <a:srgbClr val="14161B"/>
+                </a:solidFill>
+                <a:latin typeface="Trade Gothic Next" pitchFamily="34" charset="0"/>
+                <a:ea typeface="Trade Gothic Next" pitchFamily="34" charset="-122"/>
+                <a:cs typeface="Trade Gothic Next" pitchFamily="34" charset="-120"/>
+              </a:rPr>
+              <a:t>+</a:t>
+            </a:r>
+            <a:pPr indent="0" marL="0">
+              <a:buNone/>
+            </a:pPr>
+            <a:r>
+              <a:rPr lang="en-US" sz="1600" dirty="0">
+                <a:solidFill>
+                  <a:srgbClr val="14161B"/>
+                </a:solidFill>
+                <a:latin typeface="Trade Gothic Next" pitchFamily="34" charset="0"/>
+                <a:ea typeface="Trade Gothic Next" pitchFamily="34" charset="-122"/>
+                <a:cs typeface="Trade Gothic Next" pitchFamily="34" charset="-120"/>
+              </a:rPr>
+              <a:t>: 1s</a:t>
+            </a:r>
+            <a:pPr indent="0" marL="0">
+              <a:buNone/>
+            </a:pPr>
+            <a:r>
+              <a:rPr lang="en-US" sz="1600" baseline="30000" dirty="0">
+                <a:solidFill>
+                  <a:srgbClr val="14161B"/>
+                </a:solidFill>
+                <a:latin typeface="Trade Gothic Next" pitchFamily="34" charset="0"/>
+                <a:ea typeface="Trade Gothic Next" pitchFamily="34" charset="-122"/>
+                <a:cs typeface="Trade Gothic Next" pitchFamily="34" charset="-120"/>
+              </a:rPr>
+              <a:t>2</a:t>
+            </a:r>
+            <a:pPr indent="0" marL="0">
+              <a:buNone/>
+            </a:pPr>
+            <a:r>
+              <a:rPr lang="en-US" sz="1600" dirty="0">
+                <a:solidFill>
+                  <a:srgbClr val="14161B"/>
+                </a:solidFill>
+                <a:latin typeface="Trade Gothic Next" pitchFamily="34" charset="0"/>
+                <a:ea typeface="Trade Gothic Next" pitchFamily="34" charset="-122"/>
+                <a:cs typeface="Trade Gothic Next" pitchFamily="34" charset="-120"/>
+              </a:rPr>
+              <a:t> 2s</a:t>
+            </a:r>
+            <a:pPr indent="0" marL="0">
+              <a:buNone/>
+            </a:pPr>
+            <a:r>
+              <a:rPr lang="en-US" sz="1600" baseline="30000" dirty="0">
+                <a:solidFill>
+                  <a:srgbClr val="14161B"/>
+                </a:solidFill>
+                <a:latin typeface="Trade Gothic Next" pitchFamily="34" charset="0"/>
+                <a:ea typeface="Trade Gothic Next" pitchFamily="34" charset="-122"/>
+                <a:cs typeface="Trade Gothic Next" pitchFamily="34" charset="-120"/>
+              </a:rPr>
+              <a:t>2</a:t>
+            </a:r>
+            <a:pPr indent="0" marL="0">
+              <a:buNone/>
+            </a:pPr>
+            <a:r>
+              <a:rPr lang="en-US" sz="1600" dirty="0">
+                <a:solidFill>
+                  <a:srgbClr val="14161B"/>
+                </a:solidFill>
+                <a:latin typeface="Trade Gothic Next" pitchFamily="34" charset="0"/>
+                <a:ea typeface="Trade Gothic Next" pitchFamily="34" charset="-122"/>
+                <a:cs typeface="Trade Gothic Next" pitchFamily="34" charset="-120"/>
+              </a:rPr>
+              <a:t> 2p</a:t>
+            </a:r>
+            <a:pPr indent="0" marL="0">
+              <a:buNone/>
+            </a:pPr>
+            <a:r>
+              <a:rPr lang="en-US" sz="1600" baseline="30000" dirty="0">
+                <a:solidFill>
+                  <a:srgbClr val="14161B"/>
+                </a:solidFill>
+                <a:latin typeface="Trade Gothic Next" pitchFamily="34" charset="0"/>
+                <a:ea typeface="Trade Gothic Next" pitchFamily="34" charset="-122"/>
+                <a:cs typeface="Trade Gothic Next" pitchFamily="34" charset="-120"/>
+              </a:rPr>
+              <a:t>6</a:t>
             </a:r>
             <a:endParaRPr lang="en-US" sz="1600" dirty="0"/>
           </a:p>
@@ -13915,7 +14145,7 @@
       </p:sp>
       <p:sp>
         <p:nvSpPr>
-          <p:cNvPr id="13" name="Text 3"/>
+          <p:cNvPr id="14" name="Text 3"/>
           <p:cNvSpPr txBox="1"/>
           <p:nvPr>
             <p:ph idx="106" type="body" hasCustomPrompt="1"/>
@@ -14126,7 +14356,21 @@
                 <a:ea typeface="Trade Gothic Next" pitchFamily="34" charset="-122"/>
                 <a:cs typeface="Trade Gothic Next" pitchFamily="34" charset="-120"/>
               </a:rPr>
-              <a:t>Mg: [Ne] 3s²</a:t>
+              <a:t>Mg: [Ne] 3s</a:t>
+            </a:r>
+            <a:pPr indent="0" marL="0">
+              <a:buNone/>
+            </a:pPr>
+            <a:r>
+              <a:rPr lang="en-US" sz="1600" baseline="30000" dirty="0">
+                <a:solidFill>
+                  <a:srgbClr val="14161B"/>
+                </a:solidFill>
+                <a:latin typeface="Trade Gothic Next" pitchFamily="34" charset="0"/>
+                <a:ea typeface="Trade Gothic Next" pitchFamily="34" charset="-122"/>
+                <a:cs typeface="Trade Gothic Next" pitchFamily="34" charset="-120"/>
+              </a:rPr>
+              <a:t>2</a:t>
             </a:r>
             <a:endParaRPr lang="en-US" sz="1600" dirty="0"/>
           </a:p>
@@ -14143,7 +14387,35 @@
                 <a:ea typeface="Trade Gothic Next" pitchFamily="34" charset="-122"/>
                 <a:cs typeface="Trade Gothic Next" pitchFamily="34" charset="-120"/>
               </a:rPr>
-              <a:t>Mg²+: [Ne]</a:t>
+              <a:t>Mg</a:t>
+            </a:r>
+            <a:pPr indent="0" marL="0">
+              <a:buNone/>
+            </a:pPr>
+            <a:r>
+              <a:rPr lang="en-US" sz="1600" baseline="30000" dirty="0">
+                <a:solidFill>
+                  <a:srgbClr val="14161B"/>
+                </a:solidFill>
+                <a:latin typeface="Trade Gothic Next" pitchFamily="34" charset="0"/>
+                <a:ea typeface="Trade Gothic Next" pitchFamily="34" charset="-122"/>
+                <a:cs typeface="Trade Gothic Next" pitchFamily="34" charset="-120"/>
+              </a:rPr>
+              <a:t>2+</a:t>
+            </a:r>
+            <a:pPr indent="0" marL="0">
+              <a:buNone/>
+            </a:pPr>
+            <a:r>
+              <a:rPr lang="en-US" sz="1600" dirty="0">
+                <a:solidFill>
+                  <a:srgbClr val="14161B"/>
+                </a:solidFill>
+                <a:latin typeface="Trade Gothic Next" pitchFamily="34" charset="0"/>
+                <a:ea typeface="Trade Gothic Next" pitchFamily="34" charset="-122"/>
+                <a:cs typeface="Trade Gothic Next" pitchFamily="34" charset="-120"/>
+              </a:rPr>
+              <a:t>: [Ne]</a:t>
             </a:r>
             <a:endParaRPr lang="en-US" sz="1600" dirty="0"/>
           </a:p>
@@ -14242,7 +14514,49 @@
                 <a:ea typeface="Trade Gothic Next" pitchFamily="34" charset="-122"/>
                 <a:cs typeface="Trade Gothic Next" pitchFamily="34" charset="-120"/>
               </a:rPr>
-              <a:t>Al: [Ne] 3s² 3p¹</a:t>
+              <a:t>Al: [Ne] 3s</a:t>
+            </a:r>
+            <a:pPr indent="0" marL="0">
+              <a:buNone/>
+            </a:pPr>
+            <a:r>
+              <a:rPr lang="en-US" sz="1600" baseline="30000" dirty="0">
+                <a:solidFill>
+                  <a:srgbClr val="14161B"/>
+                </a:solidFill>
+                <a:latin typeface="Trade Gothic Next" pitchFamily="34" charset="0"/>
+                <a:ea typeface="Trade Gothic Next" pitchFamily="34" charset="-122"/>
+                <a:cs typeface="Trade Gothic Next" pitchFamily="34" charset="-120"/>
+              </a:rPr>
+              <a:t>2</a:t>
+            </a:r>
+            <a:pPr indent="0" marL="0">
+              <a:buNone/>
+            </a:pPr>
+            <a:r>
+              <a:rPr lang="en-US" sz="1600" dirty="0">
+                <a:solidFill>
+                  <a:srgbClr val="14161B"/>
+                </a:solidFill>
+                <a:latin typeface="Trade Gothic Next" pitchFamily="34" charset="0"/>
+                <a:ea typeface="Trade Gothic Next" pitchFamily="34" charset="-122"/>
+                <a:cs typeface="Trade Gothic Next" pitchFamily="34" charset="-120"/>
+              </a:rPr>
+              <a:t> 3p</a:t>
+            </a:r>
+            <a:pPr indent="0" marL="0">
+              <a:buNone/>
+            </a:pPr>
+            <a:r>
+              <a:rPr lang="en-US" sz="1600" baseline="30000" dirty="0">
+                <a:solidFill>
+                  <a:srgbClr val="14161B"/>
+                </a:solidFill>
+                <a:latin typeface="Trade Gothic Next" pitchFamily="34" charset="0"/>
+                <a:ea typeface="Trade Gothic Next" pitchFamily="34" charset="-122"/>
+                <a:cs typeface="Trade Gothic Next" pitchFamily="34" charset="-120"/>
+              </a:rPr>
+              <a:t>1</a:t>
             </a:r>
             <a:endParaRPr lang="en-US" sz="1600" dirty="0"/>
           </a:p>
@@ -14259,7 +14573,35 @@
                 <a:ea typeface="Trade Gothic Next" pitchFamily="34" charset="-122"/>
                 <a:cs typeface="Trade Gothic Next" pitchFamily="34" charset="-120"/>
               </a:rPr>
-              <a:t>Al³+: [Ne]</a:t>
+              <a:t>Al</a:t>
+            </a:r>
+            <a:pPr indent="0" marL="0">
+              <a:buNone/>
+            </a:pPr>
+            <a:r>
+              <a:rPr lang="en-US" sz="1600" baseline="30000" dirty="0">
+                <a:solidFill>
+                  <a:srgbClr val="14161B"/>
+                </a:solidFill>
+                <a:latin typeface="Trade Gothic Next" pitchFamily="34" charset="0"/>
+                <a:ea typeface="Trade Gothic Next" pitchFamily="34" charset="-122"/>
+                <a:cs typeface="Trade Gothic Next" pitchFamily="34" charset="-120"/>
+              </a:rPr>
+              <a:t>3+</a:t>
+            </a:r>
+            <a:pPr indent="0" marL="0">
+              <a:buNone/>
+            </a:pPr>
+            <a:r>
+              <a:rPr lang="en-US" sz="1600" dirty="0">
+                <a:solidFill>
+                  <a:srgbClr val="14161B"/>
+                </a:solidFill>
+                <a:latin typeface="Trade Gothic Next" pitchFamily="34" charset="0"/>
+                <a:ea typeface="Trade Gothic Next" pitchFamily="34" charset="-122"/>
+                <a:cs typeface="Trade Gothic Next" pitchFamily="34" charset="-120"/>
+              </a:rPr>
+              <a:t>: [Ne]</a:t>
             </a:r>
             <a:endParaRPr lang="en-US" sz="1600" dirty="0"/>
           </a:p>
@@ -14358,7 +14700,21 @@
                 <a:ea typeface="Trade Gothic Next" pitchFamily="34" charset="-122"/>
                 <a:cs typeface="Trade Gothic Next" pitchFamily="34" charset="-120"/>
               </a:rPr>
-              <a:t>Ca: [Ar] 4s²</a:t>
+              <a:t>Ca: [Ar] 4s</a:t>
+            </a:r>
+            <a:pPr indent="0" marL="0">
+              <a:buNone/>
+            </a:pPr>
+            <a:r>
+              <a:rPr lang="en-US" sz="1600" baseline="30000" dirty="0">
+                <a:solidFill>
+                  <a:srgbClr val="14161B"/>
+                </a:solidFill>
+                <a:latin typeface="Trade Gothic Next" pitchFamily="34" charset="0"/>
+                <a:ea typeface="Trade Gothic Next" pitchFamily="34" charset="-122"/>
+                <a:cs typeface="Trade Gothic Next" pitchFamily="34" charset="-120"/>
+              </a:rPr>
+              <a:t>2</a:t>
             </a:r>
             <a:endParaRPr lang="en-US" sz="1600" dirty="0"/>
           </a:p>
@@ -14375,7 +14731,35 @@
                 <a:ea typeface="Trade Gothic Next" pitchFamily="34" charset="-122"/>
                 <a:cs typeface="Trade Gothic Next" pitchFamily="34" charset="-120"/>
               </a:rPr>
-              <a:t>Ca²+: [Ar]</a:t>
+              <a:t>Ca</a:t>
+            </a:r>
+            <a:pPr indent="0" marL="0">
+              <a:buNone/>
+            </a:pPr>
+            <a:r>
+              <a:rPr lang="en-US" sz="1600" baseline="30000" dirty="0">
+                <a:solidFill>
+                  <a:srgbClr val="14161B"/>
+                </a:solidFill>
+                <a:latin typeface="Trade Gothic Next" pitchFamily="34" charset="0"/>
+                <a:ea typeface="Trade Gothic Next" pitchFamily="34" charset="-122"/>
+                <a:cs typeface="Trade Gothic Next" pitchFamily="34" charset="-120"/>
+              </a:rPr>
+              <a:t>2+</a:t>
+            </a:r>
+            <a:pPr indent="0" marL="0">
+              <a:buNone/>
+            </a:pPr>
+            <a:r>
+              <a:rPr lang="en-US" sz="1600" dirty="0">
+                <a:solidFill>
+                  <a:srgbClr val="14161B"/>
+                </a:solidFill>
+                <a:latin typeface="Trade Gothic Next" pitchFamily="34" charset="0"/>
+                <a:ea typeface="Trade Gothic Next" pitchFamily="34" charset="-122"/>
+                <a:cs typeface="Trade Gothic Next" pitchFamily="34" charset="-120"/>
+              </a:rPr>
+              <a:t>: [Ar]</a:t>
             </a:r>
             <a:endParaRPr lang="en-US" sz="1600" dirty="0"/>
           </a:p>
@@ -14523,7 +14907,7 @@
       </p:sp>
       <p:sp>
         <p:nvSpPr>
-          <p:cNvPr id="13" name="Text 4"/>
+          <p:cNvPr id="14" name="Text 4"/>
           <p:cNvSpPr txBox="1"/>
           <p:nvPr>
             <p:ph idx="107" hasCustomPrompt="1"/>
@@ -14635,7 +15019,21 @@
                 <a:ea typeface="Trade Gothic Next" pitchFamily="34" charset="-122"/>
                 <a:cs typeface="Trade Gothic Next" pitchFamily="34" charset="-120"/>
               </a:rPr>
-              <a:t>Cl Becomes Cl−</a:t>
+              <a:t>Cl Becomes Cl</a:t>
+            </a:r>
+            <a:pPr algn="l" indent="0" marL="0">
+              <a:buNone/>
+            </a:pPr>
+            <a:r>
+              <a:rPr lang="en-US" sz="2800" b="1" baseline="30000" dirty="0">
+                <a:solidFill>
+                  <a:srgbClr val="14161B"/>
+                </a:solidFill>
+                <a:latin typeface="Trade Gothic Next" pitchFamily="34" charset="0"/>
+                <a:ea typeface="Trade Gothic Next" pitchFamily="34" charset="-122"/>
+                <a:cs typeface="Trade Gothic Next" pitchFamily="34" charset="-120"/>
+              </a:rPr>
+              <a:t>−</a:t>
             </a:r>
             <a:endParaRPr lang="en-US" sz="2800" dirty="0"/>
           </a:p>
@@ -14758,7 +15156,49 @@
                 <a:ea typeface="Trade Gothic Next" pitchFamily="34" charset="-122"/>
                 <a:cs typeface="Trade Gothic Next" pitchFamily="34" charset="-120"/>
               </a:rPr>
-              <a:t>Cl: [Ne] 3s² 3p⁵</a:t>
+              <a:t>Cl: [Ne] 3s</a:t>
+            </a:r>
+            <a:pPr indent="0" marL="0">
+              <a:buNone/>
+            </a:pPr>
+            <a:r>
+              <a:rPr lang="en-US" sz="1600" baseline="30000" dirty="0">
+                <a:solidFill>
+                  <a:srgbClr val="14161B"/>
+                </a:solidFill>
+                <a:latin typeface="Trade Gothic Next" pitchFamily="34" charset="0"/>
+                <a:ea typeface="Trade Gothic Next" pitchFamily="34" charset="-122"/>
+                <a:cs typeface="Trade Gothic Next" pitchFamily="34" charset="-120"/>
+              </a:rPr>
+              <a:t>2</a:t>
+            </a:r>
+            <a:pPr indent="0" marL="0">
+              <a:buNone/>
+            </a:pPr>
+            <a:r>
+              <a:rPr lang="en-US" sz="1600" dirty="0">
+                <a:solidFill>
+                  <a:srgbClr val="14161B"/>
+                </a:solidFill>
+                <a:latin typeface="Trade Gothic Next" pitchFamily="34" charset="0"/>
+                <a:ea typeface="Trade Gothic Next" pitchFamily="34" charset="-122"/>
+                <a:cs typeface="Trade Gothic Next" pitchFamily="34" charset="-120"/>
+              </a:rPr>
+              <a:t> 3p</a:t>
+            </a:r>
+            <a:pPr indent="0" marL="0">
+              <a:buNone/>
+            </a:pPr>
+            <a:r>
+              <a:rPr lang="en-US" sz="1600" baseline="30000" dirty="0">
+                <a:solidFill>
+                  <a:srgbClr val="14161B"/>
+                </a:solidFill>
+                <a:latin typeface="Trade Gothic Next" pitchFamily="34" charset="0"/>
+                <a:ea typeface="Trade Gothic Next" pitchFamily="34" charset="-122"/>
+                <a:cs typeface="Trade Gothic Next" pitchFamily="34" charset="-120"/>
+              </a:rPr>
+              <a:t>5</a:t>
             </a:r>
             <a:endParaRPr lang="en-US" sz="1600" dirty="0"/>
           </a:p>
@@ -14857,7 +15297,77 @@
                 <a:ea typeface="Trade Gothic Next" pitchFamily="34" charset="-122"/>
                 <a:cs typeface="Trade Gothic Next" pitchFamily="34" charset="-120"/>
               </a:rPr>
-              <a:t>Cl−: [Ne] 3s² 3p⁶</a:t>
+              <a:t>Cl</a:t>
+            </a:r>
+            <a:pPr indent="0" marL="0">
+              <a:buNone/>
+            </a:pPr>
+            <a:r>
+              <a:rPr lang="en-US" sz="1600" baseline="30000" dirty="0">
+                <a:solidFill>
+                  <a:srgbClr val="14161B"/>
+                </a:solidFill>
+                <a:latin typeface="Trade Gothic Next" pitchFamily="34" charset="0"/>
+                <a:ea typeface="Trade Gothic Next" pitchFamily="34" charset="-122"/>
+                <a:cs typeface="Trade Gothic Next" pitchFamily="34" charset="-120"/>
+              </a:rPr>
+              <a:t>−</a:t>
+            </a:r>
+            <a:pPr indent="0" marL="0">
+              <a:buNone/>
+            </a:pPr>
+            <a:r>
+              <a:rPr lang="en-US" sz="1600" dirty="0">
+                <a:solidFill>
+                  <a:srgbClr val="14161B"/>
+                </a:solidFill>
+                <a:latin typeface="Trade Gothic Next" pitchFamily="34" charset="0"/>
+                <a:ea typeface="Trade Gothic Next" pitchFamily="34" charset="-122"/>
+                <a:cs typeface="Trade Gothic Next" pitchFamily="34" charset="-120"/>
+              </a:rPr>
+              <a:t>: [Ne] 3s</a:t>
+            </a:r>
+            <a:pPr indent="0" marL="0">
+              <a:buNone/>
+            </a:pPr>
+            <a:r>
+              <a:rPr lang="en-US" sz="1600" baseline="30000" dirty="0">
+                <a:solidFill>
+                  <a:srgbClr val="14161B"/>
+                </a:solidFill>
+                <a:latin typeface="Trade Gothic Next" pitchFamily="34" charset="0"/>
+                <a:ea typeface="Trade Gothic Next" pitchFamily="34" charset="-122"/>
+                <a:cs typeface="Trade Gothic Next" pitchFamily="34" charset="-120"/>
+              </a:rPr>
+              <a:t>2</a:t>
+            </a:r>
+            <a:pPr indent="0" marL="0">
+              <a:buNone/>
+            </a:pPr>
+            <a:r>
+              <a:rPr lang="en-US" sz="1600" dirty="0">
+                <a:solidFill>
+                  <a:srgbClr val="14161B"/>
+                </a:solidFill>
+                <a:latin typeface="Trade Gothic Next" pitchFamily="34" charset="0"/>
+                <a:ea typeface="Trade Gothic Next" pitchFamily="34" charset="-122"/>
+                <a:cs typeface="Trade Gothic Next" pitchFamily="34" charset="-120"/>
+              </a:rPr>
+              <a:t> 3p</a:t>
+            </a:r>
+            <a:pPr indent="0" marL="0">
+              <a:buNone/>
+            </a:pPr>
+            <a:r>
+              <a:rPr lang="en-US" sz="1600" baseline="30000" dirty="0">
+                <a:solidFill>
+                  <a:srgbClr val="14161B"/>
+                </a:solidFill>
+                <a:latin typeface="Trade Gothic Next" pitchFamily="34" charset="0"/>
+                <a:ea typeface="Trade Gothic Next" pitchFamily="34" charset="-122"/>
+                <a:cs typeface="Trade Gothic Next" pitchFamily="34" charset="-120"/>
+              </a:rPr>
+              <a:t>6</a:t>
             </a:r>
             <a:endParaRPr lang="en-US" sz="1600" dirty="0"/>
           </a:p>
@@ -15046,7 +15556,7 @@
       </p:sp>
       <p:sp>
         <p:nvSpPr>
-          <p:cNvPr id="13" name="Text 3"/>
+          <p:cNvPr id="14" name="Text 3"/>
           <p:cNvSpPr txBox="1"/>
           <p:nvPr>
             <p:ph idx="106" type="body" hasCustomPrompt="1"/>
@@ -15257,7 +15767,77 @@
                 <a:ea typeface="Trade Gothic Next" pitchFamily="34" charset="-122"/>
                 <a:cs typeface="Trade Gothic Next" pitchFamily="34" charset="-120"/>
               </a:rPr>
-              <a:t>O: 1s² 2s² 2p⁴</a:t>
+              <a:t>O: 1s</a:t>
+            </a:r>
+            <a:pPr indent="0" marL="0">
+              <a:buNone/>
+            </a:pPr>
+            <a:r>
+              <a:rPr lang="en-US" sz="1600" baseline="30000" dirty="0">
+                <a:solidFill>
+                  <a:srgbClr val="14161B"/>
+                </a:solidFill>
+                <a:latin typeface="Trade Gothic Next" pitchFamily="34" charset="0"/>
+                <a:ea typeface="Trade Gothic Next" pitchFamily="34" charset="-122"/>
+                <a:cs typeface="Trade Gothic Next" pitchFamily="34" charset="-120"/>
+              </a:rPr>
+              <a:t>2</a:t>
+            </a:r>
+            <a:pPr indent="0" marL="0">
+              <a:buNone/>
+            </a:pPr>
+            <a:r>
+              <a:rPr lang="en-US" sz="1600" dirty="0">
+                <a:solidFill>
+                  <a:srgbClr val="14161B"/>
+                </a:solidFill>
+                <a:latin typeface="Trade Gothic Next" pitchFamily="34" charset="0"/>
+                <a:ea typeface="Trade Gothic Next" pitchFamily="34" charset="-122"/>
+                <a:cs typeface="Trade Gothic Next" pitchFamily="34" charset="-120"/>
+              </a:rPr>
+              <a:t> 2s</a:t>
+            </a:r>
+            <a:pPr indent="0" marL="0">
+              <a:buNone/>
+            </a:pPr>
+            <a:r>
+              <a:rPr lang="en-US" sz="1600" baseline="30000" dirty="0">
+                <a:solidFill>
+                  <a:srgbClr val="14161B"/>
+                </a:solidFill>
+                <a:latin typeface="Trade Gothic Next" pitchFamily="34" charset="0"/>
+                <a:ea typeface="Trade Gothic Next" pitchFamily="34" charset="-122"/>
+                <a:cs typeface="Trade Gothic Next" pitchFamily="34" charset="-120"/>
+              </a:rPr>
+              <a:t>2</a:t>
+            </a:r>
+            <a:pPr indent="0" marL="0">
+              <a:buNone/>
+            </a:pPr>
+            <a:r>
+              <a:rPr lang="en-US" sz="1600" dirty="0">
+                <a:solidFill>
+                  <a:srgbClr val="14161B"/>
+                </a:solidFill>
+                <a:latin typeface="Trade Gothic Next" pitchFamily="34" charset="0"/>
+                <a:ea typeface="Trade Gothic Next" pitchFamily="34" charset="-122"/>
+                <a:cs typeface="Trade Gothic Next" pitchFamily="34" charset="-120"/>
+              </a:rPr>
+              <a:t> 2p</a:t>
+            </a:r>
+            <a:pPr indent="0" marL="0">
+              <a:buNone/>
+            </a:pPr>
+            <a:r>
+              <a:rPr lang="en-US" sz="1600" baseline="30000" dirty="0">
+                <a:solidFill>
+                  <a:srgbClr val="14161B"/>
+                </a:solidFill>
+                <a:latin typeface="Trade Gothic Next" pitchFamily="34" charset="0"/>
+                <a:ea typeface="Trade Gothic Next" pitchFamily="34" charset="-122"/>
+                <a:cs typeface="Trade Gothic Next" pitchFamily="34" charset="-120"/>
+              </a:rPr>
+              <a:t>4</a:t>
             </a:r>
             <a:endParaRPr lang="en-US" sz="1600" dirty="0"/>
           </a:p>
@@ -15274,7 +15854,105 @@
                 <a:ea typeface="Trade Gothic Next" pitchFamily="34" charset="-122"/>
                 <a:cs typeface="Trade Gothic Next" pitchFamily="34" charset="-120"/>
               </a:rPr>
-              <a:t>O²−: 1s² 2s² 2p⁶</a:t>
+              <a:t>O</a:t>
+            </a:r>
+            <a:pPr indent="0" marL="0">
+              <a:buNone/>
+            </a:pPr>
+            <a:r>
+              <a:rPr lang="en-US" sz="1600" baseline="30000" dirty="0">
+                <a:solidFill>
+                  <a:srgbClr val="14161B"/>
+                </a:solidFill>
+                <a:latin typeface="Trade Gothic Next" pitchFamily="34" charset="0"/>
+                <a:ea typeface="Trade Gothic Next" pitchFamily="34" charset="-122"/>
+                <a:cs typeface="Trade Gothic Next" pitchFamily="34" charset="-120"/>
+              </a:rPr>
+              <a:t>2−</a:t>
+            </a:r>
+            <a:pPr indent="0" marL="0">
+              <a:buNone/>
+            </a:pPr>
+            <a:r>
+              <a:rPr lang="en-US" sz="1600" dirty="0">
+                <a:solidFill>
+                  <a:srgbClr val="14161B"/>
+                </a:solidFill>
+                <a:latin typeface="Trade Gothic Next" pitchFamily="34" charset="0"/>
+                <a:ea typeface="Trade Gothic Next" pitchFamily="34" charset="-122"/>
+                <a:cs typeface="Trade Gothic Next" pitchFamily="34" charset="-120"/>
+              </a:rPr>
+              <a:t>: 1s</a:t>
+            </a:r>
+            <a:pPr indent="0" marL="0">
+              <a:buNone/>
+            </a:pPr>
+            <a:r>
+              <a:rPr lang="en-US" sz="1600" baseline="30000" dirty="0">
+                <a:solidFill>
+                  <a:srgbClr val="14161B"/>
+                </a:solidFill>
+                <a:latin typeface="Trade Gothic Next" pitchFamily="34" charset="0"/>
+                <a:ea typeface="Trade Gothic Next" pitchFamily="34" charset="-122"/>
+                <a:cs typeface="Trade Gothic Next" pitchFamily="34" charset="-120"/>
+              </a:rPr>
+              <a:t>2</a:t>
+            </a:r>
+            <a:pPr indent="0" marL="0">
+              <a:buNone/>
+            </a:pPr>
+            <a:r>
+              <a:rPr lang="en-US" sz="1600" dirty="0">
+                <a:solidFill>
+                  <a:srgbClr val="14161B"/>
+                </a:solidFill>
+                <a:latin typeface="Trade Gothic Next" pitchFamily="34" charset="0"/>
+                <a:ea typeface="Trade Gothic Next" pitchFamily="34" charset="-122"/>
+                <a:cs typeface="Trade Gothic Next" pitchFamily="34" charset="-120"/>
+              </a:rPr>
+              <a:t> 2s</a:t>
+            </a:r>
+            <a:pPr indent="0" marL="0">
+              <a:buNone/>
+            </a:pPr>
+            <a:r>
+              <a:rPr lang="en-US" sz="1600" baseline="30000" dirty="0">
+                <a:solidFill>
+                  <a:srgbClr val="14161B"/>
+                </a:solidFill>
+                <a:latin typeface="Trade Gothic Next" pitchFamily="34" charset="0"/>
+                <a:ea typeface="Trade Gothic Next" pitchFamily="34" charset="-122"/>
+                <a:cs typeface="Trade Gothic Next" pitchFamily="34" charset="-120"/>
+              </a:rPr>
+              <a:t>2</a:t>
+            </a:r>
+            <a:pPr indent="0" marL="0">
+              <a:buNone/>
+            </a:pPr>
+            <a:r>
+              <a:rPr lang="en-US" sz="1600" dirty="0">
+                <a:solidFill>
+                  <a:srgbClr val="14161B"/>
+                </a:solidFill>
+                <a:latin typeface="Trade Gothic Next" pitchFamily="34" charset="0"/>
+                <a:ea typeface="Trade Gothic Next" pitchFamily="34" charset="-122"/>
+                <a:cs typeface="Trade Gothic Next" pitchFamily="34" charset="-120"/>
+              </a:rPr>
+              <a:t> 2p</a:t>
+            </a:r>
+            <a:pPr indent="0" marL="0">
+              <a:buNone/>
+            </a:pPr>
+            <a:r>
+              <a:rPr lang="en-US" sz="1600" baseline="30000" dirty="0">
+                <a:solidFill>
+                  <a:srgbClr val="14161B"/>
+                </a:solidFill>
+                <a:latin typeface="Trade Gothic Next" pitchFamily="34" charset="0"/>
+                <a:ea typeface="Trade Gothic Next" pitchFamily="34" charset="-122"/>
+                <a:cs typeface="Trade Gothic Next" pitchFamily="34" charset="-120"/>
+              </a:rPr>
+              <a:t>6</a:t>
             </a:r>
             <a:endParaRPr lang="en-US" sz="1600" dirty="0"/>
           </a:p>
@@ -15373,7 +16051,49 @@
                 <a:ea typeface="Trade Gothic Next" pitchFamily="34" charset="-122"/>
                 <a:cs typeface="Trade Gothic Next" pitchFamily="34" charset="-120"/>
               </a:rPr>
-              <a:t>S: [Ne] 3s² 3p⁴</a:t>
+              <a:t>S: [Ne] 3s</a:t>
+            </a:r>
+            <a:pPr indent="0" marL="0">
+              <a:buNone/>
+            </a:pPr>
+            <a:r>
+              <a:rPr lang="en-US" sz="1600" baseline="30000" dirty="0">
+                <a:solidFill>
+                  <a:srgbClr val="14161B"/>
+                </a:solidFill>
+                <a:latin typeface="Trade Gothic Next" pitchFamily="34" charset="0"/>
+                <a:ea typeface="Trade Gothic Next" pitchFamily="34" charset="-122"/>
+                <a:cs typeface="Trade Gothic Next" pitchFamily="34" charset="-120"/>
+              </a:rPr>
+              <a:t>2</a:t>
+            </a:r>
+            <a:pPr indent="0" marL="0">
+              <a:buNone/>
+            </a:pPr>
+            <a:r>
+              <a:rPr lang="en-US" sz="1600" dirty="0">
+                <a:solidFill>
+                  <a:srgbClr val="14161B"/>
+                </a:solidFill>
+                <a:latin typeface="Trade Gothic Next" pitchFamily="34" charset="0"/>
+                <a:ea typeface="Trade Gothic Next" pitchFamily="34" charset="-122"/>
+                <a:cs typeface="Trade Gothic Next" pitchFamily="34" charset="-120"/>
+              </a:rPr>
+              <a:t> 3p</a:t>
+            </a:r>
+            <a:pPr indent="0" marL="0">
+              <a:buNone/>
+            </a:pPr>
+            <a:r>
+              <a:rPr lang="en-US" sz="1600" baseline="30000" dirty="0">
+                <a:solidFill>
+                  <a:srgbClr val="14161B"/>
+                </a:solidFill>
+                <a:latin typeface="Trade Gothic Next" pitchFamily="34" charset="0"/>
+                <a:ea typeface="Trade Gothic Next" pitchFamily="34" charset="-122"/>
+                <a:cs typeface="Trade Gothic Next" pitchFamily="34" charset="-120"/>
+              </a:rPr>
+              <a:t>4</a:t>
             </a:r>
             <a:endParaRPr lang="en-US" sz="1600" dirty="0"/>
           </a:p>
@@ -15390,7 +16110,77 @@
                 <a:ea typeface="Trade Gothic Next" pitchFamily="34" charset="-122"/>
                 <a:cs typeface="Trade Gothic Next" pitchFamily="34" charset="-120"/>
               </a:rPr>
-              <a:t>S²−: [Ne] 3s² 3p⁶</a:t>
+              <a:t>S</a:t>
+            </a:r>
+            <a:pPr indent="0" marL="0">
+              <a:buNone/>
+            </a:pPr>
+            <a:r>
+              <a:rPr lang="en-US" sz="1600" baseline="30000" dirty="0">
+                <a:solidFill>
+                  <a:srgbClr val="14161B"/>
+                </a:solidFill>
+                <a:latin typeface="Trade Gothic Next" pitchFamily="34" charset="0"/>
+                <a:ea typeface="Trade Gothic Next" pitchFamily="34" charset="-122"/>
+                <a:cs typeface="Trade Gothic Next" pitchFamily="34" charset="-120"/>
+              </a:rPr>
+              <a:t>2−</a:t>
+            </a:r>
+            <a:pPr indent="0" marL="0">
+              <a:buNone/>
+            </a:pPr>
+            <a:r>
+              <a:rPr lang="en-US" sz="1600" dirty="0">
+                <a:solidFill>
+                  <a:srgbClr val="14161B"/>
+                </a:solidFill>
+                <a:latin typeface="Trade Gothic Next" pitchFamily="34" charset="0"/>
+                <a:ea typeface="Trade Gothic Next" pitchFamily="34" charset="-122"/>
+                <a:cs typeface="Trade Gothic Next" pitchFamily="34" charset="-120"/>
+              </a:rPr>
+              <a:t>: [Ne] 3s</a:t>
+            </a:r>
+            <a:pPr indent="0" marL="0">
+              <a:buNone/>
+            </a:pPr>
+            <a:r>
+              <a:rPr lang="en-US" sz="1600" baseline="30000" dirty="0">
+                <a:solidFill>
+                  <a:srgbClr val="14161B"/>
+                </a:solidFill>
+                <a:latin typeface="Trade Gothic Next" pitchFamily="34" charset="0"/>
+                <a:ea typeface="Trade Gothic Next" pitchFamily="34" charset="-122"/>
+                <a:cs typeface="Trade Gothic Next" pitchFamily="34" charset="-120"/>
+              </a:rPr>
+              <a:t>2</a:t>
+            </a:r>
+            <a:pPr indent="0" marL="0">
+              <a:buNone/>
+            </a:pPr>
+            <a:r>
+              <a:rPr lang="en-US" sz="1600" dirty="0">
+                <a:solidFill>
+                  <a:srgbClr val="14161B"/>
+                </a:solidFill>
+                <a:latin typeface="Trade Gothic Next" pitchFamily="34" charset="0"/>
+                <a:ea typeface="Trade Gothic Next" pitchFamily="34" charset="-122"/>
+                <a:cs typeface="Trade Gothic Next" pitchFamily="34" charset="-120"/>
+              </a:rPr>
+              <a:t> 3p</a:t>
+            </a:r>
+            <a:pPr indent="0" marL="0">
+              <a:buNone/>
+            </a:pPr>
+            <a:r>
+              <a:rPr lang="en-US" sz="1600" baseline="30000" dirty="0">
+                <a:solidFill>
+                  <a:srgbClr val="14161B"/>
+                </a:solidFill>
+                <a:latin typeface="Trade Gothic Next" pitchFamily="34" charset="0"/>
+                <a:ea typeface="Trade Gothic Next" pitchFamily="34" charset="-122"/>
+                <a:cs typeface="Trade Gothic Next" pitchFamily="34" charset="-120"/>
+              </a:rPr>
+              <a:t>6</a:t>
             </a:r>
             <a:endParaRPr lang="en-US" sz="1600" dirty="0"/>
           </a:p>
@@ -15489,7 +16279,77 @@
                 <a:ea typeface="Trade Gothic Next" pitchFamily="34" charset="-122"/>
                 <a:cs typeface="Trade Gothic Next" pitchFamily="34" charset="-120"/>
               </a:rPr>
-              <a:t>Br: [Ar] 4s² 3d¹⁰ 4p⁵</a:t>
+              <a:t>Br: [Ar] 4s</a:t>
+            </a:r>
+            <a:pPr indent="0" marL="0">
+              <a:buNone/>
+            </a:pPr>
+            <a:r>
+              <a:rPr lang="en-US" sz="1600" baseline="30000" dirty="0">
+                <a:solidFill>
+                  <a:srgbClr val="14161B"/>
+                </a:solidFill>
+                <a:latin typeface="Trade Gothic Next" pitchFamily="34" charset="0"/>
+                <a:ea typeface="Trade Gothic Next" pitchFamily="34" charset="-122"/>
+                <a:cs typeface="Trade Gothic Next" pitchFamily="34" charset="-120"/>
+              </a:rPr>
+              <a:t>2</a:t>
+            </a:r>
+            <a:pPr indent="0" marL="0">
+              <a:buNone/>
+            </a:pPr>
+            <a:r>
+              <a:rPr lang="en-US" sz="1600" dirty="0">
+                <a:solidFill>
+                  <a:srgbClr val="14161B"/>
+                </a:solidFill>
+                <a:latin typeface="Trade Gothic Next" pitchFamily="34" charset="0"/>
+                <a:ea typeface="Trade Gothic Next" pitchFamily="34" charset="-122"/>
+                <a:cs typeface="Trade Gothic Next" pitchFamily="34" charset="-120"/>
+              </a:rPr>
+              <a:t> 3d</a:t>
+            </a:r>
+            <a:pPr indent="0" marL="0">
+              <a:buNone/>
+            </a:pPr>
+            <a:r>
+              <a:rPr lang="en-US" sz="1600" baseline="30000" dirty="0">
+                <a:solidFill>
+                  <a:srgbClr val="14161B"/>
+                </a:solidFill>
+                <a:latin typeface="Trade Gothic Next" pitchFamily="34" charset="0"/>
+                <a:ea typeface="Trade Gothic Next" pitchFamily="34" charset="-122"/>
+                <a:cs typeface="Trade Gothic Next" pitchFamily="34" charset="-120"/>
+              </a:rPr>
+              <a:t>10</a:t>
+            </a:r>
+            <a:pPr indent="0" marL="0">
+              <a:buNone/>
+            </a:pPr>
+            <a:r>
+              <a:rPr lang="en-US" sz="1600" dirty="0">
+                <a:solidFill>
+                  <a:srgbClr val="14161B"/>
+                </a:solidFill>
+                <a:latin typeface="Trade Gothic Next" pitchFamily="34" charset="0"/>
+                <a:ea typeface="Trade Gothic Next" pitchFamily="34" charset="-122"/>
+                <a:cs typeface="Trade Gothic Next" pitchFamily="34" charset="-120"/>
+              </a:rPr>
+              <a:t> 4p</a:t>
+            </a:r>
+            <a:pPr indent="0" marL="0">
+              <a:buNone/>
+            </a:pPr>
+            <a:r>
+              <a:rPr lang="en-US" sz="1600" baseline="30000" dirty="0">
+                <a:solidFill>
+                  <a:srgbClr val="14161B"/>
+                </a:solidFill>
+                <a:latin typeface="Trade Gothic Next" pitchFamily="34" charset="0"/>
+                <a:ea typeface="Trade Gothic Next" pitchFamily="34" charset="-122"/>
+                <a:cs typeface="Trade Gothic Next" pitchFamily="34" charset="-120"/>
+              </a:rPr>
+              <a:t>5</a:t>
             </a:r>
             <a:endParaRPr lang="en-US" sz="1600" dirty="0"/>
           </a:p>
@@ -15506,7 +16366,105 @@
                 <a:ea typeface="Trade Gothic Next" pitchFamily="34" charset="-122"/>
                 <a:cs typeface="Trade Gothic Next" pitchFamily="34" charset="-120"/>
               </a:rPr>
-              <a:t>Br−: [Ar] 4s² 3d¹⁰ 4p⁶</a:t>
+              <a:t>Br</a:t>
+            </a:r>
+            <a:pPr indent="0" marL="0">
+              <a:buNone/>
+            </a:pPr>
+            <a:r>
+              <a:rPr lang="en-US" sz="1600" baseline="30000" dirty="0">
+                <a:solidFill>
+                  <a:srgbClr val="14161B"/>
+                </a:solidFill>
+                <a:latin typeface="Trade Gothic Next" pitchFamily="34" charset="0"/>
+                <a:ea typeface="Trade Gothic Next" pitchFamily="34" charset="-122"/>
+                <a:cs typeface="Trade Gothic Next" pitchFamily="34" charset="-120"/>
+              </a:rPr>
+              <a:t>−</a:t>
+            </a:r>
+            <a:pPr indent="0" marL="0">
+              <a:buNone/>
+            </a:pPr>
+            <a:r>
+              <a:rPr lang="en-US" sz="1600" dirty="0">
+                <a:solidFill>
+                  <a:srgbClr val="14161B"/>
+                </a:solidFill>
+                <a:latin typeface="Trade Gothic Next" pitchFamily="34" charset="0"/>
+                <a:ea typeface="Trade Gothic Next" pitchFamily="34" charset="-122"/>
+                <a:cs typeface="Trade Gothic Next" pitchFamily="34" charset="-120"/>
+              </a:rPr>
+              <a:t>: [Ar] 4s</a:t>
+            </a:r>
+            <a:pPr indent="0" marL="0">
+              <a:buNone/>
+            </a:pPr>
+            <a:r>
+              <a:rPr lang="en-US" sz="1600" baseline="30000" dirty="0">
+                <a:solidFill>
+                  <a:srgbClr val="14161B"/>
+                </a:solidFill>
+                <a:latin typeface="Trade Gothic Next" pitchFamily="34" charset="0"/>
+                <a:ea typeface="Trade Gothic Next" pitchFamily="34" charset="-122"/>
+                <a:cs typeface="Trade Gothic Next" pitchFamily="34" charset="-120"/>
+              </a:rPr>
+              <a:t>2</a:t>
+            </a:r>
+            <a:pPr indent="0" marL="0">
+              <a:buNone/>
+            </a:pPr>
+            <a:r>
+              <a:rPr lang="en-US" sz="1600" dirty="0">
+                <a:solidFill>
+                  <a:srgbClr val="14161B"/>
+                </a:solidFill>
+                <a:latin typeface="Trade Gothic Next" pitchFamily="34" charset="0"/>
+                <a:ea typeface="Trade Gothic Next" pitchFamily="34" charset="-122"/>
+                <a:cs typeface="Trade Gothic Next" pitchFamily="34" charset="-120"/>
+              </a:rPr>
+              <a:t> 3d</a:t>
+            </a:r>
+            <a:pPr indent="0" marL="0">
+              <a:buNone/>
+            </a:pPr>
+            <a:r>
+              <a:rPr lang="en-US" sz="1600" baseline="30000" dirty="0">
+                <a:solidFill>
+                  <a:srgbClr val="14161B"/>
+                </a:solidFill>
+                <a:latin typeface="Trade Gothic Next" pitchFamily="34" charset="0"/>
+                <a:ea typeface="Trade Gothic Next" pitchFamily="34" charset="-122"/>
+                <a:cs typeface="Trade Gothic Next" pitchFamily="34" charset="-120"/>
+              </a:rPr>
+              <a:t>10</a:t>
+            </a:r>
+            <a:pPr indent="0" marL="0">
+              <a:buNone/>
+            </a:pPr>
+            <a:r>
+              <a:rPr lang="en-US" sz="1600" dirty="0">
+                <a:solidFill>
+                  <a:srgbClr val="14161B"/>
+                </a:solidFill>
+                <a:latin typeface="Trade Gothic Next" pitchFamily="34" charset="0"/>
+                <a:ea typeface="Trade Gothic Next" pitchFamily="34" charset="-122"/>
+                <a:cs typeface="Trade Gothic Next" pitchFamily="34" charset="-120"/>
+              </a:rPr>
+              <a:t> 4p</a:t>
+            </a:r>
+            <a:pPr indent="0" marL="0">
+              <a:buNone/>
+            </a:pPr>
+            <a:r>
+              <a:rPr lang="en-US" sz="1600" baseline="30000" dirty="0">
+                <a:solidFill>
+                  <a:srgbClr val="14161B"/>
+                </a:solidFill>
+                <a:latin typeface="Trade Gothic Next" pitchFamily="34" charset="0"/>
+                <a:ea typeface="Trade Gothic Next" pitchFamily="34" charset="-122"/>
+                <a:cs typeface="Trade Gothic Next" pitchFamily="34" charset="-120"/>
+              </a:rPr>
+              <a:t>6</a:t>
             </a:r>
             <a:endParaRPr lang="en-US" sz="1600" dirty="0"/>
           </a:p>
@@ -15654,7 +16612,7 @@
       </p:sp>
       <p:sp>
         <p:nvSpPr>
-          <p:cNvPr id="13" name="Text 4"/>
+          <p:cNvPr id="14" name="Text 4"/>
           <p:cNvSpPr txBox="1"/>
           <p:nvPr>
             <p:ph idx="107" hasCustomPrompt="1"/>
@@ -15889,7 +16847,91 @@
                 <a:ea typeface="Trade Gothic Next" pitchFamily="34" charset="-122"/>
                 <a:cs typeface="Trade Gothic Next" pitchFamily="34" charset="-120"/>
               </a:rPr>
-              <a:t>Each of these has 10 electrons: 1s² 2s² 2p⁶.</a:t>
+              <a:t>Each of these has 10 electrons: 1s</a:t>
+            </a:r>
+            <a:pPr indent="0" marL="0">
+              <a:buNone/>
+            </a:pPr>
+            <a:r>
+              <a:rPr lang="en-US" sz="1600" baseline="30000" dirty="0">
+                <a:solidFill>
+                  <a:srgbClr val="14161B"/>
+                </a:solidFill>
+                <a:latin typeface="Trade Gothic Next" pitchFamily="34" charset="0"/>
+                <a:ea typeface="Trade Gothic Next" pitchFamily="34" charset="-122"/>
+                <a:cs typeface="Trade Gothic Next" pitchFamily="34" charset="-120"/>
+              </a:rPr>
+              <a:t>2</a:t>
+            </a:r>
+            <a:pPr indent="0" marL="0">
+              <a:buNone/>
+            </a:pPr>
+            <a:r>
+              <a:rPr lang="en-US" sz="1600" dirty="0">
+                <a:solidFill>
+                  <a:srgbClr val="14161B"/>
+                </a:solidFill>
+                <a:latin typeface="Trade Gothic Next" pitchFamily="34" charset="0"/>
+                <a:ea typeface="Trade Gothic Next" pitchFamily="34" charset="-122"/>
+                <a:cs typeface="Trade Gothic Next" pitchFamily="34" charset="-120"/>
+              </a:rPr>
+              <a:t> 2s</a:t>
+            </a:r>
+            <a:pPr indent="0" marL="0">
+              <a:buNone/>
+            </a:pPr>
+            <a:r>
+              <a:rPr lang="en-US" sz="1600" baseline="30000" dirty="0">
+                <a:solidFill>
+                  <a:srgbClr val="14161B"/>
+                </a:solidFill>
+                <a:latin typeface="Trade Gothic Next" pitchFamily="34" charset="0"/>
+                <a:ea typeface="Trade Gothic Next" pitchFamily="34" charset="-122"/>
+                <a:cs typeface="Trade Gothic Next" pitchFamily="34" charset="-120"/>
+              </a:rPr>
+              <a:t>2</a:t>
+            </a:r>
+            <a:pPr indent="0" marL="0">
+              <a:buNone/>
+            </a:pPr>
+            <a:r>
+              <a:rPr lang="en-US" sz="1600" dirty="0">
+                <a:solidFill>
+                  <a:srgbClr val="14161B"/>
+                </a:solidFill>
+                <a:latin typeface="Trade Gothic Next" pitchFamily="34" charset="0"/>
+                <a:ea typeface="Trade Gothic Next" pitchFamily="34" charset="-122"/>
+                <a:cs typeface="Trade Gothic Next" pitchFamily="34" charset="-120"/>
+              </a:rPr>
+              <a:t> 2p</a:t>
+            </a:r>
+            <a:pPr indent="0" marL="0">
+              <a:buNone/>
+            </a:pPr>
+            <a:r>
+              <a:rPr lang="en-US" sz="1600" baseline="30000" dirty="0">
+                <a:solidFill>
+                  <a:srgbClr val="14161B"/>
+                </a:solidFill>
+                <a:latin typeface="Trade Gothic Next" pitchFamily="34" charset="0"/>
+                <a:ea typeface="Trade Gothic Next" pitchFamily="34" charset="-122"/>
+                <a:cs typeface="Trade Gothic Next" pitchFamily="34" charset="-120"/>
+              </a:rPr>
+              <a:t>6</a:t>
+            </a:r>
+            <a:pPr indent="0" marL="0">
+              <a:buNone/>
+            </a:pPr>
+            <a:r>
+              <a:rPr lang="en-US" sz="1600" dirty="0">
+                <a:solidFill>
+                  <a:srgbClr val="14161B"/>
+                </a:solidFill>
+                <a:latin typeface="Trade Gothic Next" pitchFamily="34" charset="0"/>
+                <a:ea typeface="Trade Gothic Next" pitchFamily="34" charset="-122"/>
+                <a:cs typeface="Trade Gothic Next" pitchFamily="34" charset="-120"/>
+              </a:rPr>
+              <a:t>.</a:t>
             </a:r>
             <a:endParaRPr lang="en-US" sz="1600" dirty="0"/>
           </a:p>
@@ -16143,7 +17185,7 @@
       </p:sp>
       <p:sp>
         <p:nvSpPr>
-          <p:cNvPr id="13" name="Text 3"/>
+          <p:cNvPr id="14" name="Text 3"/>
           <p:cNvSpPr txBox="1"/>
           <p:nvPr>
             <p:ph idx="106" type="body" hasCustomPrompt="1"/>
@@ -16231,7 +17273,49 @@
                 <a:ea typeface="Trade Gothic Next" pitchFamily="34" charset="-122"/>
                 <a:cs typeface="Trade Gothic Next" pitchFamily="34" charset="-120"/>
               </a:rPr>
-              <a:t>Example: Mg²+ and S²−</a:t>
+              <a:t>Example: Mg</a:t>
+            </a:r>
+            <a:pPr algn="l" indent="0" marL="0">
+              <a:buNone/>
+            </a:pPr>
+            <a:r>
+              <a:rPr lang="en-US" sz="2800" b="1" baseline="30000" dirty="0">
+                <a:solidFill>
+                  <a:srgbClr val="14161B"/>
+                </a:solidFill>
+                <a:latin typeface="Trade Gothic Next" pitchFamily="34" charset="0"/>
+                <a:ea typeface="Trade Gothic Next" pitchFamily="34" charset="-122"/>
+                <a:cs typeface="Trade Gothic Next" pitchFamily="34" charset="-120"/>
+              </a:rPr>
+              <a:t>2+</a:t>
+            </a:r>
+            <a:pPr algn="l" indent="0" marL="0">
+              <a:buNone/>
+            </a:pPr>
+            <a:r>
+              <a:rPr lang="en-US" sz="2800" b="1" dirty="0">
+                <a:solidFill>
+                  <a:srgbClr val="14161B"/>
+                </a:solidFill>
+                <a:latin typeface="Trade Gothic Next" pitchFamily="34" charset="0"/>
+                <a:ea typeface="Trade Gothic Next" pitchFamily="34" charset="-122"/>
+                <a:cs typeface="Trade Gothic Next" pitchFamily="34" charset="-120"/>
+              </a:rPr>
+              <a:t> and S</a:t>
+            </a:r>
+            <a:pPr algn="l" indent="0" marL="0">
+              <a:buNone/>
+            </a:pPr>
+            <a:r>
+              <a:rPr lang="en-US" sz="2800" b="1" baseline="30000" dirty="0">
+                <a:solidFill>
+                  <a:srgbClr val="14161B"/>
+                </a:solidFill>
+                <a:latin typeface="Trade Gothic Next" pitchFamily="34" charset="0"/>
+                <a:ea typeface="Trade Gothic Next" pitchFamily="34" charset="-122"/>
+                <a:cs typeface="Trade Gothic Next" pitchFamily="34" charset="-120"/>
+              </a:rPr>
+              <a:t>2−</a:t>
             </a:r>
             <a:endParaRPr lang="en-US" sz="2800" dirty="0"/>
           </a:p>
@@ -16313,7 +17397,63 @@
                 <a:ea typeface="Trade Gothic Next" pitchFamily="34" charset="-122"/>
                 <a:cs typeface="Trade Gothic Next" pitchFamily="34" charset="-120"/>
               </a:rPr>
-              <a:t>Write the electron configuration of Mg²+ and S²−. Name the noble gas each one matches.</a:t>
+              <a:t>Write the electron configuration of Mg</a:t>
+            </a:r>
+            <a:pPr indent="0" marL="0">
+              <a:buNone/>
+            </a:pPr>
+            <a:r>
+              <a:rPr lang="en-US" sz="1600" baseline="30000" dirty="0">
+                <a:solidFill>
+                  <a:srgbClr val="EDF0E5"/>
+                </a:solidFill>
+                <a:latin typeface="Trade Gothic Next" pitchFamily="34" charset="0"/>
+                <a:ea typeface="Trade Gothic Next" pitchFamily="34" charset="-122"/>
+                <a:cs typeface="Trade Gothic Next" pitchFamily="34" charset="-120"/>
+              </a:rPr>
+              <a:t>2+</a:t>
+            </a:r>
+            <a:pPr indent="0" marL="0">
+              <a:buNone/>
+            </a:pPr>
+            <a:r>
+              <a:rPr lang="en-US" sz="1600" dirty="0">
+                <a:solidFill>
+                  <a:srgbClr val="EDF0E5"/>
+                </a:solidFill>
+                <a:latin typeface="Trade Gothic Next" pitchFamily="34" charset="0"/>
+                <a:ea typeface="Trade Gothic Next" pitchFamily="34" charset="-122"/>
+                <a:cs typeface="Trade Gothic Next" pitchFamily="34" charset="-120"/>
+              </a:rPr>
+              <a:t> and S</a:t>
+            </a:r>
+            <a:pPr indent="0" marL="0">
+              <a:buNone/>
+            </a:pPr>
+            <a:r>
+              <a:rPr lang="en-US" sz="1600" baseline="30000" dirty="0">
+                <a:solidFill>
+                  <a:srgbClr val="EDF0E5"/>
+                </a:solidFill>
+                <a:latin typeface="Trade Gothic Next" pitchFamily="34" charset="0"/>
+                <a:ea typeface="Trade Gothic Next" pitchFamily="34" charset="-122"/>
+                <a:cs typeface="Trade Gothic Next" pitchFamily="34" charset="-120"/>
+              </a:rPr>
+              <a:t>2−</a:t>
+            </a:r>
+            <a:pPr indent="0" marL="0">
+              <a:buNone/>
+            </a:pPr>
+            <a:r>
+              <a:rPr lang="en-US" sz="1600" dirty="0">
+                <a:solidFill>
+                  <a:srgbClr val="EDF0E5"/>
+                </a:solidFill>
+                <a:latin typeface="Trade Gothic Next" pitchFamily="34" charset="0"/>
+                <a:ea typeface="Trade Gothic Next" pitchFamily="34" charset="-122"/>
+                <a:cs typeface="Trade Gothic Next" pitchFamily="34" charset="-120"/>
+              </a:rPr>
+              <a:t>. Name the noble gas each one matches.</a:t>
             </a:r>
             <a:endParaRPr lang="en-US" sz="1600" dirty="0"/>
           </a:p>
@@ -16689,7 +17829,7 @@
       </p:sp>
       <p:sp>
         <p:nvSpPr>
-          <p:cNvPr id="13" name="Text 4"/>
+          <p:cNvPr id="14" name="Text 4"/>
           <p:cNvSpPr txBox="1"/>
           <p:nvPr>
             <p:ph idx="107" hasCustomPrompt="1"/>
@@ -16777,7 +17917,63 @@
                 <a:ea typeface="Trade Gothic Next" pitchFamily="34" charset="-122"/>
                 <a:cs typeface="Trade Gothic Next" pitchFamily="34" charset="-120"/>
               </a:rPr>
-              <a:t>Mg²+ and S²−, Worked</a:t>
+              <a:t>Mg</a:t>
+            </a:r>
+            <a:pPr algn="l" indent="0" marL="0">
+              <a:buNone/>
+            </a:pPr>
+            <a:r>
+              <a:rPr lang="en-US" sz="2800" b="1" baseline="30000" dirty="0">
+                <a:solidFill>
+                  <a:srgbClr val="14161B"/>
+                </a:solidFill>
+                <a:latin typeface="Trade Gothic Next" pitchFamily="34" charset="0"/>
+                <a:ea typeface="Trade Gothic Next" pitchFamily="34" charset="-122"/>
+                <a:cs typeface="Trade Gothic Next" pitchFamily="34" charset="-120"/>
+              </a:rPr>
+              <a:t>2+</a:t>
+            </a:r>
+            <a:pPr algn="l" indent="0" marL="0">
+              <a:buNone/>
+            </a:pPr>
+            <a:r>
+              <a:rPr lang="en-US" sz="2800" b="1" dirty="0">
+                <a:solidFill>
+                  <a:srgbClr val="14161B"/>
+                </a:solidFill>
+                <a:latin typeface="Trade Gothic Next" pitchFamily="34" charset="0"/>
+                <a:ea typeface="Trade Gothic Next" pitchFamily="34" charset="-122"/>
+                <a:cs typeface="Trade Gothic Next" pitchFamily="34" charset="-120"/>
+              </a:rPr>
+              <a:t> and S</a:t>
+            </a:r>
+            <a:pPr algn="l" indent="0" marL="0">
+              <a:buNone/>
+            </a:pPr>
+            <a:r>
+              <a:rPr lang="en-US" sz="2800" b="1" baseline="30000" dirty="0">
+                <a:solidFill>
+                  <a:srgbClr val="14161B"/>
+                </a:solidFill>
+                <a:latin typeface="Trade Gothic Next" pitchFamily="34" charset="0"/>
+                <a:ea typeface="Trade Gothic Next" pitchFamily="34" charset="-122"/>
+                <a:cs typeface="Trade Gothic Next" pitchFamily="34" charset="-120"/>
+              </a:rPr>
+              <a:t>2−</a:t>
+            </a:r>
+            <a:pPr algn="l" indent="0" marL="0">
+              <a:buNone/>
+            </a:pPr>
+            <a:r>
+              <a:rPr lang="en-US" sz="2800" b="1" dirty="0">
+                <a:solidFill>
+                  <a:srgbClr val="14161B"/>
+                </a:solidFill>
+                <a:latin typeface="Trade Gothic Next" pitchFamily="34" charset="0"/>
+                <a:ea typeface="Trade Gothic Next" pitchFamily="34" charset="-122"/>
+                <a:cs typeface="Trade Gothic Next" pitchFamily="34" charset="-120"/>
+              </a:rPr>
+              <a:t>, Worked</a:t>
             </a:r>
             <a:endParaRPr lang="en-US" sz="2800" dirty="0"/>
           </a:p>
@@ -16958,7 +18154,105 @@
                 <a:ea typeface="Trade Gothic Next" pitchFamily="34" charset="-122"/>
                 <a:cs typeface="Trade Gothic Next" pitchFamily="34" charset="-120"/>
               </a:rPr>
-              <a:t>Mg: 1s² 2s² 2p⁶ 3s²</a:t>
+              <a:t>Mg: 1s</a:t>
+            </a:r>
+            <a:pPr indent="0" marL="0">
+              <a:buNone/>
+            </a:pPr>
+            <a:r>
+              <a:rPr lang="en-US" sz="1900" baseline="30000" dirty="0">
+                <a:solidFill>
+                  <a:srgbClr val="14161B"/>
+                </a:solidFill>
+                <a:latin typeface="Trade Gothic Next" pitchFamily="34" charset="0"/>
+                <a:ea typeface="Trade Gothic Next" pitchFamily="34" charset="-122"/>
+                <a:cs typeface="Trade Gothic Next" pitchFamily="34" charset="-120"/>
+              </a:rPr>
+              <a:t>2</a:t>
+            </a:r>
+            <a:pPr indent="0" marL="0">
+              <a:buNone/>
+            </a:pPr>
+            <a:r>
+              <a:rPr lang="en-US" sz="1900" dirty="0">
+                <a:solidFill>
+                  <a:srgbClr val="14161B"/>
+                </a:solidFill>
+                <a:latin typeface="Trade Gothic Next" pitchFamily="34" charset="0"/>
+                <a:ea typeface="Trade Gothic Next" pitchFamily="34" charset="-122"/>
+                <a:cs typeface="Trade Gothic Next" pitchFamily="34" charset="-120"/>
+              </a:rPr>
+              <a:t> 2s</a:t>
+            </a:r>
+            <a:pPr indent="0" marL="0">
+              <a:buNone/>
+            </a:pPr>
+            <a:r>
+              <a:rPr lang="en-US" sz="1900" baseline="30000" dirty="0">
+                <a:solidFill>
+                  <a:srgbClr val="14161B"/>
+                </a:solidFill>
+                <a:latin typeface="Trade Gothic Next" pitchFamily="34" charset="0"/>
+                <a:ea typeface="Trade Gothic Next" pitchFamily="34" charset="-122"/>
+                <a:cs typeface="Trade Gothic Next" pitchFamily="34" charset="-120"/>
+              </a:rPr>
+              <a:t>2</a:t>
+            </a:r>
+            <a:pPr indent="0" marL="0">
+              <a:buNone/>
+            </a:pPr>
+            <a:r>
+              <a:rPr lang="en-US" sz="1900" dirty="0">
+                <a:solidFill>
+                  <a:srgbClr val="14161B"/>
+                </a:solidFill>
+                <a:latin typeface="Trade Gothic Next" pitchFamily="34" charset="0"/>
+                <a:ea typeface="Trade Gothic Next" pitchFamily="34" charset="-122"/>
+                <a:cs typeface="Trade Gothic Next" pitchFamily="34" charset="-120"/>
+              </a:rPr>
+              <a:t> 2p</a:t>
+            </a:r>
+            <a:pPr indent="0" marL="0">
+              <a:buNone/>
+            </a:pPr>
+            <a:r>
+              <a:rPr lang="en-US" sz="1900" baseline="30000" dirty="0">
+                <a:solidFill>
+                  <a:srgbClr val="14161B"/>
+                </a:solidFill>
+                <a:latin typeface="Trade Gothic Next" pitchFamily="34" charset="0"/>
+                <a:ea typeface="Trade Gothic Next" pitchFamily="34" charset="-122"/>
+                <a:cs typeface="Trade Gothic Next" pitchFamily="34" charset="-120"/>
+              </a:rPr>
+              <a:t>6</a:t>
+            </a:r>
+            <a:pPr indent="0" marL="0">
+              <a:buNone/>
+            </a:pPr>
+            <a:r>
+              <a:rPr lang="en-US" sz="1900" dirty="0">
+                <a:solidFill>
+                  <a:srgbClr val="14161B"/>
+                </a:solidFill>
+                <a:latin typeface="Trade Gothic Next" pitchFamily="34" charset="0"/>
+                <a:ea typeface="Trade Gothic Next" pitchFamily="34" charset="-122"/>
+                <a:cs typeface="Trade Gothic Next" pitchFamily="34" charset="-120"/>
+              </a:rPr>
+              <a:t> 3s</a:t>
+            </a:r>
+            <a:pPr indent="0" marL="0">
+              <a:buNone/>
+            </a:pPr>
+            <a:r>
+              <a:rPr lang="en-US" sz="1900" baseline="30000" dirty="0">
+                <a:solidFill>
+                  <a:srgbClr val="14161B"/>
+                </a:solidFill>
+                <a:latin typeface="Trade Gothic Next" pitchFamily="34" charset="0"/>
+                <a:ea typeface="Trade Gothic Next" pitchFamily="34" charset="-122"/>
+                <a:cs typeface="Trade Gothic Next" pitchFamily="34" charset="-120"/>
+              </a:rPr>
+              <a:t>2</a:t>
             </a:r>
             <a:endParaRPr lang="en-US" sz="1900" dirty="0"/>
           </a:p>
@@ -16975,7 +18269,119 @@
                 <a:ea typeface="Trade Gothic Next" pitchFamily="34" charset="-122"/>
                 <a:cs typeface="Trade Gothic Next" pitchFamily="34" charset="-120"/>
               </a:rPr>
-              <a:t>Mg²+: 1s² 2s² 2p⁶ = [Ne]</a:t>
+              <a:t>Mg</a:t>
+            </a:r>
+            <a:pPr indent="0" marL="0">
+              <a:buNone/>
+            </a:pPr>
+            <a:r>
+              <a:rPr lang="en-US" sz="1900" baseline="30000" dirty="0">
+                <a:solidFill>
+                  <a:srgbClr val="14161B"/>
+                </a:solidFill>
+                <a:latin typeface="Trade Gothic Next" pitchFamily="34" charset="0"/>
+                <a:ea typeface="Trade Gothic Next" pitchFamily="34" charset="-122"/>
+                <a:cs typeface="Trade Gothic Next" pitchFamily="34" charset="-120"/>
+              </a:rPr>
+              <a:t>2+</a:t>
+            </a:r>
+            <a:pPr indent="0" marL="0">
+              <a:buNone/>
+            </a:pPr>
+            <a:r>
+              <a:rPr lang="en-US" sz="1900" dirty="0">
+                <a:solidFill>
+                  <a:srgbClr val="14161B"/>
+                </a:solidFill>
+                <a:latin typeface="Trade Gothic Next" pitchFamily="34" charset="0"/>
+                <a:ea typeface="Trade Gothic Next" pitchFamily="34" charset="-122"/>
+                <a:cs typeface="Trade Gothic Next" pitchFamily="34" charset="-120"/>
+              </a:rPr>
+              <a:t>: 1s</a:t>
+            </a:r>
+            <a:pPr indent="0" marL="0">
+              <a:buNone/>
+            </a:pPr>
+            <a:r>
+              <a:rPr lang="en-US" sz="1900" baseline="30000" dirty="0">
+                <a:solidFill>
+                  <a:srgbClr val="14161B"/>
+                </a:solidFill>
+                <a:latin typeface="Trade Gothic Next" pitchFamily="34" charset="0"/>
+                <a:ea typeface="Trade Gothic Next" pitchFamily="34" charset="-122"/>
+                <a:cs typeface="Trade Gothic Next" pitchFamily="34" charset="-120"/>
+              </a:rPr>
+              <a:t>2</a:t>
+            </a:r>
+            <a:pPr indent="0" marL="0">
+              <a:buNone/>
+            </a:pPr>
+            <a:r>
+              <a:rPr lang="en-US" sz="1900" dirty="0">
+                <a:solidFill>
+                  <a:srgbClr val="14161B"/>
+                </a:solidFill>
+                <a:latin typeface="Trade Gothic Next" pitchFamily="34" charset="0"/>
+                <a:ea typeface="Trade Gothic Next" pitchFamily="34" charset="-122"/>
+                <a:cs typeface="Trade Gothic Next" pitchFamily="34" charset="-120"/>
+              </a:rPr>
+              <a:t> 2s</a:t>
+            </a:r>
+            <a:pPr indent="0" marL="0">
+              <a:buNone/>
+            </a:pPr>
+            <a:r>
+              <a:rPr lang="en-US" sz="1900" baseline="30000" dirty="0">
+                <a:solidFill>
+                  <a:srgbClr val="14161B"/>
+                </a:solidFill>
+                <a:latin typeface="Trade Gothic Next" pitchFamily="34" charset="0"/>
+                <a:ea typeface="Trade Gothic Next" pitchFamily="34" charset="-122"/>
+                <a:cs typeface="Trade Gothic Next" pitchFamily="34" charset="-120"/>
+              </a:rPr>
+              <a:t>2</a:t>
+            </a:r>
+            <a:pPr indent="0" marL="0">
+              <a:buNone/>
+            </a:pPr>
+            <a:r>
+              <a:rPr lang="en-US" sz="1900" dirty="0">
+                <a:solidFill>
+                  <a:srgbClr val="14161B"/>
+                </a:solidFill>
+                <a:latin typeface="Trade Gothic Next" pitchFamily="34" charset="0"/>
+                <a:ea typeface="Trade Gothic Next" pitchFamily="34" charset="-122"/>
+                <a:cs typeface="Trade Gothic Next" pitchFamily="34" charset="-120"/>
+              </a:rPr>
+              <a:t> 2p</a:t>
+            </a:r>
+            <a:pPr indent="0" marL="0">
+              <a:buNone/>
+            </a:pPr>
+            <a:r>
+              <a:rPr lang="en-US" sz="1900" baseline="30000" dirty="0">
+                <a:solidFill>
+                  <a:srgbClr val="14161B"/>
+                </a:solidFill>
+                <a:latin typeface="Trade Gothic Next" pitchFamily="34" charset="0"/>
+                <a:ea typeface="Trade Gothic Next" pitchFamily="34" charset="-122"/>
+                <a:cs typeface="Trade Gothic Next" pitchFamily="34" charset="-120"/>
+              </a:rPr>
+              <a:t>6</a:t>
+            </a:r>
+            <a:pPr indent="0" marL="0">
+              <a:buNone/>
+            </a:pPr>
+            <a:r>
+              <a:rPr lang="en-US" sz="1900" dirty="0">
+                <a:solidFill>
+                  <a:srgbClr val="14161B"/>
+                </a:solidFill>
+                <a:latin typeface="Trade Gothic Next" pitchFamily="34" charset="0"/>
+                <a:ea typeface="Trade Gothic Next" pitchFamily="34" charset="-122"/>
+                <a:cs typeface="Trade Gothic Next" pitchFamily="34" charset="-120"/>
+              </a:rPr>
+              <a:t> = [Ne]</a:t>
             </a:r>
             <a:endParaRPr lang="en-US" sz="1900" dirty="0"/>
           </a:p>
@@ -16992,7 +18398,49 @@
                 <a:ea typeface="Trade Gothic Next" pitchFamily="34" charset="-122"/>
                 <a:cs typeface="Trade Gothic Next" pitchFamily="34" charset="-120"/>
               </a:rPr>
-              <a:t>S: [Ne] 3s² 3p⁴</a:t>
+              <a:t>S: [Ne] 3s</a:t>
+            </a:r>
+            <a:pPr indent="0" marL="0">
+              <a:buNone/>
+            </a:pPr>
+            <a:r>
+              <a:rPr lang="en-US" sz="1900" baseline="30000" dirty="0">
+                <a:solidFill>
+                  <a:srgbClr val="14161B"/>
+                </a:solidFill>
+                <a:latin typeface="Trade Gothic Next" pitchFamily="34" charset="0"/>
+                <a:ea typeface="Trade Gothic Next" pitchFamily="34" charset="-122"/>
+                <a:cs typeface="Trade Gothic Next" pitchFamily="34" charset="-120"/>
+              </a:rPr>
+              <a:t>2</a:t>
+            </a:r>
+            <a:pPr indent="0" marL="0">
+              <a:buNone/>
+            </a:pPr>
+            <a:r>
+              <a:rPr lang="en-US" sz="1900" dirty="0">
+                <a:solidFill>
+                  <a:srgbClr val="14161B"/>
+                </a:solidFill>
+                <a:latin typeface="Trade Gothic Next" pitchFamily="34" charset="0"/>
+                <a:ea typeface="Trade Gothic Next" pitchFamily="34" charset="-122"/>
+                <a:cs typeface="Trade Gothic Next" pitchFamily="34" charset="-120"/>
+              </a:rPr>
+              <a:t> 3p</a:t>
+            </a:r>
+            <a:pPr indent="0" marL="0">
+              <a:buNone/>
+            </a:pPr>
+            <a:r>
+              <a:rPr lang="en-US" sz="1900" baseline="30000" dirty="0">
+                <a:solidFill>
+                  <a:srgbClr val="14161B"/>
+                </a:solidFill>
+                <a:latin typeface="Trade Gothic Next" pitchFamily="34" charset="0"/>
+                <a:ea typeface="Trade Gothic Next" pitchFamily="34" charset="-122"/>
+                <a:cs typeface="Trade Gothic Next" pitchFamily="34" charset="-120"/>
+              </a:rPr>
+              <a:t>4</a:t>
             </a:r>
             <a:endParaRPr lang="en-US" sz="1900" dirty="0"/>
           </a:p>
@@ -17009,7 +18457,91 @@
                 <a:ea typeface="Trade Gothic Next" pitchFamily="34" charset="-122"/>
                 <a:cs typeface="Trade Gothic Next" pitchFamily="34" charset="-120"/>
               </a:rPr>
-              <a:t>S²−: [Ne] 3s² 3p⁶ = [Ar]</a:t>
+              <a:t>S</a:t>
+            </a:r>
+            <a:pPr indent="0" marL="0">
+              <a:buNone/>
+            </a:pPr>
+            <a:r>
+              <a:rPr lang="en-US" sz="1900" baseline="30000" dirty="0">
+                <a:solidFill>
+                  <a:srgbClr val="14161B"/>
+                </a:solidFill>
+                <a:latin typeface="Trade Gothic Next" pitchFamily="34" charset="0"/>
+                <a:ea typeface="Trade Gothic Next" pitchFamily="34" charset="-122"/>
+                <a:cs typeface="Trade Gothic Next" pitchFamily="34" charset="-120"/>
+              </a:rPr>
+              <a:t>2−</a:t>
+            </a:r>
+            <a:pPr indent="0" marL="0">
+              <a:buNone/>
+            </a:pPr>
+            <a:r>
+              <a:rPr lang="en-US" sz="1900" dirty="0">
+                <a:solidFill>
+                  <a:srgbClr val="14161B"/>
+                </a:solidFill>
+                <a:latin typeface="Trade Gothic Next" pitchFamily="34" charset="0"/>
+                <a:ea typeface="Trade Gothic Next" pitchFamily="34" charset="-122"/>
+                <a:cs typeface="Trade Gothic Next" pitchFamily="34" charset="-120"/>
+              </a:rPr>
+              <a:t>: [Ne] 3s</a:t>
+            </a:r>
+            <a:pPr indent="0" marL="0">
+              <a:buNone/>
+            </a:pPr>
+            <a:r>
+              <a:rPr lang="en-US" sz="1900" baseline="30000" dirty="0">
+                <a:solidFill>
+                  <a:srgbClr val="14161B"/>
+                </a:solidFill>
+                <a:latin typeface="Trade Gothic Next" pitchFamily="34" charset="0"/>
+                <a:ea typeface="Trade Gothic Next" pitchFamily="34" charset="-122"/>
+                <a:cs typeface="Trade Gothic Next" pitchFamily="34" charset="-120"/>
+              </a:rPr>
+              <a:t>2</a:t>
+            </a:r>
+            <a:pPr indent="0" marL="0">
+              <a:buNone/>
+            </a:pPr>
+            <a:r>
+              <a:rPr lang="en-US" sz="1900" dirty="0">
+                <a:solidFill>
+                  <a:srgbClr val="14161B"/>
+                </a:solidFill>
+                <a:latin typeface="Trade Gothic Next" pitchFamily="34" charset="0"/>
+                <a:ea typeface="Trade Gothic Next" pitchFamily="34" charset="-122"/>
+                <a:cs typeface="Trade Gothic Next" pitchFamily="34" charset="-120"/>
+              </a:rPr>
+              <a:t> 3p</a:t>
+            </a:r>
+            <a:pPr indent="0" marL="0">
+              <a:buNone/>
+            </a:pPr>
+            <a:r>
+              <a:rPr lang="en-US" sz="1900" baseline="30000" dirty="0">
+                <a:solidFill>
+                  <a:srgbClr val="14161B"/>
+                </a:solidFill>
+                <a:latin typeface="Trade Gothic Next" pitchFamily="34" charset="0"/>
+                <a:ea typeface="Trade Gothic Next" pitchFamily="34" charset="-122"/>
+                <a:cs typeface="Trade Gothic Next" pitchFamily="34" charset="-120"/>
+              </a:rPr>
+              <a:t>6</a:t>
+            </a:r>
+            <a:pPr indent="0" marL="0">
+              <a:buNone/>
+            </a:pPr>
+            <a:r>
+              <a:rPr lang="en-US" sz="1900" dirty="0">
+                <a:solidFill>
+                  <a:srgbClr val="14161B"/>
+                </a:solidFill>
+                <a:latin typeface="Trade Gothic Next" pitchFamily="34" charset="0"/>
+                <a:ea typeface="Trade Gothic Next" pitchFamily="34" charset="-122"/>
+                <a:cs typeface="Trade Gothic Next" pitchFamily="34" charset="-120"/>
+              </a:rPr>
+              <a:t> = [Ar]</a:t>
             </a:r>
             <a:endParaRPr lang="en-US" sz="1900" dirty="0"/>
           </a:p>
@@ -17050,7 +18582,63 @@
                 <a:ea typeface="Trade Gothic Next" pitchFamily="34" charset="-122"/>
                 <a:cs typeface="Trade Gothic Next" pitchFamily="34" charset="-120"/>
               </a:rPr>
-              <a:t>Mg²+ matches neon. S²− matches argon.</a:t>
+              <a:t>Mg</a:t>
+            </a:r>
+            <a:pPr indent="0" marL="0">
+              <a:buNone/>
+            </a:pPr>
+            <a:r>
+              <a:rPr lang="en-US" sz="1600" b="1" baseline="30000" dirty="0">
+                <a:solidFill>
+                  <a:srgbClr val="EDF0E5"/>
+                </a:solidFill>
+                <a:latin typeface="Trade Gothic Next" pitchFamily="34" charset="0"/>
+                <a:ea typeface="Trade Gothic Next" pitchFamily="34" charset="-122"/>
+                <a:cs typeface="Trade Gothic Next" pitchFamily="34" charset="-120"/>
+              </a:rPr>
+              <a:t>2+</a:t>
+            </a:r>
+            <a:pPr indent="0" marL="0">
+              <a:buNone/>
+            </a:pPr>
+            <a:r>
+              <a:rPr lang="en-US" sz="1600" b="1" dirty="0">
+                <a:solidFill>
+                  <a:srgbClr val="EDF0E5"/>
+                </a:solidFill>
+                <a:latin typeface="Trade Gothic Next" pitchFamily="34" charset="0"/>
+                <a:ea typeface="Trade Gothic Next" pitchFamily="34" charset="-122"/>
+                <a:cs typeface="Trade Gothic Next" pitchFamily="34" charset="-120"/>
+              </a:rPr>
+              <a:t> matches neon. S</a:t>
+            </a:r>
+            <a:pPr indent="0" marL="0">
+              <a:buNone/>
+            </a:pPr>
+            <a:r>
+              <a:rPr lang="en-US" sz="1600" b="1" baseline="30000" dirty="0">
+                <a:solidFill>
+                  <a:srgbClr val="EDF0E5"/>
+                </a:solidFill>
+                <a:latin typeface="Trade Gothic Next" pitchFamily="34" charset="0"/>
+                <a:ea typeface="Trade Gothic Next" pitchFamily="34" charset="-122"/>
+                <a:cs typeface="Trade Gothic Next" pitchFamily="34" charset="-120"/>
+              </a:rPr>
+              <a:t>2−</a:t>
+            </a:r>
+            <a:pPr indent="0" marL="0">
+              <a:buNone/>
+            </a:pPr>
+            <a:r>
+              <a:rPr lang="en-US" sz="1600" b="1" dirty="0">
+                <a:solidFill>
+                  <a:srgbClr val="EDF0E5"/>
+                </a:solidFill>
+                <a:latin typeface="Trade Gothic Next" pitchFamily="34" charset="0"/>
+                <a:ea typeface="Trade Gothic Next" pitchFamily="34" charset="-122"/>
+                <a:cs typeface="Trade Gothic Next" pitchFamily="34" charset="-120"/>
+              </a:rPr>
+              <a:t> matches argon.</a:t>
             </a:r>
             <a:endParaRPr lang="en-US" sz="1600" dirty="0"/>
           </a:p>
@@ -17140,7 +18728,7 @@
       </p:sp>
       <p:sp>
         <p:nvSpPr>
-          <p:cNvPr id="10" name="Text 4"/>
+          <p:cNvPr id="11" name="Text 4"/>
           <p:cNvSpPr txBox="1"/>
           <p:nvPr>
             <p:ph idx="107" hasCustomPrompt="1"/>
@@ -17610,7 +19198,7 @@
       </p:sp>
       <p:sp>
         <p:nvSpPr>
-          <p:cNvPr id="11" name="Text 3"/>
+          <p:cNvPr id="12" name="Text 3"/>
           <p:cNvSpPr txBox="1"/>
           <p:nvPr>
             <p:ph idx="106" hasCustomPrompt="1"/>
@@ -17722,7 +19310,49 @@
                 <a:ea typeface="Trade Gothic Next" pitchFamily="34" charset="-122"/>
                 <a:cs typeface="Trade Gothic Next" pitchFamily="34" charset="-120"/>
               </a:rPr>
-              <a:t>Iron: Fe, Fe²+, and Fe³+</a:t>
+              <a:t>Iron: Fe, Fe</a:t>
+            </a:r>
+            <a:pPr algn="l" indent="0" marL="0">
+              <a:buNone/>
+            </a:pPr>
+            <a:r>
+              <a:rPr lang="en-US" sz="2800" b="1" baseline="30000" dirty="0">
+                <a:solidFill>
+                  <a:srgbClr val="14161B"/>
+                </a:solidFill>
+                <a:latin typeface="Trade Gothic Next" pitchFamily="34" charset="0"/>
+                <a:ea typeface="Trade Gothic Next" pitchFamily="34" charset="-122"/>
+                <a:cs typeface="Trade Gothic Next" pitchFamily="34" charset="-120"/>
+              </a:rPr>
+              <a:t>2+</a:t>
+            </a:r>
+            <a:pPr algn="l" indent="0" marL="0">
+              <a:buNone/>
+            </a:pPr>
+            <a:r>
+              <a:rPr lang="en-US" sz="2800" b="1" dirty="0">
+                <a:solidFill>
+                  <a:srgbClr val="14161B"/>
+                </a:solidFill>
+                <a:latin typeface="Trade Gothic Next" pitchFamily="34" charset="0"/>
+                <a:ea typeface="Trade Gothic Next" pitchFamily="34" charset="-122"/>
+                <a:cs typeface="Trade Gothic Next" pitchFamily="34" charset="-120"/>
+              </a:rPr>
+              <a:t>, and Fe</a:t>
+            </a:r>
+            <a:pPr algn="l" indent="0" marL="0">
+              <a:buNone/>
+            </a:pPr>
+            <a:r>
+              <a:rPr lang="en-US" sz="2800" b="1" baseline="30000" dirty="0">
+                <a:solidFill>
+                  <a:srgbClr val="14161B"/>
+                </a:solidFill>
+                <a:latin typeface="Trade Gothic Next" pitchFamily="34" charset="0"/>
+                <a:ea typeface="Trade Gothic Next" pitchFamily="34" charset="-122"/>
+                <a:cs typeface="Trade Gothic Next" pitchFamily="34" charset="-120"/>
+              </a:rPr>
+              <a:t>3+</a:t>
             </a:r>
             <a:endParaRPr lang="en-US" sz="2800" dirty="0"/>
           </a:p>
@@ -17845,7 +19475,49 @@
                 <a:ea typeface="Trade Gothic Next" pitchFamily="34" charset="-122"/>
                 <a:cs typeface="Trade Gothic Next" pitchFamily="34" charset="-120"/>
               </a:rPr>
-              <a:t>[Ar] 4s² 3d⁶</a:t>
+              <a:t>[Ar] 4s</a:t>
+            </a:r>
+            <a:pPr indent="0" marL="0">
+              <a:buNone/>
+            </a:pPr>
+            <a:r>
+              <a:rPr lang="en-US" sz="1600" baseline="30000" dirty="0">
+                <a:solidFill>
+                  <a:srgbClr val="14161B"/>
+                </a:solidFill>
+                <a:latin typeface="Trade Gothic Next" pitchFamily="34" charset="0"/>
+                <a:ea typeface="Trade Gothic Next" pitchFamily="34" charset="-122"/>
+                <a:cs typeface="Trade Gothic Next" pitchFamily="34" charset="-120"/>
+              </a:rPr>
+              <a:t>2</a:t>
+            </a:r>
+            <a:pPr indent="0" marL="0">
+              <a:buNone/>
+            </a:pPr>
+            <a:r>
+              <a:rPr lang="en-US" sz="1600" dirty="0">
+                <a:solidFill>
+                  <a:srgbClr val="14161B"/>
+                </a:solidFill>
+                <a:latin typeface="Trade Gothic Next" pitchFamily="34" charset="0"/>
+                <a:ea typeface="Trade Gothic Next" pitchFamily="34" charset="-122"/>
+                <a:cs typeface="Trade Gothic Next" pitchFamily="34" charset="-120"/>
+              </a:rPr>
+              <a:t> 3d</a:t>
+            </a:r>
+            <a:pPr indent="0" marL="0">
+              <a:buNone/>
+            </a:pPr>
+            <a:r>
+              <a:rPr lang="en-US" sz="1600" baseline="30000" dirty="0">
+                <a:solidFill>
+                  <a:srgbClr val="14161B"/>
+                </a:solidFill>
+                <a:latin typeface="Trade Gothic Next" pitchFamily="34" charset="0"/>
+                <a:ea typeface="Trade Gothic Next" pitchFamily="34" charset="-122"/>
+                <a:cs typeface="Trade Gothic Next" pitchFamily="34" charset="-120"/>
+              </a:rPr>
+              <a:t>6</a:t>
             </a:r>
             <a:endParaRPr lang="en-US" sz="1600" dirty="0"/>
           </a:p>
@@ -17903,7 +19575,21 @@
                 <a:ea typeface="Trade Gothic Next" pitchFamily="34" charset="-122"/>
                 <a:cs typeface="Trade Gothic Next" pitchFamily="34" charset="-120"/>
               </a:rPr>
-              <a:t>Fe²+</a:t>
+              <a:t>Fe</a:t>
+            </a:r>
+            <a:pPr indent="0" marL="0">
+              <a:buNone/>
+            </a:pPr>
+            <a:r>
+              <a:rPr lang="en-US" sz="1200" b="1" baseline="30000" spc="120" kern="0" dirty="0">
+                <a:solidFill>
+                  <a:srgbClr val="2E3338"/>
+                </a:solidFill>
+                <a:latin typeface="Trade Gothic Next" pitchFamily="34" charset="0"/>
+                <a:ea typeface="Trade Gothic Next" pitchFamily="34" charset="-122"/>
+                <a:cs typeface="Trade Gothic Next" pitchFamily="34" charset="-120"/>
+              </a:rPr>
+              <a:t>2+</a:t>
             </a:r>
             <a:endParaRPr lang="en-US" sz="1200" dirty="0"/>
           </a:p>
@@ -17944,7 +19630,21 @@
                 <a:ea typeface="Trade Gothic Next" pitchFamily="34" charset="-122"/>
                 <a:cs typeface="Trade Gothic Next" pitchFamily="34" charset="-120"/>
               </a:rPr>
-              <a:t>[Ar] 3d⁶</a:t>
+              <a:t>[Ar] 3d</a:t>
+            </a:r>
+            <a:pPr indent="0" marL="0">
+              <a:buNone/>
+            </a:pPr>
+            <a:r>
+              <a:rPr lang="en-US" sz="1600" baseline="30000" dirty="0">
+                <a:solidFill>
+                  <a:srgbClr val="14161B"/>
+                </a:solidFill>
+                <a:latin typeface="Trade Gothic Next" pitchFamily="34" charset="0"/>
+                <a:ea typeface="Trade Gothic Next" pitchFamily="34" charset="-122"/>
+                <a:cs typeface="Trade Gothic Next" pitchFamily="34" charset="-120"/>
+              </a:rPr>
+              <a:t>6</a:t>
             </a:r>
             <a:endParaRPr lang="en-US" sz="1600" dirty="0"/>
           </a:p>
@@ -18002,7 +19702,21 @@
                 <a:ea typeface="Trade Gothic Next" pitchFamily="34" charset="-122"/>
                 <a:cs typeface="Trade Gothic Next" pitchFamily="34" charset="-120"/>
               </a:rPr>
-              <a:t>Fe³+</a:t>
+              <a:t>Fe</a:t>
+            </a:r>
+            <a:pPr indent="0" marL="0">
+              <a:buNone/>
+            </a:pPr>
+            <a:r>
+              <a:rPr lang="en-US" sz="1200" b="1" baseline="30000" spc="120" kern="0" dirty="0">
+                <a:solidFill>
+                  <a:srgbClr val="2E3338"/>
+                </a:solidFill>
+                <a:latin typeface="Trade Gothic Next" pitchFamily="34" charset="0"/>
+                <a:ea typeface="Trade Gothic Next" pitchFamily="34" charset="-122"/>
+                <a:cs typeface="Trade Gothic Next" pitchFamily="34" charset="-120"/>
+              </a:rPr>
+              <a:t>3+</a:t>
             </a:r>
             <a:endParaRPr lang="en-US" sz="1200" dirty="0"/>
           </a:p>
@@ -18043,7 +19757,21 @@
                 <a:ea typeface="Trade Gothic Next" pitchFamily="34" charset="-122"/>
                 <a:cs typeface="Trade Gothic Next" pitchFamily="34" charset="-120"/>
               </a:rPr>
-              <a:t>[Ar] 3d⁵</a:t>
+              <a:t>[Ar] 3d</a:t>
+            </a:r>
+            <a:pPr indent="0" marL="0">
+              <a:buNone/>
+            </a:pPr>
+            <a:r>
+              <a:rPr lang="en-US" sz="1600" baseline="30000" dirty="0">
+                <a:solidFill>
+                  <a:srgbClr val="14161B"/>
+                </a:solidFill>
+                <a:latin typeface="Trade Gothic Next" pitchFamily="34" charset="0"/>
+                <a:ea typeface="Trade Gothic Next" pitchFamily="34" charset="-122"/>
+                <a:cs typeface="Trade Gothic Next" pitchFamily="34" charset="-120"/>
+              </a:rPr>
+              <a:t>5</a:t>
             </a:r>
             <a:endParaRPr lang="en-US" sz="1600" dirty="0"/>
           </a:p>
@@ -18060,7 +19788,7 @@
                 <a:ea typeface="Trade Gothic Next" pitchFamily="34" charset="-122"/>
                 <a:cs typeface="Trade Gothic Next" pitchFamily="34" charset="-120"/>
               </a:rPr>
-              <a:t>23 electrons. One 3d electron left.</a:t>
+              <a:t>23 electrons. One 3d electron leaves too.</a:t>
             </a:r>
             <a:endParaRPr lang="en-US" sz="1600" dirty="0"/>
           </a:p>
@@ -18150,7 +19878,7 @@
       </p:sp>
       <p:sp>
         <p:nvSpPr>
-          <p:cNvPr id="13" name="Text 3"/>
+          <p:cNvPr id="14" name="Text 3"/>
           <p:cNvSpPr txBox="1"/>
           <p:nvPr>
             <p:ph idx="106" type="body" hasCustomPrompt="1"/>
@@ -18238,7 +19966,77 @@
                 <a:ea typeface="Trade Gothic Next" pitchFamily="34" charset="-122"/>
                 <a:cs typeface="Trade Gothic Next" pitchFamily="34" charset="-120"/>
               </a:rPr>
-              <a:t>Example: Zn²+, Cu+, and Cu²+</a:t>
+              <a:t>Example: Zn</a:t>
+            </a:r>
+            <a:pPr algn="l" indent="0" marL="0">
+              <a:buNone/>
+            </a:pPr>
+            <a:r>
+              <a:rPr lang="en-US" sz="2800" b="1" baseline="30000" dirty="0">
+                <a:solidFill>
+                  <a:srgbClr val="14161B"/>
+                </a:solidFill>
+                <a:latin typeface="Trade Gothic Next" pitchFamily="34" charset="0"/>
+                <a:ea typeface="Trade Gothic Next" pitchFamily="34" charset="-122"/>
+                <a:cs typeface="Trade Gothic Next" pitchFamily="34" charset="-120"/>
+              </a:rPr>
+              <a:t>2+</a:t>
+            </a:r>
+            <a:pPr algn="l" indent="0" marL="0">
+              <a:buNone/>
+            </a:pPr>
+            <a:r>
+              <a:rPr lang="en-US" sz="2800" b="1" dirty="0">
+                <a:solidFill>
+                  <a:srgbClr val="14161B"/>
+                </a:solidFill>
+                <a:latin typeface="Trade Gothic Next" pitchFamily="34" charset="0"/>
+                <a:ea typeface="Trade Gothic Next" pitchFamily="34" charset="-122"/>
+                <a:cs typeface="Trade Gothic Next" pitchFamily="34" charset="-120"/>
+              </a:rPr>
+              <a:t>, Cu</a:t>
+            </a:r>
+            <a:pPr algn="l" indent="0" marL="0">
+              <a:buNone/>
+            </a:pPr>
+            <a:r>
+              <a:rPr lang="en-US" sz="2800" b="1" baseline="30000" dirty="0">
+                <a:solidFill>
+                  <a:srgbClr val="14161B"/>
+                </a:solidFill>
+                <a:latin typeface="Trade Gothic Next" pitchFamily="34" charset="0"/>
+                <a:ea typeface="Trade Gothic Next" pitchFamily="34" charset="-122"/>
+                <a:cs typeface="Trade Gothic Next" pitchFamily="34" charset="-120"/>
+              </a:rPr>
+              <a:t>+</a:t>
+            </a:r>
+            <a:pPr algn="l" indent="0" marL="0">
+              <a:buNone/>
+            </a:pPr>
+            <a:r>
+              <a:rPr lang="en-US" sz="2800" b="1" dirty="0">
+                <a:solidFill>
+                  <a:srgbClr val="14161B"/>
+                </a:solidFill>
+                <a:latin typeface="Trade Gothic Next" pitchFamily="34" charset="0"/>
+                <a:ea typeface="Trade Gothic Next" pitchFamily="34" charset="-122"/>
+                <a:cs typeface="Trade Gothic Next" pitchFamily="34" charset="-120"/>
+              </a:rPr>
+              <a:t>, and Cu</a:t>
+            </a:r>
+            <a:pPr algn="l" indent="0" marL="0">
+              <a:buNone/>
+            </a:pPr>
+            <a:r>
+              <a:rPr lang="en-US" sz="2800" b="1" baseline="30000" dirty="0">
+                <a:solidFill>
+                  <a:srgbClr val="14161B"/>
+                </a:solidFill>
+                <a:latin typeface="Trade Gothic Next" pitchFamily="34" charset="0"/>
+                <a:ea typeface="Trade Gothic Next" pitchFamily="34" charset="-122"/>
+                <a:cs typeface="Trade Gothic Next" pitchFamily="34" charset="-120"/>
+              </a:rPr>
+              <a:t>2+</a:t>
             </a:r>
             <a:endParaRPr lang="en-US" sz="2800" dirty="0"/>
           </a:p>
@@ -18320,7 +20118,91 @@
                 <a:ea typeface="Trade Gothic Next" pitchFamily="34" charset="-122"/>
                 <a:cs typeface="Trade Gothic Next" pitchFamily="34" charset="-120"/>
               </a:rPr>
-              <a:t>Write the [Ar] shorthand for Zn²+, Cu+, and Cu²+.</a:t>
+              <a:t>Write the [Ar] shorthand for Zn</a:t>
+            </a:r>
+            <a:pPr indent="0" marL="0">
+              <a:buNone/>
+            </a:pPr>
+            <a:r>
+              <a:rPr lang="en-US" sz="1600" baseline="30000" dirty="0">
+                <a:solidFill>
+                  <a:srgbClr val="EDF0E5"/>
+                </a:solidFill>
+                <a:latin typeface="Trade Gothic Next" pitchFamily="34" charset="0"/>
+                <a:ea typeface="Trade Gothic Next" pitchFamily="34" charset="-122"/>
+                <a:cs typeface="Trade Gothic Next" pitchFamily="34" charset="-120"/>
+              </a:rPr>
+              <a:t>2+</a:t>
+            </a:r>
+            <a:pPr indent="0" marL="0">
+              <a:buNone/>
+            </a:pPr>
+            <a:r>
+              <a:rPr lang="en-US" sz="1600" dirty="0">
+                <a:solidFill>
+                  <a:srgbClr val="EDF0E5"/>
+                </a:solidFill>
+                <a:latin typeface="Trade Gothic Next" pitchFamily="34" charset="0"/>
+                <a:ea typeface="Trade Gothic Next" pitchFamily="34" charset="-122"/>
+                <a:cs typeface="Trade Gothic Next" pitchFamily="34" charset="-120"/>
+              </a:rPr>
+              <a:t>, Cu</a:t>
+            </a:r>
+            <a:pPr indent="0" marL="0">
+              <a:buNone/>
+            </a:pPr>
+            <a:r>
+              <a:rPr lang="en-US" sz="1600" baseline="30000" dirty="0">
+                <a:solidFill>
+                  <a:srgbClr val="EDF0E5"/>
+                </a:solidFill>
+                <a:latin typeface="Trade Gothic Next" pitchFamily="34" charset="0"/>
+                <a:ea typeface="Trade Gothic Next" pitchFamily="34" charset="-122"/>
+                <a:cs typeface="Trade Gothic Next" pitchFamily="34" charset="-120"/>
+              </a:rPr>
+              <a:t>+</a:t>
+            </a:r>
+            <a:pPr indent="0" marL="0">
+              <a:buNone/>
+            </a:pPr>
+            <a:r>
+              <a:rPr lang="en-US" sz="1600" dirty="0">
+                <a:solidFill>
+                  <a:srgbClr val="EDF0E5"/>
+                </a:solidFill>
+                <a:latin typeface="Trade Gothic Next" pitchFamily="34" charset="0"/>
+                <a:ea typeface="Trade Gothic Next" pitchFamily="34" charset="-122"/>
+                <a:cs typeface="Trade Gothic Next" pitchFamily="34" charset="-120"/>
+              </a:rPr>
+              <a:t>, and Cu</a:t>
+            </a:r>
+            <a:pPr indent="0" marL="0">
+              <a:buNone/>
+            </a:pPr>
+            <a:r>
+              <a:rPr lang="en-US" sz="1600" baseline="30000" dirty="0">
+                <a:solidFill>
+                  <a:srgbClr val="EDF0E5"/>
+                </a:solidFill>
+                <a:latin typeface="Trade Gothic Next" pitchFamily="34" charset="0"/>
+                <a:ea typeface="Trade Gothic Next" pitchFamily="34" charset="-122"/>
+                <a:cs typeface="Trade Gothic Next" pitchFamily="34" charset="-120"/>
+              </a:rPr>
+              <a:t>2+</a:t>
+            </a:r>
+            <a:pPr indent="0" marL="0">
+              <a:buNone/>
+            </a:pPr>
+            <a:r>
+              <a:rPr lang="en-US" sz="1600" dirty="0">
+                <a:solidFill>
+                  <a:srgbClr val="EDF0E5"/>
+                </a:solidFill>
+                <a:latin typeface="Trade Gothic Next" pitchFamily="34" charset="0"/>
+                <a:ea typeface="Trade Gothic Next" pitchFamily="34" charset="-122"/>
+                <a:cs typeface="Trade Gothic Next" pitchFamily="34" charset="-120"/>
+              </a:rPr>
+              <a:t>.</a:t>
             </a:r>
             <a:endParaRPr lang="en-US" sz="1600" dirty="0"/>
           </a:p>
@@ -18402,7 +20284,49 @@
                 <a:ea typeface="Trade Gothic Next" pitchFamily="34" charset="-122"/>
                 <a:cs typeface="Trade Gothic Next" pitchFamily="34" charset="-120"/>
               </a:rPr>
-              <a:t>Zn: [Ar] 4s² 3d¹⁰</a:t>
+              <a:t>Zn: [Ar] 4s</a:t>
+            </a:r>
+            <a:pPr indent="0" marL="0">
+              <a:buNone/>
+            </a:pPr>
+            <a:r>
+              <a:rPr lang="en-US" sz="1600" baseline="30000" dirty="0">
+                <a:solidFill>
+                  <a:srgbClr val="14161B"/>
+                </a:solidFill>
+                <a:latin typeface="Trade Gothic Next" pitchFamily="34" charset="0"/>
+                <a:ea typeface="Trade Gothic Next" pitchFamily="34" charset="-122"/>
+                <a:cs typeface="Trade Gothic Next" pitchFamily="34" charset="-120"/>
+              </a:rPr>
+              <a:t>2</a:t>
+            </a:r>
+            <a:pPr indent="0" marL="0">
+              <a:buNone/>
+            </a:pPr>
+            <a:r>
+              <a:rPr lang="en-US" sz="1600" dirty="0">
+                <a:solidFill>
+                  <a:srgbClr val="14161B"/>
+                </a:solidFill>
+                <a:latin typeface="Trade Gothic Next" pitchFamily="34" charset="0"/>
+                <a:ea typeface="Trade Gothic Next" pitchFamily="34" charset="-122"/>
+                <a:cs typeface="Trade Gothic Next" pitchFamily="34" charset="-120"/>
+              </a:rPr>
+              <a:t> 3d</a:t>
+            </a:r>
+            <a:pPr indent="0" marL="0">
+              <a:buNone/>
+            </a:pPr>
+            <a:r>
+              <a:rPr lang="en-US" sz="1600" baseline="30000" dirty="0">
+                <a:solidFill>
+                  <a:srgbClr val="14161B"/>
+                </a:solidFill>
+                <a:latin typeface="Trade Gothic Next" pitchFamily="34" charset="0"/>
+                <a:ea typeface="Trade Gothic Next" pitchFamily="34" charset="-122"/>
+                <a:cs typeface="Trade Gothic Next" pitchFamily="34" charset="-120"/>
+              </a:rPr>
+              <a:t>10</a:t>
             </a:r>
             <a:endParaRPr lang="en-US" sz="1600" dirty="0"/>
           </a:p>
@@ -18419,7 +20343,49 @@
                 <a:ea typeface="Trade Gothic Next" pitchFamily="34" charset="-122"/>
                 <a:cs typeface="Trade Gothic Next" pitchFamily="34" charset="-120"/>
               </a:rPr>
-              <a:t>Cu: [Ar] 4s¹ 3d¹⁰</a:t>
+              <a:t>Cu: [Ar] 4s</a:t>
+            </a:r>
+            <a:pPr indent="0" marL="0">
+              <a:buNone/>
+            </a:pPr>
+            <a:r>
+              <a:rPr lang="en-US" sz="1600" baseline="30000" dirty="0">
+                <a:solidFill>
+                  <a:srgbClr val="14161B"/>
+                </a:solidFill>
+                <a:latin typeface="Trade Gothic Next" pitchFamily="34" charset="0"/>
+                <a:ea typeface="Trade Gothic Next" pitchFamily="34" charset="-122"/>
+                <a:cs typeface="Trade Gothic Next" pitchFamily="34" charset="-120"/>
+              </a:rPr>
+              <a:t>1</a:t>
+            </a:r>
+            <a:pPr indent="0" marL="0">
+              <a:buNone/>
+            </a:pPr>
+            <a:r>
+              <a:rPr lang="en-US" sz="1600" dirty="0">
+                <a:solidFill>
+                  <a:srgbClr val="14161B"/>
+                </a:solidFill>
+                <a:latin typeface="Trade Gothic Next" pitchFamily="34" charset="0"/>
+                <a:ea typeface="Trade Gothic Next" pitchFamily="34" charset="-122"/>
+                <a:cs typeface="Trade Gothic Next" pitchFamily="34" charset="-120"/>
+              </a:rPr>
+              <a:t> 3d</a:t>
+            </a:r>
+            <a:pPr indent="0" marL="0">
+              <a:buNone/>
+            </a:pPr>
+            <a:r>
+              <a:rPr lang="en-US" sz="1600" baseline="30000" dirty="0">
+                <a:solidFill>
+                  <a:srgbClr val="14161B"/>
+                </a:solidFill>
+                <a:latin typeface="Trade Gothic Next" pitchFamily="34" charset="0"/>
+                <a:ea typeface="Trade Gothic Next" pitchFamily="34" charset="-122"/>
+                <a:cs typeface="Trade Gothic Next" pitchFamily="34" charset="-120"/>
+              </a:rPr>
+              <a:t>10</a:t>
             </a:r>
             <a:endParaRPr lang="en-US" sz="1600" dirty="0"/>
           </a:p>
@@ -18696,7 +20662,7 @@
       </p:sp>
       <p:sp>
         <p:nvSpPr>
-          <p:cNvPr id="13" name="Text 4"/>
+          <p:cNvPr id="14" name="Text 4"/>
           <p:cNvSpPr txBox="1"/>
           <p:nvPr>
             <p:ph idx="107" hasCustomPrompt="1"/>
@@ -18825,7 +20791,7 @@
                 <a:ea typeface="Trade Gothic Next" pitchFamily="34" charset="-122"/>
                 <a:cs typeface="Trade Gothic Next" pitchFamily="34" charset="-120"/>
               </a:rPr>
-              <a:t>Helium, neon, and argon barely react with anything. Sodium and chlorine react with almost everything.</a:t>
+              <a:t>Helium, neon, and argon barely react with anything. Sodium and chlorine react easily.</a:t>
             </a:r>
             <a:endParaRPr lang="en-US" sz="1600" dirty="0"/>
           </a:p>
@@ -18956,7 +20922,7 @@
       </p:sp>
       <p:sp>
         <p:nvSpPr>
-          <p:cNvPr id="7" name="Text 4"/>
+          <p:cNvPr id="8" name="Text 4"/>
           <p:cNvSpPr txBox="1"/>
           <p:nvPr>
             <p:ph idx="104" hasCustomPrompt="1"/>
@@ -19044,7 +21010,91 @@
                 <a:ea typeface="Trade Gothic Next" pitchFamily="34" charset="-122"/>
                 <a:cs typeface="Trade Gothic Next" pitchFamily="34" charset="-120"/>
               </a:rPr>
-              <a:t>Zn²+, Cu+, and Cu²+, Worked</a:t>
+              <a:t>Zn</a:t>
+            </a:r>
+            <a:pPr algn="l" indent="0" marL="0">
+              <a:buNone/>
+            </a:pPr>
+            <a:r>
+              <a:rPr lang="en-US" sz="2800" b="1" baseline="30000" dirty="0">
+                <a:solidFill>
+                  <a:srgbClr val="14161B"/>
+                </a:solidFill>
+                <a:latin typeface="Trade Gothic Next" pitchFamily="34" charset="0"/>
+                <a:ea typeface="Trade Gothic Next" pitchFamily="34" charset="-122"/>
+                <a:cs typeface="Trade Gothic Next" pitchFamily="34" charset="-120"/>
+              </a:rPr>
+              <a:t>2+</a:t>
+            </a:r>
+            <a:pPr algn="l" indent="0" marL="0">
+              <a:buNone/>
+            </a:pPr>
+            <a:r>
+              <a:rPr lang="en-US" sz="2800" b="1" dirty="0">
+                <a:solidFill>
+                  <a:srgbClr val="14161B"/>
+                </a:solidFill>
+                <a:latin typeface="Trade Gothic Next" pitchFamily="34" charset="0"/>
+                <a:ea typeface="Trade Gothic Next" pitchFamily="34" charset="-122"/>
+                <a:cs typeface="Trade Gothic Next" pitchFamily="34" charset="-120"/>
+              </a:rPr>
+              <a:t>, Cu</a:t>
+            </a:r>
+            <a:pPr algn="l" indent="0" marL="0">
+              <a:buNone/>
+            </a:pPr>
+            <a:r>
+              <a:rPr lang="en-US" sz="2800" b="1" baseline="30000" dirty="0">
+                <a:solidFill>
+                  <a:srgbClr val="14161B"/>
+                </a:solidFill>
+                <a:latin typeface="Trade Gothic Next" pitchFamily="34" charset="0"/>
+                <a:ea typeface="Trade Gothic Next" pitchFamily="34" charset="-122"/>
+                <a:cs typeface="Trade Gothic Next" pitchFamily="34" charset="-120"/>
+              </a:rPr>
+              <a:t>+</a:t>
+            </a:r>
+            <a:pPr algn="l" indent="0" marL="0">
+              <a:buNone/>
+            </a:pPr>
+            <a:r>
+              <a:rPr lang="en-US" sz="2800" b="1" dirty="0">
+                <a:solidFill>
+                  <a:srgbClr val="14161B"/>
+                </a:solidFill>
+                <a:latin typeface="Trade Gothic Next" pitchFamily="34" charset="0"/>
+                <a:ea typeface="Trade Gothic Next" pitchFamily="34" charset="-122"/>
+                <a:cs typeface="Trade Gothic Next" pitchFamily="34" charset="-120"/>
+              </a:rPr>
+              <a:t>, and Cu</a:t>
+            </a:r>
+            <a:pPr algn="l" indent="0" marL="0">
+              <a:buNone/>
+            </a:pPr>
+            <a:r>
+              <a:rPr lang="en-US" sz="2800" b="1" baseline="30000" dirty="0">
+                <a:solidFill>
+                  <a:srgbClr val="14161B"/>
+                </a:solidFill>
+                <a:latin typeface="Trade Gothic Next" pitchFamily="34" charset="0"/>
+                <a:ea typeface="Trade Gothic Next" pitchFamily="34" charset="-122"/>
+                <a:cs typeface="Trade Gothic Next" pitchFamily="34" charset="-120"/>
+              </a:rPr>
+              <a:t>2+</a:t>
+            </a:r>
+            <a:pPr algn="l" indent="0" marL="0">
+              <a:buNone/>
+            </a:pPr>
+            <a:r>
+              <a:rPr lang="en-US" sz="2800" b="1" dirty="0">
+                <a:solidFill>
+                  <a:srgbClr val="14161B"/>
+                </a:solidFill>
+                <a:latin typeface="Trade Gothic Next" pitchFamily="34" charset="0"/>
+                <a:ea typeface="Trade Gothic Next" pitchFamily="34" charset="-122"/>
+                <a:cs typeface="Trade Gothic Next" pitchFamily="34" charset="-120"/>
+              </a:rPr>
+              <a:t>, Worked</a:t>
             </a:r>
             <a:endParaRPr lang="en-US" sz="2800" dirty="0"/>
           </a:p>
@@ -19085,7 +21135,7 @@
                 <a:ea typeface="Trade Gothic Next" pitchFamily="34" charset="-122"/>
                 <a:cs typeface="Trade Gothic Next" pitchFamily="34" charset="-120"/>
               </a:rPr>
-              <a:t>Neither one has to end at a noble gas configuration.</a:t>
+              <a:t>None of these ends at a noble gas configuration.</a:t>
             </a:r>
             <a:endParaRPr lang="en-US" sz="1700" dirty="0"/>
           </a:p>
@@ -19225,7 +21275,49 @@
                 <a:ea typeface="Trade Gothic Next" pitchFamily="34" charset="-122"/>
                 <a:cs typeface="Trade Gothic Next" pitchFamily="34" charset="-120"/>
               </a:rPr>
-              <a:t>Zn²+: [Ar] 3d¹⁰</a:t>
+              <a:t>Zn</a:t>
+            </a:r>
+            <a:pPr indent="0" marL="0">
+              <a:buNone/>
+            </a:pPr>
+            <a:r>
+              <a:rPr lang="en-US" sz="1900" baseline="30000" dirty="0">
+                <a:solidFill>
+                  <a:srgbClr val="14161B"/>
+                </a:solidFill>
+                <a:latin typeface="Trade Gothic Next" pitchFamily="34" charset="0"/>
+                <a:ea typeface="Trade Gothic Next" pitchFamily="34" charset="-122"/>
+                <a:cs typeface="Trade Gothic Next" pitchFamily="34" charset="-120"/>
+              </a:rPr>
+              <a:t>2+</a:t>
+            </a:r>
+            <a:pPr indent="0" marL="0">
+              <a:buNone/>
+            </a:pPr>
+            <a:r>
+              <a:rPr lang="en-US" sz="1900" dirty="0">
+                <a:solidFill>
+                  <a:srgbClr val="14161B"/>
+                </a:solidFill>
+                <a:latin typeface="Trade Gothic Next" pitchFamily="34" charset="0"/>
+                <a:ea typeface="Trade Gothic Next" pitchFamily="34" charset="-122"/>
+                <a:cs typeface="Trade Gothic Next" pitchFamily="34" charset="-120"/>
+              </a:rPr>
+              <a:t>: [Ar] 3d</a:t>
+            </a:r>
+            <a:pPr indent="0" marL="0">
+              <a:buNone/>
+            </a:pPr>
+            <a:r>
+              <a:rPr lang="en-US" sz="1900" baseline="30000" dirty="0">
+                <a:solidFill>
+                  <a:srgbClr val="14161B"/>
+                </a:solidFill>
+                <a:latin typeface="Trade Gothic Next" pitchFamily="34" charset="0"/>
+                <a:ea typeface="Trade Gothic Next" pitchFamily="34" charset="-122"/>
+                <a:cs typeface="Trade Gothic Next" pitchFamily="34" charset="-120"/>
+              </a:rPr>
+              <a:t>10</a:t>
             </a:r>
             <a:endParaRPr lang="en-US" sz="1900" dirty="0"/>
           </a:p>
@@ -19242,7 +21334,49 @@
                 <a:ea typeface="Trade Gothic Next" pitchFamily="34" charset="-122"/>
                 <a:cs typeface="Trade Gothic Next" pitchFamily="34" charset="-120"/>
               </a:rPr>
-              <a:t>Cu+: [Ar] 3d¹⁰</a:t>
+              <a:t>Cu</a:t>
+            </a:r>
+            <a:pPr indent="0" marL="0">
+              <a:buNone/>
+            </a:pPr>
+            <a:r>
+              <a:rPr lang="en-US" sz="1900" baseline="30000" dirty="0">
+                <a:solidFill>
+                  <a:srgbClr val="14161B"/>
+                </a:solidFill>
+                <a:latin typeface="Trade Gothic Next" pitchFamily="34" charset="0"/>
+                <a:ea typeface="Trade Gothic Next" pitchFamily="34" charset="-122"/>
+                <a:cs typeface="Trade Gothic Next" pitchFamily="34" charset="-120"/>
+              </a:rPr>
+              <a:t>+</a:t>
+            </a:r>
+            <a:pPr indent="0" marL="0">
+              <a:buNone/>
+            </a:pPr>
+            <a:r>
+              <a:rPr lang="en-US" sz="1900" dirty="0">
+                <a:solidFill>
+                  <a:srgbClr val="14161B"/>
+                </a:solidFill>
+                <a:latin typeface="Trade Gothic Next" pitchFamily="34" charset="0"/>
+                <a:ea typeface="Trade Gothic Next" pitchFamily="34" charset="-122"/>
+                <a:cs typeface="Trade Gothic Next" pitchFamily="34" charset="-120"/>
+              </a:rPr>
+              <a:t>: [Ar] 3d</a:t>
+            </a:r>
+            <a:pPr indent="0" marL="0">
+              <a:buNone/>
+            </a:pPr>
+            <a:r>
+              <a:rPr lang="en-US" sz="1900" baseline="30000" dirty="0">
+                <a:solidFill>
+                  <a:srgbClr val="14161B"/>
+                </a:solidFill>
+                <a:latin typeface="Trade Gothic Next" pitchFamily="34" charset="0"/>
+                <a:ea typeface="Trade Gothic Next" pitchFamily="34" charset="-122"/>
+                <a:cs typeface="Trade Gothic Next" pitchFamily="34" charset="-120"/>
+              </a:rPr>
+              <a:t>10</a:t>
             </a:r>
             <a:endParaRPr lang="en-US" sz="1900" dirty="0"/>
           </a:p>
@@ -19259,7 +21393,35 @@
                 <a:ea typeface="Trade Gothic Next" pitchFamily="34" charset="-122"/>
                 <a:cs typeface="Trade Gothic Next" pitchFamily="34" charset="-120"/>
               </a:rPr>
-              <a:t>Cu²+: 4s, then one 3d</a:t>
+              <a:t>Cu</a:t>
+            </a:r>
+            <a:pPr indent="0" marL="0">
+              <a:buNone/>
+            </a:pPr>
+            <a:r>
+              <a:rPr lang="en-US" sz="1900" baseline="30000" dirty="0">
+                <a:solidFill>
+                  <a:srgbClr val="14161B"/>
+                </a:solidFill>
+                <a:latin typeface="Trade Gothic Next" pitchFamily="34" charset="0"/>
+                <a:ea typeface="Trade Gothic Next" pitchFamily="34" charset="-122"/>
+                <a:cs typeface="Trade Gothic Next" pitchFamily="34" charset="-120"/>
+              </a:rPr>
+              <a:t>2+</a:t>
+            </a:r>
+            <a:pPr indent="0" marL="0">
+              <a:buNone/>
+            </a:pPr>
+            <a:r>
+              <a:rPr lang="en-US" sz="1900" dirty="0">
+                <a:solidFill>
+                  <a:srgbClr val="14161B"/>
+                </a:solidFill>
+                <a:latin typeface="Trade Gothic Next" pitchFamily="34" charset="0"/>
+                <a:ea typeface="Trade Gothic Next" pitchFamily="34" charset="-122"/>
+                <a:cs typeface="Trade Gothic Next" pitchFamily="34" charset="-120"/>
+              </a:rPr>
+              <a:t>: 4s, then one 3d</a:t>
             </a:r>
             <a:endParaRPr lang="en-US" sz="1900" dirty="0"/>
           </a:p>
@@ -19276,7 +21438,21 @@
                 <a:ea typeface="Trade Gothic Next" pitchFamily="34" charset="-122"/>
                 <a:cs typeface="Trade Gothic Next" pitchFamily="34" charset="-120"/>
               </a:rPr>
-              <a:t>→ [Ar] 3d⁹</a:t>
+              <a:t>→ [Ar] 3d</a:t>
+            </a:r>
+            <a:pPr indent="0" marL="0">
+              <a:buNone/>
+            </a:pPr>
+            <a:r>
+              <a:rPr lang="en-US" sz="1900" baseline="30000" dirty="0">
+                <a:solidFill>
+                  <a:srgbClr val="14161B"/>
+                </a:solidFill>
+                <a:latin typeface="Trade Gothic Next" pitchFamily="34" charset="0"/>
+                <a:ea typeface="Trade Gothic Next" pitchFamily="34" charset="-122"/>
+                <a:cs typeface="Trade Gothic Next" pitchFamily="34" charset="-120"/>
+              </a:rPr>
+              <a:t>9</a:t>
             </a:r>
             <a:endParaRPr lang="en-US" sz="1900" dirty="0"/>
           </a:p>
@@ -19317,7 +21493,147 @@
                 <a:ea typeface="Trade Gothic Next" pitchFamily="34" charset="-122"/>
                 <a:cs typeface="Trade Gothic Next" pitchFamily="34" charset="-120"/>
               </a:rPr>
-              <a:t>Zn²+ and Cu+ are both [Ar] 3d¹⁰. Cu²+ is [Ar] 3d⁹.</a:t>
+              <a:t>Zn</a:t>
+            </a:r>
+            <a:pPr indent="0" marL="0">
+              <a:buNone/>
+            </a:pPr>
+            <a:r>
+              <a:rPr lang="en-US" sz="1600" b="1" baseline="30000" dirty="0">
+                <a:solidFill>
+                  <a:srgbClr val="EDF0E5"/>
+                </a:solidFill>
+                <a:latin typeface="Trade Gothic Next" pitchFamily="34" charset="0"/>
+                <a:ea typeface="Trade Gothic Next" pitchFamily="34" charset="-122"/>
+                <a:cs typeface="Trade Gothic Next" pitchFamily="34" charset="-120"/>
+              </a:rPr>
+              <a:t>2+</a:t>
+            </a:r>
+            <a:pPr indent="0" marL="0">
+              <a:buNone/>
+            </a:pPr>
+            <a:r>
+              <a:rPr lang="en-US" sz="1600" b="1" dirty="0">
+                <a:solidFill>
+                  <a:srgbClr val="EDF0E5"/>
+                </a:solidFill>
+                <a:latin typeface="Trade Gothic Next" pitchFamily="34" charset="0"/>
+                <a:ea typeface="Trade Gothic Next" pitchFamily="34" charset="-122"/>
+                <a:cs typeface="Trade Gothic Next" pitchFamily="34" charset="-120"/>
+              </a:rPr>
+              <a:t> and Cu</a:t>
+            </a:r>
+            <a:pPr indent="0" marL="0">
+              <a:buNone/>
+            </a:pPr>
+            <a:r>
+              <a:rPr lang="en-US" sz="1600" b="1" baseline="30000" dirty="0">
+                <a:solidFill>
+                  <a:srgbClr val="EDF0E5"/>
+                </a:solidFill>
+                <a:latin typeface="Trade Gothic Next" pitchFamily="34" charset="0"/>
+                <a:ea typeface="Trade Gothic Next" pitchFamily="34" charset="-122"/>
+                <a:cs typeface="Trade Gothic Next" pitchFamily="34" charset="-120"/>
+              </a:rPr>
+              <a:t>+</a:t>
+            </a:r>
+            <a:pPr indent="0" marL="0">
+              <a:buNone/>
+            </a:pPr>
+            <a:r>
+              <a:rPr lang="en-US" sz="1600" b="1" dirty="0">
+                <a:solidFill>
+                  <a:srgbClr val="EDF0E5"/>
+                </a:solidFill>
+                <a:latin typeface="Trade Gothic Next" pitchFamily="34" charset="0"/>
+                <a:ea typeface="Trade Gothic Next" pitchFamily="34" charset="-122"/>
+                <a:cs typeface="Trade Gothic Next" pitchFamily="34" charset="-120"/>
+              </a:rPr>
+              <a:t> are both [Ar] 3d</a:t>
+            </a:r>
+            <a:pPr indent="0" marL="0">
+              <a:buNone/>
+            </a:pPr>
+            <a:r>
+              <a:rPr lang="en-US" sz="1600" b="1" baseline="30000" dirty="0">
+                <a:solidFill>
+                  <a:srgbClr val="EDF0E5"/>
+                </a:solidFill>
+                <a:latin typeface="Trade Gothic Next" pitchFamily="34" charset="0"/>
+                <a:ea typeface="Trade Gothic Next" pitchFamily="34" charset="-122"/>
+                <a:cs typeface="Trade Gothic Next" pitchFamily="34" charset="-120"/>
+              </a:rPr>
+              <a:t>10</a:t>
+            </a:r>
+            <a:pPr indent="0" marL="0">
+              <a:buNone/>
+            </a:pPr>
+            <a:r>
+              <a:rPr lang="en-US" sz="1600" b="1" dirty="0">
+                <a:solidFill>
+                  <a:srgbClr val="EDF0E5"/>
+                </a:solidFill>
+                <a:latin typeface="Trade Gothic Next" pitchFamily="34" charset="0"/>
+                <a:ea typeface="Trade Gothic Next" pitchFamily="34" charset="-122"/>
+                <a:cs typeface="Trade Gothic Next" pitchFamily="34" charset="-120"/>
+              </a:rPr>
+              <a:t>. Cu</a:t>
+            </a:r>
+            <a:pPr indent="0" marL="0">
+              <a:buNone/>
+            </a:pPr>
+            <a:r>
+              <a:rPr lang="en-US" sz="1600" b="1" baseline="30000" dirty="0">
+                <a:solidFill>
+                  <a:srgbClr val="EDF0E5"/>
+                </a:solidFill>
+                <a:latin typeface="Trade Gothic Next" pitchFamily="34" charset="0"/>
+                <a:ea typeface="Trade Gothic Next" pitchFamily="34" charset="-122"/>
+                <a:cs typeface="Trade Gothic Next" pitchFamily="34" charset="-120"/>
+              </a:rPr>
+              <a:t>2+</a:t>
+            </a:r>
+            <a:pPr indent="0" marL="0">
+              <a:buNone/>
+            </a:pPr>
+            <a:r>
+              <a:rPr lang="en-US" sz="1600" b="1" dirty="0">
+                <a:solidFill>
+                  <a:srgbClr val="EDF0E5"/>
+                </a:solidFill>
+                <a:latin typeface="Trade Gothic Next" pitchFamily="34" charset="0"/>
+                <a:ea typeface="Trade Gothic Next" pitchFamily="34" charset="-122"/>
+                <a:cs typeface="Trade Gothic Next" pitchFamily="34" charset="-120"/>
+              </a:rPr>
+              <a:t> is [Ar] 3d</a:t>
+            </a:r>
+            <a:pPr indent="0" marL="0">
+              <a:buNone/>
+            </a:pPr>
+            <a:r>
+              <a:rPr lang="en-US" sz="1600" b="1" baseline="30000" dirty="0">
+                <a:solidFill>
+                  <a:srgbClr val="EDF0E5"/>
+                </a:solidFill>
+                <a:latin typeface="Trade Gothic Next" pitchFamily="34" charset="0"/>
+                <a:ea typeface="Trade Gothic Next" pitchFamily="34" charset="-122"/>
+                <a:cs typeface="Trade Gothic Next" pitchFamily="34" charset="-120"/>
+              </a:rPr>
+              <a:t>9</a:t>
+            </a:r>
+            <a:pPr indent="0" marL="0">
+              <a:buNone/>
+            </a:pPr>
+            <a:r>
+              <a:rPr lang="en-US" sz="1600" b="1" dirty="0">
+                <a:solidFill>
+                  <a:srgbClr val="EDF0E5"/>
+                </a:solidFill>
+                <a:latin typeface="Trade Gothic Next" pitchFamily="34" charset="0"/>
+                <a:ea typeface="Trade Gothic Next" pitchFamily="34" charset="-122"/>
+                <a:cs typeface="Trade Gothic Next" pitchFamily="34" charset="-120"/>
+              </a:rPr>
+              <a:t>.</a:t>
             </a:r>
             <a:endParaRPr lang="en-US" sz="1600" dirty="0"/>
           </a:p>
@@ -19407,7 +21723,7 @@
       </p:sp>
       <p:sp>
         <p:nvSpPr>
-          <p:cNvPr id="10" name="Text 4"/>
+          <p:cNvPr id="11" name="Text 4"/>
           <p:cNvSpPr txBox="1"/>
           <p:nvPr>
             <p:ph idx="107" hasCustomPrompt="1"/>
@@ -19659,7 +21975,21 @@
                 <a:ea typeface="Trade Gothic Next" pitchFamily="34" charset="-122"/>
                 <a:cs typeface="Trade Gothic Next" pitchFamily="34" charset="-120"/>
               </a:rPr>
-              <a:t>Ca²+</a:t>
+              <a:t>Ca</a:t>
+            </a:r>
+            <a:pPr indent="0" marL="0">
+              <a:buNone/>
+            </a:pPr>
+            <a:r>
+              <a:rPr lang="en-US" sz="1200" b="1" baseline="30000" dirty="0">
+                <a:solidFill>
+                  <a:srgbClr val="14161B"/>
+                </a:solidFill>
+                <a:latin typeface="Trade Gothic Next" pitchFamily="34" charset="0"/>
+                <a:ea typeface="Trade Gothic Next" pitchFamily="34" charset="-122"/>
+                <a:cs typeface="Trade Gothic Next" pitchFamily="34" charset="-120"/>
+              </a:rPr>
+              <a:t>2+</a:t>
             </a:r>
             <a:endParaRPr lang="en-US" sz="1200" dirty="0"/>
           </a:p>
@@ -19741,7 +22071,21 @@
                 <a:ea typeface="Trade Gothic Next" pitchFamily="34" charset="-122"/>
                 <a:cs typeface="Trade Gothic Next" pitchFamily="34" charset="-120"/>
               </a:rPr>
-              <a:t>O²−</a:t>
+              <a:t>O</a:t>
+            </a:r>
+            <a:pPr indent="0" marL="0">
+              <a:buNone/>
+            </a:pPr>
+            <a:r>
+              <a:rPr lang="en-US" sz="1200" b="1" baseline="30000" dirty="0">
+                <a:solidFill>
+                  <a:srgbClr val="14161B"/>
+                </a:solidFill>
+                <a:latin typeface="Trade Gothic Next" pitchFamily="34" charset="0"/>
+                <a:ea typeface="Trade Gothic Next" pitchFamily="34" charset="-122"/>
+                <a:cs typeface="Trade Gothic Next" pitchFamily="34" charset="-120"/>
+              </a:rPr>
+              <a:t>2−</a:t>
             </a:r>
             <a:endParaRPr lang="en-US" sz="1200" dirty="0"/>
           </a:p>
@@ -19823,7 +22167,7 @@
                 <a:ea typeface="Trade Gothic Next" pitchFamily="34" charset="-122"/>
                 <a:cs typeface="Trade Gothic Next" pitchFamily="34" charset="-120"/>
               </a:rPr>
-              <a:t>Fe³+</a:t>
+              <a:t>Three ions</a:t>
             </a:r>
             <a:endParaRPr lang="en-US" sz="1200" dirty="0"/>
           </a:p>
@@ -19864,7 +22208,91 @@
                 <a:ea typeface="Trade Gothic Next" pitchFamily="34" charset="-122"/>
                 <a:cs typeface="Trade Gothic Next" pitchFamily="34" charset="-120"/>
               </a:rPr>
-              <a:t>Write the [Ar] shorthand for Fe³+, Cu²+, and Zn²+.</a:t>
+              <a:t>[Ar] shorthand for Fe</a:t>
+            </a:r>
+            <a:pPr indent="0" marL="0">
+              <a:buNone/>
+            </a:pPr>
+            <a:r>
+              <a:rPr lang="en-US" sz="1600" baseline="30000" dirty="0">
+                <a:solidFill>
+                  <a:srgbClr val="14161B"/>
+                </a:solidFill>
+                <a:latin typeface="Trade Gothic Next" pitchFamily="34" charset="0"/>
+                <a:ea typeface="Trade Gothic Next" pitchFamily="34" charset="-122"/>
+                <a:cs typeface="Trade Gothic Next" pitchFamily="34" charset="-120"/>
+              </a:rPr>
+              <a:t>3+</a:t>
+            </a:r>
+            <a:pPr indent="0" marL="0">
+              <a:buNone/>
+            </a:pPr>
+            <a:r>
+              <a:rPr lang="en-US" sz="1600" dirty="0">
+                <a:solidFill>
+                  <a:srgbClr val="14161B"/>
+                </a:solidFill>
+                <a:latin typeface="Trade Gothic Next" pitchFamily="34" charset="0"/>
+                <a:ea typeface="Trade Gothic Next" pitchFamily="34" charset="-122"/>
+                <a:cs typeface="Trade Gothic Next" pitchFamily="34" charset="-120"/>
+              </a:rPr>
+              <a:t>, Cu</a:t>
+            </a:r>
+            <a:pPr indent="0" marL="0">
+              <a:buNone/>
+            </a:pPr>
+            <a:r>
+              <a:rPr lang="en-US" sz="1600" baseline="30000" dirty="0">
+                <a:solidFill>
+                  <a:srgbClr val="14161B"/>
+                </a:solidFill>
+                <a:latin typeface="Trade Gothic Next" pitchFamily="34" charset="0"/>
+                <a:ea typeface="Trade Gothic Next" pitchFamily="34" charset="-122"/>
+                <a:cs typeface="Trade Gothic Next" pitchFamily="34" charset="-120"/>
+              </a:rPr>
+              <a:t>2+</a:t>
+            </a:r>
+            <a:pPr indent="0" marL="0">
+              <a:buNone/>
+            </a:pPr>
+            <a:r>
+              <a:rPr lang="en-US" sz="1600" dirty="0">
+                <a:solidFill>
+                  <a:srgbClr val="14161B"/>
+                </a:solidFill>
+                <a:latin typeface="Trade Gothic Next" pitchFamily="34" charset="0"/>
+                <a:ea typeface="Trade Gothic Next" pitchFamily="34" charset="-122"/>
+                <a:cs typeface="Trade Gothic Next" pitchFamily="34" charset="-120"/>
+              </a:rPr>
+              <a:t>, and Zn</a:t>
+            </a:r>
+            <a:pPr indent="0" marL="0">
+              <a:buNone/>
+            </a:pPr>
+            <a:r>
+              <a:rPr lang="en-US" sz="1600" baseline="30000" dirty="0">
+                <a:solidFill>
+                  <a:srgbClr val="14161B"/>
+                </a:solidFill>
+                <a:latin typeface="Trade Gothic Next" pitchFamily="34" charset="0"/>
+                <a:ea typeface="Trade Gothic Next" pitchFamily="34" charset="-122"/>
+                <a:cs typeface="Trade Gothic Next" pitchFamily="34" charset="-120"/>
+              </a:rPr>
+              <a:t>2+</a:t>
+            </a:r>
+            <a:pPr indent="0" marL="0">
+              <a:buNone/>
+            </a:pPr>
+            <a:r>
+              <a:rPr lang="en-US" sz="1600" dirty="0">
+                <a:solidFill>
+                  <a:srgbClr val="14161B"/>
+                </a:solidFill>
+                <a:latin typeface="Trade Gothic Next" pitchFamily="34" charset="0"/>
+                <a:ea typeface="Trade Gothic Next" pitchFamily="34" charset="-122"/>
+                <a:cs typeface="Trade Gothic Next" pitchFamily="34" charset="-120"/>
+              </a:rPr>
+              <a:t>.</a:t>
             </a:r>
             <a:endParaRPr lang="en-US" sz="1600" dirty="0"/>
           </a:p>
@@ -19954,7 +22382,7 @@
       </p:sp>
       <p:sp>
         <p:nvSpPr>
-          <p:cNvPr id="14" name="Text 4"/>
+          <p:cNvPr id="15" name="Text 4"/>
           <p:cNvSpPr txBox="1"/>
           <p:nvPr>
             <p:ph idx="107" hasCustomPrompt="1"/>
@@ -20196,7 +22624,7 @@
       </p:sp>
       <p:sp>
         <p:nvSpPr>
-          <p:cNvPr id="6" name="Text 2"/>
+          <p:cNvPr id="7" name="Text 2"/>
           <p:cNvSpPr txBox="1"/>
           <p:nvPr>
             <p:ph idx="102" hasCustomPrompt="1"/>
@@ -20571,7 +22999,7 @@
                 <a:ea typeface="Trade Gothic Next" pitchFamily="34" charset="-122"/>
                 <a:cs typeface="Trade Gothic Next" pitchFamily="34" charset="-120"/>
               </a:rPr>
-              <a:t>Outer s and p sublevels filled, like a noble gas.</a:t>
+              <a:t>Outer s and p sublevels full: 2 or 8 electrons.</a:t>
             </a:r>
             <a:endParaRPr lang="en-US" sz="1600" dirty="0"/>
           </a:p>
@@ -20702,7 +23130,7 @@
       </p:sp>
       <p:sp>
         <p:nvSpPr>
-          <p:cNvPr id="13" name="Text 4"/>
+          <p:cNvPr id="14" name="Text 4"/>
           <p:cNvSpPr txBox="1"/>
           <p:nvPr>
             <p:ph idx="107" hasCustomPrompt="1"/>
@@ -20937,7 +23365,91 @@
                 <a:ea typeface="Trade Gothic Next" pitchFamily="34" charset="-122"/>
                 <a:cs typeface="Trade Gothic Next" pitchFamily="34" charset="-120"/>
               </a:rPr>
-              <a:t>1s² 2s² 2p⁶ fill n = 1 and n = 2. That is 10 electrons.</a:t>
+              <a:t>1s</a:t>
+            </a:r>
+            <a:pPr indent="0" marL="0">
+              <a:buNone/>
+            </a:pPr>
+            <a:r>
+              <a:rPr lang="en-US" sz="1600" baseline="30000" dirty="0">
+                <a:solidFill>
+                  <a:srgbClr val="14161B"/>
+                </a:solidFill>
+                <a:latin typeface="Trade Gothic Next" pitchFamily="34" charset="0"/>
+                <a:ea typeface="Trade Gothic Next" pitchFamily="34" charset="-122"/>
+                <a:cs typeface="Trade Gothic Next" pitchFamily="34" charset="-120"/>
+              </a:rPr>
+              <a:t>2</a:t>
+            </a:r>
+            <a:pPr indent="0" marL="0">
+              <a:buNone/>
+            </a:pPr>
+            <a:r>
+              <a:rPr lang="en-US" sz="1600" dirty="0">
+                <a:solidFill>
+                  <a:srgbClr val="14161B"/>
+                </a:solidFill>
+                <a:latin typeface="Trade Gothic Next" pitchFamily="34" charset="0"/>
+                <a:ea typeface="Trade Gothic Next" pitchFamily="34" charset="-122"/>
+                <a:cs typeface="Trade Gothic Next" pitchFamily="34" charset="-120"/>
+              </a:rPr>
+              <a:t> 2s</a:t>
+            </a:r>
+            <a:pPr indent="0" marL="0">
+              <a:buNone/>
+            </a:pPr>
+            <a:r>
+              <a:rPr lang="en-US" sz="1600" baseline="30000" dirty="0">
+                <a:solidFill>
+                  <a:srgbClr val="14161B"/>
+                </a:solidFill>
+                <a:latin typeface="Trade Gothic Next" pitchFamily="34" charset="0"/>
+                <a:ea typeface="Trade Gothic Next" pitchFamily="34" charset="-122"/>
+                <a:cs typeface="Trade Gothic Next" pitchFamily="34" charset="-120"/>
+              </a:rPr>
+              <a:t>2</a:t>
+            </a:r>
+            <a:pPr indent="0" marL="0">
+              <a:buNone/>
+            </a:pPr>
+            <a:r>
+              <a:rPr lang="en-US" sz="1600" dirty="0">
+                <a:solidFill>
+                  <a:srgbClr val="14161B"/>
+                </a:solidFill>
+                <a:latin typeface="Trade Gothic Next" pitchFamily="34" charset="0"/>
+                <a:ea typeface="Trade Gothic Next" pitchFamily="34" charset="-122"/>
+                <a:cs typeface="Trade Gothic Next" pitchFamily="34" charset="-120"/>
+              </a:rPr>
+              <a:t> 2p</a:t>
+            </a:r>
+            <a:pPr indent="0" marL="0">
+              <a:buNone/>
+            </a:pPr>
+            <a:r>
+              <a:rPr lang="en-US" sz="1600" baseline="30000" dirty="0">
+                <a:solidFill>
+                  <a:srgbClr val="14161B"/>
+                </a:solidFill>
+                <a:latin typeface="Trade Gothic Next" pitchFamily="34" charset="0"/>
+                <a:ea typeface="Trade Gothic Next" pitchFamily="34" charset="-122"/>
+                <a:cs typeface="Trade Gothic Next" pitchFamily="34" charset="-120"/>
+              </a:rPr>
+              <a:t>6</a:t>
+            </a:r>
+            <a:pPr indent="0" marL="0">
+              <a:buNone/>
+            </a:pPr>
+            <a:r>
+              <a:rPr lang="en-US" sz="1600" dirty="0">
+                <a:solidFill>
+                  <a:srgbClr val="14161B"/>
+                </a:solidFill>
+                <a:latin typeface="Trade Gothic Next" pitchFamily="34" charset="0"/>
+                <a:ea typeface="Trade Gothic Next" pitchFamily="34" charset="-122"/>
+                <a:cs typeface="Trade Gothic Next" pitchFamily="34" charset="-120"/>
+              </a:rPr>
+              <a:t> fill n = 1 and n = 2. That is 10 electrons.</a:t>
             </a:r>
             <a:endParaRPr lang="en-US" sz="1600" dirty="0"/>
           </a:p>
@@ -21019,7 +23531,63 @@
                 <a:ea typeface="Trade Gothic Next" pitchFamily="34" charset="-122"/>
                 <a:cs typeface="Trade Gothic Next" pitchFamily="34" charset="-120"/>
               </a:rPr>
-              <a:t>3s² 3p⁵ is the highest level, n = 3. That is 7 electrons.</a:t>
+              <a:t>3s</a:t>
+            </a:r>
+            <a:pPr indent="0" marL="0">
+              <a:buNone/>
+            </a:pPr>
+            <a:r>
+              <a:rPr lang="en-US" sz="1600" baseline="30000" dirty="0">
+                <a:solidFill>
+                  <a:srgbClr val="14161B"/>
+                </a:solidFill>
+                <a:latin typeface="Trade Gothic Next" pitchFamily="34" charset="0"/>
+                <a:ea typeface="Trade Gothic Next" pitchFamily="34" charset="-122"/>
+                <a:cs typeface="Trade Gothic Next" pitchFamily="34" charset="-120"/>
+              </a:rPr>
+              <a:t>2</a:t>
+            </a:r>
+            <a:pPr indent="0" marL="0">
+              <a:buNone/>
+            </a:pPr>
+            <a:r>
+              <a:rPr lang="en-US" sz="1600" dirty="0">
+                <a:solidFill>
+                  <a:srgbClr val="14161B"/>
+                </a:solidFill>
+                <a:latin typeface="Trade Gothic Next" pitchFamily="34" charset="0"/>
+                <a:ea typeface="Trade Gothic Next" pitchFamily="34" charset="-122"/>
+                <a:cs typeface="Trade Gothic Next" pitchFamily="34" charset="-120"/>
+              </a:rPr>
+              <a:t> 3p</a:t>
+            </a:r>
+            <a:pPr indent="0" marL="0">
+              <a:buNone/>
+            </a:pPr>
+            <a:r>
+              <a:rPr lang="en-US" sz="1600" baseline="30000" dirty="0">
+                <a:solidFill>
+                  <a:srgbClr val="14161B"/>
+                </a:solidFill>
+                <a:latin typeface="Trade Gothic Next" pitchFamily="34" charset="0"/>
+                <a:ea typeface="Trade Gothic Next" pitchFamily="34" charset="-122"/>
+                <a:cs typeface="Trade Gothic Next" pitchFamily="34" charset="-120"/>
+              </a:rPr>
+              <a:t>5</a:t>
+            </a:r>
+            <a:pPr indent="0" marL="0">
+              <a:buNone/>
+            </a:pPr>
+            <a:r>
+              <a:rPr lang="en-US" sz="1600" dirty="0">
+                <a:solidFill>
+                  <a:srgbClr val="14161B"/>
+                </a:solidFill>
+                <a:latin typeface="Trade Gothic Next" pitchFamily="34" charset="0"/>
+                <a:ea typeface="Trade Gothic Next" pitchFamily="34" charset="-122"/>
+                <a:cs typeface="Trade Gothic Next" pitchFamily="34" charset="-120"/>
+              </a:rPr>
+              <a:t> is the highest level, n = 3. That is 7 electrons.</a:t>
             </a:r>
             <a:endParaRPr lang="en-US" sz="1600" dirty="0"/>
           </a:p>
@@ -21191,7 +23759,7 @@
       </p:sp>
       <p:sp>
         <p:nvSpPr>
-          <p:cNvPr id="13" name="Text 3"/>
+          <p:cNvPr id="14" name="Text 3"/>
           <p:cNvSpPr txBox="1"/>
           <p:nvPr>
             <p:ph idx="106" type="body" hasCustomPrompt="1"/>
@@ -21607,7 +24175,7 @@
                 <a:ea typeface="Trade Gothic Next" pitchFamily="34" charset="-122"/>
                 <a:cs typeface="Trade Gothic Next" pitchFamily="34" charset="-120"/>
               </a:rPr>
-              <a:t>Groups 3 to 12, the transition metals. They come later in this section.</a:t>
+              <a:t>Groups 3 to 12, the transition metals. Their ions follow the rule on slide 17.</a:t>
             </a:r>
             <a:endParaRPr lang="en-US" sz="1600" dirty="0"/>
           </a:p>
@@ -21697,7 +24265,7 @@
       </p:sp>
       <p:sp>
         <p:nvSpPr>
-          <p:cNvPr id="13" name="Text 3"/>
+          <p:cNvPr id="14" name="Text 3"/>
           <p:cNvSpPr txBox="1"/>
           <p:nvPr>
             <p:ph idx="106" type="body" hasCustomPrompt="1"/>
@@ -21949,7 +24517,49 @@
                 <a:ea typeface="Trade Gothic Next" pitchFamily="34" charset="-122"/>
                 <a:cs typeface="Trade Gothic Next" pitchFamily="34" charset="-120"/>
               </a:rPr>
-              <a:t>P: [Ne] 3s² 3p³</a:t>
+              <a:t>P: [Ne] 3s</a:t>
+            </a:r>
+            <a:pPr indent="0" marL="0">
+              <a:buNone/>
+            </a:pPr>
+            <a:r>
+              <a:rPr lang="en-US" sz="1600" baseline="30000" dirty="0">
+                <a:solidFill>
+                  <a:srgbClr val="14161B"/>
+                </a:solidFill>
+                <a:latin typeface="Trade Gothic Next" pitchFamily="34" charset="0"/>
+                <a:ea typeface="Trade Gothic Next" pitchFamily="34" charset="-122"/>
+                <a:cs typeface="Trade Gothic Next" pitchFamily="34" charset="-120"/>
+              </a:rPr>
+              <a:t>2</a:t>
+            </a:r>
+            <a:pPr indent="0" marL="0">
+              <a:buNone/>
+            </a:pPr>
+            <a:r>
+              <a:rPr lang="en-US" sz="1600" dirty="0">
+                <a:solidFill>
+                  <a:srgbClr val="14161B"/>
+                </a:solidFill>
+                <a:latin typeface="Trade Gothic Next" pitchFamily="34" charset="0"/>
+                <a:ea typeface="Trade Gothic Next" pitchFamily="34" charset="-122"/>
+                <a:cs typeface="Trade Gothic Next" pitchFamily="34" charset="-120"/>
+              </a:rPr>
+              <a:t> 3p</a:t>
+            </a:r>
+            <a:pPr indent="0" marL="0">
+              <a:buNone/>
+            </a:pPr>
+            <a:r>
+              <a:rPr lang="en-US" sz="1600" baseline="30000" dirty="0">
+                <a:solidFill>
+                  <a:srgbClr val="14161B"/>
+                </a:solidFill>
+                <a:latin typeface="Trade Gothic Next" pitchFamily="34" charset="0"/>
+                <a:ea typeface="Trade Gothic Next" pitchFamily="34" charset="-122"/>
+                <a:cs typeface="Trade Gothic Next" pitchFamily="34" charset="-120"/>
+              </a:rPr>
+              <a:t>3</a:t>
             </a:r>
             <a:endParaRPr lang="en-US" sz="1600" dirty="0"/>
           </a:p>
@@ -21966,7 +24576,21 @@
                 <a:ea typeface="Trade Gothic Next" pitchFamily="34" charset="-122"/>
                 <a:cs typeface="Trade Gothic Next" pitchFamily="34" charset="-120"/>
               </a:rPr>
-              <a:t>Ca: [Ar] 4s²</a:t>
+              <a:t>Ca: [Ar] 4s</a:t>
+            </a:r>
+            <a:pPr indent="0" marL="0">
+              <a:buNone/>
+            </a:pPr>
+            <a:r>
+              <a:rPr lang="en-US" sz="1600" baseline="30000" dirty="0">
+                <a:solidFill>
+                  <a:srgbClr val="14161B"/>
+                </a:solidFill>
+                <a:latin typeface="Trade Gothic Next" pitchFamily="34" charset="0"/>
+                <a:ea typeface="Trade Gothic Next" pitchFamily="34" charset="-122"/>
+                <a:cs typeface="Trade Gothic Next" pitchFamily="34" charset="-120"/>
+              </a:rPr>
+              <a:t>2</a:t>
             </a:r>
             <a:endParaRPr lang="en-US" sz="1600" dirty="0"/>
           </a:p>
@@ -22243,7 +24867,7 @@
       </p:sp>
       <p:sp>
         <p:nvSpPr>
-          <p:cNvPr id="13" name="Text 4"/>
+          <p:cNvPr id="14" name="Text 4"/>
           <p:cNvSpPr txBox="1"/>
           <p:nvPr>
             <p:ph idx="107" hasCustomPrompt="1"/>
@@ -22512,7 +25136,49 @@
                 <a:ea typeface="Trade Gothic Next" pitchFamily="34" charset="-122"/>
                 <a:cs typeface="Trade Gothic Next" pitchFamily="34" charset="-120"/>
               </a:rPr>
-              <a:t>P: n = 3, so 3s² 3p³</a:t>
+              <a:t>P: n = 3, so 3s</a:t>
+            </a:r>
+            <a:pPr indent="0" marL="0">
+              <a:buNone/>
+            </a:pPr>
+            <a:r>
+              <a:rPr lang="en-US" sz="1900" baseline="30000" dirty="0">
+                <a:solidFill>
+                  <a:srgbClr val="14161B"/>
+                </a:solidFill>
+                <a:latin typeface="Trade Gothic Next" pitchFamily="34" charset="0"/>
+                <a:ea typeface="Trade Gothic Next" pitchFamily="34" charset="-122"/>
+                <a:cs typeface="Trade Gothic Next" pitchFamily="34" charset="-120"/>
+              </a:rPr>
+              <a:t>2</a:t>
+            </a:r>
+            <a:pPr indent="0" marL="0">
+              <a:buNone/>
+            </a:pPr>
+            <a:r>
+              <a:rPr lang="en-US" sz="1900" dirty="0">
+                <a:solidFill>
+                  <a:srgbClr val="14161B"/>
+                </a:solidFill>
+                <a:latin typeface="Trade Gothic Next" pitchFamily="34" charset="0"/>
+                <a:ea typeface="Trade Gothic Next" pitchFamily="34" charset="-122"/>
+                <a:cs typeface="Trade Gothic Next" pitchFamily="34" charset="-120"/>
+              </a:rPr>
+              <a:t> 3p</a:t>
+            </a:r>
+            <a:pPr indent="0" marL="0">
+              <a:buNone/>
+            </a:pPr>
+            <a:r>
+              <a:rPr lang="en-US" sz="1900" baseline="30000" dirty="0">
+                <a:solidFill>
+                  <a:srgbClr val="14161B"/>
+                </a:solidFill>
+                <a:latin typeface="Trade Gothic Next" pitchFamily="34" charset="0"/>
+                <a:ea typeface="Trade Gothic Next" pitchFamily="34" charset="-122"/>
+                <a:cs typeface="Trade Gothic Next" pitchFamily="34" charset="-120"/>
+              </a:rPr>
+              <a:t>3</a:t>
             </a:r>
             <a:endParaRPr lang="en-US" sz="1900" dirty="0"/>
           </a:p>
@@ -22546,7 +25212,21 @@
                 <a:ea typeface="Trade Gothic Next" pitchFamily="34" charset="-122"/>
                 <a:cs typeface="Trade Gothic Next" pitchFamily="34" charset="-120"/>
               </a:rPr>
-              <a:t>Ca: n = 4, so 4s²</a:t>
+              <a:t>Ca: n = 4, so 4s</a:t>
+            </a:r>
+            <a:pPr indent="0" marL="0">
+              <a:buNone/>
+            </a:pPr>
+            <a:r>
+              <a:rPr lang="en-US" sz="1900" baseline="30000" dirty="0">
+                <a:solidFill>
+                  <a:srgbClr val="14161B"/>
+                </a:solidFill>
+                <a:latin typeface="Trade Gothic Next" pitchFamily="34" charset="0"/>
+                <a:ea typeface="Trade Gothic Next" pitchFamily="34" charset="-122"/>
+                <a:cs typeface="Trade Gothic Next" pitchFamily="34" charset="-120"/>
+              </a:rPr>
+              <a:t>2</a:t>
             </a:r>
             <a:endParaRPr lang="en-US" sz="1900" dirty="0"/>
           </a:p>
@@ -22694,7 +25374,7 @@
       </p:sp>
       <p:sp>
         <p:nvSpPr>
-          <p:cNvPr id="10" name="Text 4"/>
+          <p:cNvPr id="11" name="Text 4"/>
           <p:cNvSpPr txBox="1"/>
           <p:nvPr>
             <p:ph idx="107" hasCustomPrompt="1"/>
@@ -23183,7 +25863,7 @@
       </p:sp>
       <p:sp>
         <p:nvSpPr>
-          <p:cNvPr id="13" name="Text 3"/>
+          <p:cNvPr id="14" name="Text 3"/>
           <p:cNvSpPr txBox="1"/>
           <p:nvPr>
             <p:ph idx="106" type="body" hasCustomPrompt="1"/>
@@ -23419,12 +26099,6 @@
             <a:pPr indent="0" marL="0">
               <a:buNone/>
             </a:pPr>
-            <a:endParaRPr lang="en-US" sz="1600" dirty="0"/>
-          </a:p>
-          <a:p>
-            <a:pPr indent="0" marL="0">
-              <a:buNone/>
-            </a:pPr>
             <a:r>
               <a:rPr lang="en-US" sz="1600" dirty="0">
                 <a:solidFill>
@@ -23434,7 +26108,35 @@
                 <a:ea typeface="Trade Gothic Next" pitchFamily="34" charset="-122"/>
                 <a:cs typeface="Trade Gothic Next" pitchFamily="34" charset="-120"/>
               </a:rPr>
-              <a:t>Na → Na+: 11 electrons become 10.</a:t>
+              <a:t>Na → Na</a:t>
+            </a:r>
+            <a:pPr indent="0" marL="0">
+              <a:buNone/>
+            </a:pPr>
+            <a:r>
+              <a:rPr lang="en-US" sz="1600" baseline="30000" dirty="0">
+                <a:solidFill>
+                  <a:srgbClr val="14161B"/>
+                </a:solidFill>
+                <a:latin typeface="Trade Gothic Next" pitchFamily="34" charset="0"/>
+                <a:ea typeface="Trade Gothic Next" pitchFamily="34" charset="-122"/>
+                <a:cs typeface="Trade Gothic Next" pitchFamily="34" charset="-120"/>
+              </a:rPr>
+              <a:t>+</a:t>
+            </a:r>
+            <a:pPr indent="0" marL="0">
+              <a:buNone/>
+            </a:pPr>
+            <a:r>
+              <a:rPr lang="en-US" sz="1600" dirty="0">
+                <a:solidFill>
+                  <a:srgbClr val="14161B"/>
+                </a:solidFill>
+                <a:latin typeface="Trade Gothic Next" pitchFamily="34" charset="0"/>
+                <a:ea typeface="Trade Gothic Next" pitchFamily="34" charset="-122"/>
+                <a:cs typeface="Trade Gothic Next" pitchFamily="34" charset="-120"/>
+              </a:rPr>
+              <a:t>: 11 electrons become 10.</a:t>
             </a:r>
             <a:endParaRPr lang="en-US" sz="1600" dirty="0"/>
           </a:p>
@@ -23541,12 +26243,6 @@
             <a:pPr indent="0" marL="0">
               <a:buNone/>
             </a:pPr>
-            <a:endParaRPr lang="en-US" sz="1600" dirty="0"/>
-          </a:p>
-          <a:p>
-            <a:pPr indent="0" marL="0">
-              <a:buNone/>
-            </a:pPr>
             <a:r>
               <a:rPr lang="en-US" sz="1600" dirty="0">
                 <a:solidFill>
@@ -23556,7 +26252,35 @@
                 <a:ea typeface="Trade Gothic Next" pitchFamily="34" charset="-122"/>
                 <a:cs typeface="Trade Gothic Next" pitchFamily="34" charset="-120"/>
               </a:rPr>
-              <a:t>Cl → Cl−: 17 electrons become 18.</a:t>
+              <a:t>Cl → Cl</a:t>
+            </a:r>
+            <a:pPr indent="0" marL="0">
+              <a:buNone/>
+            </a:pPr>
+            <a:r>
+              <a:rPr lang="en-US" sz="1600" baseline="30000" dirty="0">
+                <a:solidFill>
+                  <a:srgbClr val="EDF0E5"/>
+                </a:solidFill>
+                <a:latin typeface="Trade Gothic Next" pitchFamily="34" charset="0"/>
+                <a:ea typeface="Trade Gothic Next" pitchFamily="34" charset="-122"/>
+                <a:cs typeface="Trade Gothic Next" pitchFamily="34" charset="-120"/>
+              </a:rPr>
+              <a:t>−</a:t>
+            </a:r>
+            <a:pPr indent="0" marL="0">
+              <a:buNone/>
+            </a:pPr>
+            <a:r>
+              <a:rPr lang="en-US" sz="1600" dirty="0">
+                <a:solidFill>
+                  <a:srgbClr val="EDF0E5"/>
+                </a:solidFill>
+                <a:latin typeface="Trade Gothic Next" pitchFamily="34" charset="0"/>
+                <a:ea typeface="Trade Gothic Next" pitchFamily="34" charset="-122"/>
+                <a:cs typeface="Trade Gothic Next" pitchFamily="34" charset="-120"/>
+              </a:rPr>
+              <a:t>: 17 electrons become 18.</a:t>
             </a:r>
             <a:endParaRPr lang="en-US" sz="1600" dirty="0"/>
           </a:p>
@@ -23687,7 +26411,7 @@
       </p:sp>
       <p:sp>
         <p:nvSpPr>
-          <p:cNvPr id="11" name="Text 3"/>
+          <p:cNvPr id="12" name="Text 3"/>
           <p:cNvSpPr txBox="1"/>
           <p:nvPr>
             <p:ph idx="106" hasCustomPrompt="1"/>

--- a/deliverables/chem-u02/SHULL_CHEM_Slides_U02_S02.4.pptx
+++ b/deliverables/chem-u02/SHULL_CHEM_Slides_U02_S02.4.pptx
@@ -523,7 +523,7 @@
           <a:p>
             <a:r>
               <a:rPr lang="en-US" dirty="0"/>
-              <a:t>Section title. PROVISIONAL/OPEN: verbatim DECISIONS title now in the panel (see build report for fit). Scope boundary: S2.4 owns what an ion's configuration IS; U3.7 owns which charge an element forms and the energetics. Not taught here: Lewis dot preview (PROVISIONAL, omitted; belongs to a later unit). Transition-metal valence counting (PROVISIONAL, brief slide 6) also omitted. Image slot empty. Prompt subject: a glass tube of neon gas glowing orange on a dark bench.</a:t>
+              <a:t>Section title. PROVISIONAL/OPEN: verbatim DECISIONS title now in the panel (see build report for fit). Scope boundary (Matt, 2026-10-04): S2.4 owns what an ion's configuration IS and valence-electron-based charge prediction at the end of the section (main group only). U3.7 and U3.4 own the energetics. PROVISIONAL: group 14 and transition metals are not predicted by the rule here. Not taught here: Lewis dot preview (PROVISIONAL, omitted; belongs to a later unit). Transition-metal valence counting (PROVISIONAL, brief slide 6) also omitted. Image slot empty. Prompt subject: a glass tube of neon gas glowing orange on a dark bench.</a:t>
             </a:r>
             <a:endParaRPr lang="en-US" dirty="0"/>
           </a:p>
@@ -611,7 +611,7 @@
           <a:p>
             <a:r>
               <a:rPr lang="en-US" dirty="0"/>
-              <a:t>Na loses 3s1, leaving the neon configuration. Highest n comes off first.</a:t>
+              <a:t>MERGED slide (was two: Na+ orbitals and Cl- orbitals). Na loses its 3s1, leaving the neon configuration; Cl's added electron goes into the open 3p spot, not a new level, and matches argon. Charge column in the figure is large and plain so the minus is legible. Do not yet say why these charges: the rule comes at the end of the section.</a:t>
             </a:r>
             <a:endParaRPr lang="en-US" dirty="0"/>
           </a:p>
@@ -699,7 +699,7 @@
           <a:p>
             <a:r>
               <a:rPr lang="en-US" dirty="0"/>
-              <a:t>Mg, Al, Ca all lose their outer electrons. Do not explain why these charges form; that is U3.7. Image slot empty. Prompt subject: a strip of magnesium ribbon coiled on a dark bench.</a:t>
+              <a:t>MERGED slide (was two card slides: Mg2+/Al3+/Ca2+ and O2-/S2-/Br-). Mg2+ and Ca2+ now appear in the Ca walk-through and the worked example; S2- in the worked example. Br keeps its full 3d10. Charge lines are plain so anion minus signs are legible. Image slot empty. Prompt subject: a sealed ampoule of dark red-brown liquid bromine in a rack.</a:t>
             </a:r>
             <a:endParaRPr lang="en-US" dirty="0"/>
           </a:p>
@@ -787,7 +787,7 @@
           <a:p>
             <a:r>
               <a:rPr lang="en-US" dirty="0"/>
-              <a:t>The added electron goes into the open 3p spot, not a new level. Result matches argon.</a:t>
+              <a:t>Isoelectronic = same electron count and configuration. Sizes differ; the reason is Unit 3, only pointed to here (one-line pointer, not taught).</a:t>
             </a:r>
             <a:endParaRPr lang="en-US" dirty="0"/>
           </a:p>
@@ -875,7 +875,7 @@
           <a:p>
             <a:r>
               <a:rPr lang="en-US" dirty="0"/>
-              <a:t>Anions fill open s and p spots. Br keeps its full 3d10. Image slot empty. Prompt subject: a sealed ampoule of dark red-brown liquid bromine in a rack.</a:t>
+              <a:t>PROVISIONAL (simplified): 'why 4s leaves first' is a student-language account (once 3d has electrons it sits lower than 4s). It is not a full energetics explanation; do not extend it. Matches S2.3 wording. Image slot empty. Prompt subject: a polished iron nail and a copper coin on dark slate.</a:t>
             </a:r>
             <a:endParaRPr lang="en-US" dirty="0"/>
           </a:p>
@@ -963,7 +963,7 @@
           <a:p>
             <a:r>
               <a:rPr lang="en-US" dirty="0"/>
-              <a:t>Isoelectronic = same electron count and configuration. Sizes differ; the reason is Unit 3, only pointed to here.</a:t>
+              <a:t>Fe 26, Fe2+ 24 [Ar]3d6, Fe3+ 23 [Ar]3d5. Present 3d5 as an observed electron count, not proof of a cause.</a:t>
             </a:r>
             <a:endParaRPr lang="en-US" dirty="0"/>
           </a:p>
@@ -1051,7 +1051,7 @@
           <a:p>
             <a:r>
               <a:rPr lang="en-US" dirty="0"/>
-              <a:t>Worked example, do together. Image slot empty. Prompt subject: a sample of magnesium sulfate crystals on a watch glass.</a:t>
+              <a:t>Same rule as iron. Cu is the taught exception: [Ar] 4s1 3d10. Image slot empty. Prompt subject: a galvanized zinc sheet beside a length of copper wire.</a:t>
             </a:r>
             <a:endParaRPr lang="en-US" dirty="0"/>
           </a:p>
@@ -1139,7 +1139,7 @@
           <a:p>
             <a:r>
               <a:rPr lang="en-US" dirty="0"/>
-              <a:t>Mg 12 to 10 electrons = [Ne]. S 16 to 18 electrons = [Ar]. Image slot empty. Prompt subject: an analytical balance display in a darkened lab.</a:t>
+              <a:t>Zn2+ = Cu+ = [Ar] 3d10 (28 e). Cu2+ = [Ar] 3d9 (27 e). Not noble-gas configurations; these are stable anyway. Image slot empty. Prompt subject: a pencil resting on a page of handwritten calculations.</a:t>
             </a:r>
             <a:endParaRPr lang="en-US" dirty="0"/>
           </a:p>
@@ -1227,7 +1227,7 @@
           <a:p>
             <a:r>
               <a:rPr lang="en-US" dirty="0"/>
-              <a:t>PROVISIONAL (simplified): 'why 4s leaves first' is a student-language account (once 3d has electrons it sits lower than 4s). It is not a full energetics explanation; do not extend it. Matches S2.3 wording. Image slot empty. Prompt subject: a polished iron nail and a copper coin on dark slate.</a:t>
+              <a:t>NEW. Closing synthesis, step 1: Ca walk-through in four moves: count (2 valence), move (lose 2; gaining 6 is more), result ([Ar], 18 electrons), charge (20 protons minus 18 electrons = 2+). Valence-electron reasoning only. Do not teach ionization energy; Unit 3 (U3.4, U3.7) explains the energy side. Scope boundary set by Matt 2026-10-04; DECISIONS.md not changed. Avoid 'wants' or 'needs' language for atoms. Image slot empty. Prompt subject: a chunk of calcium metal in a sealed glass vial on dark slate.</a:t>
             </a:r>
             <a:endParaRPr lang="en-US" dirty="0"/>
           </a:p>
@@ -1315,7 +1315,7 @@
           <a:p>
             <a:r>
               <a:rPr lang="en-US" dirty="0"/>
-              <a:t>Fe 26, Fe2+ 24 [Ar]3d6, Fe3+ 23 [Ar]3d5. Present 3d5 as an observed electron count, not proof of a cause.</a:t>
+              <a:t>NEW. Rule by group (period 3 examples; hand-built, every count asserted in the figure script). Main group: lose or gain the fewest electrons to reach 8 (2 in period 1). PROVISIONAL: group 14 (4 lost or 4 gained, no 'fewest') and the transition metals are not predicted by this rule here; transition-metal ions were covered on the iron and Zn/Cu slides. Pointer only: the energy side (why that charge is favoured) is Unit 3, U3.4 and U3.7; do not teach ionization energy. Charges are written plain and large (3−, 2−, 1−) because the superscript minus is faint.</a:t>
             </a:r>
             <a:endParaRPr lang="en-US" dirty="0"/>
           </a:p>
@@ -1403,7 +1403,7 @@
           <a:p>
             <a:r>
               <a:rPr lang="en-US" dirty="0"/>
-              <a:t>Same rule as iron. Cu is the taught exception: [Ar] 4s1 3d10. Image slot empty. Prompt subject: a galvanized zinc sheet beside a length of copper wire.</a:t>
+              <a:t>NEW worked example (replaces the earlier Mg2+/S2- configuration example, which this one subsumes). Do together; work area empty on purpose. Answers on next slide. Image slot empty. Prompt subject: four sample vials of magnesium, aluminum, sulfur, and bromine on a dark bench.</a:t>
             </a:r>
             <a:endParaRPr lang="en-US" dirty="0"/>
           </a:p>
@@ -1579,7 +1579,7 @@
           <a:p>
             <a:r>
               <a:rPr lang="en-US" dirty="0"/>
-              <a:t>Zn2+ = Cu+ = [Ar] 3d10 (28 e). Cu2+ = [Ar] 3d9 (27 e). Not noble-gas configurations; these are stable anyway. Image slot empty. Prompt subject: a pencil resting on a page of handwritten calculations.</a:t>
+              <a:t>Mg: 12 e to 10, Mg2+, [Ne]. Al: 13 to 10, Al3+, [Ne]. S: 16 to 18, S2-, [Ar]. Br: 35 to 36, Br-, [Kr] (3d10 already full). All numbers re-added in the figure script assertions. Anion charges are written plain (2−, 1−) on the slide for legibility. Same pattern, same rule: Mg2+ and S2- were the old example's ions. Image slot empty. Prompt subject: a pencil resting on a page of handwritten ion charges.</a:t>
             </a:r>
             <a:endParaRPr lang="en-US" dirty="0"/>
           </a:p>
@@ -1667,7 +1667,7 @@
           <a:p>
             <a:r>
               <a:rPr lang="en-US" dirty="0"/>
-              <a:t>Answers. 1) Al 3, Se 6, Xe 8. 2) Ca2+: 20 to 18 electrons, 1s2 2s2 2p6 3s2 3p6 = [Ar], argon. 3) O2-: 10 electrons, 1s2 2s2 2p6. 4) Fe3+: [Ar] 3d5; the two 4s electrons leave first, then one 3d. (The 'which leave first' part is not printed on the tile.) 5) Cu2+ [Ar] 3d9 (27 e); Zn2+ [Ar] 3d10 (28 e). The slide tile 4 carries Fe3+, Cu2+, Zn2+ together, so items 4 and 5 share one tile. Image slot empty. Prompt subject: a periodic table wall chart photographed at a shallow angle.</a:t>
+              <a:t>Answers. 1) Al 3, Se 6, Xe 8. 2) Ca2+: 20 to 18 electrons, 1s2 2s2 2p6 3s2 3p6 = [Ar], argon. 3) O: group 16, 6 valence, gain 2, O2- (charge 2−), 10 electrons, 1s2 2s2 2p6 = [Ne]. 4) Fe3+: [Ar] 3d5; the two 4s electrons leave first, then one 3d. (The 'which leave first' part is not printed on the tile.) 5) Cu2+ [Ar] 3d9 (27 e); Zn2+ [Ar] 3d10 (28 e). The slide tile 4 carries Fe3+, Cu2+, Zn2+ together, so items 4 and 5 share one tile. If time, oral extras using the rule: K 1 valence, lose 1, K+, [Ar]; Se 6 valence, gain 2, Se2-, [Kr]; Al 3 valence, lose 3, Al3+, [Ne]. Group 14 (Si, C) and transition metals: not predicted by the rule here (PROVISIONAL). Tile 3 was changed from 'write the O2- configuration' to a predict-then-write prompt so the new rule is checked. Image slot empty. Prompt subject: a periodic table wall chart photographed at a shallow angle.</a:t>
             </a:r>
             <a:endParaRPr lang="en-US" dirty="0"/>
           </a:p>
@@ -1755,7 +1755,7 @@
           <a:p>
             <a:r>
               <a:rPr lang="en-US" dirty="0"/>
-              <a:t>Boundary: S2.4 stops at what an ion's configuration is. Which charge forms and the energy it takes: U3.4, U3.7. Image slot empty. Prompt subject: a long laboratory bench receding into shadow.</a:t>
+              <a:t>Boundary (Matt, 2026-10-04): S2.4 owns valence-electron-based charge prediction (main group). Why that charge is favoured and the energy it takes: U3.4 and U3.7. Group 14 and transition metals not predicted by the rule here (PROVISIONAL). DECISIONS.md not changed. Image slot empty. Prompt subject: a long laboratory bench receding into shadow.</a:t>
             </a:r>
             <a:endParaRPr lang="en-US" dirty="0"/>
           </a:p>
@@ -2019,7 +2019,7 @@
           <a:p>
             <a:r>
               <a:rPr lang="en-US" dirty="0"/>
-              <a:t>Main-group only. PROVISIONAL: transition-metal valence counting is deliberately left out (brief slide 6; Matt to decide whether d electrons count). Say only that their ions lose the outer s electrons first (slide 17). Lewis dot preview omitted: belongs to a later unit (S5.1), PROVISIONAL.</a:t>
+              <a:t>Main-group only. PROVISIONAL: transition-metal valence counting is deliberately left out (brief slide 6; Matt to decide whether d electrons count). Say only that their ions lose the outer s electrons first (slide 13). Lewis dot preview omitted: belongs to a later unit (S5.1), PROVISIONAL.</a:t>
             </a:r>
             <a:endParaRPr lang="en-US" dirty="0"/>
           </a:p>
@@ -2371,7 +2371,7 @@
           <a:p>
             <a:r>
               <a:rPr lang="en-US" dirty="0"/>
-              <a:t>Electrons = atomic number minus charge. Protons never change. Boundary: do not predict which charge forms (U3.7). Image slot empty. Prompt subject: a bowl of table salt crystals on dark slate.</a:t>
+              <a:t>Electrons = atomic number minus charge. Protons never change. Here we only describe what an ion is; the charge-prediction rule comes at the end of the section (slide 18). Anion charge is also written plain (1−) because the superscript minus is faint. Image slot empty. Prompt subject: a bowl of table salt crystals on dark slate.</a:t>
             </a:r>
             <a:endParaRPr lang="en-US" dirty="0"/>
           </a:p>
@@ -13363,7 +13363,7 @@
                 <a:ea typeface="Trade Gothic Next" pitchFamily="34" charset="-122"/>
                 <a:cs typeface="Trade Gothic Next" pitchFamily="34" charset="-120"/>
               </a:rPr>
-              <a:t>Count valence electrons, explain why noble gases are stable, and write the electron configuration of any common ion.</a:t>
+              <a:t>Count valence electrons, explain why noble gases are stable, write ion configurations, and predict main-group ion charges.</a:t>
             </a:r>
             <a:endParaRPr lang="en-US" sz="1600" dirty="0"/>
           </a:p>
@@ -13467,7 +13467,7 @@
       </p:grpSpPr>
       <p:pic>
         <p:nvPicPr>
-          <p:cNvPr id="2" name="Image 0" descr="/home/user/WorkWork/templates/slide/assets/chem_u02_s2.4_na_cation_orbitals.png">    </p:cNvPr>
+          <p:cNvPr id="2" name="Image 0" descr="/home/user/WorkWork/templates/slide/assets/chem_u02_s2.4_na_cl_ions.png">    </p:cNvPr>
           <p:cNvPicPr>
             <a:picLocks noChangeAspect="1"/>
           </p:cNvPicPr>
@@ -13524,21 +13524,7 @@
                 <a:ea typeface="Trade Gothic Next" pitchFamily="34" charset="-122"/>
                 <a:cs typeface="Trade Gothic Next" pitchFamily="34" charset="-120"/>
               </a:rPr>
-              <a:t>Na Becomes Na</a:t>
-            </a:r>
-            <a:pPr algn="l" indent="0" marL="0">
-              <a:buNone/>
-            </a:pPr>
-            <a:r>
-              <a:rPr lang="en-US" sz="2800" b="1" baseline="30000" dirty="0">
-                <a:solidFill>
-                  <a:srgbClr val="14161B"/>
-                </a:solidFill>
-                <a:latin typeface="Trade Gothic Next" pitchFamily="34" charset="0"/>
-                <a:ea typeface="Trade Gothic Next" pitchFamily="34" charset="-122"/>
-                <a:cs typeface="Trade Gothic Next" pitchFamily="34" charset="-120"/>
-              </a:rPr>
-              <a:t>+</a:t>
+              <a:t>Na Loses One, Cl Gains One</a:t>
             </a:r>
             <a:endParaRPr lang="en-US" sz="2800" dirty="0"/>
           </a:p>
@@ -13579,7 +13565,7 @@
                 <a:ea typeface="Trade Gothic Next" pitchFamily="34" charset="-122"/>
                 <a:cs typeface="Trade Gothic Next" pitchFamily="34" charset="-120"/>
               </a:rPr>
-              <a:t>Electrons leave from the highest n first. Sodium loses its 3s electron.</a:t>
+              <a:t>Electrons leave from the highest n first. A gained electron fills the open 3p spot.</a:t>
             </a:r>
             <a:endParaRPr lang="en-US" sz="1700" dirty="0"/>
           </a:p>
@@ -13620,7 +13606,7 @@
                 <a:ea typeface="Trade Gothic Next" pitchFamily="34" charset="-122"/>
                 <a:cs typeface="Trade Gothic Next" pitchFamily="34" charset="-120"/>
               </a:rPr>
-              <a:t>BEFORE</a:t>
+              <a:t>SODIUM</a:t>
             </a:r>
             <a:endParaRPr lang="en-US" sz="1200" dirty="0"/>
           </a:p>
@@ -13661,7 +13647,7 @@
                 <a:ea typeface="Trade Gothic Next" pitchFamily="34" charset="-122"/>
                 <a:cs typeface="Trade Gothic Next" pitchFamily="34" charset="-120"/>
               </a:rPr>
-              <a:t>Na: 1s</a:t>
+              <a:t>3s</a:t>
             </a:r>
             <a:pPr indent="0" marL="0">
               <a:buNone/>
@@ -13675,7 +13661,7 @@
                 <a:ea typeface="Trade Gothic Next" pitchFamily="34" charset="-122"/>
                 <a:cs typeface="Trade Gothic Next" pitchFamily="34" charset="-120"/>
               </a:rPr>
-              <a:t>2</a:t>
+              <a:t>1</a:t>
             </a:r>
             <a:pPr indent="0" marL="0">
               <a:buNone/>
@@ -13689,7 +13675,24 @@
                 <a:ea typeface="Trade Gothic Next" pitchFamily="34" charset="-122"/>
                 <a:cs typeface="Trade Gothic Next" pitchFamily="34" charset="-120"/>
               </a:rPr>
-              <a:t> 2s</a:t>
+              <a:t> leaves: 11 → 10 electrons.</a:t>
+            </a:r>
+            <a:endParaRPr lang="en-US" sz="1600" dirty="0"/>
+          </a:p>
+          <a:p>
+            <a:pPr indent="0" marL="0">
+              <a:buNone/>
+            </a:pPr>
+            <a:r>
+              <a:rPr lang="en-US" sz="1600" dirty="0">
+                <a:solidFill>
+                  <a:srgbClr val="14161B"/>
+                </a:solidFill>
+                <a:latin typeface="Trade Gothic Next" pitchFamily="34" charset="0"/>
+                <a:ea typeface="Trade Gothic Next" pitchFamily="34" charset="-122"/>
+                <a:cs typeface="Trade Gothic Next" pitchFamily="34" charset="-120"/>
+              </a:rPr>
+              <a:t>Na</a:t>
             </a:r>
             <a:pPr indent="0" marL="0">
               <a:buNone/>
@@ -13703,7 +13706,7 @@
                 <a:ea typeface="Trade Gothic Next" pitchFamily="34" charset="-122"/>
                 <a:cs typeface="Trade Gothic Next" pitchFamily="34" charset="-120"/>
               </a:rPr>
-              <a:t>2</a:t>
+              <a:t>+</a:t>
             </a:r>
             <a:pPr indent="0" marL="0">
               <a:buNone/>
@@ -13717,66 +13720,7 @@
                 <a:ea typeface="Trade Gothic Next" pitchFamily="34" charset="-122"/>
                 <a:cs typeface="Trade Gothic Next" pitchFamily="34" charset="-120"/>
               </a:rPr>
-              <a:t> 2p</a:t>
-            </a:r>
-            <a:pPr indent="0" marL="0">
-              <a:buNone/>
-            </a:pPr>
-            <a:r>
-              <a:rPr lang="en-US" sz="1600" baseline="30000" dirty="0">
-                <a:solidFill>
-                  <a:srgbClr val="14161B"/>
-                </a:solidFill>
-                <a:latin typeface="Trade Gothic Next" pitchFamily="34" charset="0"/>
-                <a:ea typeface="Trade Gothic Next" pitchFamily="34" charset="-122"/>
-                <a:cs typeface="Trade Gothic Next" pitchFamily="34" charset="-120"/>
-              </a:rPr>
-              <a:t>6</a:t>
-            </a:r>
-            <a:pPr indent="0" marL="0">
-              <a:buNone/>
-            </a:pPr>
-            <a:r>
-              <a:rPr lang="en-US" sz="1600" dirty="0">
-                <a:solidFill>
-                  <a:srgbClr val="14161B"/>
-                </a:solidFill>
-                <a:latin typeface="Trade Gothic Next" pitchFamily="34" charset="0"/>
-                <a:ea typeface="Trade Gothic Next" pitchFamily="34" charset="-122"/>
-                <a:cs typeface="Trade Gothic Next" pitchFamily="34" charset="-120"/>
-              </a:rPr>
-              <a:t> 3s</a:t>
-            </a:r>
-            <a:pPr indent="0" marL="0">
-              <a:buNone/>
-            </a:pPr>
-            <a:r>
-              <a:rPr lang="en-US" sz="1600" baseline="30000" dirty="0">
-                <a:solidFill>
-                  <a:srgbClr val="14161B"/>
-                </a:solidFill>
-                <a:latin typeface="Trade Gothic Next" pitchFamily="34" charset="0"/>
-                <a:ea typeface="Trade Gothic Next" pitchFamily="34" charset="-122"/>
-                <a:cs typeface="Trade Gothic Next" pitchFamily="34" charset="-120"/>
-              </a:rPr>
-              <a:t>1</a:t>
-            </a:r>
-            <a:endParaRPr lang="en-US" sz="1600" dirty="0"/>
-          </a:p>
-          <a:p>
-            <a:pPr indent="0" marL="0">
-              <a:buNone/>
-            </a:pPr>
-            <a:r>
-              <a:rPr lang="en-US" sz="1600" dirty="0">
-                <a:solidFill>
-                  <a:srgbClr val="14161B"/>
-                </a:solidFill>
-                <a:latin typeface="Trade Gothic Next" pitchFamily="34" charset="0"/>
-                <a:ea typeface="Trade Gothic Next" pitchFamily="34" charset="-122"/>
-                <a:cs typeface="Trade Gothic Next" pitchFamily="34" charset="-120"/>
-              </a:rPr>
-              <a:t>11 electrons</a:t>
+              <a:t>: charge 1+. Matches [Ne].</a:t>
             </a:r>
             <a:endParaRPr lang="en-US" sz="1600" dirty="0"/>
           </a:p>
@@ -13817,7 +13761,7 @@
                 <a:ea typeface="Trade Gothic Next" pitchFamily="34" charset="-122"/>
                 <a:cs typeface="Trade Gothic Next" pitchFamily="34" charset="-120"/>
               </a:rPr>
-              <a:t>AFTER</a:t>
+              <a:t>CHLORINE</a:t>
             </a:r>
             <a:endParaRPr lang="en-US" sz="1200" dirty="0"/>
           </a:p>
@@ -13858,7 +13802,24 @@
                 <a:ea typeface="Trade Gothic Next" pitchFamily="34" charset="-122"/>
                 <a:cs typeface="Trade Gothic Next" pitchFamily="34" charset="-120"/>
               </a:rPr>
-              <a:t>Na</a:t>
+              <a:t>One electron fills 3p: 17 → 18.</a:t>
+            </a:r>
+            <a:endParaRPr lang="en-US" sz="1600" dirty="0"/>
+          </a:p>
+          <a:p>
+            <a:pPr indent="0" marL="0">
+              <a:buNone/>
+            </a:pPr>
+            <a:r>
+              <a:rPr lang="en-US" sz="1600" dirty="0">
+                <a:solidFill>
+                  <a:srgbClr val="14161B"/>
+                </a:solidFill>
+                <a:latin typeface="Trade Gothic Next" pitchFamily="34" charset="0"/>
+                <a:ea typeface="Trade Gothic Next" pitchFamily="34" charset="-122"/>
+                <a:cs typeface="Trade Gothic Next" pitchFamily="34" charset="-120"/>
+              </a:rPr>
+              <a:t>Cl</a:t>
             </a:r>
             <a:pPr indent="0" marL="0">
               <a:buNone/>
@@ -13872,7 +13833,7 @@
                 <a:ea typeface="Trade Gothic Next" pitchFamily="34" charset="-122"/>
                 <a:cs typeface="Trade Gothic Next" pitchFamily="34" charset="-120"/>
               </a:rPr>
-              <a:t>+</a:t>
+              <a:t>−</a:t>
             </a:r>
             <a:pPr indent="0" marL="0">
               <a:buNone/>
@@ -13886,94 +13847,7 @@
                 <a:ea typeface="Trade Gothic Next" pitchFamily="34" charset="-122"/>
                 <a:cs typeface="Trade Gothic Next" pitchFamily="34" charset="-120"/>
               </a:rPr>
-              <a:t>: 1s</a:t>
-            </a:r>
-            <a:pPr indent="0" marL="0">
-              <a:buNone/>
-            </a:pPr>
-            <a:r>
-              <a:rPr lang="en-US" sz="1600" baseline="30000" dirty="0">
-                <a:solidFill>
-                  <a:srgbClr val="14161B"/>
-                </a:solidFill>
-                <a:latin typeface="Trade Gothic Next" pitchFamily="34" charset="0"/>
-                <a:ea typeface="Trade Gothic Next" pitchFamily="34" charset="-122"/>
-                <a:cs typeface="Trade Gothic Next" pitchFamily="34" charset="-120"/>
-              </a:rPr>
-              <a:t>2</a:t>
-            </a:r>
-            <a:pPr indent="0" marL="0">
-              <a:buNone/>
-            </a:pPr>
-            <a:r>
-              <a:rPr lang="en-US" sz="1600" dirty="0">
-                <a:solidFill>
-                  <a:srgbClr val="14161B"/>
-                </a:solidFill>
-                <a:latin typeface="Trade Gothic Next" pitchFamily="34" charset="0"/>
-                <a:ea typeface="Trade Gothic Next" pitchFamily="34" charset="-122"/>
-                <a:cs typeface="Trade Gothic Next" pitchFamily="34" charset="-120"/>
-              </a:rPr>
-              <a:t> 2s</a:t>
-            </a:r>
-            <a:pPr indent="0" marL="0">
-              <a:buNone/>
-            </a:pPr>
-            <a:r>
-              <a:rPr lang="en-US" sz="1600" baseline="30000" dirty="0">
-                <a:solidFill>
-                  <a:srgbClr val="14161B"/>
-                </a:solidFill>
-                <a:latin typeface="Trade Gothic Next" pitchFamily="34" charset="0"/>
-                <a:ea typeface="Trade Gothic Next" pitchFamily="34" charset="-122"/>
-                <a:cs typeface="Trade Gothic Next" pitchFamily="34" charset="-120"/>
-              </a:rPr>
-              <a:t>2</a:t>
-            </a:r>
-            <a:pPr indent="0" marL="0">
-              <a:buNone/>
-            </a:pPr>
-            <a:r>
-              <a:rPr lang="en-US" sz="1600" dirty="0">
-                <a:solidFill>
-                  <a:srgbClr val="14161B"/>
-                </a:solidFill>
-                <a:latin typeface="Trade Gothic Next" pitchFamily="34" charset="0"/>
-                <a:ea typeface="Trade Gothic Next" pitchFamily="34" charset="-122"/>
-                <a:cs typeface="Trade Gothic Next" pitchFamily="34" charset="-120"/>
-              </a:rPr>
-              <a:t> 2p</a:t>
-            </a:r>
-            <a:pPr indent="0" marL="0">
-              <a:buNone/>
-            </a:pPr>
-            <a:r>
-              <a:rPr lang="en-US" sz="1600" baseline="30000" dirty="0">
-                <a:solidFill>
-                  <a:srgbClr val="14161B"/>
-                </a:solidFill>
-                <a:latin typeface="Trade Gothic Next" pitchFamily="34" charset="0"/>
-                <a:ea typeface="Trade Gothic Next" pitchFamily="34" charset="-122"/>
-                <a:cs typeface="Trade Gothic Next" pitchFamily="34" charset="-120"/>
-              </a:rPr>
-              <a:t>6</a:t>
-            </a:r>
-            <a:endParaRPr lang="en-US" sz="1600" dirty="0"/>
-          </a:p>
-          <a:p>
-            <a:pPr indent="0" marL="0">
-              <a:buNone/>
-            </a:pPr>
-            <a:r>
-              <a:rPr lang="en-US" sz="1600" dirty="0">
-                <a:solidFill>
-                  <a:srgbClr val="14161B"/>
-                </a:solidFill>
-                <a:latin typeface="Trade Gothic Next" pitchFamily="34" charset="0"/>
-                <a:ea typeface="Trade Gothic Next" pitchFamily="34" charset="-122"/>
-                <a:cs typeface="Trade Gothic Next" pitchFamily="34" charset="-120"/>
-              </a:rPr>
-              <a:t>10 electrons</a:t>
+              <a:t>: charge 1−. Matches [Ar].</a:t>
             </a:r>
             <a:endParaRPr lang="en-US" sz="1600" dirty="0"/>
           </a:p>
@@ -14014,7 +13888,7 @@
                 <a:ea typeface="Trade Gothic Next" pitchFamily="34" charset="-122"/>
                 <a:cs typeface="Trade Gothic Next" pitchFamily="34" charset="-120"/>
               </a:rPr>
-              <a:t>THE MATCH</a:t>
+              <a:t>THE CHECK</a:t>
             </a:r>
             <a:endParaRPr lang="en-US" sz="1200" dirty="0"/>
           </a:p>
@@ -14055,7 +13929,7 @@
                 <a:ea typeface="Trade Gothic Next" pitchFamily="34" charset="-122"/>
                 <a:cs typeface="Trade Gothic Next" pitchFamily="34" charset="-120"/>
               </a:rPr>
-              <a:t>That is the configuration of neon, [Ne].</a:t>
+              <a:t>11 − 1 = 10 and 17 + 1 = 18.</a:t>
             </a:r>
             <a:endParaRPr lang="en-US" sz="1600" dirty="0"/>
           </a:p>
@@ -14233,7 +14107,7 @@
                 <a:ea typeface="Trade Gothic Next" pitchFamily="34" charset="-122"/>
                 <a:cs typeface="Trade Gothic Next" pitchFamily="34" charset="-120"/>
               </a:rPr>
-              <a:t>Three More Cations</a:t>
+              <a:t>Three More Ions, Same Move</a:t>
             </a:r>
             <a:endParaRPr lang="en-US" sz="2800" dirty="0"/>
           </a:p>
@@ -14274,7 +14148,7 @@
                 <a:ea typeface="Trade Gothic Next" pitchFamily="34" charset="-122"/>
                 <a:cs typeface="Trade Gothic Next" pitchFamily="34" charset="-120"/>
               </a:rPr>
-              <a:t>Same move every time. Remove from the highest n.</a:t>
+              <a:t>Remove from the highest n, or fill the open spots in s and p.</a:t>
             </a:r>
             <a:endParaRPr lang="en-US" sz="1700" dirty="0"/>
           </a:p>
@@ -14315,7 +14189,7 @@
                 <a:ea typeface="Trade Gothic Next" pitchFamily="34" charset="-122"/>
                 <a:cs typeface="Trade Gothic Next" pitchFamily="34" charset="-120"/>
               </a:rPr>
-              <a:t>MAGNESIUM</a:t>
+              <a:t>ALUMINUM</a:t>
             </a:r>
             <a:endParaRPr lang="en-US" sz="1200" dirty="0"/>
           </a:p>
@@ -14356,7 +14230,7 @@
                 <a:ea typeface="Trade Gothic Next" pitchFamily="34" charset="-122"/>
                 <a:cs typeface="Trade Gothic Next" pitchFamily="34" charset="-120"/>
               </a:rPr>
-              <a:t>Mg: [Ne] 3s</a:t>
+              <a:t>Al: [Ne] 3s</a:t>
             </a:r>
             <a:pPr indent="0" marL="0">
               <a:buNone/>
@@ -14372,6 +14246,34 @@
               </a:rPr>
               <a:t>2</a:t>
             </a:r>
+            <a:pPr indent="0" marL="0">
+              <a:buNone/>
+            </a:pPr>
+            <a:r>
+              <a:rPr lang="en-US" sz="1600" dirty="0">
+                <a:solidFill>
+                  <a:srgbClr val="14161B"/>
+                </a:solidFill>
+                <a:latin typeface="Trade Gothic Next" pitchFamily="34" charset="0"/>
+                <a:ea typeface="Trade Gothic Next" pitchFamily="34" charset="-122"/>
+                <a:cs typeface="Trade Gothic Next" pitchFamily="34" charset="-120"/>
+              </a:rPr>
+              <a:t> 3p</a:t>
+            </a:r>
+            <a:pPr indent="0" marL="0">
+              <a:buNone/>
+            </a:pPr>
+            <a:r>
+              <a:rPr lang="en-US" sz="1600" baseline="30000" dirty="0">
+                <a:solidFill>
+                  <a:srgbClr val="14161B"/>
+                </a:solidFill>
+                <a:latin typeface="Trade Gothic Next" pitchFamily="34" charset="0"/>
+                <a:ea typeface="Trade Gothic Next" pitchFamily="34" charset="-122"/>
+                <a:cs typeface="Trade Gothic Next" pitchFamily="34" charset="-120"/>
+              </a:rPr>
+              <a:t>1</a:t>
+            </a:r>
             <a:endParaRPr lang="en-US" sz="1600" dirty="0"/>
           </a:p>
           <a:p>
@@ -14387,7 +14289,7 @@
                 <a:ea typeface="Trade Gothic Next" pitchFamily="34" charset="-122"/>
                 <a:cs typeface="Trade Gothic Next" pitchFamily="34" charset="-120"/>
               </a:rPr>
-              <a:t>Mg</a:t>
+              <a:t>Al</a:t>
             </a:r>
             <a:pPr indent="0" marL="0">
               <a:buNone/>
@@ -14401,7 +14303,7 @@
                 <a:ea typeface="Trade Gothic Next" pitchFamily="34" charset="-122"/>
                 <a:cs typeface="Trade Gothic Next" pitchFamily="34" charset="-120"/>
               </a:rPr>
-              <a:t>2+</a:t>
+              <a:t>3+</a:t>
             </a:r>
             <a:pPr indent="0" marL="0">
               <a:buNone/>
@@ -14432,7 +14334,24 @@
                 <a:ea typeface="Trade Gothic Next" pitchFamily="34" charset="-122"/>
                 <a:cs typeface="Trade Gothic Next" pitchFamily="34" charset="-120"/>
               </a:rPr>
-              <a:t>12 → 10 electrons</a:t>
+              <a:t>13 → 10 electrons</a:t>
+            </a:r>
+            <a:endParaRPr lang="en-US" sz="1600" dirty="0"/>
+          </a:p>
+          <a:p>
+            <a:pPr indent="0" marL="0">
+              <a:buNone/>
+            </a:pPr>
+            <a:r>
+              <a:rPr lang="en-US" sz="1600" dirty="0">
+                <a:solidFill>
+                  <a:srgbClr val="14161B"/>
+                </a:solidFill>
+                <a:latin typeface="Trade Gothic Next" pitchFamily="34" charset="0"/>
+                <a:ea typeface="Trade Gothic Next" pitchFamily="34" charset="-122"/>
+                <a:cs typeface="Trade Gothic Next" pitchFamily="34" charset="-120"/>
+              </a:rPr>
+              <a:t>Charge: 3+</a:t>
             </a:r>
             <a:endParaRPr lang="en-US" sz="1600" dirty="0"/>
           </a:p>
@@ -14473,7 +14392,7 @@
                 <a:ea typeface="Trade Gothic Next" pitchFamily="34" charset="-122"/>
                 <a:cs typeface="Trade Gothic Next" pitchFamily="34" charset="-120"/>
               </a:rPr>
-              <a:t>ALUMINUM</a:t>
+              <a:t>OXYGEN</a:t>
             </a:r>
             <a:endParaRPr lang="en-US" sz="1200" dirty="0"/>
           </a:p>
@@ -14514,7 +14433,7 @@
                 <a:ea typeface="Trade Gothic Next" pitchFamily="34" charset="-122"/>
                 <a:cs typeface="Trade Gothic Next" pitchFamily="34" charset="-120"/>
               </a:rPr>
-              <a:t>Al: [Ne] 3s</a:t>
+              <a:t>O: 1s</a:t>
             </a:r>
             <a:pPr indent="0" marL="0">
               <a:buNone/>
@@ -14542,7 +14461,7 @@
                 <a:ea typeface="Trade Gothic Next" pitchFamily="34" charset="-122"/>
                 <a:cs typeface="Trade Gothic Next" pitchFamily="34" charset="-120"/>
               </a:rPr>
-              <a:t> 3p</a:t>
+              <a:t> 2s</a:t>
             </a:r>
             <a:pPr indent="0" marL="0">
               <a:buNone/>
@@ -14556,7 +14475,35 @@
                 <a:ea typeface="Trade Gothic Next" pitchFamily="34" charset="-122"/>
                 <a:cs typeface="Trade Gothic Next" pitchFamily="34" charset="-120"/>
               </a:rPr>
-              <a:t>1</a:t>
+              <a:t>2</a:t>
+            </a:r>
+            <a:pPr indent="0" marL="0">
+              <a:buNone/>
+            </a:pPr>
+            <a:r>
+              <a:rPr lang="en-US" sz="1600" dirty="0">
+                <a:solidFill>
+                  <a:srgbClr val="14161B"/>
+                </a:solidFill>
+                <a:latin typeface="Trade Gothic Next" pitchFamily="34" charset="0"/>
+                <a:ea typeface="Trade Gothic Next" pitchFamily="34" charset="-122"/>
+                <a:cs typeface="Trade Gothic Next" pitchFamily="34" charset="-120"/>
+              </a:rPr>
+              <a:t> 2p</a:t>
+            </a:r>
+            <a:pPr indent="0" marL="0">
+              <a:buNone/>
+            </a:pPr>
+            <a:r>
+              <a:rPr lang="en-US" sz="1600" baseline="30000" dirty="0">
+                <a:solidFill>
+                  <a:srgbClr val="14161B"/>
+                </a:solidFill>
+                <a:latin typeface="Trade Gothic Next" pitchFamily="34" charset="0"/>
+                <a:ea typeface="Trade Gothic Next" pitchFamily="34" charset="-122"/>
+                <a:cs typeface="Trade Gothic Next" pitchFamily="34" charset="-120"/>
+              </a:rPr>
+              <a:t>4</a:t>
             </a:r>
             <a:endParaRPr lang="en-US" sz="1600" dirty="0"/>
           </a:p>
@@ -14573,7 +14520,7 @@
                 <a:ea typeface="Trade Gothic Next" pitchFamily="34" charset="-122"/>
                 <a:cs typeface="Trade Gothic Next" pitchFamily="34" charset="-120"/>
               </a:rPr>
-              <a:t>Al</a:t>
+              <a:t>O</a:t>
             </a:r>
             <a:pPr indent="0" marL="0">
               <a:buNone/>
@@ -14587,7 +14534,7 @@
                 <a:ea typeface="Trade Gothic Next" pitchFamily="34" charset="-122"/>
                 <a:cs typeface="Trade Gothic Next" pitchFamily="34" charset="-120"/>
               </a:rPr>
-              <a:t>3+</a:t>
+              <a:t>2−</a:t>
             </a:r>
             <a:pPr indent="0" marL="0">
               <a:buNone/>
@@ -14601,7 +14548,77 @@
                 <a:ea typeface="Trade Gothic Next" pitchFamily="34" charset="-122"/>
                 <a:cs typeface="Trade Gothic Next" pitchFamily="34" charset="-120"/>
               </a:rPr>
-              <a:t>: [Ne]</a:t>
+              <a:t>: 1s</a:t>
+            </a:r>
+            <a:pPr indent="0" marL="0">
+              <a:buNone/>
+            </a:pPr>
+            <a:r>
+              <a:rPr lang="en-US" sz="1600" baseline="30000" dirty="0">
+                <a:solidFill>
+                  <a:srgbClr val="14161B"/>
+                </a:solidFill>
+                <a:latin typeface="Trade Gothic Next" pitchFamily="34" charset="0"/>
+                <a:ea typeface="Trade Gothic Next" pitchFamily="34" charset="-122"/>
+                <a:cs typeface="Trade Gothic Next" pitchFamily="34" charset="-120"/>
+              </a:rPr>
+              <a:t>2</a:t>
+            </a:r>
+            <a:pPr indent="0" marL="0">
+              <a:buNone/>
+            </a:pPr>
+            <a:r>
+              <a:rPr lang="en-US" sz="1600" dirty="0">
+                <a:solidFill>
+                  <a:srgbClr val="14161B"/>
+                </a:solidFill>
+                <a:latin typeface="Trade Gothic Next" pitchFamily="34" charset="0"/>
+                <a:ea typeface="Trade Gothic Next" pitchFamily="34" charset="-122"/>
+                <a:cs typeface="Trade Gothic Next" pitchFamily="34" charset="-120"/>
+              </a:rPr>
+              <a:t> 2s</a:t>
+            </a:r>
+            <a:pPr indent="0" marL="0">
+              <a:buNone/>
+            </a:pPr>
+            <a:r>
+              <a:rPr lang="en-US" sz="1600" baseline="30000" dirty="0">
+                <a:solidFill>
+                  <a:srgbClr val="14161B"/>
+                </a:solidFill>
+                <a:latin typeface="Trade Gothic Next" pitchFamily="34" charset="0"/>
+                <a:ea typeface="Trade Gothic Next" pitchFamily="34" charset="-122"/>
+                <a:cs typeface="Trade Gothic Next" pitchFamily="34" charset="-120"/>
+              </a:rPr>
+              <a:t>2</a:t>
+            </a:r>
+            <a:pPr indent="0" marL="0">
+              <a:buNone/>
+            </a:pPr>
+            <a:r>
+              <a:rPr lang="en-US" sz="1600" dirty="0">
+                <a:solidFill>
+                  <a:srgbClr val="14161B"/>
+                </a:solidFill>
+                <a:latin typeface="Trade Gothic Next" pitchFamily="34" charset="0"/>
+                <a:ea typeface="Trade Gothic Next" pitchFamily="34" charset="-122"/>
+                <a:cs typeface="Trade Gothic Next" pitchFamily="34" charset="-120"/>
+              </a:rPr>
+              <a:t> 2p</a:t>
+            </a:r>
+            <a:pPr indent="0" marL="0">
+              <a:buNone/>
+            </a:pPr>
+            <a:r>
+              <a:rPr lang="en-US" sz="1600" baseline="30000" dirty="0">
+                <a:solidFill>
+                  <a:srgbClr val="14161B"/>
+                </a:solidFill>
+                <a:latin typeface="Trade Gothic Next" pitchFamily="34" charset="0"/>
+                <a:ea typeface="Trade Gothic Next" pitchFamily="34" charset="-122"/>
+                <a:cs typeface="Trade Gothic Next" pitchFamily="34" charset="-120"/>
+              </a:rPr>
+              <a:t>6</a:t>
             </a:r>
             <a:endParaRPr lang="en-US" sz="1600" dirty="0"/>
           </a:p>
@@ -14618,7 +14635,24 @@
                 <a:ea typeface="Trade Gothic Next" pitchFamily="34" charset="-122"/>
                 <a:cs typeface="Trade Gothic Next" pitchFamily="34" charset="-120"/>
               </a:rPr>
-              <a:t>13 → 10 electrons</a:t>
+              <a:t>= [Ne], 10 electrons</a:t>
+            </a:r>
+            <a:endParaRPr lang="en-US" sz="1600" dirty="0"/>
+          </a:p>
+          <a:p>
+            <a:pPr indent="0" marL="0">
+              <a:buNone/>
+            </a:pPr>
+            <a:r>
+              <a:rPr lang="en-US" sz="1600" dirty="0">
+                <a:solidFill>
+                  <a:srgbClr val="14161B"/>
+                </a:solidFill>
+                <a:latin typeface="Trade Gothic Next" pitchFamily="34" charset="0"/>
+                <a:ea typeface="Trade Gothic Next" pitchFamily="34" charset="-122"/>
+                <a:cs typeface="Trade Gothic Next" pitchFamily="34" charset="-120"/>
+              </a:rPr>
+              <a:t>Charge: 2−</a:t>
             </a:r>
             <a:endParaRPr lang="en-US" sz="1600" dirty="0"/>
           </a:p>
@@ -14659,7 +14693,7 @@
                 <a:ea typeface="Trade Gothic Next" pitchFamily="34" charset="-122"/>
                 <a:cs typeface="Trade Gothic Next" pitchFamily="34" charset="-120"/>
               </a:rPr>
-              <a:t>CALCIUM</a:t>
+              <a:t>BROMINE</a:t>
             </a:r>
             <a:endParaRPr lang="en-US" sz="1200" dirty="0"/>
           </a:p>
@@ -14700,7 +14734,7 @@
                 <a:ea typeface="Trade Gothic Next" pitchFamily="34" charset="-122"/>
                 <a:cs typeface="Trade Gothic Next" pitchFamily="34" charset="-120"/>
               </a:rPr>
-              <a:t>Ca: [Ar] 4s</a:t>
+              <a:t>Br: [Ar] 4s</a:t>
             </a:r>
             <a:pPr indent="0" marL="0">
               <a:buNone/>
@@ -14716,6 +14750,62 @@
               </a:rPr>
               <a:t>2</a:t>
             </a:r>
+            <a:pPr indent="0" marL="0">
+              <a:buNone/>
+            </a:pPr>
+            <a:r>
+              <a:rPr lang="en-US" sz="1600" dirty="0">
+                <a:solidFill>
+                  <a:srgbClr val="14161B"/>
+                </a:solidFill>
+                <a:latin typeface="Trade Gothic Next" pitchFamily="34" charset="0"/>
+                <a:ea typeface="Trade Gothic Next" pitchFamily="34" charset="-122"/>
+                <a:cs typeface="Trade Gothic Next" pitchFamily="34" charset="-120"/>
+              </a:rPr>
+              <a:t> 3d</a:t>
+            </a:r>
+            <a:pPr indent="0" marL="0">
+              <a:buNone/>
+            </a:pPr>
+            <a:r>
+              <a:rPr lang="en-US" sz="1600" baseline="30000" dirty="0">
+                <a:solidFill>
+                  <a:srgbClr val="14161B"/>
+                </a:solidFill>
+                <a:latin typeface="Trade Gothic Next" pitchFamily="34" charset="0"/>
+                <a:ea typeface="Trade Gothic Next" pitchFamily="34" charset="-122"/>
+                <a:cs typeface="Trade Gothic Next" pitchFamily="34" charset="-120"/>
+              </a:rPr>
+              <a:t>10</a:t>
+            </a:r>
+            <a:pPr indent="0" marL="0">
+              <a:buNone/>
+            </a:pPr>
+            <a:r>
+              <a:rPr lang="en-US" sz="1600" dirty="0">
+                <a:solidFill>
+                  <a:srgbClr val="14161B"/>
+                </a:solidFill>
+                <a:latin typeface="Trade Gothic Next" pitchFamily="34" charset="0"/>
+                <a:ea typeface="Trade Gothic Next" pitchFamily="34" charset="-122"/>
+                <a:cs typeface="Trade Gothic Next" pitchFamily="34" charset="-120"/>
+              </a:rPr>
+              <a:t> 4p</a:t>
+            </a:r>
+            <a:pPr indent="0" marL="0">
+              <a:buNone/>
+            </a:pPr>
+            <a:r>
+              <a:rPr lang="en-US" sz="1600" baseline="30000" dirty="0">
+                <a:solidFill>
+                  <a:srgbClr val="14161B"/>
+                </a:solidFill>
+                <a:latin typeface="Trade Gothic Next" pitchFamily="34" charset="0"/>
+                <a:ea typeface="Trade Gothic Next" pitchFamily="34" charset="-122"/>
+                <a:cs typeface="Trade Gothic Next" pitchFamily="34" charset="-120"/>
+              </a:rPr>
+              <a:t>5</a:t>
+            </a:r>
             <a:endParaRPr lang="en-US" sz="1600" dirty="0"/>
           </a:p>
           <a:p>
@@ -14731,7 +14821,7 @@
                 <a:ea typeface="Trade Gothic Next" pitchFamily="34" charset="-122"/>
                 <a:cs typeface="Trade Gothic Next" pitchFamily="34" charset="-120"/>
               </a:rPr>
-              <a:t>Ca</a:t>
+              <a:t>Br</a:t>
             </a:r>
             <a:pPr indent="0" marL="0">
               <a:buNone/>
@@ -14745,7 +14835,7 @@
                 <a:ea typeface="Trade Gothic Next" pitchFamily="34" charset="-122"/>
                 <a:cs typeface="Trade Gothic Next" pitchFamily="34" charset="-120"/>
               </a:rPr>
-              <a:t>2+</a:t>
+              <a:t>−</a:t>
             </a:r>
             <a:pPr indent="0" marL="0">
               <a:buNone/>
@@ -14759,7 +14849,77 @@
                 <a:ea typeface="Trade Gothic Next" pitchFamily="34" charset="-122"/>
                 <a:cs typeface="Trade Gothic Next" pitchFamily="34" charset="-120"/>
               </a:rPr>
-              <a:t>: [Ar]</a:t>
+              <a:t>: [Ar] 4s</a:t>
+            </a:r>
+            <a:pPr indent="0" marL="0">
+              <a:buNone/>
+            </a:pPr>
+            <a:r>
+              <a:rPr lang="en-US" sz="1600" baseline="30000" dirty="0">
+                <a:solidFill>
+                  <a:srgbClr val="14161B"/>
+                </a:solidFill>
+                <a:latin typeface="Trade Gothic Next" pitchFamily="34" charset="0"/>
+                <a:ea typeface="Trade Gothic Next" pitchFamily="34" charset="-122"/>
+                <a:cs typeface="Trade Gothic Next" pitchFamily="34" charset="-120"/>
+              </a:rPr>
+              <a:t>2</a:t>
+            </a:r>
+            <a:pPr indent="0" marL="0">
+              <a:buNone/>
+            </a:pPr>
+            <a:r>
+              <a:rPr lang="en-US" sz="1600" dirty="0">
+                <a:solidFill>
+                  <a:srgbClr val="14161B"/>
+                </a:solidFill>
+                <a:latin typeface="Trade Gothic Next" pitchFamily="34" charset="0"/>
+                <a:ea typeface="Trade Gothic Next" pitchFamily="34" charset="-122"/>
+                <a:cs typeface="Trade Gothic Next" pitchFamily="34" charset="-120"/>
+              </a:rPr>
+              <a:t> 3d</a:t>
+            </a:r>
+            <a:pPr indent="0" marL="0">
+              <a:buNone/>
+            </a:pPr>
+            <a:r>
+              <a:rPr lang="en-US" sz="1600" baseline="30000" dirty="0">
+                <a:solidFill>
+                  <a:srgbClr val="14161B"/>
+                </a:solidFill>
+                <a:latin typeface="Trade Gothic Next" pitchFamily="34" charset="0"/>
+                <a:ea typeface="Trade Gothic Next" pitchFamily="34" charset="-122"/>
+                <a:cs typeface="Trade Gothic Next" pitchFamily="34" charset="-120"/>
+              </a:rPr>
+              <a:t>10</a:t>
+            </a:r>
+            <a:pPr indent="0" marL="0">
+              <a:buNone/>
+            </a:pPr>
+            <a:r>
+              <a:rPr lang="en-US" sz="1600" dirty="0">
+                <a:solidFill>
+                  <a:srgbClr val="14161B"/>
+                </a:solidFill>
+                <a:latin typeface="Trade Gothic Next" pitchFamily="34" charset="0"/>
+                <a:ea typeface="Trade Gothic Next" pitchFamily="34" charset="-122"/>
+                <a:cs typeface="Trade Gothic Next" pitchFamily="34" charset="-120"/>
+              </a:rPr>
+              <a:t> 4p</a:t>
+            </a:r>
+            <a:pPr indent="0" marL="0">
+              <a:buNone/>
+            </a:pPr>
+            <a:r>
+              <a:rPr lang="en-US" sz="1600" baseline="30000" dirty="0">
+                <a:solidFill>
+                  <a:srgbClr val="14161B"/>
+                </a:solidFill>
+                <a:latin typeface="Trade Gothic Next" pitchFamily="34" charset="0"/>
+                <a:ea typeface="Trade Gothic Next" pitchFamily="34" charset="-122"/>
+                <a:cs typeface="Trade Gothic Next" pitchFamily="34" charset="-120"/>
+              </a:rPr>
+              <a:t>6</a:t>
             </a:r>
             <a:endParaRPr lang="en-US" sz="1600" dirty="0"/>
           </a:p>
@@ -14776,7 +14936,24 @@
                 <a:ea typeface="Trade Gothic Next" pitchFamily="34" charset="-122"/>
                 <a:cs typeface="Trade Gothic Next" pitchFamily="34" charset="-120"/>
               </a:rPr>
-              <a:t>20 → 18 electrons</a:t>
+              <a:t>= [Kr], 36 electrons</a:t>
+            </a:r>
+            <a:endParaRPr lang="en-US" sz="1600" dirty="0"/>
+          </a:p>
+          <a:p>
+            <a:pPr indent="0" marL="0">
+              <a:buNone/>
+            </a:pPr>
+            <a:r>
+              <a:rPr lang="en-US" sz="1600" dirty="0">
+                <a:solidFill>
+                  <a:srgbClr val="14161B"/>
+                </a:solidFill>
+                <a:latin typeface="Trade Gothic Next" pitchFamily="34" charset="0"/>
+                <a:ea typeface="Trade Gothic Next" pitchFamily="34" charset="-122"/>
+                <a:cs typeface="Trade Gothic Next" pitchFamily="34" charset="-120"/>
+              </a:rPr>
+              <a:t>Charge: 1−</a:t>
             </a:r>
             <a:endParaRPr lang="en-US" sz="1600" dirty="0"/>
           </a:p>
@@ -14817,7 +14994,7 @@
                 <a:ea typeface="Trade Gothic Next" pitchFamily="34" charset="-122"/>
                 <a:cs typeface="Trade Gothic Next" pitchFamily="34" charset="-120"/>
               </a:rPr>
-              <a:t>A cation's electrons come off the outermost level, the one with the highest n.</a:t>
+              <a:t>A cation loses from the highest n. An anion fills open spots in s and p.</a:t>
             </a:r>
             <a:endParaRPr lang="en-US" sz="1600" dirty="0"/>
           </a:p>
@@ -14946,1711 +15123,6 @@
 <file path=ppt/slides/slide12.xml><?xml version="1.0" encoding="utf-8"?>
 <p:sld xmlns:a="http://schemas.openxmlformats.org/drawingml/2006/main" xmlns:r="http://schemas.openxmlformats.org/officeDocument/2006/relationships" xmlns:p="http://schemas.openxmlformats.org/presentationml/2006/main">
   <p:cSld name="Slide 12">
-    <p:spTree>
-      <p:nvGrpSpPr>
-        <p:cNvPr id="1" name=""/>
-        <p:cNvGrpSpPr/>
-        <p:nvPr/>
-      </p:nvGrpSpPr>
-      <p:grpSpPr>
-        <a:xfrm>
-          <a:off x="0" y="0"/>
-          <a:ext cx="0" cy="0"/>
-          <a:chOff x="0" y="0"/>
-          <a:chExt cx="0" cy="0"/>
-        </a:xfrm>
-      </p:grpSpPr>
-      <p:pic>
-        <p:nvPicPr>
-          <p:cNvPr id="2" name="Image 0" descr="/home/user/WorkWork/templates/slide/assets/chem_u02_s2.4_cl_anion_orbitals.png">    </p:cNvPr>
-          <p:cNvPicPr>
-            <a:picLocks noChangeAspect="1"/>
-          </p:cNvPicPr>
-          <p:nvPr/>
-        </p:nvPicPr>
-        <p:blipFill>
-          <a:blip r:embed="rId1"/>
-          <a:stretch>
-            <a:fillRect/>
-          </a:stretch>
-        </p:blipFill>
-        <p:spPr>
-          <a:xfrm>
-            <a:off x="914400" y="2651760"/>
-            <a:ext cx="4617720" cy="2743200"/>
-          </a:xfrm>
-          <a:prstGeom prst="rect">
-            <a:avLst/>
-          </a:prstGeom>
-        </p:spPr>
-      </p:pic>
-      <p:sp>
-        <p:nvSpPr>
-          <p:cNvPr id="3" name="Text 2"/>
-          <p:cNvSpPr txBox="1"/>
-          <p:nvPr>
-            <p:ph idx="103" type="title" hasCustomPrompt="1"/>
-          </p:nvPr>
-        </p:nvSpPr>
-        <p:spPr>
-          <a:xfrm>
-            <a:off x="685800" y="932688"/>
-            <a:ext cx="10820095" cy="868680"/>
-          </a:xfrm>
-          <a:prstGeom prst="rect">
-            <a:avLst/>
-          </a:prstGeom>
-          <a:noFill/>
-          <a:ln/>
-        </p:spPr>
-        <p:txBody>
-          <a:bodyPr wrap="square" lIns="0" tIns="0" rIns="0" bIns="0" rtlCol="0" anchor="t"/>
-          <a:lstStyle/>
-          <a:p>
-            <a:pPr algn="l" indent="0" marL="0">
-              <a:buNone/>
-            </a:pPr>
-            <a:r>
-              <a:rPr lang="en-US" sz="2800" b="1" dirty="0">
-                <a:solidFill>
-                  <a:srgbClr val="14161B"/>
-                </a:solidFill>
-                <a:latin typeface="Trade Gothic Next" pitchFamily="34" charset="0"/>
-                <a:ea typeface="Trade Gothic Next" pitchFamily="34" charset="-122"/>
-                <a:cs typeface="Trade Gothic Next" pitchFamily="34" charset="-120"/>
-              </a:rPr>
-              <a:t>Cl Becomes Cl</a:t>
-            </a:r>
-            <a:pPr algn="l" indent="0" marL="0">
-              <a:buNone/>
-            </a:pPr>
-            <a:r>
-              <a:rPr lang="en-US" sz="2800" b="1" baseline="30000" dirty="0">
-                <a:solidFill>
-                  <a:srgbClr val="14161B"/>
-                </a:solidFill>
-                <a:latin typeface="Trade Gothic Next" pitchFamily="34" charset="0"/>
-                <a:ea typeface="Trade Gothic Next" pitchFamily="34" charset="-122"/>
-                <a:cs typeface="Trade Gothic Next" pitchFamily="34" charset="-120"/>
-              </a:rPr>
-              <a:t>−</a:t>
-            </a:r>
-            <a:endParaRPr lang="en-US" sz="2800" dirty="0"/>
-          </a:p>
-        </p:txBody>
-      </p:sp>
-      <p:sp>
-        <p:nvSpPr>
-          <p:cNvPr id="4" name="Text 2"/>
-          <p:cNvSpPr txBox="1"/>
-          <p:nvPr>
-            <p:ph idx="104" type="body" hasCustomPrompt="1"/>
-          </p:nvPr>
-        </p:nvSpPr>
-        <p:spPr>
-          <a:xfrm>
-            <a:off x="685800" y="1847088"/>
-            <a:ext cx="10820095" cy="384048"/>
-          </a:xfrm>
-          <a:prstGeom prst="rect">
-            <a:avLst/>
-          </a:prstGeom>
-          <a:noFill/>
-          <a:ln/>
-        </p:spPr>
-        <p:txBody>
-          <a:bodyPr wrap="square" lIns="0" tIns="0" rIns="0" bIns="0" rtlCol="0"/>
-          <a:lstStyle/>
-          <a:p>
-            <a:pPr indent="0" marL="0">
-              <a:buNone/>
-            </a:pPr>
-            <a:r>
-              <a:rPr lang="en-US" sz="1700" dirty="0">
-                <a:solidFill>
-                  <a:srgbClr val="2E3338"/>
-                </a:solidFill>
-                <a:latin typeface="Trade Gothic Next" pitchFamily="34" charset="0"/>
-                <a:ea typeface="Trade Gothic Next" pitchFamily="34" charset="-122"/>
-                <a:cs typeface="Trade Gothic Next" pitchFamily="34" charset="-120"/>
-              </a:rPr>
-              <a:t>A gained electron fills the open spot in the same outer sublevel.</a:t>
-            </a:r>
-            <a:endParaRPr lang="en-US" sz="1700" dirty="0"/>
-          </a:p>
-        </p:txBody>
-      </p:sp>
-      <p:sp>
-        <p:nvSpPr>
-          <p:cNvPr id="5" name="Text 4"/>
-          <p:cNvSpPr txBox="1"/>
-          <p:nvPr>
-            <p:ph idx="108" type="body" hasCustomPrompt="1"/>
-          </p:nvPr>
-        </p:nvSpPr>
-        <p:spPr>
-          <a:xfrm>
-            <a:off x="6327648" y="2560320"/>
-            <a:ext cx="5129784" cy="219456"/>
-          </a:xfrm>
-          <a:prstGeom prst="rect">
-            <a:avLst/>
-          </a:prstGeom>
-          <a:noFill/>
-          <a:ln/>
-        </p:spPr>
-        <p:txBody>
-          <a:bodyPr wrap="square" lIns="0" tIns="0" rIns="0" bIns="0" rtlCol="0"/>
-          <a:lstStyle/>
-          <a:p>
-            <a:pPr indent="0" marL="0">
-              <a:buNone/>
-            </a:pPr>
-            <a:r>
-              <a:rPr lang="en-US" sz="1200" b="1" spc="120" kern="0" dirty="0">
-                <a:solidFill>
-                  <a:srgbClr val="2E3338"/>
-                </a:solidFill>
-                <a:latin typeface="Trade Gothic Next" pitchFamily="34" charset="0"/>
-                <a:ea typeface="Trade Gothic Next" pitchFamily="34" charset="-122"/>
-                <a:cs typeface="Trade Gothic Next" pitchFamily="34" charset="-120"/>
-              </a:rPr>
-              <a:t>BEFORE</a:t>
-            </a:r>
-            <a:endParaRPr lang="en-US" sz="1200" dirty="0"/>
-          </a:p>
-        </p:txBody>
-      </p:sp>
-      <p:sp>
-        <p:nvSpPr>
-          <p:cNvPr id="6" name="Text 4"/>
-          <p:cNvSpPr txBox="1"/>
-          <p:nvPr>
-            <p:ph idx="109" type="body" hasCustomPrompt="1"/>
-          </p:nvPr>
-        </p:nvSpPr>
-        <p:spPr>
-          <a:xfrm>
-            <a:off x="6327648" y="2852928"/>
-            <a:ext cx="5129784" cy="329184"/>
-          </a:xfrm>
-          <a:prstGeom prst="rect">
-            <a:avLst/>
-          </a:prstGeom>
-          <a:noFill/>
-          <a:ln/>
-        </p:spPr>
-        <p:txBody>
-          <a:bodyPr wrap="square" lIns="0" tIns="0" rIns="0" bIns="0" rtlCol="0"/>
-          <a:lstStyle/>
-          <a:p>
-            <a:pPr indent="0" marL="0">
-              <a:buNone/>
-            </a:pPr>
-            <a:r>
-              <a:rPr lang="en-US" sz="1600" dirty="0">
-                <a:solidFill>
-                  <a:srgbClr val="14161B"/>
-                </a:solidFill>
-                <a:latin typeface="Trade Gothic Next" pitchFamily="34" charset="0"/>
-                <a:ea typeface="Trade Gothic Next" pitchFamily="34" charset="-122"/>
-                <a:cs typeface="Trade Gothic Next" pitchFamily="34" charset="-120"/>
-              </a:rPr>
-              <a:t>Cl: [Ne] 3s</a:t>
-            </a:r>
-            <a:pPr indent="0" marL="0">
-              <a:buNone/>
-            </a:pPr>
-            <a:r>
-              <a:rPr lang="en-US" sz="1600" baseline="30000" dirty="0">
-                <a:solidFill>
-                  <a:srgbClr val="14161B"/>
-                </a:solidFill>
-                <a:latin typeface="Trade Gothic Next" pitchFamily="34" charset="0"/>
-                <a:ea typeface="Trade Gothic Next" pitchFamily="34" charset="-122"/>
-                <a:cs typeface="Trade Gothic Next" pitchFamily="34" charset="-120"/>
-              </a:rPr>
-              <a:t>2</a:t>
-            </a:r>
-            <a:pPr indent="0" marL="0">
-              <a:buNone/>
-            </a:pPr>
-            <a:r>
-              <a:rPr lang="en-US" sz="1600" dirty="0">
-                <a:solidFill>
-                  <a:srgbClr val="14161B"/>
-                </a:solidFill>
-                <a:latin typeface="Trade Gothic Next" pitchFamily="34" charset="0"/>
-                <a:ea typeface="Trade Gothic Next" pitchFamily="34" charset="-122"/>
-                <a:cs typeface="Trade Gothic Next" pitchFamily="34" charset="-120"/>
-              </a:rPr>
-              <a:t> 3p</a:t>
-            </a:r>
-            <a:pPr indent="0" marL="0">
-              <a:buNone/>
-            </a:pPr>
-            <a:r>
-              <a:rPr lang="en-US" sz="1600" baseline="30000" dirty="0">
-                <a:solidFill>
-                  <a:srgbClr val="14161B"/>
-                </a:solidFill>
-                <a:latin typeface="Trade Gothic Next" pitchFamily="34" charset="0"/>
-                <a:ea typeface="Trade Gothic Next" pitchFamily="34" charset="-122"/>
-                <a:cs typeface="Trade Gothic Next" pitchFamily="34" charset="-120"/>
-              </a:rPr>
-              <a:t>5</a:t>
-            </a:r>
-            <a:endParaRPr lang="en-US" sz="1600" dirty="0"/>
-          </a:p>
-          <a:p>
-            <a:pPr indent="0" marL="0">
-              <a:buNone/>
-            </a:pPr>
-            <a:r>
-              <a:rPr lang="en-US" sz="1600" dirty="0">
-                <a:solidFill>
-                  <a:srgbClr val="14161B"/>
-                </a:solidFill>
-                <a:latin typeface="Trade Gothic Next" pitchFamily="34" charset="0"/>
-                <a:ea typeface="Trade Gothic Next" pitchFamily="34" charset="-122"/>
-                <a:cs typeface="Trade Gothic Next" pitchFamily="34" charset="-120"/>
-              </a:rPr>
-              <a:t>17 electrons</a:t>
-            </a:r>
-            <a:endParaRPr lang="en-US" sz="1600" dirty="0"/>
-          </a:p>
-        </p:txBody>
-      </p:sp>
-      <p:sp>
-        <p:nvSpPr>
-          <p:cNvPr id="7" name="Text 5"/>
-          <p:cNvSpPr txBox="1"/>
-          <p:nvPr>
-            <p:ph idx="111" type="body" hasCustomPrompt="1"/>
-          </p:nvPr>
-        </p:nvSpPr>
-        <p:spPr>
-          <a:xfrm>
-            <a:off x="6327648" y="3694176"/>
-            <a:ext cx="5129784" cy="219456"/>
-          </a:xfrm>
-          <a:prstGeom prst="rect">
-            <a:avLst/>
-          </a:prstGeom>
-          <a:noFill/>
-          <a:ln/>
-        </p:spPr>
-        <p:txBody>
-          <a:bodyPr wrap="square" lIns="0" tIns="0" rIns="0" bIns="0" rtlCol="0"/>
-          <a:lstStyle/>
-          <a:p>
-            <a:pPr indent="0" marL="0">
-              <a:buNone/>
-            </a:pPr>
-            <a:r>
-              <a:rPr lang="en-US" sz="1200" b="1" spc="120" kern="0" dirty="0">
-                <a:solidFill>
-                  <a:srgbClr val="2E3338"/>
-                </a:solidFill>
-                <a:latin typeface="Trade Gothic Next" pitchFamily="34" charset="0"/>
-                <a:ea typeface="Trade Gothic Next" pitchFamily="34" charset="-122"/>
-                <a:cs typeface="Trade Gothic Next" pitchFamily="34" charset="-120"/>
-              </a:rPr>
-              <a:t>AFTER</a:t>
-            </a:r>
-            <a:endParaRPr lang="en-US" sz="1200" dirty="0"/>
-          </a:p>
-        </p:txBody>
-      </p:sp>
-      <p:sp>
-        <p:nvSpPr>
-          <p:cNvPr id="8" name="Text 5"/>
-          <p:cNvSpPr txBox="1"/>
-          <p:nvPr>
-            <p:ph idx="112" type="body" hasCustomPrompt="1"/>
-          </p:nvPr>
-        </p:nvSpPr>
-        <p:spPr>
-          <a:xfrm>
-            <a:off x="6327648" y="3986784"/>
-            <a:ext cx="5129784" cy="329184"/>
-          </a:xfrm>
-          <a:prstGeom prst="rect">
-            <a:avLst/>
-          </a:prstGeom>
-          <a:noFill/>
-          <a:ln/>
-        </p:spPr>
-        <p:txBody>
-          <a:bodyPr wrap="square" lIns="0" tIns="0" rIns="0" bIns="0" rtlCol="0"/>
-          <a:lstStyle/>
-          <a:p>
-            <a:pPr indent="0" marL="0">
-              <a:buNone/>
-            </a:pPr>
-            <a:r>
-              <a:rPr lang="en-US" sz="1600" dirty="0">
-                <a:solidFill>
-                  <a:srgbClr val="14161B"/>
-                </a:solidFill>
-                <a:latin typeface="Trade Gothic Next" pitchFamily="34" charset="0"/>
-                <a:ea typeface="Trade Gothic Next" pitchFamily="34" charset="-122"/>
-                <a:cs typeface="Trade Gothic Next" pitchFamily="34" charset="-120"/>
-              </a:rPr>
-              <a:t>Cl</a:t>
-            </a:r>
-            <a:pPr indent="0" marL="0">
-              <a:buNone/>
-            </a:pPr>
-            <a:r>
-              <a:rPr lang="en-US" sz="1600" baseline="30000" dirty="0">
-                <a:solidFill>
-                  <a:srgbClr val="14161B"/>
-                </a:solidFill>
-                <a:latin typeface="Trade Gothic Next" pitchFamily="34" charset="0"/>
-                <a:ea typeface="Trade Gothic Next" pitchFamily="34" charset="-122"/>
-                <a:cs typeface="Trade Gothic Next" pitchFamily="34" charset="-120"/>
-              </a:rPr>
-              <a:t>−</a:t>
-            </a:r>
-            <a:pPr indent="0" marL="0">
-              <a:buNone/>
-            </a:pPr>
-            <a:r>
-              <a:rPr lang="en-US" sz="1600" dirty="0">
-                <a:solidFill>
-                  <a:srgbClr val="14161B"/>
-                </a:solidFill>
-                <a:latin typeface="Trade Gothic Next" pitchFamily="34" charset="0"/>
-                <a:ea typeface="Trade Gothic Next" pitchFamily="34" charset="-122"/>
-                <a:cs typeface="Trade Gothic Next" pitchFamily="34" charset="-120"/>
-              </a:rPr>
-              <a:t>: [Ne] 3s</a:t>
-            </a:r>
-            <a:pPr indent="0" marL="0">
-              <a:buNone/>
-            </a:pPr>
-            <a:r>
-              <a:rPr lang="en-US" sz="1600" baseline="30000" dirty="0">
-                <a:solidFill>
-                  <a:srgbClr val="14161B"/>
-                </a:solidFill>
-                <a:latin typeface="Trade Gothic Next" pitchFamily="34" charset="0"/>
-                <a:ea typeface="Trade Gothic Next" pitchFamily="34" charset="-122"/>
-                <a:cs typeface="Trade Gothic Next" pitchFamily="34" charset="-120"/>
-              </a:rPr>
-              <a:t>2</a:t>
-            </a:r>
-            <a:pPr indent="0" marL="0">
-              <a:buNone/>
-            </a:pPr>
-            <a:r>
-              <a:rPr lang="en-US" sz="1600" dirty="0">
-                <a:solidFill>
-                  <a:srgbClr val="14161B"/>
-                </a:solidFill>
-                <a:latin typeface="Trade Gothic Next" pitchFamily="34" charset="0"/>
-                <a:ea typeface="Trade Gothic Next" pitchFamily="34" charset="-122"/>
-                <a:cs typeface="Trade Gothic Next" pitchFamily="34" charset="-120"/>
-              </a:rPr>
-              <a:t> 3p</a:t>
-            </a:r>
-            <a:pPr indent="0" marL="0">
-              <a:buNone/>
-            </a:pPr>
-            <a:r>
-              <a:rPr lang="en-US" sz="1600" baseline="30000" dirty="0">
-                <a:solidFill>
-                  <a:srgbClr val="14161B"/>
-                </a:solidFill>
-                <a:latin typeface="Trade Gothic Next" pitchFamily="34" charset="0"/>
-                <a:ea typeface="Trade Gothic Next" pitchFamily="34" charset="-122"/>
-                <a:cs typeface="Trade Gothic Next" pitchFamily="34" charset="-120"/>
-              </a:rPr>
-              <a:t>6</a:t>
-            </a:r>
-            <a:endParaRPr lang="en-US" sz="1600" dirty="0"/>
-          </a:p>
-          <a:p>
-            <a:pPr indent="0" marL="0">
-              <a:buNone/>
-            </a:pPr>
-            <a:r>
-              <a:rPr lang="en-US" sz="1600" dirty="0">
-                <a:solidFill>
-                  <a:srgbClr val="14161B"/>
-                </a:solidFill>
-                <a:latin typeface="Trade Gothic Next" pitchFamily="34" charset="0"/>
-                <a:ea typeface="Trade Gothic Next" pitchFamily="34" charset="-122"/>
-                <a:cs typeface="Trade Gothic Next" pitchFamily="34" charset="-120"/>
-              </a:rPr>
-              <a:t>18 electrons</a:t>
-            </a:r>
-            <a:endParaRPr lang="en-US" sz="1600" dirty="0"/>
-          </a:p>
-        </p:txBody>
-      </p:sp>
-      <p:sp>
-        <p:nvSpPr>
-          <p:cNvPr id="9" name="Text 6"/>
-          <p:cNvSpPr txBox="1"/>
-          <p:nvPr>
-            <p:ph idx="114" type="body" hasCustomPrompt="1"/>
-          </p:nvPr>
-        </p:nvSpPr>
-        <p:spPr>
-          <a:xfrm>
-            <a:off x="6327648" y="4828032"/>
-            <a:ext cx="5129784" cy="219456"/>
-          </a:xfrm>
-          <a:prstGeom prst="rect">
-            <a:avLst/>
-          </a:prstGeom>
-          <a:noFill/>
-          <a:ln/>
-        </p:spPr>
-        <p:txBody>
-          <a:bodyPr wrap="square" lIns="0" tIns="0" rIns="0" bIns="0" rtlCol="0"/>
-          <a:lstStyle/>
-          <a:p>
-            <a:pPr indent="0" marL="0">
-              <a:buNone/>
-            </a:pPr>
-            <a:r>
-              <a:rPr lang="en-US" sz="1200" b="1" spc="120" kern="0" dirty="0">
-                <a:solidFill>
-                  <a:srgbClr val="2E3338"/>
-                </a:solidFill>
-                <a:latin typeface="Trade Gothic Next" pitchFamily="34" charset="0"/>
-                <a:ea typeface="Trade Gothic Next" pitchFamily="34" charset="-122"/>
-                <a:cs typeface="Trade Gothic Next" pitchFamily="34" charset="-120"/>
-              </a:rPr>
-              <a:t>THE MATCH</a:t>
-            </a:r>
-            <a:endParaRPr lang="en-US" sz="1200" dirty="0"/>
-          </a:p>
-        </p:txBody>
-      </p:sp>
-      <p:sp>
-        <p:nvSpPr>
-          <p:cNvPr id="10" name="Text 6"/>
-          <p:cNvSpPr txBox="1"/>
-          <p:nvPr>
-            <p:ph idx="115" type="body" hasCustomPrompt="1"/>
-          </p:nvPr>
-        </p:nvSpPr>
-        <p:spPr>
-          <a:xfrm>
-            <a:off x="6327648" y="5120640"/>
-            <a:ext cx="5129784" cy="320040"/>
-          </a:xfrm>
-          <a:prstGeom prst="rect">
-            <a:avLst/>
-          </a:prstGeom>
-          <a:noFill/>
-          <a:ln/>
-        </p:spPr>
-        <p:txBody>
-          <a:bodyPr wrap="square" lIns="0" tIns="0" rIns="0" bIns="0" rtlCol="0"/>
-          <a:lstStyle/>
-          <a:p>
-            <a:pPr indent="0" marL="0">
-              <a:buNone/>
-            </a:pPr>
-            <a:r>
-              <a:rPr lang="en-US" sz="1600" dirty="0">
-                <a:solidFill>
-                  <a:srgbClr val="14161B"/>
-                </a:solidFill>
-                <a:latin typeface="Trade Gothic Next" pitchFamily="34" charset="0"/>
-                <a:ea typeface="Trade Gothic Next" pitchFamily="34" charset="-122"/>
-                <a:cs typeface="Trade Gothic Next" pitchFamily="34" charset="-120"/>
-              </a:rPr>
-              <a:t>That is the configuration of argon, [Ar]. The new electron went into 3p, not a new level.</a:t>
-            </a:r>
-            <a:endParaRPr lang="en-US" sz="1600" dirty="0"/>
-          </a:p>
-        </p:txBody>
-      </p:sp>
-      <p:sp>
-        <p:nvSpPr>
-          <p:cNvPr id="11" name="Text 1"/>
-          <p:cNvSpPr txBox="1"/>
-          <p:nvPr>
-            <p:ph idx="101" type="body" hasCustomPrompt="1"/>
-          </p:nvPr>
-        </p:nvSpPr>
-        <p:spPr>
-          <a:xfrm>
-            <a:off x="685800" y="384048"/>
-            <a:ext cx="6400800" cy="237744"/>
-          </a:xfrm>
-          <a:prstGeom prst="rect">
-            <a:avLst/>
-          </a:prstGeom>
-          <a:noFill/>
-          <a:ln/>
-        </p:spPr>
-        <p:txBody>
-          <a:bodyPr wrap="square" lIns="0" tIns="0" rIns="0" bIns="0" rtlCol="0" anchor="ctr"/>
-          <a:lstStyle/>
-          <a:p>
-            <a:pPr indent="0" marL="0">
-              <a:buNone/>
-            </a:pPr>
-            <a:r>
-              <a:rPr lang="en-US" sz="1100" b="1" spc="160" kern="0" dirty="0">
-                <a:solidFill>
-                  <a:srgbClr val="14161B"/>
-                </a:solidFill>
-                <a:latin typeface="Trade Gothic Next" pitchFamily="34" charset="0"/>
-                <a:ea typeface="Trade Gothic Next" pitchFamily="34" charset="-122"/>
-                <a:cs typeface="Trade Gothic Next" pitchFamily="34" charset="-120"/>
-              </a:rPr>
-              <a:t>UNIT 02  •  CHEMISTRY</a:t>
-            </a:r>
-            <a:endParaRPr lang="en-US" sz="1100" dirty="0"/>
-          </a:p>
-        </p:txBody>
-      </p:sp>
-      <p:sp>
-        <p:nvSpPr>
-          <p:cNvPr id="12" name="Text 7"/>
-          <p:cNvSpPr txBox="1"/>
-          <p:nvPr>
-            <p:ph idx="117" type="body" hasCustomPrompt="1"/>
-          </p:nvPr>
-        </p:nvSpPr>
-        <p:spPr>
-          <a:xfrm>
-            <a:off x="8762695" y="6382512"/>
-            <a:ext cx="2743200" cy="237744"/>
-          </a:xfrm>
-          <a:prstGeom prst="rect">
-            <a:avLst/>
-          </a:prstGeom>
-          <a:noFill/>
-          <a:ln/>
-        </p:spPr>
-        <p:txBody>
-          <a:bodyPr wrap="square" lIns="0" tIns="0" rIns="0" bIns="0" rtlCol="0" anchor="ctr"/>
-          <a:lstStyle/>
-          <a:p>
-            <a:pPr algn="r" indent="0" marL="0">
-              <a:buNone/>
-            </a:pPr>
-            <a:r>
-              <a:rPr lang="en-US" sz="1000" b="1" spc="140" kern="0" dirty="0">
-                <a:solidFill>
-                  <a:srgbClr val="2E3338"/>
-                </a:solidFill>
-                <a:latin typeface="Trade Gothic Next" pitchFamily="34" charset="0"/>
-                <a:ea typeface="Trade Gothic Next" pitchFamily="34" charset="-122"/>
-                <a:cs typeface="Trade Gothic Next" pitchFamily="34" charset="-120"/>
-              </a:rPr>
-              <a:t>U02 • S02.4</a:t>
-            </a:r>
-            <a:endParaRPr lang="en-US" sz="1000" dirty="0"/>
-          </a:p>
-        </p:txBody>
-      </p:sp>
-      <p:sp>
-        <p:nvSpPr>
-          <p:cNvPr id="14" name="Text 3"/>
-          <p:cNvSpPr txBox="1"/>
-          <p:nvPr>
-            <p:ph idx="106" type="body" hasCustomPrompt="1"/>
-          </p:nvPr>
-        </p:nvSpPr>
-        <p:spPr>
-          <a:xfrm>
-            <a:off x="914400" y="2651760"/>
-            <a:ext cx="4617720" cy="2743200"/>
-          </a:xfrm>
-          <a:prstGeom prst="rect">
-            <a:avLst/>
-          </a:prstGeom>
-          <a:noFill/>
-          <a:ln/>
-        </p:spPr>
-        <p:txBody>
-          <a:bodyPr wrap="square" lIns="0" tIns="0" rIns="0" bIns="0" rtlCol="0" anchor="ctr"/>
-          <a:lstStyle/>
-          <a:p>
-            <a:pPr algn="ctr" indent="0" marL="0">
-              <a:buNone/>
-            </a:pPr>
-            <a:endParaRPr lang="en-US" sz="2000" dirty="0"/>
-          </a:p>
-        </p:txBody>
-      </p:sp>
-    </p:spTree>
-  </p:cSld>
-  <p:clrMapOvr>
-    <a:masterClrMapping/>
-  </p:clrMapOvr>
-</p:sld>
-</file>
-
-<file path=ppt/slides/slide13.xml><?xml version="1.0" encoding="utf-8"?>
-<p:sld xmlns:a="http://schemas.openxmlformats.org/drawingml/2006/main" xmlns:r="http://schemas.openxmlformats.org/officeDocument/2006/relationships" xmlns:p="http://schemas.openxmlformats.org/presentationml/2006/main">
-  <p:cSld name="Slide 13">
-    <p:spTree>
-      <p:nvGrpSpPr>
-        <p:cNvPr id="1" name=""/>
-        <p:cNvGrpSpPr/>
-        <p:nvPr/>
-      </p:nvGrpSpPr>
-      <p:grpSpPr>
-        <a:xfrm>
-          <a:off x="0" y="0"/>
-          <a:ext cx="0" cy="0"/>
-          <a:chOff x="0" y="0"/>
-          <a:chExt cx="0" cy="0"/>
-        </a:xfrm>
-      </p:grpSpPr>
-      <p:sp>
-        <p:nvSpPr>
-          <p:cNvPr id="2" name="Text 2"/>
-          <p:cNvSpPr txBox="1"/>
-          <p:nvPr>
-            <p:ph idx="103" type="title" hasCustomPrompt="1"/>
-          </p:nvPr>
-        </p:nvSpPr>
-        <p:spPr>
-          <a:xfrm>
-            <a:off x="685800" y="932688"/>
-            <a:ext cx="7360920" cy="868680"/>
-          </a:xfrm>
-          <a:prstGeom prst="rect">
-            <a:avLst/>
-          </a:prstGeom>
-          <a:noFill/>
-          <a:ln/>
-        </p:spPr>
-        <p:txBody>
-          <a:bodyPr wrap="square" lIns="0" tIns="0" rIns="0" bIns="0" rtlCol="0" anchor="t"/>
-          <a:lstStyle/>
-          <a:p>
-            <a:pPr algn="l" indent="0" marL="0">
-              <a:buNone/>
-            </a:pPr>
-            <a:r>
-              <a:rPr lang="en-US" sz="2800" b="1" dirty="0">
-                <a:solidFill>
-                  <a:srgbClr val="14161B"/>
-                </a:solidFill>
-                <a:latin typeface="Trade Gothic Next" pitchFamily="34" charset="0"/>
-                <a:ea typeface="Trade Gothic Next" pitchFamily="34" charset="-122"/>
-                <a:cs typeface="Trade Gothic Next" pitchFamily="34" charset="-120"/>
-              </a:rPr>
-              <a:t>Three More Anions</a:t>
-            </a:r>
-            <a:endParaRPr lang="en-US" sz="2800" dirty="0"/>
-          </a:p>
-        </p:txBody>
-      </p:sp>
-      <p:sp>
-        <p:nvSpPr>
-          <p:cNvPr id="3" name="Text 2"/>
-          <p:cNvSpPr txBox="1"/>
-          <p:nvPr>
-            <p:ph idx="104" type="body" hasCustomPrompt="1"/>
-          </p:nvPr>
-        </p:nvSpPr>
-        <p:spPr>
-          <a:xfrm>
-            <a:off x="685800" y="1847088"/>
-            <a:ext cx="7360920" cy="384048"/>
-          </a:xfrm>
-          <a:prstGeom prst="rect">
-            <a:avLst/>
-          </a:prstGeom>
-          <a:noFill/>
-          <a:ln/>
-        </p:spPr>
-        <p:txBody>
-          <a:bodyPr wrap="square" lIns="0" tIns="0" rIns="0" bIns="0" rtlCol="0"/>
-          <a:lstStyle/>
-          <a:p>
-            <a:pPr indent="0" marL="0">
-              <a:buNone/>
-            </a:pPr>
-            <a:r>
-              <a:rPr lang="en-US" sz="1700" dirty="0">
-                <a:solidFill>
-                  <a:srgbClr val="2E3338"/>
-                </a:solidFill>
-                <a:latin typeface="Trade Gothic Next" pitchFamily="34" charset="0"/>
-                <a:ea typeface="Trade Gothic Next" pitchFamily="34" charset="-122"/>
-                <a:cs typeface="Trade Gothic Next" pitchFamily="34" charset="-120"/>
-              </a:rPr>
-              <a:t>Same move every time. Fill the open spots in the outer s and p.</a:t>
-            </a:r>
-            <a:endParaRPr lang="en-US" sz="1700" dirty="0"/>
-          </a:p>
-        </p:txBody>
-      </p:sp>
-      <p:sp>
-        <p:nvSpPr>
-          <p:cNvPr id="4" name="Text 5"/>
-          <p:cNvSpPr txBox="1"/>
-          <p:nvPr>
-            <p:ph idx="109" type="body" hasCustomPrompt="1"/>
-          </p:nvPr>
-        </p:nvSpPr>
-        <p:spPr>
-          <a:xfrm>
-            <a:off x="886968" y="2953512"/>
-            <a:ext cx="2999232" cy="219456"/>
-          </a:xfrm>
-          <a:prstGeom prst="rect">
-            <a:avLst/>
-          </a:prstGeom>
-          <a:noFill/>
-          <a:ln/>
-        </p:spPr>
-        <p:txBody>
-          <a:bodyPr wrap="square" lIns="0" tIns="0" rIns="0" bIns="0" rtlCol="0"/>
-          <a:lstStyle/>
-          <a:p>
-            <a:pPr indent="0" marL="0">
-              <a:buNone/>
-            </a:pPr>
-            <a:r>
-              <a:rPr lang="en-US" sz="1200" b="1" spc="120" kern="0" dirty="0">
-                <a:solidFill>
-                  <a:srgbClr val="2E3338"/>
-                </a:solidFill>
-                <a:latin typeface="Trade Gothic Next" pitchFamily="34" charset="0"/>
-                <a:ea typeface="Trade Gothic Next" pitchFamily="34" charset="-122"/>
-                <a:cs typeface="Trade Gothic Next" pitchFamily="34" charset="-120"/>
-              </a:rPr>
-              <a:t>OXYGEN</a:t>
-            </a:r>
-            <a:endParaRPr lang="en-US" sz="1200" dirty="0"/>
-          </a:p>
-        </p:txBody>
-      </p:sp>
-      <p:sp>
-        <p:nvSpPr>
-          <p:cNvPr id="5" name="Text 5"/>
-          <p:cNvSpPr txBox="1"/>
-          <p:nvPr>
-            <p:ph idx="110" type="body" hasCustomPrompt="1"/>
-          </p:nvPr>
-        </p:nvSpPr>
-        <p:spPr>
-          <a:xfrm>
-            <a:off x="886968" y="3246120"/>
-            <a:ext cx="2999232" cy="1673352"/>
-          </a:xfrm>
-          <a:prstGeom prst="rect">
-            <a:avLst/>
-          </a:prstGeom>
-          <a:noFill/>
-          <a:ln/>
-        </p:spPr>
-        <p:txBody>
-          <a:bodyPr wrap="square" lIns="0" tIns="0" rIns="0" bIns="0" rtlCol="0"/>
-          <a:lstStyle/>
-          <a:p>
-            <a:pPr indent="0" marL="0">
-              <a:buNone/>
-            </a:pPr>
-            <a:r>
-              <a:rPr lang="en-US" sz="1600" dirty="0">
-                <a:solidFill>
-                  <a:srgbClr val="14161B"/>
-                </a:solidFill>
-                <a:latin typeface="Trade Gothic Next" pitchFamily="34" charset="0"/>
-                <a:ea typeface="Trade Gothic Next" pitchFamily="34" charset="-122"/>
-                <a:cs typeface="Trade Gothic Next" pitchFamily="34" charset="-120"/>
-              </a:rPr>
-              <a:t>O: 1s</a:t>
-            </a:r>
-            <a:pPr indent="0" marL="0">
-              <a:buNone/>
-            </a:pPr>
-            <a:r>
-              <a:rPr lang="en-US" sz="1600" baseline="30000" dirty="0">
-                <a:solidFill>
-                  <a:srgbClr val="14161B"/>
-                </a:solidFill>
-                <a:latin typeface="Trade Gothic Next" pitchFamily="34" charset="0"/>
-                <a:ea typeface="Trade Gothic Next" pitchFamily="34" charset="-122"/>
-                <a:cs typeface="Trade Gothic Next" pitchFamily="34" charset="-120"/>
-              </a:rPr>
-              <a:t>2</a:t>
-            </a:r>
-            <a:pPr indent="0" marL="0">
-              <a:buNone/>
-            </a:pPr>
-            <a:r>
-              <a:rPr lang="en-US" sz="1600" dirty="0">
-                <a:solidFill>
-                  <a:srgbClr val="14161B"/>
-                </a:solidFill>
-                <a:latin typeface="Trade Gothic Next" pitchFamily="34" charset="0"/>
-                <a:ea typeface="Trade Gothic Next" pitchFamily="34" charset="-122"/>
-                <a:cs typeface="Trade Gothic Next" pitchFamily="34" charset="-120"/>
-              </a:rPr>
-              <a:t> 2s</a:t>
-            </a:r>
-            <a:pPr indent="0" marL="0">
-              <a:buNone/>
-            </a:pPr>
-            <a:r>
-              <a:rPr lang="en-US" sz="1600" baseline="30000" dirty="0">
-                <a:solidFill>
-                  <a:srgbClr val="14161B"/>
-                </a:solidFill>
-                <a:latin typeface="Trade Gothic Next" pitchFamily="34" charset="0"/>
-                <a:ea typeface="Trade Gothic Next" pitchFamily="34" charset="-122"/>
-                <a:cs typeface="Trade Gothic Next" pitchFamily="34" charset="-120"/>
-              </a:rPr>
-              <a:t>2</a:t>
-            </a:r>
-            <a:pPr indent="0" marL="0">
-              <a:buNone/>
-            </a:pPr>
-            <a:r>
-              <a:rPr lang="en-US" sz="1600" dirty="0">
-                <a:solidFill>
-                  <a:srgbClr val="14161B"/>
-                </a:solidFill>
-                <a:latin typeface="Trade Gothic Next" pitchFamily="34" charset="0"/>
-                <a:ea typeface="Trade Gothic Next" pitchFamily="34" charset="-122"/>
-                <a:cs typeface="Trade Gothic Next" pitchFamily="34" charset="-120"/>
-              </a:rPr>
-              <a:t> 2p</a:t>
-            </a:r>
-            <a:pPr indent="0" marL="0">
-              <a:buNone/>
-            </a:pPr>
-            <a:r>
-              <a:rPr lang="en-US" sz="1600" baseline="30000" dirty="0">
-                <a:solidFill>
-                  <a:srgbClr val="14161B"/>
-                </a:solidFill>
-                <a:latin typeface="Trade Gothic Next" pitchFamily="34" charset="0"/>
-                <a:ea typeface="Trade Gothic Next" pitchFamily="34" charset="-122"/>
-                <a:cs typeface="Trade Gothic Next" pitchFamily="34" charset="-120"/>
-              </a:rPr>
-              <a:t>4</a:t>
-            </a:r>
-            <a:endParaRPr lang="en-US" sz="1600" dirty="0"/>
-          </a:p>
-          <a:p>
-            <a:pPr indent="0" marL="0">
-              <a:buNone/>
-            </a:pPr>
-            <a:r>
-              <a:rPr lang="en-US" sz="1600" dirty="0">
-                <a:solidFill>
-                  <a:srgbClr val="14161B"/>
-                </a:solidFill>
-                <a:latin typeface="Trade Gothic Next" pitchFamily="34" charset="0"/>
-                <a:ea typeface="Trade Gothic Next" pitchFamily="34" charset="-122"/>
-                <a:cs typeface="Trade Gothic Next" pitchFamily="34" charset="-120"/>
-              </a:rPr>
-              <a:t>O</a:t>
-            </a:r>
-            <a:pPr indent="0" marL="0">
-              <a:buNone/>
-            </a:pPr>
-            <a:r>
-              <a:rPr lang="en-US" sz="1600" baseline="30000" dirty="0">
-                <a:solidFill>
-                  <a:srgbClr val="14161B"/>
-                </a:solidFill>
-                <a:latin typeface="Trade Gothic Next" pitchFamily="34" charset="0"/>
-                <a:ea typeface="Trade Gothic Next" pitchFamily="34" charset="-122"/>
-                <a:cs typeface="Trade Gothic Next" pitchFamily="34" charset="-120"/>
-              </a:rPr>
-              <a:t>2−</a:t>
-            </a:r>
-            <a:pPr indent="0" marL="0">
-              <a:buNone/>
-            </a:pPr>
-            <a:r>
-              <a:rPr lang="en-US" sz="1600" dirty="0">
-                <a:solidFill>
-                  <a:srgbClr val="14161B"/>
-                </a:solidFill>
-                <a:latin typeface="Trade Gothic Next" pitchFamily="34" charset="0"/>
-                <a:ea typeface="Trade Gothic Next" pitchFamily="34" charset="-122"/>
-                <a:cs typeface="Trade Gothic Next" pitchFamily="34" charset="-120"/>
-              </a:rPr>
-              <a:t>: 1s</a:t>
-            </a:r>
-            <a:pPr indent="0" marL="0">
-              <a:buNone/>
-            </a:pPr>
-            <a:r>
-              <a:rPr lang="en-US" sz="1600" baseline="30000" dirty="0">
-                <a:solidFill>
-                  <a:srgbClr val="14161B"/>
-                </a:solidFill>
-                <a:latin typeface="Trade Gothic Next" pitchFamily="34" charset="0"/>
-                <a:ea typeface="Trade Gothic Next" pitchFamily="34" charset="-122"/>
-                <a:cs typeface="Trade Gothic Next" pitchFamily="34" charset="-120"/>
-              </a:rPr>
-              <a:t>2</a:t>
-            </a:r>
-            <a:pPr indent="0" marL="0">
-              <a:buNone/>
-            </a:pPr>
-            <a:r>
-              <a:rPr lang="en-US" sz="1600" dirty="0">
-                <a:solidFill>
-                  <a:srgbClr val="14161B"/>
-                </a:solidFill>
-                <a:latin typeface="Trade Gothic Next" pitchFamily="34" charset="0"/>
-                <a:ea typeface="Trade Gothic Next" pitchFamily="34" charset="-122"/>
-                <a:cs typeface="Trade Gothic Next" pitchFamily="34" charset="-120"/>
-              </a:rPr>
-              <a:t> 2s</a:t>
-            </a:r>
-            <a:pPr indent="0" marL="0">
-              <a:buNone/>
-            </a:pPr>
-            <a:r>
-              <a:rPr lang="en-US" sz="1600" baseline="30000" dirty="0">
-                <a:solidFill>
-                  <a:srgbClr val="14161B"/>
-                </a:solidFill>
-                <a:latin typeface="Trade Gothic Next" pitchFamily="34" charset="0"/>
-                <a:ea typeface="Trade Gothic Next" pitchFamily="34" charset="-122"/>
-                <a:cs typeface="Trade Gothic Next" pitchFamily="34" charset="-120"/>
-              </a:rPr>
-              <a:t>2</a:t>
-            </a:r>
-            <a:pPr indent="0" marL="0">
-              <a:buNone/>
-            </a:pPr>
-            <a:r>
-              <a:rPr lang="en-US" sz="1600" dirty="0">
-                <a:solidFill>
-                  <a:srgbClr val="14161B"/>
-                </a:solidFill>
-                <a:latin typeface="Trade Gothic Next" pitchFamily="34" charset="0"/>
-                <a:ea typeface="Trade Gothic Next" pitchFamily="34" charset="-122"/>
-                <a:cs typeface="Trade Gothic Next" pitchFamily="34" charset="-120"/>
-              </a:rPr>
-              <a:t> 2p</a:t>
-            </a:r>
-            <a:pPr indent="0" marL="0">
-              <a:buNone/>
-            </a:pPr>
-            <a:r>
-              <a:rPr lang="en-US" sz="1600" baseline="30000" dirty="0">
-                <a:solidFill>
-                  <a:srgbClr val="14161B"/>
-                </a:solidFill>
-                <a:latin typeface="Trade Gothic Next" pitchFamily="34" charset="0"/>
-                <a:ea typeface="Trade Gothic Next" pitchFamily="34" charset="-122"/>
-                <a:cs typeface="Trade Gothic Next" pitchFamily="34" charset="-120"/>
-              </a:rPr>
-              <a:t>6</a:t>
-            </a:r>
-            <a:endParaRPr lang="en-US" sz="1600" dirty="0"/>
-          </a:p>
-          <a:p>
-            <a:pPr indent="0" marL="0">
-              <a:buNone/>
-            </a:pPr>
-            <a:r>
-              <a:rPr lang="en-US" sz="1600" dirty="0">
-                <a:solidFill>
-                  <a:srgbClr val="14161B"/>
-                </a:solidFill>
-                <a:latin typeface="Trade Gothic Next" pitchFamily="34" charset="0"/>
-                <a:ea typeface="Trade Gothic Next" pitchFamily="34" charset="-122"/>
-                <a:cs typeface="Trade Gothic Next" pitchFamily="34" charset="-120"/>
-              </a:rPr>
-              <a:t>= [Ne], 10 electrons</a:t>
-            </a:r>
-            <a:endParaRPr lang="en-US" sz="1600" dirty="0"/>
-          </a:p>
-        </p:txBody>
-      </p:sp>
-      <p:sp>
-        <p:nvSpPr>
-          <p:cNvPr id="6" name="Text 6"/>
-          <p:cNvSpPr txBox="1"/>
-          <p:nvPr>
-            <p:ph idx="112" type="body" hasCustomPrompt="1"/>
-          </p:nvPr>
-        </p:nvSpPr>
-        <p:spPr>
-          <a:xfrm>
-            <a:off x="4498848" y="2953512"/>
-            <a:ext cx="2999232" cy="219456"/>
-          </a:xfrm>
-          <a:prstGeom prst="rect">
-            <a:avLst/>
-          </a:prstGeom>
-          <a:noFill/>
-          <a:ln/>
-        </p:spPr>
-        <p:txBody>
-          <a:bodyPr wrap="square" lIns="0" tIns="0" rIns="0" bIns="0" rtlCol="0"/>
-          <a:lstStyle/>
-          <a:p>
-            <a:pPr indent="0" marL="0">
-              <a:buNone/>
-            </a:pPr>
-            <a:r>
-              <a:rPr lang="en-US" sz="1200" b="1" spc="120" kern="0" dirty="0">
-                <a:solidFill>
-                  <a:srgbClr val="2E3338"/>
-                </a:solidFill>
-                <a:latin typeface="Trade Gothic Next" pitchFamily="34" charset="0"/>
-                <a:ea typeface="Trade Gothic Next" pitchFamily="34" charset="-122"/>
-                <a:cs typeface="Trade Gothic Next" pitchFamily="34" charset="-120"/>
-              </a:rPr>
-              <a:t>SULFUR</a:t>
-            </a:r>
-            <a:endParaRPr lang="en-US" sz="1200" dirty="0"/>
-          </a:p>
-        </p:txBody>
-      </p:sp>
-      <p:sp>
-        <p:nvSpPr>
-          <p:cNvPr id="7" name="Text 6"/>
-          <p:cNvSpPr txBox="1"/>
-          <p:nvPr>
-            <p:ph idx="113" type="body" hasCustomPrompt="1"/>
-          </p:nvPr>
-        </p:nvSpPr>
-        <p:spPr>
-          <a:xfrm>
-            <a:off x="4498848" y="3246120"/>
-            <a:ext cx="2999232" cy="1673352"/>
-          </a:xfrm>
-          <a:prstGeom prst="rect">
-            <a:avLst/>
-          </a:prstGeom>
-          <a:noFill/>
-          <a:ln/>
-        </p:spPr>
-        <p:txBody>
-          <a:bodyPr wrap="square" lIns="0" tIns="0" rIns="0" bIns="0" rtlCol="0"/>
-          <a:lstStyle/>
-          <a:p>
-            <a:pPr indent="0" marL="0">
-              <a:buNone/>
-            </a:pPr>
-            <a:r>
-              <a:rPr lang="en-US" sz="1600" dirty="0">
-                <a:solidFill>
-                  <a:srgbClr val="14161B"/>
-                </a:solidFill>
-                <a:latin typeface="Trade Gothic Next" pitchFamily="34" charset="0"/>
-                <a:ea typeface="Trade Gothic Next" pitchFamily="34" charset="-122"/>
-                <a:cs typeface="Trade Gothic Next" pitchFamily="34" charset="-120"/>
-              </a:rPr>
-              <a:t>S: [Ne] 3s</a:t>
-            </a:r>
-            <a:pPr indent="0" marL="0">
-              <a:buNone/>
-            </a:pPr>
-            <a:r>
-              <a:rPr lang="en-US" sz="1600" baseline="30000" dirty="0">
-                <a:solidFill>
-                  <a:srgbClr val="14161B"/>
-                </a:solidFill>
-                <a:latin typeface="Trade Gothic Next" pitchFamily="34" charset="0"/>
-                <a:ea typeface="Trade Gothic Next" pitchFamily="34" charset="-122"/>
-                <a:cs typeface="Trade Gothic Next" pitchFamily="34" charset="-120"/>
-              </a:rPr>
-              <a:t>2</a:t>
-            </a:r>
-            <a:pPr indent="0" marL="0">
-              <a:buNone/>
-            </a:pPr>
-            <a:r>
-              <a:rPr lang="en-US" sz="1600" dirty="0">
-                <a:solidFill>
-                  <a:srgbClr val="14161B"/>
-                </a:solidFill>
-                <a:latin typeface="Trade Gothic Next" pitchFamily="34" charset="0"/>
-                <a:ea typeface="Trade Gothic Next" pitchFamily="34" charset="-122"/>
-                <a:cs typeface="Trade Gothic Next" pitchFamily="34" charset="-120"/>
-              </a:rPr>
-              <a:t> 3p</a:t>
-            </a:r>
-            <a:pPr indent="0" marL="0">
-              <a:buNone/>
-            </a:pPr>
-            <a:r>
-              <a:rPr lang="en-US" sz="1600" baseline="30000" dirty="0">
-                <a:solidFill>
-                  <a:srgbClr val="14161B"/>
-                </a:solidFill>
-                <a:latin typeface="Trade Gothic Next" pitchFamily="34" charset="0"/>
-                <a:ea typeface="Trade Gothic Next" pitchFamily="34" charset="-122"/>
-                <a:cs typeface="Trade Gothic Next" pitchFamily="34" charset="-120"/>
-              </a:rPr>
-              <a:t>4</a:t>
-            </a:r>
-            <a:endParaRPr lang="en-US" sz="1600" dirty="0"/>
-          </a:p>
-          <a:p>
-            <a:pPr indent="0" marL="0">
-              <a:buNone/>
-            </a:pPr>
-            <a:r>
-              <a:rPr lang="en-US" sz="1600" dirty="0">
-                <a:solidFill>
-                  <a:srgbClr val="14161B"/>
-                </a:solidFill>
-                <a:latin typeface="Trade Gothic Next" pitchFamily="34" charset="0"/>
-                <a:ea typeface="Trade Gothic Next" pitchFamily="34" charset="-122"/>
-                <a:cs typeface="Trade Gothic Next" pitchFamily="34" charset="-120"/>
-              </a:rPr>
-              <a:t>S</a:t>
-            </a:r>
-            <a:pPr indent="0" marL="0">
-              <a:buNone/>
-            </a:pPr>
-            <a:r>
-              <a:rPr lang="en-US" sz="1600" baseline="30000" dirty="0">
-                <a:solidFill>
-                  <a:srgbClr val="14161B"/>
-                </a:solidFill>
-                <a:latin typeface="Trade Gothic Next" pitchFamily="34" charset="0"/>
-                <a:ea typeface="Trade Gothic Next" pitchFamily="34" charset="-122"/>
-                <a:cs typeface="Trade Gothic Next" pitchFamily="34" charset="-120"/>
-              </a:rPr>
-              <a:t>2−</a:t>
-            </a:r>
-            <a:pPr indent="0" marL="0">
-              <a:buNone/>
-            </a:pPr>
-            <a:r>
-              <a:rPr lang="en-US" sz="1600" dirty="0">
-                <a:solidFill>
-                  <a:srgbClr val="14161B"/>
-                </a:solidFill>
-                <a:latin typeface="Trade Gothic Next" pitchFamily="34" charset="0"/>
-                <a:ea typeface="Trade Gothic Next" pitchFamily="34" charset="-122"/>
-                <a:cs typeface="Trade Gothic Next" pitchFamily="34" charset="-120"/>
-              </a:rPr>
-              <a:t>: [Ne] 3s</a:t>
-            </a:r>
-            <a:pPr indent="0" marL="0">
-              <a:buNone/>
-            </a:pPr>
-            <a:r>
-              <a:rPr lang="en-US" sz="1600" baseline="30000" dirty="0">
-                <a:solidFill>
-                  <a:srgbClr val="14161B"/>
-                </a:solidFill>
-                <a:latin typeface="Trade Gothic Next" pitchFamily="34" charset="0"/>
-                <a:ea typeface="Trade Gothic Next" pitchFamily="34" charset="-122"/>
-                <a:cs typeface="Trade Gothic Next" pitchFamily="34" charset="-120"/>
-              </a:rPr>
-              <a:t>2</a:t>
-            </a:r>
-            <a:pPr indent="0" marL="0">
-              <a:buNone/>
-            </a:pPr>
-            <a:r>
-              <a:rPr lang="en-US" sz="1600" dirty="0">
-                <a:solidFill>
-                  <a:srgbClr val="14161B"/>
-                </a:solidFill>
-                <a:latin typeface="Trade Gothic Next" pitchFamily="34" charset="0"/>
-                <a:ea typeface="Trade Gothic Next" pitchFamily="34" charset="-122"/>
-                <a:cs typeface="Trade Gothic Next" pitchFamily="34" charset="-120"/>
-              </a:rPr>
-              <a:t> 3p</a:t>
-            </a:r>
-            <a:pPr indent="0" marL="0">
-              <a:buNone/>
-            </a:pPr>
-            <a:r>
-              <a:rPr lang="en-US" sz="1600" baseline="30000" dirty="0">
-                <a:solidFill>
-                  <a:srgbClr val="14161B"/>
-                </a:solidFill>
-                <a:latin typeface="Trade Gothic Next" pitchFamily="34" charset="0"/>
-                <a:ea typeface="Trade Gothic Next" pitchFamily="34" charset="-122"/>
-                <a:cs typeface="Trade Gothic Next" pitchFamily="34" charset="-120"/>
-              </a:rPr>
-              <a:t>6</a:t>
-            </a:r>
-            <a:endParaRPr lang="en-US" sz="1600" dirty="0"/>
-          </a:p>
-          <a:p>
-            <a:pPr indent="0" marL="0">
-              <a:buNone/>
-            </a:pPr>
-            <a:r>
-              <a:rPr lang="en-US" sz="1600" dirty="0">
-                <a:solidFill>
-                  <a:srgbClr val="14161B"/>
-                </a:solidFill>
-                <a:latin typeface="Trade Gothic Next" pitchFamily="34" charset="0"/>
-                <a:ea typeface="Trade Gothic Next" pitchFamily="34" charset="-122"/>
-                <a:cs typeface="Trade Gothic Next" pitchFamily="34" charset="-120"/>
-              </a:rPr>
-              <a:t>= [Ar], 18 electrons</a:t>
-            </a:r>
-            <a:endParaRPr lang="en-US" sz="1600" dirty="0"/>
-          </a:p>
-        </p:txBody>
-      </p:sp>
-      <p:sp>
-        <p:nvSpPr>
-          <p:cNvPr id="8" name="Text 7"/>
-          <p:cNvSpPr txBox="1"/>
-          <p:nvPr>
-            <p:ph idx="115" type="body" hasCustomPrompt="1"/>
-          </p:nvPr>
-        </p:nvSpPr>
-        <p:spPr>
-          <a:xfrm>
-            <a:off x="8110728" y="2953512"/>
-            <a:ext cx="2999232" cy="219456"/>
-          </a:xfrm>
-          <a:prstGeom prst="rect">
-            <a:avLst/>
-          </a:prstGeom>
-          <a:noFill/>
-          <a:ln/>
-        </p:spPr>
-        <p:txBody>
-          <a:bodyPr wrap="square" lIns="0" tIns="0" rIns="0" bIns="0" rtlCol="0"/>
-          <a:lstStyle/>
-          <a:p>
-            <a:pPr indent="0" marL="0">
-              <a:buNone/>
-            </a:pPr>
-            <a:r>
-              <a:rPr lang="en-US" sz="1200" b="1" spc="120" kern="0" dirty="0">
-                <a:solidFill>
-                  <a:srgbClr val="2E3338"/>
-                </a:solidFill>
-                <a:latin typeface="Trade Gothic Next" pitchFamily="34" charset="0"/>
-                <a:ea typeface="Trade Gothic Next" pitchFamily="34" charset="-122"/>
-                <a:cs typeface="Trade Gothic Next" pitchFamily="34" charset="-120"/>
-              </a:rPr>
-              <a:t>BROMINE</a:t>
-            </a:r>
-            <a:endParaRPr lang="en-US" sz="1200" dirty="0"/>
-          </a:p>
-        </p:txBody>
-      </p:sp>
-      <p:sp>
-        <p:nvSpPr>
-          <p:cNvPr id="9" name="Text 7"/>
-          <p:cNvSpPr txBox="1"/>
-          <p:nvPr>
-            <p:ph idx="116" type="body" hasCustomPrompt="1"/>
-          </p:nvPr>
-        </p:nvSpPr>
-        <p:spPr>
-          <a:xfrm>
-            <a:off x="8110728" y="3246120"/>
-            <a:ext cx="2999232" cy="1673352"/>
-          </a:xfrm>
-          <a:prstGeom prst="rect">
-            <a:avLst/>
-          </a:prstGeom>
-          <a:noFill/>
-          <a:ln/>
-        </p:spPr>
-        <p:txBody>
-          <a:bodyPr wrap="square" lIns="0" tIns="0" rIns="0" bIns="0" rtlCol="0"/>
-          <a:lstStyle/>
-          <a:p>
-            <a:pPr indent="0" marL="0">
-              <a:buNone/>
-            </a:pPr>
-            <a:r>
-              <a:rPr lang="en-US" sz="1600" dirty="0">
-                <a:solidFill>
-                  <a:srgbClr val="14161B"/>
-                </a:solidFill>
-                <a:latin typeface="Trade Gothic Next" pitchFamily="34" charset="0"/>
-                <a:ea typeface="Trade Gothic Next" pitchFamily="34" charset="-122"/>
-                <a:cs typeface="Trade Gothic Next" pitchFamily="34" charset="-120"/>
-              </a:rPr>
-              <a:t>Br: [Ar] 4s</a:t>
-            </a:r>
-            <a:pPr indent="0" marL="0">
-              <a:buNone/>
-            </a:pPr>
-            <a:r>
-              <a:rPr lang="en-US" sz="1600" baseline="30000" dirty="0">
-                <a:solidFill>
-                  <a:srgbClr val="14161B"/>
-                </a:solidFill>
-                <a:latin typeface="Trade Gothic Next" pitchFamily="34" charset="0"/>
-                <a:ea typeface="Trade Gothic Next" pitchFamily="34" charset="-122"/>
-                <a:cs typeface="Trade Gothic Next" pitchFamily="34" charset="-120"/>
-              </a:rPr>
-              <a:t>2</a:t>
-            </a:r>
-            <a:pPr indent="0" marL="0">
-              <a:buNone/>
-            </a:pPr>
-            <a:r>
-              <a:rPr lang="en-US" sz="1600" dirty="0">
-                <a:solidFill>
-                  <a:srgbClr val="14161B"/>
-                </a:solidFill>
-                <a:latin typeface="Trade Gothic Next" pitchFamily="34" charset="0"/>
-                <a:ea typeface="Trade Gothic Next" pitchFamily="34" charset="-122"/>
-                <a:cs typeface="Trade Gothic Next" pitchFamily="34" charset="-120"/>
-              </a:rPr>
-              <a:t> 3d</a:t>
-            </a:r>
-            <a:pPr indent="0" marL="0">
-              <a:buNone/>
-            </a:pPr>
-            <a:r>
-              <a:rPr lang="en-US" sz="1600" baseline="30000" dirty="0">
-                <a:solidFill>
-                  <a:srgbClr val="14161B"/>
-                </a:solidFill>
-                <a:latin typeface="Trade Gothic Next" pitchFamily="34" charset="0"/>
-                <a:ea typeface="Trade Gothic Next" pitchFamily="34" charset="-122"/>
-                <a:cs typeface="Trade Gothic Next" pitchFamily="34" charset="-120"/>
-              </a:rPr>
-              <a:t>10</a:t>
-            </a:r>
-            <a:pPr indent="0" marL="0">
-              <a:buNone/>
-            </a:pPr>
-            <a:r>
-              <a:rPr lang="en-US" sz="1600" dirty="0">
-                <a:solidFill>
-                  <a:srgbClr val="14161B"/>
-                </a:solidFill>
-                <a:latin typeface="Trade Gothic Next" pitchFamily="34" charset="0"/>
-                <a:ea typeface="Trade Gothic Next" pitchFamily="34" charset="-122"/>
-                <a:cs typeface="Trade Gothic Next" pitchFamily="34" charset="-120"/>
-              </a:rPr>
-              <a:t> 4p</a:t>
-            </a:r>
-            <a:pPr indent="0" marL="0">
-              <a:buNone/>
-            </a:pPr>
-            <a:r>
-              <a:rPr lang="en-US" sz="1600" baseline="30000" dirty="0">
-                <a:solidFill>
-                  <a:srgbClr val="14161B"/>
-                </a:solidFill>
-                <a:latin typeface="Trade Gothic Next" pitchFamily="34" charset="0"/>
-                <a:ea typeface="Trade Gothic Next" pitchFamily="34" charset="-122"/>
-                <a:cs typeface="Trade Gothic Next" pitchFamily="34" charset="-120"/>
-              </a:rPr>
-              <a:t>5</a:t>
-            </a:r>
-            <a:endParaRPr lang="en-US" sz="1600" dirty="0"/>
-          </a:p>
-          <a:p>
-            <a:pPr indent="0" marL="0">
-              <a:buNone/>
-            </a:pPr>
-            <a:r>
-              <a:rPr lang="en-US" sz="1600" dirty="0">
-                <a:solidFill>
-                  <a:srgbClr val="14161B"/>
-                </a:solidFill>
-                <a:latin typeface="Trade Gothic Next" pitchFamily="34" charset="0"/>
-                <a:ea typeface="Trade Gothic Next" pitchFamily="34" charset="-122"/>
-                <a:cs typeface="Trade Gothic Next" pitchFamily="34" charset="-120"/>
-              </a:rPr>
-              <a:t>Br</a:t>
-            </a:r>
-            <a:pPr indent="0" marL="0">
-              <a:buNone/>
-            </a:pPr>
-            <a:r>
-              <a:rPr lang="en-US" sz="1600" baseline="30000" dirty="0">
-                <a:solidFill>
-                  <a:srgbClr val="14161B"/>
-                </a:solidFill>
-                <a:latin typeface="Trade Gothic Next" pitchFamily="34" charset="0"/>
-                <a:ea typeface="Trade Gothic Next" pitchFamily="34" charset="-122"/>
-                <a:cs typeface="Trade Gothic Next" pitchFamily="34" charset="-120"/>
-              </a:rPr>
-              <a:t>−</a:t>
-            </a:r>
-            <a:pPr indent="0" marL="0">
-              <a:buNone/>
-            </a:pPr>
-            <a:r>
-              <a:rPr lang="en-US" sz="1600" dirty="0">
-                <a:solidFill>
-                  <a:srgbClr val="14161B"/>
-                </a:solidFill>
-                <a:latin typeface="Trade Gothic Next" pitchFamily="34" charset="0"/>
-                <a:ea typeface="Trade Gothic Next" pitchFamily="34" charset="-122"/>
-                <a:cs typeface="Trade Gothic Next" pitchFamily="34" charset="-120"/>
-              </a:rPr>
-              <a:t>: [Ar] 4s</a:t>
-            </a:r>
-            <a:pPr indent="0" marL="0">
-              <a:buNone/>
-            </a:pPr>
-            <a:r>
-              <a:rPr lang="en-US" sz="1600" baseline="30000" dirty="0">
-                <a:solidFill>
-                  <a:srgbClr val="14161B"/>
-                </a:solidFill>
-                <a:latin typeface="Trade Gothic Next" pitchFamily="34" charset="0"/>
-                <a:ea typeface="Trade Gothic Next" pitchFamily="34" charset="-122"/>
-                <a:cs typeface="Trade Gothic Next" pitchFamily="34" charset="-120"/>
-              </a:rPr>
-              <a:t>2</a:t>
-            </a:r>
-            <a:pPr indent="0" marL="0">
-              <a:buNone/>
-            </a:pPr>
-            <a:r>
-              <a:rPr lang="en-US" sz="1600" dirty="0">
-                <a:solidFill>
-                  <a:srgbClr val="14161B"/>
-                </a:solidFill>
-                <a:latin typeface="Trade Gothic Next" pitchFamily="34" charset="0"/>
-                <a:ea typeface="Trade Gothic Next" pitchFamily="34" charset="-122"/>
-                <a:cs typeface="Trade Gothic Next" pitchFamily="34" charset="-120"/>
-              </a:rPr>
-              <a:t> 3d</a:t>
-            </a:r>
-            <a:pPr indent="0" marL="0">
-              <a:buNone/>
-            </a:pPr>
-            <a:r>
-              <a:rPr lang="en-US" sz="1600" baseline="30000" dirty="0">
-                <a:solidFill>
-                  <a:srgbClr val="14161B"/>
-                </a:solidFill>
-                <a:latin typeface="Trade Gothic Next" pitchFamily="34" charset="0"/>
-                <a:ea typeface="Trade Gothic Next" pitchFamily="34" charset="-122"/>
-                <a:cs typeface="Trade Gothic Next" pitchFamily="34" charset="-120"/>
-              </a:rPr>
-              <a:t>10</a:t>
-            </a:r>
-            <a:pPr indent="0" marL="0">
-              <a:buNone/>
-            </a:pPr>
-            <a:r>
-              <a:rPr lang="en-US" sz="1600" dirty="0">
-                <a:solidFill>
-                  <a:srgbClr val="14161B"/>
-                </a:solidFill>
-                <a:latin typeface="Trade Gothic Next" pitchFamily="34" charset="0"/>
-                <a:ea typeface="Trade Gothic Next" pitchFamily="34" charset="-122"/>
-                <a:cs typeface="Trade Gothic Next" pitchFamily="34" charset="-120"/>
-              </a:rPr>
-              <a:t> 4p</a:t>
-            </a:r>
-            <a:pPr indent="0" marL="0">
-              <a:buNone/>
-            </a:pPr>
-            <a:r>
-              <a:rPr lang="en-US" sz="1600" baseline="30000" dirty="0">
-                <a:solidFill>
-                  <a:srgbClr val="14161B"/>
-                </a:solidFill>
-                <a:latin typeface="Trade Gothic Next" pitchFamily="34" charset="0"/>
-                <a:ea typeface="Trade Gothic Next" pitchFamily="34" charset="-122"/>
-                <a:cs typeface="Trade Gothic Next" pitchFamily="34" charset="-120"/>
-              </a:rPr>
-              <a:t>6</a:t>
-            </a:r>
-            <a:endParaRPr lang="en-US" sz="1600" dirty="0"/>
-          </a:p>
-          <a:p>
-            <a:pPr indent="0" marL="0">
-              <a:buNone/>
-            </a:pPr>
-            <a:r>
-              <a:rPr lang="en-US" sz="1600" dirty="0">
-                <a:solidFill>
-                  <a:srgbClr val="14161B"/>
-                </a:solidFill>
-                <a:latin typeface="Trade Gothic Next" pitchFamily="34" charset="0"/>
-                <a:ea typeface="Trade Gothic Next" pitchFamily="34" charset="-122"/>
-                <a:cs typeface="Trade Gothic Next" pitchFamily="34" charset="-120"/>
-              </a:rPr>
-              <a:t>= [Kr], 36 electrons</a:t>
-            </a:r>
-            <a:endParaRPr lang="en-US" sz="1600" dirty="0"/>
-          </a:p>
-        </p:txBody>
-      </p:sp>
-      <p:sp>
-        <p:nvSpPr>
-          <p:cNvPr id="10" name="Text 9"/>
-          <p:cNvSpPr txBox="1"/>
-          <p:nvPr>
-            <p:ph idx="119" type="body" hasCustomPrompt="1"/>
-          </p:nvPr>
-        </p:nvSpPr>
-        <p:spPr>
-          <a:xfrm>
-            <a:off x="2240280" y="5486400"/>
-            <a:ext cx="8991295" cy="402336"/>
-          </a:xfrm>
-          <a:prstGeom prst="rect">
-            <a:avLst/>
-          </a:prstGeom>
-          <a:noFill/>
-          <a:ln/>
-        </p:spPr>
-        <p:txBody>
-          <a:bodyPr wrap="square" lIns="0" tIns="0" rIns="0" bIns="0" rtlCol="0" anchor="ctr"/>
-          <a:lstStyle/>
-          <a:p>
-            <a:pPr indent="0" marL="0">
-              <a:buNone/>
-            </a:pPr>
-            <a:r>
-              <a:rPr lang="en-US" sz="1600" b="1" dirty="0">
-                <a:solidFill>
-                  <a:srgbClr val="EDF0E5"/>
-                </a:solidFill>
-                <a:latin typeface="Trade Gothic Next" pitchFamily="34" charset="0"/>
-                <a:ea typeface="Trade Gothic Next" pitchFamily="34" charset="-122"/>
-                <a:cs typeface="Trade Gothic Next" pitchFamily="34" charset="-120"/>
-              </a:rPr>
-              <a:t>An anion's added electrons go into the open spots in the same outer s and p sublevels.</a:t>
-            </a:r>
-            <a:endParaRPr lang="en-US" sz="1600" dirty="0"/>
-          </a:p>
-        </p:txBody>
-      </p:sp>
-      <p:sp>
-        <p:nvSpPr>
-          <p:cNvPr id="11" name="Text 1"/>
-          <p:cNvSpPr txBox="1"/>
-          <p:nvPr>
-            <p:ph idx="101" type="body" hasCustomPrompt="1"/>
-          </p:nvPr>
-        </p:nvSpPr>
-        <p:spPr>
-          <a:xfrm>
-            <a:off x="685800" y="384048"/>
-            <a:ext cx="6400800" cy="237744"/>
-          </a:xfrm>
-          <a:prstGeom prst="rect">
-            <a:avLst/>
-          </a:prstGeom>
-          <a:noFill/>
-          <a:ln/>
-        </p:spPr>
-        <p:txBody>
-          <a:bodyPr wrap="square" lIns="0" tIns="0" rIns="0" bIns="0" rtlCol="0" anchor="ctr"/>
-          <a:lstStyle/>
-          <a:p>
-            <a:pPr indent="0" marL="0">
-              <a:buNone/>
-            </a:pPr>
-            <a:r>
-              <a:rPr lang="en-US" sz="1100" b="1" spc="160" kern="0" dirty="0">
-                <a:solidFill>
-                  <a:srgbClr val="14161B"/>
-                </a:solidFill>
-                <a:latin typeface="Trade Gothic Next" pitchFamily="34" charset="0"/>
-                <a:ea typeface="Trade Gothic Next" pitchFamily="34" charset="-122"/>
-                <a:cs typeface="Trade Gothic Next" pitchFamily="34" charset="-120"/>
-              </a:rPr>
-              <a:t>UNIT 02  •  CHEMISTRY</a:t>
-            </a:r>
-            <a:endParaRPr lang="en-US" sz="1100" dirty="0"/>
-          </a:p>
-        </p:txBody>
-      </p:sp>
-      <p:sp>
-        <p:nvSpPr>
-          <p:cNvPr id="12" name="Text 10"/>
-          <p:cNvSpPr txBox="1"/>
-          <p:nvPr>
-            <p:ph idx="121" type="body" hasCustomPrompt="1"/>
-          </p:nvPr>
-        </p:nvSpPr>
-        <p:spPr>
-          <a:xfrm>
-            <a:off x="8762695" y="6382512"/>
-            <a:ext cx="2743200" cy="237744"/>
-          </a:xfrm>
-          <a:prstGeom prst="rect">
-            <a:avLst/>
-          </a:prstGeom>
-          <a:noFill/>
-          <a:ln/>
-        </p:spPr>
-        <p:txBody>
-          <a:bodyPr wrap="square" lIns="0" tIns="0" rIns="0" bIns="0" rtlCol="0" anchor="ctr"/>
-          <a:lstStyle/>
-          <a:p>
-            <a:pPr algn="r" indent="0" marL="0">
-              <a:buNone/>
-            </a:pPr>
-            <a:r>
-              <a:rPr lang="en-US" sz="1000" b="1" spc="140" kern="0" dirty="0">
-                <a:solidFill>
-                  <a:srgbClr val="2E3338"/>
-                </a:solidFill>
-                <a:latin typeface="Trade Gothic Next" pitchFamily="34" charset="0"/>
-                <a:ea typeface="Trade Gothic Next" pitchFamily="34" charset="-122"/>
-                <a:cs typeface="Trade Gothic Next" pitchFamily="34" charset="-120"/>
-              </a:rPr>
-              <a:t>U02 • S02.4</a:t>
-            </a:r>
-            <a:endParaRPr lang="en-US" sz="1000" dirty="0"/>
-          </a:p>
-        </p:txBody>
-      </p:sp>
-      <p:sp>
-        <p:nvSpPr>
-          <p:cNvPr id="14" name="Text 4"/>
-          <p:cNvSpPr txBox="1"/>
-          <p:nvPr>
-            <p:ph idx="107" hasCustomPrompt="1"/>
-          </p:nvPr>
-        </p:nvSpPr>
-        <p:spPr>
-          <a:xfrm>
-            <a:off x="8641080" y="1088136"/>
-            <a:ext cx="2633472" cy="1481328"/>
-          </a:xfrm>
-          <a:prstGeom prst="rect">
-            <a:avLst/>
-          </a:prstGeom>
-          <a:noFill/>
-          <a:ln/>
-        </p:spPr>
-        <p:txBody>
-          <a:bodyPr wrap="square" lIns="0" tIns="0" rIns="0" bIns="0" rtlCol="0" anchor="ctr"/>
-          <a:lstStyle/>
-          <a:p>
-            <a:pPr algn="ctr" indent="0" marL="0">
-              <a:buNone/>
-            </a:pPr>
-            <a:endParaRPr lang="en-US" sz="1200" dirty="0"/>
-          </a:p>
-        </p:txBody>
-      </p:sp>
-    </p:spTree>
-  </p:cSld>
-  <p:clrMapOvr>
-    <a:masterClrMapping/>
-  </p:clrMapOvr>
-</p:sld>
-</file>
-
-<file path=ppt/slides/slide14.xml><?xml version="1.0" encoding="utf-8"?>
-<p:sld xmlns:a="http://schemas.openxmlformats.org/drawingml/2006/main" xmlns:r="http://schemas.openxmlformats.org/officeDocument/2006/relationships" xmlns:p="http://schemas.openxmlformats.org/presentationml/2006/main">
-  <p:cSld name="Slide 14">
     <p:spTree>
       <p:nvGrpSpPr>
         <p:cNvPr id="1" name=""/>
@@ -17221,9 +15693,9 @@
 </p:sld>
 </file>
 
-<file path=ppt/slides/slide15.xml><?xml version="1.0" encoding="utf-8"?>
+<file path=ppt/slides/slide13.xml><?xml version="1.0" encoding="utf-8"?>
 <p:sld xmlns:a="http://schemas.openxmlformats.org/drawingml/2006/main" xmlns:r="http://schemas.openxmlformats.org/officeDocument/2006/relationships" xmlns:p="http://schemas.openxmlformats.org/presentationml/2006/main">
-  <p:cSld name="Slide 15">
+  <p:cSld name="Slide 13">
     <p:spTree>
       <p:nvGrpSpPr>
         <p:cNvPr id="1" name=""/>
@@ -17249,7 +15721,7 @@
         <p:spPr>
           <a:xfrm>
             <a:off x="685800" y="932688"/>
-            <a:ext cx="7863840" cy="868680"/>
+            <a:ext cx="10820095" cy="868680"/>
           </a:xfrm>
           <a:prstGeom prst="rect">
             <a:avLst/>
@@ -17273,49 +15745,7 @@
                 <a:ea typeface="Trade Gothic Next" pitchFamily="34" charset="-122"/>
                 <a:cs typeface="Trade Gothic Next" pitchFamily="34" charset="-120"/>
               </a:rPr>
-              <a:t>Example: Mg</a:t>
-            </a:r>
-            <a:pPr algn="l" indent="0" marL="0">
-              <a:buNone/>
-            </a:pPr>
-            <a:r>
-              <a:rPr lang="en-US" sz="2800" b="1" baseline="30000" dirty="0">
-                <a:solidFill>
-                  <a:srgbClr val="14161B"/>
-                </a:solidFill>
-                <a:latin typeface="Trade Gothic Next" pitchFamily="34" charset="0"/>
-                <a:ea typeface="Trade Gothic Next" pitchFamily="34" charset="-122"/>
-                <a:cs typeface="Trade Gothic Next" pitchFamily="34" charset="-120"/>
-              </a:rPr>
-              <a:t>2+</a:t>
-            </a:r>
-            <a:pPr algn="l" indent="0" marL="0">
-              <a:buNone/>
-            </a:pPr>
-            <a:r>
-              <a:rPr lang="en-US" sz="2800" b="1" dirty="0">
-                <a:solidFill>
-                  <a:srgbClr val="14161B"/>
-                </a:solidFill>
-                <a:latin typeface="Trade Gothic Next" pitchFamily="34" charset="0"/>
-                <a:ea typeface="Trade Gothic Next" pitchFamily="34" charset="-122"/>
-                <a:cs typeface="Trade Gothic Next" pitchFamily="34" charset="-120"/>
-              </a:rPr>
-              <a:t> and S</a:t>
-            </a:r>
-            <a:pPr algn="l" indent="0" marL="0">
-              <a:buNone/>
-            </a:pPr>
-            <a:r>
-              <a:rPr lang="en-US" sz="2800" b="1" baseline="30000" dirty="0">
-                <a:solidFill>
-                  <a:srgbClr val="14161B"/>
-                </a:solidFill>
-                <a:latin typeface="Trade Gothic Next" pitchFamily="34" charset="0"/>
-                <a:ea typeface="Trade Gothic Next" pitchFamily="34" charset="-122"/>
-                <a:cs typeface="Trade Gothic Next" pitchFamily="34" charset="-120"/>
-              </a:rPr>
-              <a:t>2−</a:t>
+              <a:t>Transition Metal Ions: 4s Leaves First</a:t>
             </a:r>
             <a:endParaRPr lang="en-US" sz="2800" dirty="0"/>
           </a:p>
@@ -17332,7 +15762,7 @@
         <p:spPr>
           <a:xfrm>
             <a:off x="685800" y="1847088"/>
-            <a:ext cx="7863840" cy="384048"/>
+            <a:ext cx="10820095" cy="384048"/>
           </a:xfrm>
           <a:prstGeom prst="rect">
             <a:avLst/>
@@ -17356,7 +15786,7 @@
                 <a:ea typeface="Trade Gothic Next" pitchFamily="34" charset="-122"/>
                 <a:cs typeface="Trade Gothic Next" pitchFamily="34" charset="-120"/>
               </a:rPr>
-              <a:t>We do this one together. Copy the setup, not just the answer.</a:t>
+              <a:t>This is the rule that surprises people. Watch the order.</a:t>
             </a:r>
             <a:endParaRPr lang="en-US" sz="1700" dirty="0"/>
           </a:p>
@@ -17364,16 +15794,16 @@
       </p:sp>
       <p:sp>
         <p:nvSpPr>
-          <p:cNvPr id="4" name="Text 6"/>
-          <p:cNvSpPr txBox="1"/>
-          <p:nvPr>
-            <p:ph idx="110" type="body" hasCustomPrompt="1"/>
-          </p:nvPr>
-        </p:nvSpPr>
-        <p:spPr>
-          <a:xfrm>
-            <a:off x="886968" y="2798064"/>
-            <a:ext cx="4992624" cy="548640"/>
+          <p:cNvPr id="4" name="Text 4"/>
+          <p:cNvSpPr txBox="1"/>
+          <p:nvPr>
+            <p:ph idx="108" type="body" hasCustomPrompt="1"/>
+          </p:nvPr>
+        </p:nvSpPr>
+        <p:spPr>
+          <a:xfrm>
+            <a:off x="5733288" y="2542032"/>
+            <a:ext cx="2752344" cy="219456"/>
           </a:xfrm>
           <a:prstGeom prst="rect">
             <a:avLst/>
@@ -17389,21 +15819,176 @@
               <a:buNone/>
             </a:pPr>
             <a:r>
+              <a:rPr lang="en-US" sz="1200" b="1" spc="120" kern="0" dirty="0">
+                <a:solidFill>
+                  <a:srgbClr val="2E3338"/>
+                </a:solidFill>
+                <a:latin typeface="Trade Gothic Next" pitchFamily="34" charset="0"/>
+                <a:ea typeface="Trade Gothic Next" pitchFamily="34" charset="-122"/>
+                <a:cs typeface="Trade Gothic Next" pitchFamily="34" charset="-120"/>
+              </a:rPr>
+              <a:t>THE RULE</a:t>
+            </a:r>
+            <a:endParaRPr lang="en-US" sz="1200" dirty="0"/>
+          </a:p>
+        </p:txBody>
+      </p:sp>
+      <p:sp>
+        <p:nvSpPr>
+          <p:cNvPr id="5" name="Text 4"/>
+          <p:cNvSpPr txBox="1"/>
+          <p:nvPr>
+            <p:ph idx="109" type="body" hasCustomPrompt="1"/>
+          </p:nvPr>
+        </p:nvSpPr>
+        <p:spPr>
+          <a:xfrm>
+            <a:off x="5733288" y="2834640"/>
+            <a:ext cx="2752344" cy="1965960"/>
+          </a:xfrm>
+          <a:prstGeom prst="rect">
+            <a:avLst/>
+          </a:prstGeom>
+          <a:noFill/>
+          <a:ln/>
+        </p:spPr>
+        <p:txBody>
+          <a:bodyPr wrap="square" lIns="0" tIns="0" rIns="0" bIns="0" rtlCol="0"/>
+          <a:lstStyle/>
+          <a:p>
+            <a:pPr indent="0" marL="0">
+              <a:buNone/>
+            </a:pPr>
+            <a:r>
               <a:rPr lang="en-US" sz="1600" dirty="0">
                 <a:solidFill>
+                  <a:srgbClr val="14161B"/>
+                </a:solidFill>
+                <a:latin typeface="Trade Gothic Next" pitchFamily="34" charset="0"/>
+                <a:ea typeface="Trade Gothic Next" pitchFamily="34" charset="-122"/>
+                <a:cs typeface="Trade Gothic Next" pitchFamily="34" charset="-120"/>
+              </a:rPr>
+              <a:t>Remove electrons from the outermost s first: 4s.</a:t>
+            </a:r>
+            <a:endParaRPr lang="en-US" sz="1600" dirty="0"/>
+          </a:p>
+          <a:p>
+            <a:pPr indent="0" marL="0">
+              <a:buNone/>
+            </a:pPr>
+            <a:endParaRPr lang="en-US" sz="1600" dirty="0"/>
+          </a:p>
+          <a:p>
+            <a:pPr indent="0" marL="0">
+              <a:buNone/>
+            </a:pPr>
+            <a:r>
+              <a:rPr lang="en-US" sz="1600" dirty="0">
+                <a:solidFill>
+                  <a:srgbClr val="14161B"/>
+                </a:solidFill>
+                <a:latin typeface="Trade Gothic Next" pitchFamily="34" charset="0"/>
+                <a:ea typeface="Trade Gothic Next" pitchFamily="34" charset="-122"/>
+                <a:cs typeface="Trade Gothic Next" pitchFamily="34" charset="-120"/>
+              </a:rPr>
+              <a:t>Then take from 3d if more must go.</a:t>
+            </a:r>
+            <a:endParaRPr lang="en-US" sz="1600" dirty="0"/>
+          </a:p>
+        </p:txBody>
+      </p:sp>
+      <p:sp>
+        <p:nvSpPr>
+          <p:cNvPr id="6" name="Text 5"/>
+          <p:cNvSpPr txBox="1"/>
+          <p:nvPr>
+            <p:ph idx="111" type="body" hasCustomPrompt="1"/>
+          </p:nvPr>
+        </p:nvSpPr>
+        <p:spPr>
+          <a:xfrm>
+            <a:off x="9116568" y="2542032"/>
+            <a:ext cx="2752344" cy="219456"/>
+          </a:xfrm>
+          <a:prstGeom prst="rect">
+            <a:avLst/>
+          </a:prstGeom>
+          <a:noFill/>
+          <a:ln/>
+        </p:spPr>
+        <p:txBody>
+          <a:bodyPr wrap="square" lIns="0" tIns="0" rIns="0" bIns="0" rtlCol="0"/>
+          <a:lstStyle/>
+          <a:p>
+            <a:pPr indent="0" marL="0">
+              <a:buNone/>
+            </a:pPr>
+            <a:r>
+              <a:rPr lang="en-US" sz="1200" b="1" spc="120" kern="0" dirty="0">
+                <a:solidFill>
+                  <a:srgbClr val="BDB6AA"/>
+                </a:solidFill>
+                <a:latin typeface="Trade Gothic Next" pitchFamily="34" charset="0"/>
+                <a:ea typeface="Trade Gothic Next" pitchFamily="34" charset="-122"/>
+                <a:cs typeface="Trade Gothic Next" pitchFamily="34" charset="-120"/>
+              </a:rPr>
+              <a:t>THE REASON</a:t>
+            </a:r>
+            <a:endParaRPr lang="en-US" sz="1200" dirty="0"/>
+          </a:p>
+        </p:txBody>
+      </p:sp>
+      <p:sp>
+        <p:nvSpPr>
+          <p:cNvPr id="7" name="Text 5"/>
+          <p:cNvSpPr txBox="1"/>
+          <p:nvPr>
+            <p:ph idx="112" type="body" hasCustomPrompt="1"/>
+          </p:nvPr>
+        </p:nvSpPr>
+        <p:spPr>
+          <a:xfrm>
+            <a:off x="9116568" y="2834640"/>
+            <a:ext cx="2752344" cy="1965960"/>
+          </a:xfrm>
+          <a:prstGeom prst="rect">
+            <a:avLst/>
+          </a:prstGeom>
+          <a:noFill/>
+          <a:ln/>
+        </p:spPr>
+        <p:txBody>
+          <a:bodyPr wrap="square" lIns="0" tIns="0" rIns="0" bIns="0" rtlCol="0"/>
+          <a:lstStyle/>
+          <a:p>
+            <a:pPr indent="0" marL="0">
+              <a:buNone/>
+            </a:pPr>
+            <a:r>
+              <a:rPr lang="en-US" sz="1600" dirty="0">
+                <a:solidFill>
                   <a:srgbClr val="EDF0E5"/>
                 </a:solidFill>
                 <a:latin typeface="Trade Gothic Next" pitchFamily="34" charset="0"/>
                 <a:ea typeface="Trade Gothic Next" pitchFamily="34" charset="-122"/>
                 <a:cs typeface="Trade Gothic Next" pitchFamily="34" charset="-120"/>
               </a:rPr>
-              <a:t>Write the electron configuration of Mg</a:t>
-            </a:r>
-            <a:pPr indent="0" marL="0">
-              <a:buNone/>
-            </a:pPr>
-            <a:r>
-              <a:rPr lang="en-US" sz="1600" baseline="30000" dirty="0">
+              <a:t>Once 3d has electrons, it sits lower in energy than 4s.</a:t>
+            </a:r>
+            <a:endParaRPr lang="en-US" sz="1600" dirty="0"/>
+          </a:p>
+          <a:p>
+            <a:pPr indent="0" marL="0">
+              <a:buNone/>
+            </a:pPr>
+            <a:endParaRPr lang="en-US" sz="1600" dirty="0"/>
+          </a:p>
+          <a:p>
+            <a:pPr indent="0" marL="0">
+              <a:buNone/>
+            </a:pPr>
+            <a:r>
+              <a:rPr lang="en-US" sz="1600" dirty="0">
                 <a:solidFill>
                   <a:srgbClr val="EDF0E5"/>
                 </a:solidFill>
@@ -17411,13 +15996,40 @@
                 <a:ea typeface="Trade Gothic Next" pitchFamily="34" charset="-122"/>
                 <a:cs typeface="Trade Gothic Next" pitchFamily="34" charset="-120"/>
               </a:rPr>
-              <a:t>2+</a:t>
-            </a:r>
-            <a:pPr indent="0" marL="0">
-              <a:buNone/>
-            </a:pPr>
-            <a:r>
-              <a:rPr lang="en-US" sz="1600" dirty="0">
+              <a:t>So 4s electrons leave first, even though 4s filled first.</a:t>
+            </a:r>
+            <a:endParaRPr lang="en-US" sz="1600" dirty="0"/>
+          </a:p>
+        </p:txBody>
+      </p:sp>
+      <p:sp>
+        <p:nvSpPr>
+          <p:cNvPr id="8" name="Text 7"/>
+          <p:cNvSpPr txBox="1"/>
+          <p:nvPr>
+            <p:ph idx="115" type="body" hasCustomPrompt="1"/>
+          </p:nvPr>
+        </p:nvSpPr>
+        <p:spPr>
+          <a:xfrm>
+            <a:off x="2240280" y="5394960"/>
+            <a:ext cx="8991295" cy="402336"/>
+          </a:xfrm>
+          <a:prstGeom prst="rect">
+            <a:avLst/>
+          </a:prstGeom>
+          <a:noFill/>
+          <a:ln/>
+        </p:spPr>
+        <p:txBody>
+          <a:bodyPr wrap="square" lIns="0" tIns="0" rIns="0" bIns="0" rtlCol="0" anchor="ctr"/>
+          <a:lstStyle/>
+          <a:p>
+            <a:pPr indent="0" marL="0">
+              <a:buNone/>
+            </a:pPr>
+            <a:r>
+              <a:rPr lang="en-US" sz="1600" b="1" dirty="0">
                 <a:solidFill>
                   <a:srgbClr val="EDF0E5"/>
                 </a:solidFill>
@@ -17425,35 +16037,7 @@
                 <a:ea typeface="Trade Gothic Next" pitchFamily="34" charset="-122"/>
                 <a:cs typeface="Trade Gothic Next" pitchFamily="34" charset="-120"/>
               </a:rPr>
-              <a:t> and S</a:t>
-            </a:r>
-            <a:pPr indent="0" marL="0">
-              <a:buNone/>
-            </a:pPr>
-            <a:r>
-              <a:rPr lang="en-US" sz="1600" baseline="30000" dirty="0">
-                <a:solidFill>
-                  <a:srgbClr val="EDF0E5"/>
-                </a:solidFill>
-                <a:latin typeface="Trade Gothic Next" pitchFamily="34" charset="0"/>
-                <a:ea typeface="Trade Gothic Next" pitchFamily="34" charset="-122"/>
-                <a:cs typeface="Trade Gothic Next" pitchFamily="34" charset="-120"/>
-              </a:rPr>
-              <a:t>2−</a:t>
-            </a:r>
-            <a:pPr indent="0" marL="0">
-              <a:buNone/>
-            </a:pPr>
-            <a:r>
-              <a:rPr lang="en-US" sz="1600" dirty="0">
-                <a:solidFill>
-                  <a:srgbClr val="EDF0E5"/>
-                </a:solidFill>
-                <a:latin typeface="Trade Gothic Next" pitchFamily="34" charset="0"/>
-                <a:ea typeface="Trade Gothic Next" pitchFamily="34" charset="-122"/>
-                <a:cs typeface="Trade Gothic Next" pitchFamily="34" charset="-120"/>
-              </a:rPr>
-              <a:t>. Name the noble gas each one matches.</a:t>
+              <a:t>Transition-metal ions lose their ns electrons before their (n−1)d electrons.</a:t>
             </a:r>
             <a:endParaRPr lang="en-US" sz="1600" dirty="0"/>
           </a:p>
@@ -17461,293 +16045,7 @@
       </p:sp>
       <p:sp>
         <p:nvSpPr>
-          <p:cNvPr id="5" name="Text 7"/>
-          <p:cNvSpPr txBox="1"/>
-          <p:nvPr>
-            <p:ph idx="112" type="body" hasCustomPrompt="1"/>
-          </p:nvPr>
-        </p:nvSpPr>
-        <p:spPr>
-          <a:xfrm>
-            <a:off x="886968" y="3776472"/>
-            <a:ext cx="2203704" cy="219456"/>
-          </a:xfrm>
-          <a:prstGeom prst="rect">
-            <a:avLst/>
-          </a:prstGeom>
-          <a:noFill/>
-          <a:ln/>
-        </p:spPr>
-        <p:txBody>
-          <a:bodyPr wrap="square" lIns="0" tIns="0" rIns="0" bIns="0" rtlCol="0"/>
-          <a:lstStyle/>
-          <a:p>
-            <a:pPr indent="0" marL="0">
-              <a:buNone/>
-            </a:pPr>
-            <a:r>
-              <a:rPr lang="en-US" sz="1200" b="1" spc="120" kern="0" dirty="0">
-                <a:solidFill>
-                  <a:srgbClr val="2E3338"/>
-                </a:solidFill>
-                <a:latin typeface="Trade Gothic Next" pitchFamily="34" charset="0"/>
-                <a:ea typeface="Trade Gothic Next" pitchFamily="34" charset="-122"/>
-                <a:cs typeface="Trade Gothic Next" pitchFamily="34" charset="-120"/>
-              </a:rPr>
-              <a:t>GIVEN</a:t>
-            </a:r>
-            <a:endParaRPr lang="en-US" sz="1200" dirty="0"/>
-          </a:p>
-        </p:txBody>
-      </p:sp>
-      <p:sp>
-        <p:nvSpPr>
-          <p:cNvPr id="6" name="Text 7"/>
-          <p:cNvSpPr txBox="1"/>
-          <p:nvPr>
-            <p:ph idx="113" type="body" hasCustomPrompt="1"/>
-          </p:nvPr>
-        </p:nvSpPr>
-        <p:spPr>
-          <a:xfrm>
-            <a:off x="886968" y="4069080"/>
-            <a:ext cx="2203704" cy="1078992"/>
-          </a:xfrm>
-          <a:prstGeom prst="rect">
-            <a:avLst/>
-          </a:prstGeom>
-          <a:noFill/>
-          <a:ln/>
-        </p:spPr>
-        <p:txBody>
-          <a:bodyPr wrap="square" lIns="0" tIns="0" rIns="0" bIns="0" rtlCol="0"/>
-          <a:lstStyle/>
-          <a:p>
-            <a:pPr indent="0" marL="0">
-              <a:buNone/>
-            </a:pPr>
-            <a:r>
-              <a:rPr lang="en-US" sz="1600" dirty="0">
-                <a:solidFill>
-                  <a:srgbClr val="14161B"/>
-                </a:solidFill>
-                <a:latin typeface="Trade Gothic Next" pitchFamily="34" charset="0"/>
-                <a:ea typeface="Trade Gothic Next" pitchFamily="34" charset="-122"/>
-                <a:cs typeface="Trade Gothic Next" pitchFamily="34" charset="-120"/>
-              </a:rPr>
-              <a:t>Mg: atomic number 12</a:t>
-            </a:r>
-            <a:endParaRPr lang="en-US" sz="1600" dirty="0"/>
-          </a:p>
-          <a:p>
-            <a:pPr indent="0" marL="0">
-              <a:buNone/>
-            </a:pPr>
-            <a:r>
-              <a:rPr lang="en-US" sz="1600" dirty="0">
-                <a:solidFill>
-                  <a:srgbClr val="14161B"/>
-                </a:solidFill>
-                <a:latin typeface="Trade Gothic Next" pitchFamily="34" charset="0"/>
-                <a:ea typeface="Trade Gothic Next" pitchFamily="34" charset="-122"/>
-                <a:cs typeface="Trade Gothic Next" pitchFamily="34" charset="-120"/>
-              </a:rPr>
-              <a:t>S: atomic number 16</a:t>
-            </a:r>
-            <a:endParaRPr lang="en-US" sz="1600" dirty="0"/>
-          </a:p>
-        </p:txBody>
-      </p:sp>
-      <p:sp>
-        <p:nvSpPr>
-          <p:cNvPr id="7" name="Text 8"/>
-          <p:cNvSpPr txBox="1"/>
-          <p:nvPr>
-            <p:ph idx="115" type="body" hasCustomPrompt="1"/>
-          </p:nvPr>
-        </p:nvSpPr>
-        <p:spPr>
-          <a:xfrm>
-            <a:off x="3675888" y="3776472"/>
-            <a:ext cx="2203704" cy="219456"/>
-          </a:xfrm>
-          <a:prstGeom prst="rect">
-            <a:avLst/>
-          </a:prstGeom>
-          <a:noFill/>
-          <a:ln/>
-        </p:spPr>
-        <p:txBody>
-          <a:bodyPr wrap="square" lIns="0" tIns="0" rIns="0" bIns="0" rtlCol="0"/>
-          <a:lstStyle/>
-          <a:p>
-            <a:pPr indent="0" marL="0">
-              <a:buNone/>
-            </a:pPr>
-            <a:r>
-              <a:rPr lang="en-US" sz="1200" b="1" spc="120" kern="0" dirty="0">
-                <a:solidFill>
-                  <a:srgbClr val="2E3338"/>
-                </a:solidFill>
-                <a:latin typeface="Trade Gothic Next" pitchFamily="34" charset="0"/>
-                <a:ea typeface="Trade Gothic Next" pitchFamily="34" charset="-122"/>
-                <a:cs typeface="Trade Gothic Next" pitchFamily="34" charset="-120"/>
-              </a:rPr>
-              <a:t>NEED</a:t>
-            </a:r>
-            <a:endParaRPr lang="en-US" sz="1200" dirty="0"/>
-          </a:p>
-        </p:txBody>
-      </p:sp>
-      <p:sp>
-        <p:nvSpPr>
-          <p:cNvPr id="8" name="Text 8"/>
-          <p:cNvSpPr txBox="1"/>
-          <p:nvPr>
-            <p:ph idx="116" type="body" hasCustomPrompt="1"/>
-          </p:nvPr>
-        </p:nvSpPr>
-        <p:spPr>
-          <a:xfrm>
-            <a:off x="3675888" y="4069080"/>
-            <a:ext cx="2203704" cy="1078992"/>
-          </a:xfrm>
-          <a:prstGeom prst="rect">
-            <a:avLst/>
-          </a:prstGeom>
-          <a:noFill/>
-          <a:ln/>
-        </p:spPr>
-        <p:txBody>
-          <a:bodyPr wrap="square" lIns="0" tIns="0" rIns="0" bIns="0" rtlCol="0"/>
-          <a:lstStyle/>
-          <a:p>
-            <a:pPr indent="0" marL="0">
-              <a:buNone/>
-            </a:pPr>
-            <a:r>
-              <a:rPr lang="en-US" sz="1600" dirty="0">
-                <a:solidFill>
-                  <a:srgbClr val="14161B"/>
-                </a:solidFill>
-                <a:latin typeface="Trade Gothic Next" pitchFamily="34" charset="0"/>
-                <a:ea typeface="Trade Gothic Next" pitchFamily="34" charset="-122"/>
-                <a:cs typeface="Trade Gothic Next" pitchFamily="34" charset="-120"/>
-              </a:rPr>
-              <a:t>Each atom's configuration</a:t>
-            </a:r>
-            <a:endParaRPr lang="en-US" sz="1600" dirty="0"/>
-          </a:p>
-          <a:p>
-            <a:pPr indent="0" marL="0">
-              <a:buNone/>
-            </a:pPr>
-            <a:r>
-              <a:rPr lang="en-US" sz="1600" dirty="0">
-                <a:solidFill>
-                  <a:srgbClr val="14161B"/>
-                </a:solidFill>
-                <a:latin typeface="Trade Gothic Next" pitchFamily="34" charset="0"/>
-                <a:ea typeface="Trade Gothic Next" pitchFamily="34" charset="-122"/>
-                <a:cs typeface="Trade Gothic Next" pitchFamily="34" charset="-120"/>
-              </a:rPr>
-              <a:t>Ion electron count</a:t>
-            </a:r>
-            <a:endParaRPr lang="en-US" sz="1600" dirty="0"/>
-          </a:p>
-          <a:p>
-            <a:pPr indent="0" marL="0">
-              <a:buNone/>
-            </a:pPr>
-            <a:r>
-              <a:rPr lang="en-US" sz="1600" dirty="0">
-                <a:solidFill>
-                  <a:srgbClr val="14161B"/>
-                </a:solidFill>
-                <a:latin typeface="Trade Gothic Next" pitchFamily="34" charset="0"/>
-                <a:ea typeface="Trade Gothic Next" pitchFamily="34" charset="-122"/>
-                <a:cs typeface="Trade Gothic Next" pitchFamily="34" charset="-120"/>
-              </a:rPr>
-              <a:t>Matching noble gas</a:t>
-            </a:r>
-            <a:endParaRPr lang="en-US" sz="1600" dirty="0"/>
-          </a:p>
-        </p:txBody>
-      </p:sp>
-      <p:sp>
-        <p:nvSpPr>
-          <p:cNvPr id="9" name="Text 10"/>
-          <p:cNvSpPr txBox="1"/>
-          <p:nvPr>
-            <p:ph idx="119" type="body" hasCustomPrompt="1"/>
-          </p:nvPr>
-        </p:nvSpPr>
-        <p:spPr>
-          <a:xfrm>
-            <a:off x="6464808" y="2880360"/>
-            <a:ext cx="4837176" cy="2286000"/>
-          </a:xfrm>
-          <a:prstGeom prst="rect">
-            <a:avLst/>
-          </a:prstGeom>
-          <a:noFill/>
-          <a:ln/>
-        </p:spPr>
-        <p:txBody>
-          <a:bodyPr wrap="square" lIns="0" tIns="0" rIns="0" bIns="0" rtlCol="0"/>
-          <a:lstStyle/>
-          <a:p>
-            <a:pPr indent="0" marL="0">
-              <a:buNone/>
-            </a:pPr>
-            <a:endParaRPr lang="en-US" sz="1900" dirty="0"/>
-          </a:p>
-        </p:txBody>
-      </p:sp>
-      <p:sp>
-        <p:nvSpPr>
-          <p:cNvPr id="10" name="Text 12"/>
-          <p:cNvSpPr txBox="1"/>
-          <p:nvPr>
-            <p:ph idx="122" type="body" hasCustomPrompt="1"/>
-          </p:nvPr>
-        </p:nvSpPr>
-        <p:spPr>
-          <a:xfrm>
-            <a:off x="2240280" y="5605272"/>
-            <a:ext cx="8991295" cy="402336"/>
-          </a:xfrm>
-          <a:prstGeom prst="rect">
-            <a:avLst/>
-          </a:prstGeom>
-          <a:noFill/>
-          <a:ln/>
-        </p:spPr>
-        <p:txBody>
-          <a:bodyPr wrap="square" lIns="0" tIns="0" rIns="0" bIns="0" rtlCol="0" anchor="ctr"/>
-          <a:lstStyle/>
-          <a:p>
-            <a:pPr indent="0" marL="0">
-              <a:buNone/>
-            </a:pPr>
-            <a:r>
-              <a:rPr lang="en-US" sz="1600" b="1" dirty="0">
-                <a:solidFill>
-                  <a:srgbClr val="EDF0E5"/>
-                </a:solidFill>
-                <a:latin typeface="Trade Gothic Next" pitchFamily="34" charset="0"/>
-                <a:ea typeface="Trade Gothic Next" pitchFamily="34" charset="-122"/>
-                <a:cs typeface="Trade Gothic Next" pitchFamily="34" charset="-120"/>
-              </a:rPr>
-              <a:t>Start from the neutral atom's configuration, then remove or add electrons.</a:t>
-            </a:r>
-            <a:endParaRPr lang="en-US" sz="1600" dirty="0"/>
-          </a:p>
-        </p:txBody>
-      </p:sp>
-      <p:sp>
-        <p:nvSpPr>
-          <p:cNvPr id="11" name="Text 1"/>
+          <p:cNvPr id="9" name="Text 1"/>
           <p:cNvSpPr txBox="1"/>
           <p:nvPr>
             <p:ph idx="101" type="body" hasCustomPrompt="1"/>
@@ -17788,10 +16086,10 @@
       </p:sp>
       <p:sp>
         <p:nvSpPr>
-          <p:cNvPr id="12" name="Text 13"/>
-          <p:cNvSpPr txBox="1"/>
-          <p:nvPr>
-            <p:ph idx="124" type="body" hasCustomPrompt="1"/>
+          <p:cNvPr id="10" name="Text 8"/>
+          <p:cNvSpPr txBox="1"/>
+          <p:nvPr>
+            <p:ph idx="117" type="body" hasCustomPrompt="1"/>
           </p:nvPr>
         </p:nvSpPr>
         <p:spPr>
@@ -17829,16 +16127,16 @@
       </p:sp>
       <p:sp>
         <p:nvSpPr>
-          <p:cNvPr id="14" name="Text 4"/>
-          <p:cNvSpPr txBox="1"/>
-          <p:nvPr>
-            <p:ph idx="107" hasCustomPrompt="1"/>
-          </p:nvPr>
-        </p:nvSpPr>
-        <p:spPr>
-          <a:xfrm>
-            <a:off x="9262872" y="1088136"/>
-            <a:ext cx="1901952" cy="1069848"/>
+          <p:cNvPr id="12" name="Text 3"/>
+          <p:cNvSpPr txBox="1"/>
+          <p:nvPr>
+            <p:ph idx="106" hasCustomPrompt="1"/>
+          </p:nvPr>
+        </p:nvSpPr>
+        <p:spPr>
+          <a:xfrm>
+            <a:off x="685800" y="2377440"/>
+            <a:ext cx="4663440" cy="2624328"/>
           </a:xfrm>
           <a:prstGeom prst="rect">
             <a:avLst/>
@@ -17865,1378 +16163,9 @@
 </p:sld>
 </file>
 
-<file path=ppt/slides/slide16.xml><?xml version="1.0" encoding="utf-8"?>
+<file path=ppt/slides/slide14.xml><?xml version="1.0" encoding="utf-8"?>
 <p:sld xmlns:a="http://schemas.openxmlformats.org/drawingml/2006/main" xmlns:r="http://schemas.openxmlformats.org/officeDocument/2006/relationships" xmlns:p="http://schemas.openxmlformats.org/presentationml/2006/main">
-  <p:cSld name="Slide 16">
-    <p:spTree>
-      <p:nvGrpSpPr>
-        <p:cNvPr id="1" name=""/>
-        <p:cNvGrpSpPr/>
-        <p:nvPr/>
-      </p:nvGrpSpPr>
-      <p:grpSpPr>
-        <a:xfrm>
-          <a:off x="0" y="0"/>
-          <a:ext cx="0" cy="0"/>
-          <a:chOff x="0" y="0"/>
-          <a:chExt cx="0" cy="0"/>
-        </a:xfrm>
-      </p:grpSpPr>
-      <p:sp>
-        <p:nvSpPr>
-          <p:cNvPr id="2" name="Text 2"/>
-          <p:cNvSpPr txBox="1"/>
-          <p:nvPr>
-            <p:ph idx="103" type="title" hasCustomPrompt="1"/>
-          </p:nvPr>
-        </p:nvSpPr>
-        <p:spPr>
-          <a:xfrm>
-            <a:off x="685800" y="932688"/>
-            <a:ext cx="10820095" cy="868680"/>
-          </a:xfrm>
-          <a:prstGeom prst="rect">
-            <a:avLst/>
-          </a:prstGeom>
-          <a:noFill/>
-          <a:ln/>
-        </p:spPr>
-        <p:txBody>
-          <a:bodyPr wrap="square" lIns="0" tIns="0" rIns="0" bIns="0" rtlCol="0" anchor="t"/>
-          <a:lstStyle/>
-          <a:p>
-            <a:pPr algn="l" indent="0" marL="0">
-              <a:buNone/>
-            </a:pPr>
-            <a:r>
-              <a:rPr lang="en-US" sz="2800" b="1" dirty="0">
-                <a:solidFill>
-                  <a:srgbClr val="14161B"/>
-                </a:solidFill>
-                <a:latin typeface="Trade Gothic Next" pitchFamily="34" charset="0"/>
-                <a:ea typeface="Trade Gothic Next" pitchFamily="34" charset="-122"/>
-                <a:cs typeface="Trade Gothic Next" pitchFamily="34" charset="-120"/>
-              </a:rPr>
-              <a:t>Mg</a:t>
-            </a:r>
-            <a:pPr algn="l" indent="0" marL="0">
-              <a:buNone/>
-            </a:pPr>
-            <a:r>
-              <a:rPr lang="en-US" sz="2800" b="1" baseline="30000" dirty="0">
-                <a:solidFill>
-                  <a:srgbClr val="14161B"/>
-                </a:solidFill>
-                <a:latin typeface="Trade Gothic Next" pitchFamily="34" charset="0"/>
-                <a:ea typeface="Trade Gothic Next" pitchFamily="34" charset="-122"/>
-                <a:cs typeface="Trade Gothic Next" pitchFamily="34" charset="-120"/>
-              </a:rPr>
-              <a:t>2+</a:t>
-            </a:r>
-            <a:pPr algn="l" indent="0" marL="0">
-              <a:buNone/>
-            </a:pPr>
-            <a:r>
-              <a:rPr lang="en-US" sz="2800" b="1" dirty="0">
-                <a:solidFill>
-                  <a:srgbClr val="14161B"/>
-                </a:solidFill>
-                <a:latin typeface="Trade Gothic Next" pitchFamily="34" charset="0"/>
-                <a:ea typeface="Trade Gothic Next" pitchFamily="34" charset="-122"/>
-                <a:cs typeface="Trade Gothic Next" pitchFamily="34" charset="-120"/>
-              </a:rPr>
-              <a:t> and S</a:t>
-            </a:r>
-            <a:pPr algn="l" indent="0" marL="0">
-              <a:buNone/>
-            </a:pPr>
-            <a:r>
-              <a:rPr lang="en-US" sz="2800" b="1" baseline="30000" dirty="0">
-                <a:solidFill>
-                  <a:srgbClr val="14161B"/>
-                </a:solidFill>
-                <a:latin typeface="Trade Gothic Next" pitchFamily="34" charset="0"/>
-                <a:ea typeface="Trade Gothic Next" pitchFamily="34" charset="-122"/>
-                <a:cs typeface="Trade Gothic Next" pitchFamily="34" charset="-120"/>
-              </a:rPr>
-              <a:t>2−</a:t>
-            </a:r>
-            <a:pPr algn="l" indent="0" marL="0">
-              <a:buNone/>
-            </a:pPr>
-            <a:r>
-              <a:rPr lang="en-US" sz="2800" b="1" dirty="0">
-                <a:solidFill>
-                  <a:srgbClr val="14161B"/>
-                </a:solidFill>
-                <a:latin typeface="Trade Gothic Next" pitchFamily="34" charset="0"/>
-                <a:ea typeface="Trade Gothic Next" pitchFamily="34" charset="-122"/>
-                <a:cs typeface="Trade Gothic Next" pitchFamily="34" charset="-120"/>
-              </a:rPr>
-              <a:t>, Worked</a:t>
-            </a:r>
-            <a:endParaRPr lang="en-US" sz="2800" dirty="0"/>
-          </a:p>
-        </p:txBody>
-      </p:sp>
-      <p:sp>
-        <p:nvSpPr>
-          <p:cNvPr id="3" name="Text 2"/>
-          <p:cNvSpPr txBox="1"/>
-          <p:nvPr>
-            <p:ph idx="104" type="body" hasCustomPrompt="1"/>
-          </p:nvPr>
-        </p:nvSpPr>
-        <p:spPr>
-          <a:xfrm>
-            <a:off x="685800" y="1847088"/>
-            <a:ext cx="10820095" cy="384048"/>
-          </a:xfrm>
-          <a:prstGeom prst="rect">
-            <a:avLst/>
-          </a:prstGeom>
-          <a:noFill/>
-          <a:ln/>
-        </p:spPr>
-        <p:txBody>
-          <a:bodyPr wrap="square" lIns="0" tIns="0" rIns="0" bIns="0" rtlCol="0"/>
-          <a:lstStyle/>
-          <a:p>
-            <a:pPr indent="0" marL="0">
-              <a:buNone/>
-            </a:pPr>
-            <a:r>
-              <a:rPr lang="en-US" sz="1700" dirty="0">
-                <a:solidFill>
-                  <a:srgbClr val="2E3338"/>
-                </a:solidFill>
-                <a:latin typeface="Trade Gothic Next" pitchFamily="34" charset="0"/>
-                <a:ea typeface="Trade Gothic Next" pitchFamily="34" charset="-122"/>
-                <a:cs typeface="Trade Gothic Next" pitchFamily="34" charset="-120"/>
-              </a:rPr>
-              <a:t>Count the electrons at the end. They should match the noble gas.</a:t>
-            </a:r>
-            <a:endParaRPr lang="en-US" sz="1700" dirty="0"/>
-          </a:p>
-        </p:txBody>
-      </p:sp>
-      <p:sp>
-        <p:nvSpPr>
-          <p:cNvPr id="4" name="Text 5"/>
-          <p:cNvSpPr txBox="1"/>
-          <p:nvPr>
-            <p:ph idx="109" type="body" hasCustomPrompt="1"/>
-          </p:nvPr>
-        </p:nvSpPr>
-        <p:spPr>
-          <a:xfrm>
-            <a:off x="5276088" y="2560320"/>
-            <a:ext cx="2752344" cy="219456"/>
-          </a:xfrm>
-          <a:prstGeom prst="rect">
-            <a:avLst/>
-          </a:prstGeom>
-          <a:noFill/>
-          <a:ln/>
-        </p:spPr>
-        <p:txBody>
-          <a:bodyPr wrap="square" lIns="0" tIns="0" rIns="0" bIns="0" rtlCol="0"/>
-          <a:lstStyle/>
-          <a:p>
-            <a:pPr indent="0" marL="0">
-              <a:buNone/>
-            </a:pPr>
-            <a:r>
-              <a:rPr lang="en-US" sz="1200" b="1" spc="120" kern="0" dirty="0">
-                <a:solidFill>
-                  <a:srgbClr val="2E3338"/>
-                </a:solidFill>
-                <a:latin typeface="Trade Gothic Next" pitchFamily="34" charset="0"/>
-                <a:ea typeface="Trade Gothic Next" pitchFamily="34" charset="-122"/>
-                <a:cs typeface="Trade Gothic Next" pitchFamily="34" charset="-120"/>
-              </a:rPr>
-              <a:t>SETUP</a:t>
-            </a:r>
-            <a:endParaRPr lang="en-US" sz="1200" dirty="0"/>
-          </a:p>
-        </p:txBody>
-      </p:sp>
-      <p:sp>
-        <p:nvSpPr>
-          <p:cNvPr id="5" name="Text 5"/>
-          <p:cNvSpPr txBox="1"/>
-          <p:nvPr>
-            <p:ph idx="110" type="body" hasCustomPrompt="1"/>
-          </p:nvPr>
-        </p:nvSpPr>
-        <p:spPr>
-          <a:xfrm>
-            <a:off x="5276088" y="2852928"/>
-            <a:ext cx="2752344" cy="1901952"/>
-          </a:xfrm>
-          <a:prstGeom prst="rect">
-            <a:avLst/>
-          </a:prstGeom>
-          <a:noFill/>
-          <a:ln/>
-        </p:spPr>
-        <p:txBody>
-          <a:bodyPr wrap="square" lIns="0" tIns="0" rIns="0" bIns="0" rtlCol="0"/>
-          <a:lstStyle/>
-          <a:p>
-            <a:pPr indent="0" marL="0">
-              <a:buNone/>
-            </a:pPr>
-            <a:r>
-              <a:rPr lang="en-US" sz="1600" dirty="0">
-                <a:solidFill>
-                  <a:srgbClr val="14161B"/>
-                </a:solidFill>
-                <a:latin typeface="Trade Gothic Next" pitchFamily="34" charset="0"/>
-                <a:ea typeface="Trade Gothic Next" pitchFamily="34" charset="-122"/>
-                <a:cs typeface="Trade Gothic Next" pitchFamily="34" charset="-120"/>
-              </a:rPr>
-              <a:t>Mg: 12 → 10 electrons</a:t>
-            </a:r>
-            <a:endParaRPr lang="en-US" sz="1600" dirty="0"/>
-          </a:p>
-          <a:p>
-            <a:pPr indent="0" marL="0">
-              <a:buNone/>
-            </a:pPr>
-            <a:r>
-              <a:rPr lang="en-US" sz="1600" dirty="0">
-                <a:solidFill>
-                  <a:srgbClr val="14161B"/>
-                </a:solidFill>
-                <a:latin typeface="Trade Gothic Next" pitchFamily="34" charset="0"/>
-                <a:ea typeface="Trade Gothic Next" pitchFamily="34" charset="-122"/>
-                <a:cs typeface="Trade Gothic Next" pitchFamily="34" charset="-120"/>
-              </a:rPr>
-              <a:t>S: 16 → 18 electrons</a:t>
-            </a:r>
-            <a:endParaRPr lang="en-US" sz="1600" dirty="0"/>
-          </a:p>
-        </p:txBody>
-      </p:sp>
-      <p:sp>
-        <p:nvSpPr>
-          <p:cNvPr id="6" name="Text 7"/>
-          <p:cNvSpPr txBox="1"/>
-          <p:nvPr>
-            <p:ph idx="113" type="body" hasCustomPrompt="1"/>
-          </p:nvPr>
-        </p:nvSpPr>
-        <p:spPr>
-          <a:xfrm>
-            <a:off x="8613648" y="2871216"/>
-            <a:ext cx="2688336" cy="1920240"/>
-          </a:xfrm>
-          <a:prstGeom prst="rect">
-            <a:avLst/>
-          </a:prstGeom>
-          <a:noFill/>
-          <a:ln/>
-        </p:spPr>
-        <p:txBody>
-          <a:bodyPr wrap="square" lIns="0" tIns="0" rIns="0" bIns="0" rtlCol="0"/>
-          <a:lstStyle/>
-          <a:p>
-            <a:pPr indent="0" marL="0">
-              <a:buNone/>
-            </a:pPr>
-            <a:r>
-              <a:rPr lang="en-US" sz="1900" dirty="0">
-                <a:solidFill>
-                  <a:srgbClr val="14161B"/>
-                </a:solidFill>
-                <a:latin typeface="Trade Gothic Next" pitchFamily="34" charset="0"/>
-                <a:ea typeface="Trade Gothic Next" pitchFamily="34" charset="-122"/>
-                <a:cs typeface="Trade Gothic Next" pitchFamily="34" charset="-120"/>
-              </a:rPr>
-              <a:t>Mg: 1s</a:t>
-            </a:r>
-            <a:pPr indent="0" marL="0">
-              <a:buNone/>
-            </a:pPr>
-            <a:r>
-              <a:rPr lang="en-US" sz="1900" baseline="30000" dirty="0">
-                <a:solidFill>
-                  <a:srgbClr val="14161B"/>
-                </a:solidFill>
-                <a:latin typeface="Trade Gothic Next" pitchFamily="34" charset="0"/>
-                <a:ea typeface="Trade Gothic Next" pitchFamily="34" charset="-122"/>
-                <a:cs typeface="Trade Gothic Next" pitchFamily="34" charset="-120"/>
-              </a:rPr>
-              <a:t>2</a:t>
-            </a:r>
-            <a:pPr indent="0" marL="0">
-              <a:buNone/>
-            </a:pPr>
-            <a:r>
-              <a:rPr lang="en-US" sz="1900" dirty="0">
-                <a:solidFill>
-                  <a:srgbClr val="14161B"/>
-                </a:solidFill>
-                <a:latin typeface="Trade Gothic Next" pitchFamily="34" charset="0"/>
-                <a:ea typeface="Trade Gothic Next" pitchFamily="34" charset="-122"/>
-                <a:cs typeface="Trade Gothic Next" pitchFamily="34" charset="-120"/>
-              </a:rPr>
-              <a:t> 2s</a:t>
-            </a:r>
-            <a:pPr indent="0" marL="0">
-              <a:buNone/>
-            </a:pPr>
-            <a:r>
-              <a:rPr lang="en-US" sz="1900" baseline="30000" dirty="0">
-                <a:solidFill>
-                  <a:srgbClr val="14161B"/>
-                </a:solidFill>
-                <a:latin typeface="Trade Gothic Next" pitchFamily="34" charset="0"/>
-                <a:ea typeface="Trade Gothic Next" pitchFamily="34" charset="-122"/>
-                <a:cs typeface="Trade Gothic Next" pitchFamily="34" charset="-120"/>
-              </a:rPr>
-              <a:t>2</a:t>
-            </a:r>
-            <a:pPr indent="0" marL="0">
-              <a:buNone/>
-            </a:pPr>
-            <a:r>
-              <a:rPr lang="en-US" sz="1900" dirty="0">
-                <a:solidFill>
-                  <a:srgbClr val="14161B"/>
-                </a:solidFill>
-                <a:latin typeface="Trade Gothic Next" pitchFamily="34" charset="0"/>
-                <a:ea typeface="Trade Gothic Next" pitchFamily="34" charset="-122"/>
-                <a:cs typeface="Trade Gothic Next" pitchFamily="34" charset="-120"/>
-              </a:rPr>
-              <a:t> 2p</a:t>
-            </a:r>
-            <a:pPr indent="0" marL="0">
-              <a:buNone/>
-            </a:pPr>
-            <a:r>
-              <a:rPr lang="en-US" sz="1900" baseline="30000" dirty="0">
-                <a:solidFill>
-                  <a:srgbClr val="14161B"/>
-                </a:solidFill>
-                <a:latin typeface="Trade Gothic Next" pitchFamily="34" charset="0"/>
-                <a:ea typeface="Trade Gothic Next" pitchFamily="34" charset="-122"/>
-                <a:cs typeface="Trade Gothic Next" pitchFamily="34" charset="-120"/>
-              </a:rPr>
-              <a:t>6</a:t>
-            </a:r>
-            <a:pPr indent="0" marL="0">
-              <a:buNone/>
-            </a:pPr>
-            <a:r>
-              <a:rPr lang="en-US" sz="1900" dirty="0">
-                <a:solidFill>
-                  <a:srgbClr val="14161B"/>
-                </a:solidFill>
-                <a:latin typeface="Trade Gothic Next" pitchFamily="34" charset="0"/>
-                <a:ea typeface="Trade Gothic Next" pitchFamily="34" charset="-122"/>
-                <a:cs typeface="Trade Gothic Next" pitchFamily="34" charset="-120"/>
-              </a:rPr>
-              <a:t> 3s</a:t>
-            </a:r>
-            <a:pPr indent="0" marL="0">
-              <a:buNone/>
-            </a:pPr>
-            <a:r>
-              <a:rPr lang="en-US" sz="1900" baseline="30000" dirty="0">
-                <a:solidFill>
-                  <a:srgbClr val="14161B"/>
-                </a:solidFill>
-                <a:latin typeface="Trade Gothic Next" pitchFamily="34" charset="0"/>
-                <a:ea typeface="Trade Gothic Next" pitchFamily="34" charset="-122"/>
-                <a:cs typeface="Trade Gothic Next" pitchFamily="34" charset="-120"/>
-              </a:rPr>
-              <a:t>2</a:t>
-            </a:r>
-            <a:endParaRPr lang="en-US" sz="1900" dirty="0"/>
-          </a:p>
-          <a:p>
-            <a:pPr indent="0" marL="0">
-              <a:buNone/>
-            </a:pPr>
-            <a:r>
-              <a:rPr lang="en-US" sz="1900" dirty="0">
-                <a:solidFill>
-                  <a:srgbClr val="14161B"/>
-                </a:solidFill>
-                <a:latin typeface="Trade Gothic Next" pitchFamily="34" charset="0"/>
-                <a:ea typeface="Trade Gothic Next" pitchFamily="34" charset="-122"/>
-                <a:cs typeface="Trade Gothic Next" pitchFamily="34" charset="-120"/>
-              </a:rPr>
-              <a:t>Mg</a:t>
-            </a:r>
-            <a:pPr indent="0" marL="0">
-              <a:buNone/>
-            </a:pPr>
-            <a:r>
-              <a:rPr lang="en-US" sz="1900" baseline="30000" dirty="0">
-                <a:solidFill>
-                  <a:srgbClr val="14161B"/>
-                </a:solidFill>
-                <a:latin typeface="Trade Gothic Next" pitchFamily="34" charset="0"/>
-                <a:ea typeface="Trade Gothic Next" pitchFamily="34" charset="-122"/>
-                <a:cs typeface="Trade Gothic Next" pitchFamily="34" charset="-120"/>
-              </a:rPr>
-              <a:t>2+</a:t>
-            </a:r>
-            <a:pPr indent="0" marL="0">
-              <a:buNone/>
-            </a:pPr>
-            <a:r>
-              <a:rPr lang="en-US" sz="1900" dirty="0">
-                <a:solidFill>
-                  <a:srgbClr val="14161B"/>
-                </a:solidFill>
-                <a:latin typeface="Trade Gothic Next" pitchFamily="34" charset="0"/>
-                <a:ea typeface="Trade Gothic Next" pitchFamily="34" charset="-122"/>
-                <a:cs typeface="Trade Gothic Next" pitchFamily="34" charset="-120"/>
-              </a:rPr>
-              <a:t>: 1s</a:t>
-            </a:r>
-            <a:pPr indent="0" marL="0">
-              <a:buNone/>
-            </a:pPr>
-            <a:r>
-              <a:rPr lang="en-US" sz="1900" baseline="30000" dirty="0">
-                <a:solidFill>
-                  <a:srgbClr val="14161B"/>
-                </a:solidFill>
-                <a:latin typeface="Trade Gothic Next" pitchFamily="34" charset="0"/>
-                <a:ea typeface="Trade Gothic Next" pitchFamily="34" charset="-122"/>
-                <a:cs typeface="Trade Gothic Next" pitchFamily="34" charset="-120"/>
-              </a:rPr>
-              <a:t>2</a:t>
-            </a:r>
-            <a:pPr indent="0" marL="0">
-              <a:buNone/>
-            </a:pPr>
-            <a:r>
-              <a:rPr lang="en-US" sz="1900" dirty="0">
-                <a:solidFill>
-                  <a:srgbClr val="14161B"/>
-                </a:solidFill>
-                <a:latin typeface="Trade Gothic Next" pitchFamily="34" charset="0"/>
-                <a:ea typeface="Trade Gothic Next" pitchFamily="34" charset="-122"/>
-                <a:cs typeface="Trade Gothic Next" pitchFamily="34" charset="-120"/>
-              </a:rPr>
-              <a:t> 2s</a:t>
-            </a:r>
-            <a:pPr indent="0" marL="0">
-              <a:buNone/>
-            </a:pPr>
-            <a:r>
-              <a:rPr lang="en-US" sz="1900" baseline="30000" dirty="0">
-                <a:solidFill>
-                  <a:srgbClr val="14161B"/>
-                </a:solidFill>
-                <a:latin typeface="Trade Gothic Next" pitchFamily="34" charset="0"/>
-                <a:ea typeface="Trade Gothic Next" pitchFamily="34" charset="-122"/>
-                <a:cs typeface="Trade Gothic Next" pitchFamily="34" charset="-120"/>
-              </a:rPr>
-              <a:t>2</a:t>
-            </a:r>
-            <a:pPr indent="0" marL="0">
-              <a:buNone/>
-            </a:pPr>
-            <a:r>
-              <a:rPr lang="en-US" sz="1900" dirty="0">
-                <a:solidFill>
-                  <a:srgbClr val="14161B"/>
-                </a:solidFill>
-                <a:latin typeface="Trade Gothic Next" pitchFamily="34" charset="0"/>
-                <a:ea typeface="Trade Gothic Next" pitchFamily="34" charset="-122"/>
-                <a:cs typeface="Trade Gothic Next" pitchFamily="34" charset="-120"/>
-              </a:rPr>
-              <a:t> 2p</a:t>
-            </a:r>
-            <a:pPr indent="0" marL="0">
-              <a:buNone/>
-            </a:pPr>
-            <a:r>
-              <a:rPr lang="en-US" sz="1900" baseline="30000" dirty="0">
-                <a:solidFill>
-                  <a:srgbClr val="14161B"/>
-                </a:solidFill>
-                <a:latin typeface="Trade Gothic Next" pitchFamily="34" charset="0"/>
-                <a:ea typeface="Trade Gothic Next" pitchFamily="34" charset="-122"/>
-                <a:cs typeface="Trade Gothic Next" pitchFamily="34" charset="-120"/>
-              </a:rPr>
-              <a:t>6</a:t>
-            </a:r>
-            <a:pPr indent="0" marL="0">
-              <a:buNone/>
-            </a:pPr>
-            <a:r>
-              <a:rPr lang="en-US" sz="1900" dirty="0">
-                <a:solidFill>
-                  <a:srgbClr val="14161B"/>
-                </a:solidFill>
-                <a:latin typeface="Trade Gothic Next" pitchFamily="34" charset="0"/>
-                <a:ea typeface="Trade Gothic Next" pitchFamily="34" charset="-122"/>
-                <a:cs typeface="Trade Gothic Next" pitchFamily="34" charset="-120"/>
-              </a:rPr>
-              <a:t> = [Ne]</a:t>
-            </a:r>
-            <a:endParaRPr lang="en-US" sz="1900" dirty="0"/>
-          </a:p>
-          <a:p>
-            <a:pPr indent="0" marL="0">
-              <a:buNone/>
-            </a:pPr>
-            <a:r>
-              <a:rPr lang="en-US" sz="1900" dirty="0">
-                <a:solidFill>
-                  <a:srgbClr val="14161B"/>
-                </a:solidFill>
-                <a:latin typeface="Trade Gothic Next" pitchFamily="34" charset="0"/>
-                <a:ea typeface="Trade Gothic Next" pitchFamily="34" charset="-122"/>
-                <a:cs typeface="Trade Gothic Next" pitchFamily="34" charset="-120"/>
-              </a:rPr>
-              <a:t>S: [Ne] 3s</a:t>
-            </a:r>
-            <a:pPr indent="0" marL="0">
-              <a:buNone/>
-            </a:pPr>
-            <a:r>
-              <a:rPr lang="en-US" sz="1900" baseline="30000" dirty="0">
-                <a:solidFill>
-                  <a:srgbClr val="14161B"/>
-                </a:solidFill>
-                <a:latin typeface="Trade Gothic Next" pitchFamily="34" charset="0"/>
-                <a:ea typeface="Trade Gothic Next" pitchFamily="34" charset="-122"/>
-                <a:cs typeface="Trade Gothic Next" pitchFamily="34" charset="-120"/>
-              </a:rPr>
-              <a:t>2</a:t>
-            </a:r>
-            <a:pPr indent="0" marL="0">
-              <a:buNone/>
-            </a:pPr>
-            <a:r>
-              <a:rPr lang="en-US" sz="1900" dirty="0">
-                <a:solidFill>
-                  <a:srgbClr val="14161B"/>
-                </a:solidFill>
-                <a:latin typeface="Trade Gothic Next" pitchFamily="34" charset="0"/>
-                <a:ea typeface="Trade Gothic Next" pitchFamily="34" charset="-122"/>
-                <a:cs typeface="Trade Gothic Next" pitchFamily="34" charset="-120"/>
-              </a:rPr>
-              <a:t> 3p</a:t>
-            </a:r>
-            <a:pPr indent="0" marL="0">
-              <a:buNone/>
-            </a:pPr>
-            <a:r>
-              <a:rPr lang="en-US" sz="1900" baseline="30000" dirty="0">
-                <a:solidFill>
-                  <a:srgbClr val="14161B"/>
-                </a:solidFill>
-                <a:latin typeface="Trade Gothic Next" pitchFamily="34" charset="0"/>
-                <a:ea typeface="Trade Gothic Next" pitchFamily="34" charset="-122"/>
-                <a:cs typeface="Trade Gothic Next" pitchFamily="34" charset="-120"/>
-              </a:rPr>
-              <a:t>4</a:t>
-            </a:r>
-            <a:endParaRPr lang="en-US" sz="1900" dirty="0"/>
-          </a:p>
-          <a:p>
-            <a:pPr indent="0" marL="0">
-              <a:buNone/>
-            </a:pPr>
-            <a:r>
-              <a:rPr lang="en-US" sz="1900" dirty="0">
-                <a:solidFill>
-                  <a:srgbClr val="14161B"/>
-                </a:solidFill>
-                <a:latin typeface="Trade Gothic Next" pitchFamily="34" charset="0"/>
-                <a:ea typeface="Trade Gothic Next" pitchFamily="34" charset="-122"/>
-                <a:cs typeface="Trade Gothic Next" pitchFamily="34" charset="-120"/>
-              </a:rPr>
-              <a:t>S</a:t>
-            </a:r>
-            <a:pPr indent="0" marL="0">
-              <a:buNone/>
-            </a:pPr>
-            <a:r>
-              <a:rPr lang="en-US" sz="1900" baseline="30000" dirty="0">
-                <a:solidFill>
-                  <a:srgbClr val="14161B"/>
-                </a:solidFill>
-                <a:latin typeface="Trade Gothic Next" pitchFamily="34" charset="0"/>
-                <a:ea typeface="Trade Gothic Next" pitchFamily="34" charset="-122"/>
-                <a:cs typeface="Trade Gothic Next" pitchFamily="34" charset="-120"/>
-              </a:rPr>
-              <a:t>2−</a:t>
-            </a:r>
-            <a:pPr indent="0" marL="0">
-              <a:buNone/>
-            </a:pPr>
-            <a:r>
-              <a:rPr lang="en-US" sz="1900" dirty="0">
-                <a:solidFill>
-                  <a:srgbClr val="14161B"/>
-                </a:solidFill>
-                <a:latin typeface="Trade Gothic Next" pitchFamily="34" charset="0"/>
-                <a:ea typeface="Trade Gothic Next" pitchFamily="34" charset="-122"/>
-                <a:cs typeface="Trade Gothic Next" pitchFamily="34" charset="-120"/>
-              </a:rPr>
-              <a:t>: [Ne] 3s</a:t>
-            </a:r>
-            <a:pPr indent="0" marL="0">
-              <a:buNone/>
-            </a:pPr>
-            <a:r>
-              <a:rPr lang="en-US" sz="1900" baseline="30000" dirty="0">
-                <a:solidFill>
-                  <a:srgbClr val="14161B"/>
-                </a:solidFill>
-                <a:latin typeface="Trade Gothic Next" pitchFamily="34" charset="0"/>
-                <a:ea typeface="Trade Gothic Next" pitchFamily="34" charset="-122"/>
-                <a:cs typeface="Trade Gothic Next" pitchFamily="34" charset="-120"/>
-              </a:rPr>
-              <a:t>2</a:t>
-            </a:r>
-            <a:pPr indent="0" marL="0">
-              <a:buNone/>
-            </a:pPr>
-            <a:r>
-              <a:rPr lang="en-US" sz="1900" dirty="0">
-                <a:solidFill>
-                  <a:srgbClr val="14161B"/>
-                </a:solidFill>
-                <a:latin typeface="Trade Gothic Next" pitchFamily="34" charset="0"/>
-                <a:ea typeface="Trade Gothic Next" pitchFamily="34" charset="-122"/>
-                <a:cs typeface="Trade Gothic Next" pitchFamily="34" charset="-120"/>
-              </a:rPr>
-              <a:t> 3p</a:t>
-            </a:r>
-            <a:pPr indent="0" marL="0">
-              <a:buNone/>
-            </a:pPr>
-            <a:r>
-              <a:rPr lang="en-US" sz="1900" baseline="30000" dirty="0">
-                <a:solidFill>
-                  <a:srgbClr val="14161B"/>
-                </a:solidFill>
-                <a:latin typeface="Trade Gothic Next" pitchFamily="34" charset="0"/>
-                <a:ea typeface="Trade Gothic Next" pitchFamily="34" charset="-122"/>
-                <a:cs typeface="Trade Gothic Next" pitchFamily="34" charset="-120"/>
-              </a:rPr>
-              <a:t>6</a:t>
-            </a:r>
-            <a:pPr indent="0" marL="0">
-              <a:buNone/>
-            </a:pPr>
-            <a:r>
-              <a:rPr lang="en-US" sz="1900" dirty="0">
-                <a:solidFill>
-                  <a:srgbClr val="14161B"/>
-                </a:solidFill>
-                <a:latin typeface="Trade Gothic Next" pitchFamily="34" charset="0"/>
-                <a:ea typeface="Trade Gothic Next" pitchFamily="34" charset="-122"/>
-                <a:cs typeface="Trade Gothic Next" pitchFamily="34" charset="-120"/>
-              </a:rPr>
-              <a:t> = [Ar]</a:t>
-            </a:r>
-            <a:endParaRPr lang="en-US" sz="1900" dirty="0"/>
-          </a:p>
-        </p:txBody>
-      </p:sp>
-      <p:sp>
-        <p:nvSpPr>
-          <p:cNvPr id="7" name="Text 9"/>
-          <p:cNvSpPr txBox="1"/>
-          <p:nvPr>
-            <p:ph idx="116" type="body" hasCustomPrompt="1"/>
-          </p:nvPr>
-        </p:nvSpPr>
-        <p:spPr>
-          <a:xfrm>
-            <a:off x="2240280" y="5212080"/>
-            <a:ext cx="8991295" cy="402336"/>
-          </a:xfrm>
-          <a:prstGeom prst="rect">
-            <a:avLst/>
-          </a:prstGeom>
-          <a:noFill/>
-          <a:ln/>
-        </p:spPr>
-        <p:txBody>
-          <a:bodyPr wrap="square" lIns="0" tIns="0" rIns="0" bIns="0" rtlCol="0" anchor="ctr"/>
-          <a:lstStyle/>
-          <a:p>
-            <a:pPr indent="0" marL="0">
-              <a:buNone/>
-            </a:pPr>
-            <a:r>
-              <a:rPr lang="en-US" sz="1600" b="1" dirty="0">
-                <a:solidFill>
-                  <a:srgbClr val="EDF0E5"/>
-                </a:solidFill>
-                <a:latin typeface="Trade Gothic Next" pitchFamily="34" charset="0"/>
-                <a:ea typeface="Trade Gothic Next" pitchFamily="34" charset="-122"/>
-                <a:cs typeface="Trade Gothic Next" pitchFamily="34" charset="-120"/>
-              </a:rPr>
-              <a:t>Mg</a:t>
-            </a:r>
-            <a:pPr indent="0" marL="0">
-              <a:buNone/>
-            </a:pPr>
-            <a:r>
-              <a:rPr lang="en-US" sz="1600" b="1" baseline="30000" dirty="0">
-                <a:solidFill>
-                  <a:srgbClr val="EDF0E5"/>
-                </a:solidFill>
-                <a:latin typeface="Trade Gothic Next" pitchFamily="34" charset="0"/>
-                <a:ea typeface="Trade Gothic Next" pitchFamily="34" charset="-122"/>
-                <a:cs typeface="Trade Gothic Next" pitchFamily="34" charset="-120"/>
-              </a:rPr>
-              <a:t>2+</a:t>
-            </a:r>
-            <a:pPr indent="0" marL="0">
-              <a:buNone/>
-            </a:pPr>
-            <a:r>
-              <a:rPr lang="en-US" sz="1600" b="1" dirty="0">
-                <a:solidFill>
-                  <a:srgbClr val="EDF0E5"/>
-                </a:solidFill>
-                <a:latin typeface="Trade Gothic Next" pitchFamily="34" charset="0"/>
-                <a:ea typeface="Trade Gothic Next" pitchFamily="34" charset="-122"/>
-                <a:cs typeface="Trade Gothic Next" pitchFamily="34" charset="-120"/>
-              </a:rPr>
-              <a:t> matches neon. S</a:t>
-            </a:r>
-            <a:pPr indent="0" marL="0">
-              <a:buNone/>
-            </a:pPr>
-            <a:r>
-              <a:rPr lang="en-US" sz="1600" b="1" baseline="30000" dirty="0">
-                <a:solidFill>
-                  <a:srgbClr val="EDF0E5"/>
-                </a:solidFill>
-                <a:latin typeface="Trade Gothic Next" pitchFamily="34" charset="0"/>
-                <a:ea typeface="Trade Gothic Next" pitchFamily="34" charset="-122"/>
-                <a:cs typeface="Trade Gothic Next" pitchFamily="34" charset="-120"/>
-              </a:rPr>
-              <a:t>2−</a:t>
-            </a:r>
-            <a:pPr indent="0" marL="0">
-              <a:buNone/>
-            </a:pPr>
-            <a:r>
-              <a:rPr lang="en-US" sz="1600" b="1" dirty="0">
-                <a:solidFill>
-                  <a:srgbClr val="EDF0E5"/>
-                </a:solidFill>
-                <a:latin typeface="Trade Gothic Next" pitchFamily="34" charset="0"/>
-                <a:ea typeface="Trade Gothic Next" pitchFamily="34" charset="-122"/>
-                <a:cs typeface="Trade Gothic Next" pitchFamily="34" charset="-120"/>
-              </a:rPr>
-              <a:t> matches argon.</a:t>
-            </a:r>
-            <a:endParaRPr lang="en-US" sz="1600" dirty="0"/>
-          </a:p>
-        </p:txBody>
-      </p:sp>
-      <p:sp>
-        <p:nvSpPr>
-          <p:cNvPr id="8" name="Text 1"/>
-          <p:cNvSpPr txBox="1"/>
-          <p:nvPr>
-            <p:ph idx="101" type="body" hasCustomPrompt="1"/>
-          </p:nvPr>
-        </p:nvSpPr>
-        <p:spPr>
-          <a:xfrm>
-            <a:off x="685800" y="384048"/>
-            <a:ext cx="6400800" cy="237744"/>
-          </a:xfrm>
-          <a:prstGeom prst="rect">
-            <a:avLst/>
-          </a:prstGeom>
-          <a:noFill/>
-          <a:ln/>
-        </p:spPr>
-        <p:txBody>
-          <a:bodyPr wrap="square" lIns="0" tIns="0" rIns="0" bIns="0" rtlCol="0" anchor="ctr"/>
-          <a:lstStyle/>
-          <a:p>
-            <a:pPr indent="0" marL="0">
-              <a:buNone/>
-            </a:pPr>
-            <a:r>
-              <a:rPr lang="en-US" sz="1100" b="1" spc="160" kern="0" dirty="0">
-                <a:solidFill>
-                  <a:srgbClr val="14161B"/>
-                </a:solidFill>
-                <a:latin typeface="Trade Gothic Next" pitchFamily="34" charset="0"/>
-                <a:ea typeface="Trade Gothic Next" pitchFamily="34" charset="-122"/>
-                <a:cs typeface="Trade Gothic Next" pitchFamily="34" charset="-120"/>
-              </a:rPr>
-              <a:t>UNIT 02  •  CHEMISTRY</a:t>
-            </a:r>
-            <a:endParaRPr lang="en-US" sz="1100" dirty="0"/>
-          </a:p>
-        </p:txBody>
-      </p:sp>
-      <p:sp>
-        <p:nvSpPr>
-          <p:cNvPr id="9" name="Text 10"/>
-          <p:cNvSpPr txBox="1"/>
-          <p:nvPr>
-            <p:ph idx="118" type="body" hasCustomPrompt="1"/>
-          </p:nvPr>
-        </p:nvSpPr>
-        <p:spPr>
-          <a:xfrm>
-            <a:off x="8762695" y="6382512"/>
-            <a:ext cx="2743200" cy="237744"/>
-          </a:xfrm>
-          <a:prstGeom prst="rect">
-            <a:avLst/>
-          </a:prstGeom>
-          <a:noFill/>
-          <a:ln/>
-        </p:spPr>
-        <p:txBody>
-          <a:bodyPr wrap="square" lIns="0" tIns="0" rIns="0" bIns="0" rtlCol="0" anchor="ctr"/>
-          <a:lstStyle/>
-          <a:p>
-            <a:pPr algn="r" indent="0" marL="0">
-              <a:buNone/>
-            </a:pPr>
-            <a:r>
-              <a:rPr lang="en-US" sz="1000" b="1" spc="140" kern="0" dirty="0">
-                <a:solidFill>
-                  <a:srgbClr val="2E3338"/>
-                </a:solidFill>
-                <a:latin typeface="Trade Gothic Next" pitchFamily="34" charset="0"/>
-                <a:ea typeface="Trade Gothic Next" pitchFamily="34" charset="-122"/>
-                <a:cs typeface="Trade Gothic Next" pitchFamily="34" charset="-120"/>
-              </a:rPr>
-              <a:t>U02 • S02.4</a:t>
-            </a:r>
-            <a:endParaRPr lang="en-US" sz="1000" dirty="0"/>
-          </a:p>
-        </p:txBody>
-      </p:sp>
-      <p:sp>
-        <p:nvSpPr>
-          <p:cNvPr id="11" name="Text 4"/>
-          <p:cNvSpPr txBox="1"/>
-          <p:nvPr>
-            <p:ph idx="107" hasCustomPrompt="1"/>
-          </p:nvPr>
-        </p:nvSpPr>
-        <p:spPr>
-          <a:xfrm>
-            <a:off x="832104" y="2542032"/>
-            <a:ext cx="3867912" cy="2267712"/>
-          </a:xfrm>
-          <a:prstGeom prst="rect">
-            <a:avLst/>
-          </a:prstGeom>
-          <a:noFill/>
-          <a:ln/>
-        </p:spPr>
-        <p:txBody>
-          <a:bodyPr wrap="square" lIns="0" tIns="0" rIns="0" bIns="0" rtlCol="0" anchor="ctr"/>
-          <a:lstStyle/>
-          <a:p>
-            <a:pPr algn="ctr" indent="0" marL="0">
-              <a:buNone/>
-            </a:pPr>
-            <a:endParaRPr lang="en-US" sz="1200" dirty="0"/>
-          </a:p>
-        </p:txBody>
-      </p:sp>
-    </p:spTree>
-  </p:cSld>
-  <p:clrMapOvr>
-    <a:masterClrMapping/>
-  </p:clrMapOvr>
-</p:sld>
-</file>
-
-<file path=ppt/slides/slide17.xml><?xml version="1.0" encoding="utf-8"?>
-<p:sld xmlns:a="http://schemas.openxmlformats.org/drawingml/2006/main" xmlns:r="http://schemas.openxmlformats.org/officeDocument/2006/relationships" xmlns:p="http://schemas.openxmlformats.org/presentationml/2006/main">
-  <p:cSld name="Slide 17">
-    <p:spTree>
-      <p:nvGrpSpPr>
-        <p:cNvPr id="1" name=""/>
-        <p:cNvGrpSpPr/>
-        <p:nvPr/>
-      </p:nvGrpSpPr>
-      <p:grpSpPr>
-        <a:xfrm>
-          <a:off x="0" y="0"/>
-          <a:ext cx="0" cy="0"/>
-          <a:chOff x="0" y="0"/>
-          <a:chExt cx="0" cy="0"/>
-        </a:xfrm>
-      </p:grpSpPr>
-      <p:sp>
-        <p:nvSpPr>
-          <p:cNvPr id="2" name="Text 2"/>
-          <p:cNvSpPr txBox="1"/>
-          <p:nvPr>
-            <p:ph idx="103" type="title" hasCustomPrompt="1"/>
-          </p:nvPr>
-        </p:nvSpPr>
-        <p:spPr>
-          <a:xfrm>
-            <a:off x="685800" y="932688"/>
-            <a:ext cx="10820095" cy="868680"/>
-          </a:xfrm>
-          <a:prstGeom prst="rect">
-            <a:avLst/>
-          </a:prstGeom>
-          <a:noFill/>
-          <a:ln/>
-        </p:spPr>
-        <p:txBody>
-          <a:bodyPr wrap="square" lIns="0" tIns="0" rIns="0" bIns="0" rtlCol="0" anchor="t"/>
-          <a:lstStyle/>
-          <a:p>
-            <a:pPr algn="l" indent="0" marL="0">
-              <a:buNone/>
-            </a:pPr>
-            <a:r>
-              <a:rPr lang="en-US" sz="2800" b="1" dirty="0">
-                <a:solidFill>
-                  <a:srgbClr val="14161B"/>
-                </a:solidFill>
-                <a:latin typeface="Trade Gothic Next" pitchFamily="34" charset="0"/>
-                <a:ea typeface="Trade Gothic Next" pitchFamily="34" charset="-122"/>
-                <a:cs typeface="Trade Gothic Next" pitchFamily="34" charset="-120"/>
-              </a:rPr>
-              <a:t>Transition Metal Ions: 4s Leaves First</a:t>
-            </a:r>
-            <a:endParaRPr lang="en-US" sz="2800" dirty="0"/>
-          </a:p>
-        </p:txBody>
-      </p:sp>
-      <p:sp>
-        <p:nvSpPr>
-          <p:cNvPr id="3" name="Text 2"/>
-          <p:cNvSpPr txBox="1"/>
-          <p:nvPr>
-            <p:ph idx="104" type="body" hasCustomPrompt="1"/>
-          </p:nvPr>
-        </p:nvSpPr>
-        <p:spPr>
-          <a:xfrm>
-            <a:off x="685800" y="1847088"/>
-            <a:ext cx="10820095" cy="384048"/>
-          </a:xfrm>
-          <a:prstGeom prst="rect">
-            <a:avLst/>
-          </a:prstGeom>
-          <a:noFill/>
-          <a:ln/>
-        </p:spPr>
-        <p:txBody>
-          <a:bodyPr wrap="square" lIns="0" tIns="0" rIns="0" bIns="0" rtlCol="0"/>
-          <a:lstStyle/>
-          <a:p>
-            <a:pPr indent="0" marL="0">
-              <a:buNone/>
-            </a:pPr>
-            <a:r>
-              <a:rPr lang="en-US" sz="1700" dirty="0">
-                <a:solidFill>
-                  <a:srgbClr val="2E3338"/>
-                </a:solidFill>
-                <a:latin typeface="Trade Gothic Next" pitchFamily="34" charset="0"/>
-                <a:ea typeface="Trade Gothic Next" pitchFamily="34" charset="-122"/>
-                <a:cs typeface="Trade Gothic Next" pitchFamily="34" charset="-120"/>
-              </a:rPr>
-              <a:t>This is the rule that surprises people. Watch the order.</a:t>
-            </a:r>
-            <a:endParaRPr lang="en-US" sz="1700" dirty="0"/>
-          </a:p>
-        </p:txBody>
-      </p:sp>
-      <p:sp>
-        <p:nvSpPr>
-          <p:cNvPr id="4" name="Text 4"/>
-          <p:cNvSpPr txBox="1"/>
-          <p:nvPr>
-            <p:ph idx="108" type="body" hasCustomPrompt="1"/>
-          </p:nvPr>
-        </p:nvSpPr>
-        <p:spPr>
-          <a:xfrm>
-            <a:off x="5733288" y="2542032"/>
-            <a:ext cx="2752344" cy="219456"/>
-          </a:xfrm>
-          <a:prstGeom prst="rect">
-            <a:avLst/>
-          </a:prstGeom>
-          <a:noFill/>
-          <a:ln/>
-        </p:spPr>
-        <p:txBody>
-          <a:bodyPr wrap="square" lIns="0" tIns="0" rIns="0" bIns="0" rtlCol="0"/>
-          <a:lstStyle/>
-          <a:p>
-            <a:pPr indent="0" marL="0">
-              <a:buNone/>
-            </a:pPr>
-            <a:r>
-              <a:rPr lang="en-US" sz="1200" b="1" spc="120" kern="0" dirty="0">
-                <a:solidFill>
-                  <a:srgbClr val="2E3338"/>
-                </a:solidFill>
-                <a:latin typeface="Trade Gothic Next" pitchFamily="34" charset="0"/>
-                <a:ea typeface="Trade Gothic Next" pitchFamily="34" charset="-122"/>
-                <a:cs typeface="Trade Gothic Next" pitchFamily="34" charset="-120"/>
-              </a:rPr>
-              <a:t>THE RULE</a:t>
-            </a:r>
-            <a:endParaRPr lang="en-US" sz="1200" dirty="0"/>
-          </a:p>
-        </p:txBody>
-      </p:sp>
-      <p:sp>
-        <p:nvSpPr>
-          <p:cNvPr id="5" name="Text 4"/>
-          <p:cNvSpPr txBox="1"/>
-          <p:nvPr>
-            <p:ph idx="109" type="body" hasCustomPrompt="1"/>
-          </p:nvPr>
-        </p:nvSpPr>
-        <p:spPr>
-          <a:xfrm>
-            <a:off x="5733288" y="2834640"/>
-            <a:ext cx="2752344" cy="1965960"/>
-          </a:xfrm>
-          <a:prstGeom prst="rect">
-            <a:avLst/>
-          </a:prstGeom>
-          <a:noFill/>
-          <a:ln/>
-        </p:spPr>
-        <p:txBody>
-          <a:bodyPr wrap="square" lIns="0" tIns="0" rIns="0" bIns="0" rtlCol="0"/>
-          <a:lstStyle/>
-          <a:p>
-            <a:pPr indent="0" marL="0">
-              <a:buNone/>
-            </a:pPr>
-            <a:r>
-              <a:rPr lang="en-US" sz="1600" dirty="0">
-                <a:solidFill>
-                  <a:srgbClr val="14161B"/>
-                </a:solidFill>
-                <a:latin typeface="Trade Gothic Next" pitchFamily="34" charset="0"/>
-                <a:ea typeface="Trade Gothic Next" pitchFamily="34" charset="-122"/>
-                <a:cs typeface="Trade Gothic Next" pitchFamily="34" charset="-120"/>
-              </a:rPr>
-              <a:t>Remove electrons from the outermost s first: 4s.</a:t>
-            </a:r>
-            <a:endParaRPr lang="en-US" sz="1600" dirty="0"/>
-          </a:p>
-          <a:p>
-            <a:pPr indent="0" marL="0">
-              <a:buNone/>
-            </a:pPr>
-            <a:endParaRPr lang="en-US" sz="1600" dirty="0"/>
-          </a:p>
-          <a:p>
-            <a:pPr indent="0" marL="0">
-              <a:buNone/>
-            </a:pPr>
-            <a:r>
-              <a:rPr lang="en-US" sz="1600" dirty="0">
-                <a:solidFill>
-                  <a:srgbClr val="14161B"/>
-                </a:solidFill>
-                <a:latin typeface="Trade Gothic Next" pitchFamily="34" charset="0"/>
-                <a:ea typeface="Trade Gothic Next" pitchFamily="34" charset="-122"/>
-                <a:cs typeface="Trade Gothic Next" pitchFamily="34" charset="-120"/>
-              </a:rPr>
-              <a:t>Then take from 3d if more must go.</a:t>
-            </a:r>
-            <a:endParaRPr lang="en-US" sz="1600" dirty="0"/>
-          </a:p>
-        </p:txBody>
-      </p:sp>
-      <p:sp>
-        <p:nvSpPr>
-          <p:cNvPr id="6" name="Text 5"/>
-          <p:cNvSpPr txBox="1"/>
-          <p:nvPr>
-            <p:ph idx="111" type="body" hasCustomPrompt="1"/>
-          </p:nvPr>
-        </p:nvSpPr>
-        <p:spPr>
-          <a:xfrm>
-            <a:off x="9116568" y="2542032"/>
-            <a:ext cx="2752344" cy="219456"/>
-          </a:xfrm>
-          <a:prstGeom prst="rect">
-            <a:avLst/>
-          </a:prstGeom>
-          <a:noFill/>
-          <a:ln/>
-        </p:spPr>
-        <p:txBody>
-          <a:bodyPr wrap="square" lIns="0" tIns="0" rIns="0" bIns="0" rtlCol="0"/>
-          <a:lstStyle/>
-          <a:p>
-            <a:pPr indent="0" marL="0">
-              <a:buNone/>
-            </a:pPr>
-            <a:r>
-              <a:rPr lang="en-US" sz="1200" b="1" spc="120" kern="0" dirty="0">
-                <a:solidFill>
-                  <a:srgbClr val="BDB6AA"/>
-                </a:solidFill>
-                <a:latin typeface="Trade Gothic Next" pitchFamily="34" charset="0"/>
-                <a:ea typeface="Trade Gothic Next" pitchFamily="34" charset="-122"/>
-                <a:cs typeface="Trade Gothic Next" pitchFamily="34" charset="-120"/>
-              </a:rPr>
-              <a:t>THE REASON</a:t>
-            </a:r>
-            <a:endParaRPr lang="en-US" sz="1200" dirty="0"/>
-          </a:p>
-        </p:txBody>
-      </p:sp>
-      <p:sp>
-        <p:nvSpPr>
-          <p:cNvPr id="7" name="Text 5"/>
-          <p:cNvSpPr txBox="1"/>
-          <p:nvPr>
-            <p:ph idx="112" type="body" hasCustomPrompt="1"/>
-          </p:nvPr>
-        </p:nvSpPr>
-        <p:spPr>
-          <a:xfrm>
-            <a:off x="9116568" y="2834640"/>
-            <a:ext cx="2752344" cy="1965960"/>
-          </a:xfrm>
-          <a:prstGeom prst="rect">
-            <a:avLst/>
-          </a:prstGeom>
-          <a:noFill/>
-          <a:ln/>
-        </p:spPr>
-        <p:txBody>
-          <a:bodyPr wrap="square" lIns="0" tIns="0" rIns="0" bIns="0" rtlCol="0"/>
-          <a:lstStyle/>
-          <a:p>
-            <a:pPr indent="0" marL="0">
-              <a:buNone/>
-            </a:pPr>
-            <a:r>
-              <a:rPr lang="en-US" sz="1600" dirty="0">
-                <a:solidFill>
-                  <a:srgbClr val="EDF0E5"/>
-                </a:solidFill>
-                <a:latin typeface="Trade Gothic Next" pitchFamily="34" charset="0"/>
-                <a:ea typeface="Trade Gothic Next" pitchFamily="34" charset="-122"/>
-                <a:cs typeface="Trade Gothic Next" pitchFamily="34" charset="-120"/>
-              </a:rPr>
-              <a:t>Once 3d has electrons, it sits lower in energy than 4s.</a:t>
-            </a:r>
-            <a:endParaRPr lang="en-US" sz="1600" dirty="0"/>
-          </a:p>
-          <a:p>
-            <a:pPr indent="0" marL="0">
-              <a:buNone/>
-            </a:pPr>
-            <a:endParaRPr lang="en-US" sz="1600" dirty="0"/>
-          </a:p>
-          <a:p>
-            <a:pPr indent="0" marL="0">
-              <a:buNone/>
-            </a:pPr>
-            <a:r>
-              <a:rPr lang="en-US" sz="1600" dirty="0">
-                <a:solidFill>
-                  <a:srgbClr val="EDF0E5"/>
-                </a:solidFill>
-                <a:latin typeface="Trade Gothic Next" pitchFamily="34" charset="0"/>
-                <a:ea typeface="Trade Gothic Next" pitchFamily="34" charset="-122"/>
-                <a:cs typeface="Trade Gothic Next" pitchFamily="34" charset="-120"/>
-              </a:rPr>
-              <a:t>So 4s electrons leave first, even though 4s filled first.</a:t>
-            </a:r>
-            <a:endParaRPr lang="en-US" sz="1600" dirty="0"/>
-          </a:p>
-        </p:txBody>
-      </p:sp>
-      <p:sp>
-        <p:nvSpPr>
-          <p:cNvPr id="8" name="Text 7"/>
-          <p:cNvSpPr txBox="1"/>
-          <p:nvPr>
-            <p:ph idx="115" type="body" hasCustomPrompt="1"/>
-          </p:nvPr>
-        </p:nvSpPr>
-        <p:spPr>
-          <a:xfrm>
-            <a:off x="2240280" y="5394960"/>
-            <a:ext cx="8991295" cy="402336"/>
-          </a:xfrm>
-          <a:prstGeom prst="rect">
-            <a:avLst/>
-          </a:prstGeom>
-          <a:noFill/>
-          <a:ln/>
-        </p:spPr>
-        <p:txBody>
-          <a:bodyPr wrap="square" lIns="0" tIns="0" rIns="0" bIns="0" rtlCol="0" anchor="ctr"/>
-          <a:lstStyle/>
-          <a:p>
-            <a:pPr indent="0" marL="0">
-              <a:buNone/>
-            </a:pPr>
-            <a:r>
-              <a:rPr lang="en-US" sz="1600" b="1" dirty="0">
-                <a:solidFill>
-                  <a:srgbClr val="EDF0E5"/>
-                </a:solidFill>
-                <a:latin typeface="Trade Gothic Next" pitchFamily="34" charset="0"/>
-                <a:ea typeface="Trade Gothic Next" pitchFamily="34" charset="-122"/>
-                <a:cs typeface="Trade Gothic Next" pitchFamily="34" charset="-120"/>
-              </a:rPr>
-              <a:t>Transition-metal ions lose their ns electrons before their (n−1)d electrons.</a:t>
-            </a:r>
-            <a:endParaRPr lang="en-US" sz="1600" dirty="0"/>
-          </a:p>
-        </p:txBody>
-      </p:sp>
-      <p:sp>
-        <p:nvSpPr>
-          <p:cNvPr id="9" name="Text 1"/>
-          <p:cNvSpPr txBox="1"/>
-          <p:nvPr>
-            <p:ph idx="101" type="body" hasCustomPrompt="1"/>
-          </p:nvPr>
-        </p:nvSpPr>
-        <p:spPr>
-          <a:xfrm>
-            <a:off x="685800" y="384048"/>
-            <a:ext cx="6400800" cy="237744"/>
-          </a:xfrm>
-          <a:prstGeom prst="rect">
-            <a:avLst/>
-          </a:prstGeom>
-          <a:noFill/>
-          <a:ln/>
-        </p:spPr>
-        <p:txBody>
-          <a:bodyPr wrap="square" lIns="0" tIns="0" rIns="0" bIns="0" rtlCol="0" anchor="ctr"/>
-          <a:lstStyle/>
-          <a:p>
-            <a:pPr indent="0" marL="0">
-              <a:buNone/>
-            </a:pPr>
-            <a:r>
-              <a:rPr lang="en-US" sz="1100" b="1" spc="160" kern="0" dirty="0">
-                <a:solidFill>
-                  <a:srgbClr val="14161B"/>
-                </a:solidFill>
-                <a:latin typeface="Trade Gothic Next" pitchFamily="34" charset="0"/>
-                <a:ea typeface="Trade Gothic Next" pitchFamily="34" charset="-122"/>
-                <a:cs typeface="Trade Gothic Next" pitchFamily="34" charset="-120"/>
-              </a:rPr>
-              <a:t>UNIT 02  •  CHEMISTRY</a:t>
-            </a:r>
-            <a:endParaRPr lang="en-US" sz="1100" dirty="0"/>
-          </a:p>
-        </p:txBody>
-      </p:sp>
-      <p:sp>
-        <p:nvSpPr>
-          <p:cNvPr id="10" name="Text 8"/>
-          <p:cNvSpPr txBox="1"/>
-          <p:nvPr>
-            <p:ph idx="117" type="body" hasCustomPrompt="1"/>
-          </p:nvPr>
-        </p:nvSpPr>
-        <p:spPr>
-          <a:xfrm>
-            <a:off x="8762695" y="6382512"/>
-            <a:ext cx="2743200" cy="237744"/>
-          </a:xfrm>
-          <a:prstGeom prst="rect">
-            <a:avLst/>
-          </a:prstGeom>
-          <a:noFill/>
-          <a:ln/>
-        </p:spPr>
-        <p:txBody>
-          <a:bodyPr wrap="square" lIns="0" tIns="0" rIns="0" bIns="0" rtlCol="0" anchor="ctr"/>
-          <a:lstStyle/>
-          <a:p>
-            <a:pPr algn="r" indent="0" marL="0">
-              <a:buNone/>
-            </a:pPr>
-            <a:r>
-              <a:rPr lang="en-US" sz="1000" b="1" spc="140" kern="0" dirty="0">
-                <a:solidFill>
-                  <a:srgbClr val="2E3338"/>
-                </a:solidFill>
-                <a:latin typeface="Trade Gothic Next" pitchFamily="34" charset="0"/>
-                <a:ea typeface="Trade Gothic Next" pitchFamily="34" charset="-122"/>
-                <a:cs typeface="Trade Gothic Next" pitchFamily="34" charset="-120"/>
-              </a:rPr>
-              <a:t>U02 • S02.4</a:t>
-            </a:r>
-            <a:endParaRPr lang="en-US" sz="1000" dirty="0"/>
-          </a:p>
-        </p:txBody>
-      </p:sp>
-      <p:sp>
-        <p:nvSpPr>
-          <p:cNvPr id="12" name="Text 3"/>
-          <p:cNvSpPr txBox="1"/>
-          <p:nvPr>
-            <p:ph idx="106" hasCustomPrompt="1"/>
-          </p:nvPr>
-        </p:nvSpPr>
-        <p:spPr>
-          <a:xfrm>
-            <a:off x="685800" y="2377440"/>
-            <a:ext cx="4663440" cy="2624328"/>
-          </a:xfrm>
-          <a:prstGeom prst="rect">
-            <a:avLst/>
-          </a:prstGeom>
-          <a:noFill/>
-          <a:ln/>
-        </p:spPr>
-        <p:txBody>
-          <a:bodyPr wrap="square" lIns="0" tIns="0" rIns="0" bIns="0" rtlCol="0" anchor="ctr"/>
-          <a:lstStyle/>
-          <a:p>
-            <a:pPr algn="ctr" indent="0" marL="0">
-              <a:buNone/>
-            </a:pPr>
-            <a:endParaRPr lang="en-US" sz="1200" dirty="0"/>
-          </a:p>
-        </p:txBody>
-      </p:sp>
-    </p:spTree>
-  </p:cSld>
-  <p:clrMapOvr>
-    <a:masterClrMapping/>
-  </p:clrMapOvr>
-</p:sld>
-</file>
-
-<file path=ppt/slides/slide18.xml><?xml version="1.0" encoding="utf-8"?>
-<p:sld xmlns:a="http://schemas.openxmlformats.org/drawingml/2006/main" xmlns:r="http://schemas.openxmlformats.org/officeDocument/2006/relationships" xmlns:p="http://schemas.openxmlformats.org/presentationml/2006/main">
-  <p:cSld name="Slide 18">
+  <p:cSld name="Slide 14">
     <p:spTree>
       <p:nvGrpSpPr>
         <p:cNvPr id="1" name=""/>
@@ -19914,6 +16843,2662 @@
 </p:sld>
 </file>
 
+<file path=ppt/slides/slide15.xml><?xml version="1.0" encoding="utf-8"?>
+<p:sld xmlns:a="http://schemas.openxmlformats.org/drawingml/2006/main" xmlns:r="http://schemas.openxmlformats.org/officeDocument/2006/relationships" xmlns:p="http://schemas.openxmlformats.org/presentationml/2006/main">
+  <p:cSld name="Slide 15">
+    <p:spTree>
+      <p:nvGrpSpPr>
+        <p:cNvPr id="1" name=""/>
+        <p:cNvGrpSpPr/>
+        <p:nvPr/>
+      </p:nvGrpSpPr>
+      <p:grpSpPr>
+        <a:xfrm>
+          <a:off x="0" y="0"/>
+          <a:ext cx="0" cy="0"/>
+          <a:chOff x="0" y="0"/>
+          <a:chExt cx="0" cy="0"/>
+        </a:xfrm>
+      </p:grpSpPr>
+      <p:sp>
+        <p:nvSpPr>
+          <p:cNvPr id="2" name="Text 2"/>
+          <p:cNvSpPr txBox="1"/>
+          <p:nvPr>
+            <p:ph idx="103" type="title" hasCustomPrompt="1"/>
+          </p:nvPr>
+        </p:nvSpPr>
+        <p:spPr>
+          <a:xfrm>
+            <a:off x="685800" y="932688"/>
+            <a:ext cx="7863840" cy="868680"/>
+          </a:xfrm>
+          <a:prstGeom prst="rect">
+            <a:avLst/>
+          </a:prstGeom>
+          <a:noFill/>
+          <a:ln/>
+        </p:spPr>
+        <p:txBody>
+          <a:bodyPr wrap="square" lIns="0" tIns="0" rIns="0" bIns="0" rtlCol="0" anchor="t"/>
+          <a:lstStyle/>
+          <a:p>
+            <a:pPr algn="l" indent="0" marL="0">
+              <a:buNone/>
+            </a:pPr>
+            <a:r>
+              <a:rPr lang="en-US" sz="2800" b="1" dirty="0">
+                <a:solidFill>
+                  <a:srgbClr val="14161B"/>
+                </a:solidFill>
+                <a:latin typeface="Trade Gothic Next" pitchFamily="34" charset="0"/>
+                <a:ea typeface="Trade Gothic Next" pitchFamily="34" charset="-122"/>
+                <a:cs typeface="Trade Gothic Next" pitchFamily="34" charset="-120"/>
+              </a:rPr>
+              <a:t>Example: Zn</a:t>
+            </a:r>
+            <a:pPr algn="l" indent="0" marL="0">
+              <a:buNone/>
+            </a:pPr>
+            <a:r>
+              <a:rPr lang="en-US" sz="2800" b="1" baseline="30000" dirty="0">
+                <a:solidFill>
+                  <a:srgbClr val="14161B"/>
+                </a:solidFill>
+                <a:latin typeface="Trade Gothic Next" pitchFamily="34" charset="0"/>
+                <a:ea typeface="Trade Gothic Next" pitchFamily="34" charset="-122"/>
+                <a:cs typeface="Trade Gothic Next" pitchFamily="34" charset="-120"/>
+              </a:rPr>
+              <a:t>2+</a:t>
+            </a:r>
+            <a:pPr algn="l" indent="0" marL="0">
+              <a:buNone/>
+            </a:pPr>
+            <a:r>
+              <a:rPr lang="en-US" sz="2800" b="1" dirty="0">
+                <a:solidFill>
+                  <a:srgbClr val="14161B"/>
+                </a:solidFill>
+                <a:latin typeface="Trade Gothic Next" pitchFamily="34" charset="0"/>
+                <a:ea typeface="Trade Gothic Next" pitchFamily="34" charset="-122"/>
+                <a:cs typeface="Trade Gothic Next" pitchFamily="34" charset="-120"/>
+              </a:rPr>
+              <a:t>, Cu</a:t>
+            </a:r>
+            <a:pPr algn="l" indent="0" marL="0">
+              <a:buNone/>
+            </a:pPr>
+            <a:r>
+              <a:rPr lang="en-US" sz="2800" b="1" baseline="30000" dirty="0">
+                <a:solidFill>
+                  <a:srgbClr val="14161B"/>
+                </a:solidFill>
+                <a:latin typeface="Trade Gothic Next" pitchFamily="34" charset="0"/>
+                <a:ea typeface="Trade Gothic Next" pitchFamily="34" charset="-122"/>
+                <a:cs typeface="Trade Gothic Next" pitchFamily="34" charset="-120"/>
+              </a:rPr>
+              <a:t>+</a:t>
+            </a:r>
+            <a:pPr algn="l" indent="0" marL="0">
+              <a:buNone/>
+            </a:pPr>
+            <a:r>
+              <a:rPr lang="en-US" sz="2800" b="1" dirty="0">
+                <a:solidFill>
+                  <a:srgbClr val="14161B"/>
+                </a:solidFill>
+                <a:latin typeface="Trade Gothic Next" pitchFamily="34" charset="0"/>
+                <a:ea typeface="Trade Gothic Next" pitchFamily="34" charset="-122"/>
+                <a:cs typeface="Trade Gothic Next" pitchFamily="34" charset="-120"/>
+              </a:rPr>
+              <a:t>, and Cu</a:t>
+            </a:r>
+            <a:pPr algn="l" indent="0" marL="0">
+              <a:buNone/>
+            </a:pPr>
+            <a:r>
+              <a:rPr lang="en-US" sz="2800" b="1" baseline="30000" dirty="0">
+                <a:solidFill>
+                  <a:srgbClr val="14161B"/>
+                </a:solidFill>
+                <a:latin typeface="Trade Gothic Next" pitchFamily="34" charset="0"/>
+                <a:ea typeface="Trade Gothic Next" pitchFamily="34" charset="-122"/>
+                <a:cs typeface="Trade Gothic Next" pitchFamily="34" charset="-120"/>
+              </a:rPr>
+              <a:t>2+</a:t>
+            </a:r>
+            <a:endParaRPr lang="en-US" sz="2800" dirty="0"/>
+          </a:p>
+        </p:txBody>
+      </p:sp>
+      <p:sp>
+        <p:nvSpPr>
+          <p:cNvPr id="3" name="Text 2"/>
+          <p:cNvSpPr txBox="1"/>
+          <p:nvPr>
+            <p:ph idx="104" type="body" hasCustomPrompt="1"/>
+          </p:nvPr>
+        </p:nvSpPr>
+        <p:spPr>
+          <a:xfrm>
+            <a:off x="685800" y="1847088"/>
+            <a:ext cx="7863840" cy="384048"/>
+          </a:xfrm>
+          <a:prstGeom prst="rect">
+            <a:avLst/>
+          </a:prstGeom>
+          <a:noFill/>
+          <a:ln/>
+        </p:spPr>
+        <p:txBody>
+          <a:bodyPr wrap="square" lIns="0" tIns="0" rIns="0" bIns="0" rtlCol="0"/>
+          <a:lstStyle/>
+          <a:p>
+            <a:pPr indent="0" marL="0">
+              <a:buNone/>
+            </a:pPr>
+            <a:r>
+              <a:rPr lang="en-US" sz="1700" dirty="0">
+                <a:solidFill>
+                  <a:srgbClr val="2E3338"/>
+                </a:solidFill>
+                <a:latin typeface="Trade Gothic Next" pitchFamily="34" charset="0"/>
+                <a:ea typeface="Trade Gothic Next" pitchFamily="34" charset="-122"/>
+                <a:cs typeface="Trade Gothic Next" pitchFamily="34" charset="-120"/>
+              </a:rPr>
+              <a:t>Same rule as iron. Copy the setup, not just the answer.</a:t>
+            </a:r>
+            <a:endParaRPr lang="en-US" sz="1700" dirty="0"/>
+          </a:p>
+        </p:txBody>
+      </p:sp>
+      <p:sp>
+        <p:nvSpPr>
+          <p:cNvPr id="4" name="Text 6"/>
+          <p:cNvSpPr txBox="1"/>
+          <p:nvPr>
+            <p:ph idx="110" type="body" hasCustomPrompt="1"/>
+          </p:nvPr>
+        </p:nvSpPr>
+        <p:spPr>
+          <a:xfrm>
+            <a:off x="886968" y="2798064"/>
+            <a:ext cx="4992624" cy="548640"/>
+          </a:xfrm>
+          <a:prstGeom prst="rect">
+            <a:avLst/>
+          </a:prstGeom>
+          <a:noFill/>
+          <a:ln/>
+        </p:spPr>
+        <p:txBody>
+          <a:bodyPr wrap="square" lIns="0" tIns="0" rIns="0" bIns="0" rtlCol="0"/>
+          <a:lstStyle/>
+          <a:p>
+            <a:pPr indent="0" marL="0">
+              <a:buNone/>
+            </a:pPr>
+            <a:r>
+              <a:rPr lang="en-US" sz="1600" dirty="0">
+                <a:solidFill>
+                  <a:srgbClr val="EDF0E5"/>
+                </a:solidFill>
+                <a:latin typeface="Trade Gothic Next" pitchFamily="34" charset="0"/>
+                <a:ea typeface="Trade Gothic Next" pitchFamily="34" charset="-122"/>
+                <a:cs typeface="Trade Gothic Next" pitchFamily="34" charset="-120"/>
+              </a:rPr>
+              <a:t>Write the [Ar] shorthand for Zn</a:t>
+            </a:r>
+            <a:pPr indent="0" marL="0">
+              <a:buNone/>
+            </a:pPr>
+            <a:r>
+              <a:rPr lang="en-US" sz="1600" baseline="30000" dirty="0">
+                <a:solidFill>
+                  <a:srgbClr val="EDF0E5"/>
+                </a:solidFill>
+                <a:latin typeface="Trade Gothic Next" pitchFamily="34" charset="0"/>
+                <a:ea typeface="Trade Gothic Next" pitchFamily="34" charset="-122"/>
+                <a:cs typeface="Trade Gothic Next" pitchFamily="34" charset="-120"/>
+              </a:rPr>
+              <a:t>2+</a:t>
+            </a:r>
+            <a:pPr indent="0" marL="0">
+              <a:buNone/>
+            </a:pPr>
+            <a:r>
+              <a:rPr lang="en-US" sz="1600" dirty="0">
+                <a:solidFill>
+                  <a:srgbClr val="EDF0E5"/>
+                </a:solidFill>
+                <a:latin typeface="Trade Gothic Next" pitchFamily="34" charset="0"/>
+                <a:ea typeface="Trade Gothic Next" pitchFamily="34" charset="-122"/>
+                <a:cs typeface="Trade Gothic Next" pitchFamily="34" charset="-120"/>
+              </a:rPr>
+              <a:t>, Cu</a:t>
+            </a:r>
+            <a:pPr indent="0" marL="0">
+              <a:buNone/>
+            </a:pPr>
+            <a:r>
+              <a:rPr lang="en-US" sz="1600" baseline="30000" dirty="0">
+                <a:solidFill>
+                  <a:srgbClr val="EDF0E5"/>
+                </a:solidFill>
+                <a:latin typeface="Trade Gothic Next" pitchFamily="34" charset="0"/>
+                <a:ea typeface="Trade Gothic Next" pitchFamily="34" charset="-122"/>
+                <a:cs typeface="Trade Gothic Next" pitchFamily="34" charset="-120"/>
+              </a:rPr>
+              <a:t>+</a:t>
+            </a:r>
+            <a:pPr indent="0" marL="0">
+              <a:buNone/>
+            </a:pPr>
+            <a:r>
+              <a:rPr lang="en-US" sz="1600" dirty="0">
+                <a:solidFill>
+                  <a:srgbClr val="EDF0E5"/>
+                </a:solidFill>
+                <a:latin typeface="Trade Gothic Next" pitchFamily="34" charset="0"/>
+                <a:ea typeface="Trade Gothic Next" pitchFamily="34" charset="-122"/>
+                <a:cs typeface="Trade Gothic Next" pitchFamily="34" charset="-120"/>
+              </a:rPr>
+              <a:t>, and Cu</a:t>
+            </a:r>
+            <a:pPr indent="0" marL="0">
+              <a:buNone/>
+            </a:pPr>
+            <a:r>
+              <a:rPr lang="en-US" sz="1600" baseline="30000" dirty="0">
+                <a:solidFill>
+                  <a:srgbClr val="EDF0E5"/>
+                </a:solidFill>
+                <a:latin typeface="Trade Gothic Next" pitchFamily="34" charset="0"/>
+                <a:ea typeface="Trade Gothic Next" pitchFamily="34" charset="-122"/>
+                <a:cs typeface="Trade Gothic Next" pitchFamily="34" charset="-120"/>
+              </a:rPr>
+              <a:t>2+</a:t>
+            </a:r>
+            <a:pPr indent="0" marL="0">
+              <a:buNone/>
+            </a:pPr>
+            <a:r>
+              <a:rPr lang="en-US" sz="1600" dirty="0">
+                <a:solidFill>
+                  <a:srgbClr val="EDF0E5"/>
+                </a:solidFill>
+                <a:latin typeface="Trade Gothic Next" pitchFamily="34" charset="0"/>
+                <a:ea typeface="Trade Gothic Next" pitchFamily="34" charset="-122"/>
+                <a:cs typeface="Trade Gothic Next" pitchFamily="34" charset="-120"/>
+              </a:rPr>
+              <a:t>.</a:t>
+            </a:r>
+            <a:endParaRPr lang="en-US" sz="1600" dirty="0"/>
+          </a:p>
+        </p:txBody>
+      </p:sp>
+      <p:sp>
+        <p:nvSpPr>
+          <p:cNvPr id="5" name="Text 7"/>
+          <p:cNvSpPr txBox="1"/>
+          <p:nvPr>
+            <p:ph idx="112" type="body" hasCustomPrompt="1"/>
+          </p:nvPr>
+        </p:nvSpPr>
+        <p:spPr>
+          <a:xfrm>
+            <a:off x="886968" y="3776472"/>
+            <a:ext cx="2203704" cy="219456"/>
+          </a:xfrm>
+          <a:prstGeom prst="rect">
+            <a:avLst/>
+          </a:prstGeom>
+          <a:noFill/>
+          <a:ln/>
+        </p:spPr>
+        <p:txBody>
+          <a:bodyPr wrap="square" lIns="0" tIns="0" rIns="0" bIns="0" rtlCol="0"/>
+          <a:lstStyle/>
+          <a:p>
+            <a:pPr indent="0" marL="0">
+              <a:buNone/>
+            </a:pPr>
+            <a:r>
+              <a:rPr lang="en-US" sz="1200" b="1" spc="120" kern="0" dirty="0">
+                <a:solidFill>
+                  <a:srgbClr val="2E3338"/>
+                </a:solidFill>
+                <a:latin typeface="Trade Gothic Next" pitchFamily="34" charset="0"/>
+                <a:ea typeface="Trade Gothic Next" pitchFamily="34" charset="-122"/>
+                <a:cs typeface="Trade Gothic Next" pitchFamily="34" charset="-120"/>
+              </a:rPr>
+              <a:t>GIVEN</a:t>
+            </a:r>
+            <a:endParaRPr lang="en-US" sz="1200" dirty="0"/>
+          </a:p>
+        </p:txBody>
+      </p:sp>
+      <p:sp>
+        <p:nvSpPr>
+          <p:cNvPr id="6" name="Text 7"/>
+          <p:cNvSpPr txBox="1"/>
+          <p:nvPr>
+            <p:ph idx="113" type="body" hasCustomPrompt="1"/>
+          </p:nvPr>
+        </p:nvSpPr>
+        <p:spPr>
+          <a:xfrm>
+            <a:off x="886968" y="4069080"/>
+            <a:ext cx="2203704" cy="1078992"/>
+          </a:xfrm>
+          <a:prstGeom prst="rect">
+            <a:avLst/>
+          </a:prstGeom>
+          <a:noFill/>
+          <a:ln/>
+        </p:spPr>
+        <p:txBody>
+          <a:bodyPr wrap="square" lIns="0" tIns="0" rIns="0" bIns="0" rtlCol="0"/>
+          <a:lstStyle/>
+          <a:p>
+            <a:pPr indent="0" marL="0">
+              <a:buNone/>
+            </a:pPr>
+            <a:r>
+              <a:rPr lang="en-US" sz="1600" dirty="0">
+                <a:solidFill>
+                  <a:srgbClr val="14161B"/>
+                </a:solidFill>
+                <a:latin typeface="Trade Gothic Next" pitchFamily="34" charset="0"/>
+                <a:ea typeface="Trade Gothic Next" pitchFamily="34" charset="-122"/>
+                <a:cs typeface="Trade Gothic Next" pitchFamily="34" charset="-120"/>
+              </a:rPr>
+              <a:t>Zn: [Ar] 4s</a:t>
+            </a:r>
+            <a:pPr indent="0" marL="0">
+              <a:buNone/>
+            </a:pPr>
+            <a:r>
+              <a:rPr lang="en-US" sz="1600" baseline="30000" dirty="0">
+                <a:solidFill>
+                  <a:srgbClr val="14161B"/>
+                </a:solidFill>
+                <a:latin typeface="Trade Gothic Next" pitchFamily="34" charset="0"/>
+                <a:ea typeface="Trade Gothic Next" pitchFamily="34" charset="-122"/>
+                <a:cs typeface="Trade Gothic Next" pitchFamily="34" charset="-120"/>
+              </a:rPr>
+              <a:t>2</a:t>
+            </a:r>
+            <a:pPr indent="0" marL="0">
+              <a:buNone/>
+            </a:pPr>
+            <a:r>
+              <a:rPr lang="en-US" sz="1600" dirty="0">
+                <a:solidFill>
+                  <a:srgbClr val="14161B"/>
+                </a:solidFill>
+                <a:latin typeface="Trade Gothic Next" pitchFamily="34" charset="0"/>
+                <a:ea typeface="Trade Gothic Next" pitchFamily="34" charset="-122"/>
+                <a:cs typeface="Trade Gothic Next" pitchFamily="34" charset="-120"/>
+              </a:rPr>
+              <a:t> 3d</a:t>
+            </a:r>
+            <a:pPr indent="0" marL="0">
+              <a:buNone/>
+            </a:pPr>
+            <a:r>
+              <a:rPr lang="en-US" sz="1600" baseline="30000" dirty="0">
+                <a:solidFill>
+                  <a:srgbClr val="14161B"/>
+                </a:solidFill>
+                <a:latin typeface="Trade Gothic Next" pitchFamily="34" charset="0"/>
+                <a:ea typeface="Trade Gothic Next" pitchFamily="34" charset="-122"/>
+                <a:cs typeface="Trade Gothic Next" pitchFamily="34" charset="-120"/>
+              </a:rPr>
+              <a:t>10</a:t>
+            </a:r>
+            <a:endParaRPr lang="en-US" sz="1600" dirty="0"/>
+          </a:p>
+          <a:p>
+            <a:pPr indent="0" marL="0">
+              <a:buNone/>
+            </a:pPr>
+            <a:r>
+              <a:rPr lang="en-US" sz="1600" dirty="0">
+                <a:solidFill>
+                  <a:srgbClr val="14161B"/>
+                </a:solidFill>
+                <a:latin typeface="Trade Gothic Next" pitchFamily="34" charset="0"/>
+                <a:ea typeface="Trade Gothic Next" pitchFamily="34" charset="-122"/>
+                <a:cs typeface="Trade Gothic Next" pitchFamily="34" charset="-120"/>
+              </a:rPr>
+              <a:t>Cu: [Ar] 4s</a:t>
+            </a:r>
+            <a:pPr indent="0" marL="0">
+              <a:buNone/>
+            </a:pPr>
+            <a:r>
+              <a:rPr lang="en-US" sz="1600" baseline="30000" dirty="0">
+                <a:solidFill>
+                  <a:srgbClr val="14161B"/>
+                </a:solidFill>
+                <a:latin typeface="Trade Gothic Next" pitchFamily="34" charset="0"/>
+                <a:ea typeface="Trade Gothic Next" pitchFamily="34" charset="-122"/>
+                <a:cs typeface="Trade Gothic Next" pitchFamily="34" charset="-120"/>
+              </a:rPr>
+              <a:t>1</a:t>
+            </a:r>
+            <a:pPr indent="0" marL="0">
+              <a:buNone/>
+            </a:pPr>
+            <a:r>
+              <a:rPr lang="en-US" sz="1600" dirty="0">
+                <a:solidFill>
+                  <a:srgbClr val="14161B"/>
+                </a:solidFill>
+                <a:latin typeface="Trade Gothic Next" pitchFamily="34" charset="0"/>
+                <a:ea typeface="Trade Gothic Next" pitchFamily="34" charset="-122"/>
+                <a:cs typeface="Trade Gothic Next" pitchFamily="34" charset="-120"/>
+              </a:rPr>
+              <a:t> 3d</a:t>
+            </a:r>
+            <a:pPr indent="0" marL="0">
+              <a:buNone/>
+            </a:pPr>
+            <a:r>
+              <a:rPr lang="en-US" sz="1600" baseline="30000" dirty="0">
+                <a:solidFill>
+                  <a:srgbClr val="14161B"/>
+                </a:solidFill>
+                <a:latin typeface="Trade Gothic Next" pitchFamily="34" charset="0"/>
+                <a:ea typeface="Trade Gothic Next" pitchFamily="34" charset="-122"/>
+                <a:cs typeface="Trade Gothic Next" pitchFamily="34" charset="-120"/>
+              </a:rPr>
+              <a:t>10</a:t>
+            </a:r>
+            <a:endParaRPr lang="en-US" sz="1600" dirty="0"/>
+          </a:p>
+        </p:txBody>
+      </p:sp>
+      <p:sp>
+        <p:nvSpPr>
+          <p:cNvPr id="7" name="Text 8"/>
+          <p:cNvSpPr txBox="1"/>
+          <p:nvPr>
+            <p:ph idx="115" type="body" hasCustomPrompt="1"/>
+          </p:nvPr>
+        </p:nvSpPr>
+        <p:spPr>
+          <a:xfrm>
+            <a:off x="3675888" y="3776472"/>
+            <a:ext cx="2203704" cy="219456"/>
+          </a:xfrm>
+          <a:prstGeom prst="rect">
+            <a:avLst/>
+          </a:prstGeom>
+          <a:noFill/>
+          <a:ln/>
+        </p:spPr>
+        <p:txBody>
+          <a:bodyPr wrap="square" lIns="0" tIns="0" rIns="0" bIns="0" rtlCol="0"/>
+          <a:lstStyle/>
+          <a:p>
+            <a:pPr indent="0" marL="0">
+              <a:buNone/>
+            </a:pPr>
+            <a:r>
+              <a:rPr lang="en-US" sz="1200" b="1" spc="120" kern="0" dirty="0">
+                <a:solidFill>
+                  <a:srgbClr val="2E3338"/>
+                </a:solidFill>
+                <a:latin typeface="Trade Gothic Next" pitchFamily="34" charset="0"/>
+                <a:ea typeface="Trade Gothic Next" pitchFamily="34" charset="-122"/>
+                <a:cs typeface="Trade Gothic Next" pitchFamily="34" charset="-120"/>
+              </a:rPr>
+              <a:t>NEED</a:t>
+            </a:r>
+            <a:endParaRPr lang="en-US" sz="1200" dirty="0"/>
+          </a:p>
+        </p:txBody>
+      </p:sp>
+      <p:sp>
+        <p:nvSpPr>
+          <p:cNvPr id="8" name="Text 8"/>
+          <p:cNvSpPr txBox="1"/>
+          <p:nvPr>
+            <p:ph idx="116" type="body" hasCustomPrompt="1"/>
+          </p:nvPr>
+        </p:nvSpPr>
+        <p:spPr>
+          <a:xfrm>
+            <a:off x="3675888" y="4069080"/>
+            <a:ext cx="2203704" cy="1078992"/>
+          </a:xfrm>
+          <a:prstGeom prst="rect">
+            <a:avLst/>
+          </a:prstGeom>
+          <a:noFill/>
+          <a:ln/>
+        </p:spPr>
+        <p:txBody>
+          <a:bodyPr wrap="square" lIns="0" tIns="0" rIns="0" bIns="0" rtlCol="0"/>
+          <a:lstStyle/>
+          <a:p>
+            <a:pPr indent="0" marL="0">
+              <a:buNone/>
+            </a:pPr>
+            <a:r>
+              <a:rPr lang="en-US" sz="1600" dirty="0">
+                <a:solidFill>
+                  <a:srgbClr val="14161B"/>
+                </a:solidFill>
+                <a:latin typeface="Trade Gothic Next" pitchFamily="34" charset="0"/>
+                <a:ea typeface="Trade Gothic Next" pitchFamily="34" charset="-122"/>
+                <a:cs typeface="Trade Gothic Next" pitchFamily="34" charset="-120"/>
+              </a:rPr>
+              <a:t>Electrons to remove</a:t>
+            </a:r>
+            <a:endParaRPr lang="en-US" sz="1600" dirty="0"/>
+          </a:p>
+          <a:p>
+            <a:pPr indent="0" marL="0">
+              <a:buNone/>
+            </a:pPr>
+            <a:r>
+              <a:rPr lang="en-US" sz="1600" dirty="0">
+                <a:solidFill>
+                  <a:srgbClr val="14161B"/>
+                </a:solidFill>
+                <a:latin typeface="Trade Gothic Next" pitchFamily="34" charset="0"/>
+                <a:ea typeface="Trade Gothic Next" pitchFamily="34" charset="-122"/>
+                <a:cs typeface="Trade Gothic Next" pitchFamily="34" charset="-120"/>
+              </a:rPr>
+              <a:t>Which sublevel they leave</a:t>
+            </a:r>
+            <a:endParaRPr lang="en-US" sz="1600" dirty="0"/>
+          </a:p>
+          <a:p>
+            <a:pPr indent="0" marL="0">
+              <a:buNone/>
+            </a:pPr>
+            <a:r>
+              <a:rPr lang="en-US" sz="1600" dirty="0">
+                <a:solidFill>
+                  <a:srgbClr val="14161B"/>
+                </a:solidFill>
+                <a:latin typeface="Trade Gothic Next" pitchFamily="34" charset="0"/>
+                <a:ea typeface="Trade Gothic Next" pitchFamily="34" charset="-122"/>
+                <a:cs typeface="Trade Gothic Next" pitchFamily="34" charset="-120"/>
+              </a:rPr>
+              <a:t>Each ion's shorthand</a:t>
+            </a:r>
+            <a:endParaRPr lang="en-US" sz="1600" dirty="0"/>
+          </a:p>
+        </p:txBody>
+      </p:sp>
+      <p:sp>
+        <p:nvSpPr>
+          <p:cNvPr id="9" name="Text 10"/>
+          <p:cNvSpPr txBox="1"/>
+          <p:nvPr>
+            <p:ph idx="119" type="body" hasCustomPrompt="1"/>
+          </p:nvPr>
+        </p:nvSpPr>
+        <p:spPr>
+          <a:xfrm>
+            <a:off x="6464808" y="2880360"/>
+            <a:ext cx="4837176" cy="2286000"/>
+          </a:xfrm>
+          <a:prstGeom prst="rect">
+            <a:avLst/>
+          </a:prstGeom>
+          <a:noFill/>
+          <a:ln/>
+        </p:spPr>
+        <p:txBody>
+          <a:bodyPr wrap="square" lIns="0" tIns="0" rIns="0" bIns="0" rtlCol="0"/>
+          <a:lstStyle/>
+          <a:p>
+            <a:pPr indent="0" marL="0">
+              <a:buNone/>
+            </a:pPr>
+            <a:endParaRPr lang="en-US" sz="1900" dirty="0"/>
+          </a:p>
+        </p:txBody>
+      </p:sp>
+      <p:sp>
+        <p:nvSpPr>
+          <p:cNvPr id="10" name="Text 12"/>
+          <p:cNvSpPr txBox="1"/>
+          <p:nvPr>
+            <p:ph idx="122" type="body" hasCustomPrompt="1"/>
+          </p:nvPr>
+        </p:nvSpPr>
+        <p:spPr>
+          <a:xfrm>
+            <a:off x="2240280" y="5605272"/>
+            <a:ext cx="8991295" cy="402336"/>
+          </a:xfrm>
+          <a:prstGeom prst="rect">
+            <a:avLst/>
+          </a:prstGeom>
+          <a:noFill/>
+          <a:ln/>
+        </p:spPr>
+        <p:txBody>
+          <a:bodyPr wrap="square" lIns="0" tIns="0" rIns="0" bIns="0" rtlCol="0" anchor="ctr"/>
+          <a:lstStyle/>
+          <a:p>
+            <a:pPr indent="0" marL="0">
+              <a:buNone/>
+            </a:pPr>
+            <a:r>
+              <a:rPr lang="en-US" sz="1600" b="1" dirty="0">
+                <a:solidFill>
+                  <a:srgbClr val="EDF0E5"/>
+                </a:solidFill>
+                <a:latin typeface="Trade Gothic Next" pitchFamily="34" charset="0"/>
+                <a:ea typeface="Trade Gothic Next" pitchFamily="34" charset="-122"/>
+                <a:cs typeface="Trade Gothic Next" pitchFamily="34" charset="-120"/>
+              </a:rPr>
+              <a:t>Take the 4s electrons first. Only then take from 3d.</a:t>
+            </a:r>
+            <a:endParaRPr lang="en-US" sz="1600" dirty="0"/>
+          </a:p>
+        </p:txBody>
+      </p:sp>
+      <p:sp>
+        <p:nvSpPr>
+          <p:cNvPr id="11" name="Text 1"/>
+          <p:cNvSpPr txBox="1"/>
+          <p:nvPr>
+            <p:ph idx="101" type="body" hasCustomPrompt="1"/>
+          </p:nvPr>
+        </p:nvSpPr>
+        <p:spPr>
+          <a:xfrm>
+            <a:off x="685800" y="384048"/>
+            <a:ext cx="6400800" cy="237744"/>
+          </a:xfrm>
+          <a:prstGeom prst="rect">
+            <a:avLst/>
+          </a:prstGeom>
+          <a:noFill/>
+          <a:ln/>
+        </p:spPr>
+        <p:txBody>
+          <a:bodyPr wrap="square" lIns="0" tIns="0" rIns="0" bIns="0" rtlCol="0" anchor="ctr"/>
+          <a:lstStyle/>
+          <a:p>
+            <a:pPr indent="0" marL="0">
+              <a:buNone/>
+            </a:pPr>
+            <a:r>
+              <a:rPr lang="en-US" sz="1100" b="1" spc="160" kern="0" dirty="0">
+                <a:solidFill>
+                  <a:srgbClr val="14161B"/>
+                </a:solidFill>
+                <a:latin typeface="Trade Gothic Next" pitchFamily="34" charset="0"/>
+                <a:ea typeface="Trade Gothic Next" pitchFamily="34" charset="-122"/>
+                <a:cs typeface="Trade Gothic Next" pitchFamily="34" charset="-120"/>
+              </a:rPr>
+              <a:t>UNIT 02  •  CHEMISTRY</a:t>
+            </a:r>
+            <a:endParaRPr lang="en-US" sz="1100" dirty="0"/>
+          </a:p>
+        </p:txBody>
+      </p:sp>
+      <p:sp>
+        <p:nvSpPr>
+          <p:cNvPr id="12" name="Text 13"/>
+          <p:cNvSpPr txBox="1"/>
+          <p:nvPr>
+            <p:ph idx="124" type="body" hasCustomPrompt="1"/>
+          </p:nvPr>
+        </p:nvSpPr>
+        <p:spPr>
+          <a:xfrm>
+            <a:off x="8762695" y="6382512"/>
+            <a:ext cx="2743200" cy="237744"/>
+          </a:xfrm>
+          <a:prstGeom prst="rect">
+            <a:avLst/>
+          </a:prstGeom>
+          <a:noFill/>
+          <a:ln/>
+        </p:spPr>
+        <p:txBody>
+          <a:bodyPr wrap="square" lIns="0" tIns="0" rIns="0" bIns="0" rtlCol="0" anchor="ctr"/>
+          <a:lstStyle/>
+          <a:p>
+            <a:pPr algn="r" indent="0" marL="0">
+              <a:buNone/>
+            </a:pPr>
+            <a:r>
+              <a:rPr lang="en-US" sz="1000" b="1" spc="140" kern="0" dirty="0">
+                <a:solidFill>
+                  <a:srgbClr val="2E3338"/>
+                </a:solidFill>
+                <a:latin typeface="Trade Gothic Next" pitchFamily="34" charset="0"/>
+                <a:ea typeface="Trade Gothic Next" pitchFamily="34" charset="-122"/>
+                <a:cs typeface="Trade Gothic Next" pitchFamily="34" charset="-120"/>
+              </a:rPr>
+              <a:t>U02 • S02.4</a:t>
+            </a:r>
+            <a:endParaRPr lang="en-US" sz="1000" dirty="0"/>
+          </a:p>
+        </p:txBody>
+      </p:sp>
+      <p:sp>
+        <p:nvSpPr>
+          <p:cNvPr id="14" name="Text 4"/>
+          <p:cNvSpPr txBox="1"/>
+          <p:nvPr>
+            <p:ph idx="107" hasCustomPrompt="1"/>
+          </p:nvPr>
+        </p:nvSpPr>
+        <p:spPr>
+          <a:xfrm>
+            <a:off x="9262872" y="1088136"/>
+            <a:ext cx="1901952" cy="1069848"/>
+          </a:xfrm>
+          <a:prstGeom prst="rect">
+            <a:avLst/>
+          </a:prstGeom>
+          <a:noFill/>
+          <a:ln/>
+        </p:spPr>
+        <p:txBody>
+          <a:bodyPr wrap="square" lIns="0" tIns="0" rIns="0" bIns="0" rtlCol="0" anchor="ctr"/>
+          <a:lstStyle/>
+          <a:p>
+            <a:pPr algn="ctr" indent="0" marL="0">
+              <a:buNone/>
+            </a:pPr>
+            <a:endParaRPr lang="en-US" sz="1200" dirty="0"/>
+          </a:p>
+        </p:txBody>
+      </p:sp>
+    </p:spTree>
+  </p:cSld>
+  <p:clrMapOvr>
+    <a:masterClrMapping/>
+  </p:clrMapOvr>
+</p:sld>
+</file>
+
+<file path=ppt/slides/slide16.xml><?xml version="1.0" encoding="utf-8"?>
+<p:sld xmlns:a="http://schemas.openxmlformats.org/drawingml/2006/main" xmlns:r="http://schemas.openxmlformats.org/officeDocument/2006/relationships" xmlns:p="http://schemas.openxmlformats.org/presentationml/2006/main">
+  <p:cSld name="Slide 16">
+    <p:spTree>
+      <p:nvGrpSpPr>
+        <p:cNvPr id="1" name=""/>
+        <p:cNvGrpSpPr/>
+        <p:nvPr/>
+      </p:nvGrpSpPr>
+      <p:grpSpPr>
+        <a:xfrm>
+          <a:off x="0" y="0"/>
+          <a:ext cx="0" cy="0"/>
+          <a:chOff x="0" y="0"/>
+          <a:chExt cx="0" cy="0"/>
+        </a:xfrm>
+      </p:grpSpPr>
+      <p:sp>
+        <p:nvSpPr>
+          <p:cNvPr id="2" name="Text 2"/>
+          <p:cNvSpPr txBox="1"/>
+          <p:nvPr>
+            <p:ph idx="103" type="title" hasCustomPrompt="1"/>
+          </p:nvPr>
+        </p:nvSpPr>
+        <p:spPr>
+          <a:xfrm>
+            <a:off x="685800" y="932688"/>
+            <a:ext cx="10820095" cy="868680"/>
+          </a:xfrm>
+          <a:prstGeom prst="rect">
+            <a:avLst/>
+          </a:prstGeom>
+          <a:noFill/>
+          <a:ln/>
+        </p:spPr>
+        <p:txBody>
+          <a:bodyPr wrap="square" lIns="0" tIns="0" rIns="0" bIns="0" rtlCol="0" anchor="t"/>
+          <a:lstStyle/>
+          <a:p>
+            <a:pPr algn="l" indent="0" marL="0">
+              <a:buNone/>
+            </a:pPr>
+            <a:r>
+              <a:rPr lang="en-US" sz="2800" b="1" dirty="0">
+                <a:solidFill>
+                  <a:srgbClr val="14161B"/>
+                </a:solidFill>
+                <a:latin typeface="Trade Gothic Next" pitchFamily="34" charset="0"/>
+                <a:ea typeface="Trade Gothic Next" pitchFamily="34" charset="-122"/>
+                <a:cs typeface="Trade Gothic Next" pitchFamily="34" charset="-120"/>
+              </a:rPr>
+              <a:t>Zn</a:t>
+            </a:r>
+            <a:pPr algn="l" indent="0" marL="0">
+              <a:buNone/>
+            </a:pPr>
+            <a:r>
+              <a:rPr lang="en-US" sz="2800" b="1" baseline="30000" dirty="0">
+                <a:solidFill>
+                  <a:srgbClr val="14161B"/>
+                </a:solidFill>
+                <a:latin typeface="Trade Gothic Next" pitchFamily="34" charset="0"/>
+                <a:ea typeface="Trade Gothic Next" pitchFamily="34" charset="-122"/>
+                <a:cs typeface="Trade Gothic Next" pitchFamily="34" charset="-120"/>
+              </a:rPr>
+              <a:t>2+</a:t>
+            </a:r>
+            <a:pPr algn="l" indent="0" marL="0">
+              <a:buNone/>
+            </a:pPr>
+            <a:r>
+              <a:rPr lang="en-US" sz="2800" b="1" dirty="0">
+                <a:solidFill>
+                  <a:srgbClr val="14161B"/>
+                </a:solidFill>
+                <a:latin typeface="Trade Gothic Next" pitchFamily="34" charset="0"/>
+                <a:ea typeface="Trade Gothic Next" pitchFamily="34" charset="-122"/>
+                <a:cs typeface="Trade Gothic Next" pitchFamily="34" charset="-120"/>
+              </a:rPr>
+              <a:t>, Cu</a:t>
+            </a:r>
+            <a:pPr algn="l" indent="0" marL="0">
+              <a:buNone/>
+            </a:pPr>
+            <a:r>
+              <a:rPr lang="en-US" sz="2800" b="1" baseline="30000" dirty="0">
+                <a:solidFill>
+                  <a:srgbClr val="14161B"/>
+                </a:solidFill>
+                <a:latin typeface="Trade Gothic Next" pitchFamily="34" charset="0"/>
+                <a:ea typeface="Trade Gothic Next" pitchFamily="34" charset="-122"/>
+                <a:cs typeface="Trade Gothic Next" pitchFamily="34" charset="-120"/>
+              </a:rPr>
+              <a:t>+</a:t>
+            </a:r>
+            <a:pPr algn="l" indent="0" marL="0">
+              <a:buNone/>
+            </a:pPr>
+            <a:r>
+              <a:rPr lang="en-US" sz="2800" b="1" dirty="0">
+                <a:solidFill>
+                  <a:srgbClr val="14161B"/>
+                </a:solidFill>
+                <a:latin typeface="Trade Gothic Next" pitchFamily="34" charset="0"/>
+                <a:ea typeface="Trade Gothic Next" pitchFamily="34" charset="-122"/>
+                <a:cs typeface="Trade Gothic Next" pitchFamily="34" charset="-120"/>
+              </a:rPr>
+              <a:t>, and Cu</a:t>
+            </a:r>
+            <a:pPr algn="l" indent="0" marL="0">
+              <a:buNone/>
+            </a:pPr>
+            <a:r>
+              <a:rPr lang="en-US" sz="2800" b="1" baseline="30000" dirty="0">
+                <a:solidFill>
+                  <a:srgbClr val="14161B"/>
+                </a:solidFill>
+                <a:latin typeface="Trade Gothic Next" pitchFamily="34" charset="0"/>
+                <a:ea typeface="Trade Gothic Next" pitchFamily="34" charset="-122"/>
+                <a:cs typeface="Trade Gothic Next" pitchFamily="34" charset="-120"/>
+              </a:rPr>
+              <a:t>2+</a:t>
+            </a:r>
+            <a:pPr algn="l" indent="0" marL="0">
+              <a:buNone/>
+            </a:pPr>
+            <a:r>
+              <a:rPr lang="en-US" sz="2800" b="1" dirty="0">
+                <a:solidFill>
+                  <a:srgbClr val="14161B"/>
+                </a:solidFill>
+                <a:latin typeface="Trade Gothic Next" pitchFamily="34" charset="0"/>
+                <a:ea typeface="Trade Gothic Next" pitchFamily="34" charset="-122"/>
+                <a:cs typeface="Trade Gothic Next" pitchFamily="34" charset="-120"/>
+              </a:rPr>
+              <a:t>, Worked</a:t>
+            </a:r>
+            <a:endParaRPr lang="en-US" sz="2800" dirty="0"/>
+          </a:p>
+        </p:txBody>
+      </p:sp>
+      <p:sp>
+        <p:nvSpPr>
+          <p:cNvPr id="3" name="Text 2"/>
+          <p:cNvSpPr txBox="1"/>
+          <p:nvPr>
+            <p:ph idx="104" type="body" hasCustomPrompt="1"/>
+          </p:nvPr>
+        </p:nvSpPr>
+        <p:spPr>
+          <a:xfrm>
+            <a:off x="685800" y="1847088"/>
+            <a:ext cx="10820095" cy="384048"/>
+          </a:xfrm>
+          <a:prstGeom prst="rect">
+            <a:avLst/>
+          </a:prstGeom>
+          <a:noFill/>
+          <a:ln/>
+        </p:spPr>
+        <p:txBody>
+          <a:bodyPr wrap="square" lIns="0" tIns="0" rIns="0" bIns="0" rtlCol="0"/>
+          <a:lstStyle/>
+          <a:p>
+            <a:pPr indent="0" marL="0">
+              <a:buNone/>
+            </a:pPr>
+            <a:r>
+              <a:rPr lang="en-US" sz="1700" dirty="0">
+                <a:solidFill>
+                  <a:srgbClr val="2E3338"/>
+                </a:solidFill>
+                <a:latin typeface="Trade Gothic Next" pitchFamily="34" charset="0"/>
+                <a:ea typeface="Trade Gothic Next" pitchFamily="34" charset="-122"/>
+                <a:cs typeface="Trade Gothic Next" pitchFamily="34" charset="-120"/>
+              </a:rPr>
+              <a:t>None of these ends at a noble gas configuration.</a:t>
+            </a:r>
+            <a:endParaRPr lang="en-US" sz="1700" dirty="0"/>
+          </a:p>
+        </p:txBody>
+      </p:sp>
+      <p:sp>
+        <p:nvSpPr>
+          <p:cNvPr id="4" name="Text 5"/>
+          <p:cNvSpPr txBox="1"/>
+          <p:nvPr>
+            <p:ph idx="109" type="body" hasCustomPrompt="1"/>
+          </p:nvPr>
+        </p:nvSpPr>
+        <p:spPr>
+          <a:xfrm>
+            <a:off x="5276088" y="2560320"/>
+            <a:ext cx="2752344" cy="219456"/>
+          </a:xfrm>
+          <a:prstGeom prst="rect">
+            <a:avLst/>
+          </a:prstGeom>
+          <a:noFill/>
+          <a:ln/>
+        </p:spPr>
+        <p:txBody>
+          <a:bodyPr wrap="square" lIns="0" tIns="0" rIns="0" bIns="0" rtlCol="0"/>
+          <a:lstStyle/>
+          <a:p>
+            <a:pPr indent="0" marL="0">
+              <a:buNone/>
+            </a:pPr>
+            <a:r>
+              <a:rPr lang="en-US" sz="1200" b="1" spc="120" kern="0" dirty="0">
+                <a:solidFill>
+                  <a:srgbClr val="2E3338"/>
+                </a:solidFill>
+                <a:latin typeface="Trade Gothic Next" pitchFamily="34" charset="0"/>
+                <a:ea typeface="Trade Gothic Next" pitchFamily="34" charset="-122"/>
+                <a:cs typeface="Trade Gothic Next" pitchFamily="34" charset="-120"/>
+              </a:rPr>
+              <a:t>SETUP</a:t>
+            </a:r>
+            <a:endParaRPr lang="en-US" sz="1200" dirty="0"/>
+          </a:p>
+        </p:txBody>
+      </p:sp>
+      <p:sp>
+        <p:nvSpPr>
+          <p:cNvPr id="5" name="Text 5"/>
+          <p:cNvSpPr txBox="1"/>
+          <p:nvPr>
+            <p:ph idx="110" type="body" hasCustomPrompt="1"/>
+          </p:nvPr>
+        </p:nvSpPr>
+        <p:spPr>
+          <a:xfrm>
+            <a:off x="5276088" y="2852928"/>
+            <a:ext cx="2752344" cy="1901952"/>
+          </a:xfrm>
+          <a:prstGeom prst="rect">
+            <a:avLst/>
+          </a:prstGeom>
+          <a:noFill/>
+          <a:ln/>
+        </p:spPr>
+        <p:txBody>
+          <a:bodyPr wrap="square" lIns="0" tIns="0" rIns="0" bIns="0" rtlCol="0"/>
+          <a:lstStyle/>
+          <a:p>
+            <a:pPr indent="0" marL="0">
+              <a:buNone/>
+            </a:pPr>
+            <a:r>
+              <a:rPr lang="en-US" sz="1600" dirty="0">
+                <a:solidFill>
+                  <a:srgbClr val="14161B"/>
+                </a:solidFill>
+                <a:latin typeface="Trade Gothic Next" pitchFamily="34" charset="0"/>
+                <a:ea typeface="Trade Gothic Next" pitchFamily="34" charset="-122"/>
+                <a:cs typeface="Trade Gothic Next" pitchFamily="34" charset="-120"/>
+              </a:rPr>
+              <a:t>Take 4s first, then 3d.</a:t>
+            </a:r>
+            <a:endParaRPr lang="en-US" sz="1600" dirty="0"/>
+          </a:p>
+          <a:p>
+            <a:pPr indent="0" marL="0">
+              <a:buNone/>
+            </a:pPr>
+            <a:r>
+              <a:rPr lang="en-US" sz="1600" dirty="0">
+                <a:solidFill>
+                  <a:srgbClr val="14161B"/>
+                </a:solidFill>
+                <a:latin typeface="Trade Gothic Next" pitchFamily="34" charset="0"/>
+                <a:ea typeface="Trade Gothic Next" pitchFamily="34" charset="-122"/>
+                <a:cs typeface="Trade Gothic Next" pitchFamily="34" charset="-120"/>
+              </a:rPr>
+              <a:t>Zn 30 → 28. Cu 29 → 28 or 27.</a:t>
+            </a:r>
+            <a:endParaRPr lang="en-US" sz="1600" dirty="0"/>
+          </a:p>
+        </p:txBody>
+      </p:sp>
+      <p:sp>
+        <p:nvSpPr>
+          <p:cNvPr id="6" name="Text 7"/>
+          <p:cNvSpPr txBox="1"/>
+          <p:nvPr>
+            <p:ph idx="113" type="body" hasCustomPrompt="1"/>
+          </p:nvPr>
+        </p:nvSpPr>
+        <p:spPr>
+          <a:xfrm>
+            <a:off x="8613648" y="2871216"/>
+            <a:ext cx="2688336" cy="1920240"/>
+          </a:xfrm>
+          <a:prstGeom prst="rect">
+            <a:avLst/>
+          </a:prstGeom>
+          <a:noFill/>
+          <a:ln/>
+        </p:spPr>
+        <p:txBody>
+          <a:bodyPr wrap="square" lIns="0" tIns="0" rIns="0" bIns="0" rtlCol="0"/>
+          <a:lstStyle/>
+          <a:p>
+            <a:pPr indent="0" marL="0">
+              <a:buNone/>
+            </a:pPr>
+            <a:r>
+              <a:rPr lang="en-US" sz="1900" dirty="0">
+                <a:solidFill>
+                  <a:srgbClr val="14161B"/>
+                </a:solidFill>
+                <a:latin typeface="Trade Gothic Next" pitchFamily="34" charset="0"/>
+                <a:ea typeface="Trade Gothic Next" pitchFamily="34" charset="-122"/>
+                <a:cs typeface="Trade Gothic Next" pitchFamily="34" charset="-120"/>
+              </a:rPr>
+              <a:t>Zn</a:t>
+            </a:r>
+            <a:pPr indent="0" marL="0">
+              <a:buNone/>
+            </a:pPr>
+            <a:r>
+              <a:rPr lang="en-US" sz="1900" baseline="30000" dirty="0">
+                <a:solidFill>
+                  <a:srgbClr val="14161B"/>
+                </a:solidFill>
+                <a:latin typeface="Trade Gothic Next" pitchFamily="34" charset="0"/>
+                <a:ea typeface="Trade Gothic Next" pitchFamily="34" charset="-122"/>
+                <a:cs typeface="Trade Gothic Next" pitchFamily="34" charset="-120"/>
+              </a:rPr>
+              <a:t>2+</a:t>
+            </a:r>
+            <a:pPr indent="0" marL="0">
+              <a:buNone/>
+            </a:pPr>
+            <a:r>
+              <a:rPr lang="en-US" sz="1900" dirty="0">
+                <a:solidFill>
+                  <a:srgbClr val="14161B"/>
+                </a:solidFill>
+                <a:latin typeface="Trade Gothic Next" pitchFamily="34" charset="0"/>
+                <a:ea typeface="Trade Gothic Next" pitchFamily="34" charset="-122"/>
+                <a:cs typeface="Trade Gothic Next" pitchFamily="34" charset="-120"/>
+              </a:rPr>
+              <a:t>: [Ar] 3d</a:t>
+            </a:r>
+            <a:pPr indent="0" marL="0">
+              <a:buNone/>
+            </a:pPr>
+            <a:r>
+              <a:rPr lang="en-US" sz="1900" baseline="30000" dirty="0">
+                <a:solidFill>
+                  <a:srgbClr val="14161B"/>
+                </a:solidFill>
+                <a:latin typeface="Trade Gothic Next" pitchFamily="34" charset="0"/>
+                <a:ea typeface="Trade Gothic Next" pitchFamily="34" charset="-122"/>
+                <a:cs typeface="Trade Gothic Next" pitchFamily="34" charset="-120"/>
+              </a:rPr>
+              <a:t>10</a:t>
+            </a:r>
+            <a:endParaRPr lang="en-US" sz="1900" dirty="0"/>
+          </a:p>
+          <a:p>
+            <a:pPr indent="0" marL="0">
+              <a:buNone/>
+            </a:pPr>
+            <a:r>
+              <a:rPr lang="en-US" sz="1900" dirty="0">
+                <a:solidFill>
+                  <a:srgbClr val="14161B"/>
+                </a:solidFill>
+                <a:latin typeface="Trade Gothic Next" pitchFamily="34" charset="0"/>
+                <a:ea typeface="Trade Gothic Next" pitchFamily="34" charset="-122"/>
+                <a:cs typeface="Trade Gothic Next" pitchFamily="34" charset="-120"/>
+              </a:rPr>
+              <a:t>Cu</a:t>
+            </a:r>
+            <a:pPr indent="0" marL="0">
+              <a:buNone/>
+            </a:pPr>
+            <a:r>
+              <a:rPr lang="en-US" sz="1900" baseline="30000" dirty="0">
+                <a:solidFill>
+                  <a:srgbClr val="14161B"/>
+                </a:solidFill>
+                <a:latin typeface="Trade Gothic Next" pitchFamily="34" charset="0"/>
+                <a:ea typeface="Trade Gothic Next" pitchFamily="34" charset="-122"/>
+                <a:cs typeface="Trade Gothic Next" pitchFamily="34" charset="-120"/>
+              </a:rPr>
+              <a:t>+</a:t>
+            </a:r>
+            <a:pPr indent="0" marL="0">
+              <a:buNone/>
+            </a:pPr>
+            <a:r>
+              <a:rPr lang="en-US" sz="1900" dirty="0">
+                <a:solidFill>
+                  <a:srgbClr val="14161B"/>
+                </a:solidFill>
+                <a:latin typeface="Trade Gothic Next" pitchFamily="34" charset="0"/>
+                <a:ea typeface="Trade Gothic Next" pitchFamily="34" charset="-122"/>
+                <a:cs typeface="Trade Gothic Next" pitchFamily="34" charset="-120"/>
+              </a:rPr>
+              <a:t>: [Ar] 3d</a:t>
+            </a:r>
+            <a:pPr indent="0" marL="0">
+              <a:buNone/>
+            </a:pPr>
+            <a:r>
+              <a:rPr lang="en-US" sz="1900" baseline="30000" dirty="0">
+                <a:solidFill>
+                  <a:srgbClr val="14161B"/>
+                </a:solidFill>
+                <a:latin typeface="Trade Gothic Next" pitchFamily="34" charset="0"/>
+                <a:ea typeface="Trade Gothic Next" pitchFamily="34" charset="-122"/>
+                <a:cs typeface="Trade Gothic Next" pitchFamily="34" charset="-120"/>
+              </a:rPr>
+              <a:t>10</a:t>
+            </a:r>
+            <a:endParaRPr lang="en-US" sz="1900" dirty="0"/>
+          </a:p>
+          <a:p>
+            <a:pPr indent="0" marL="0">
+              <a:buNone/>
+            </a:pPr>
+            <a:r>
+              <a:rPr lang="en-US" sz="1900" dirty="0">
+                <a:solidFill>
+                  <a:srgbClr val="14161B"/>
+                </a:solidFill>
+                <a:latin typeface="Trade Gothic Next" pitchFamily="34" charset="0"/>
+                <a:ea typeface="Trade Gothic Next" pitchFamily="34" charset="-122"/>
+                <a:cs typeface="Trade Gothic Next" pitchFamily="34" charset="-120"/>
+              </a:rPr>
+              <a:t>Cu</a:t>
+            </a:r>
+            <a:pPr indent="0" marL="0">
+              <a:buNone/>
+            </a:pPr>
+            <a:r>
+              <a:rPr lang="en-US" sz="1900" baseline="30000" dirty="0">
+                <a:solidFill>
+                  <a:srgbClr val="14161B"/>
+                </a:solidFill>
+                <a:latin typeface="Trade Gothic Next" pitchFamily="34" charset="0"/>
+                <a:ea typeface="Trade Gothic Next" pitchFamily="34" charset="-122"/>
+                <a:cs typeface="Trade Gothic Next" pitchFamily="34" charset="-120"/>
+              </a:rPr>
+              <a:t>2+</a:t>
+            </a:r>
+            <a:pPr indent="0" marL="0">
+              <a:buNone/>
+            </a:pPr>
+            <a:r>
+              <a:rPr lang="en-US" sz="1900" dirty="0">
+                <a:solidFill>
+                  <a:srgbClr val="14161B"/>
+                </a:solidFill>
+                <a:latin typeface="Trade Gothic Next" pitchFamily="34" charset="0"/>
+                <a:ea typeface="Trade Gothic Next" pitchFamily="34" charset="-122"/>
+                <a:cs typeface="Trade Gothic Next" pitchFamily="34" charset="-120"/>
+              </a:rPr>
+              <a:t>: 4s, then one 3d</a:t>
+            </a:r>
+            <a:endParaRPr lang="en-US" sz="1900" dirty="0"/>
+          </a:p>
+          <a:p>
+            <a:pPr indent="0" marL="0">
+              <a:buNone/>
+            </a:pPr>
+            <a:r>
+              <a:rPr lang="en-US" sz="1900" dirty="0">
+                <a:solidFill>
+                  <a:srgbClr val="14161B"/>
+                </a:solidFill>
+                <a:latin typeface="Trade Gothic Next" pitchFamily="34" charset="0"/>
+                <a:ea typeface="Trade Gothic Next" pitchFamily="34" charset="-122"/>
+                <a:cs typeface="Trade Gothic Next" pitchFamily="34" charset="-120"/>
+              </a:rPr>
+              <a:t>→ [Ar] 3d</a:t>
+            </a:r>
+            <a:pPr indent="0" marL="0">
+              <a:buNone/>
+            </a:pPr>
+            <a:r>
+              <a:rPr lang="en-US" sz="1900" baseline="30000" dirty="0">
+                <a:solidFill>
+                  <a:srgbClr val="14161B"/>
+                </a:solidFill>
+                <a:latin typeface="Trade Gothic Next" pitchFamily="34" charset="0"/>
+                <a:ea typeface="Trade Gothic Next" pitchFamily="34" charset="-122"/>
+                <a:cs typeface="Trade Gothic Next" pitchFamily="34" charset="-120"/>
+              </a:rPr>
+              <a:t>9</a:t>
+            </a:r>
+            <a:endParaRPr lang="en-US" sz="1900" dirty="0"/>
+          </a:p>
+        </p:txBody>
+      </p:sp>
+      <p:sp>
+        <p:nvSpPr>
+          <p:cNvPr id="7" name="Text 9"/>
+          <p:cNvSpPr txBox="1"/>
+          <p:nvPr>
+            <p:ph idx="116" type="body" hasCustomPrompt="1"/>
+          </p:nvPr>
+        </p:nvSpPr>
+        <p:spPr>
+          <a:xfrm>
+            <a:off x="2240280" y="5212080"/>
+            <a:ext cx="8991295" cy="402336"/>
+          </a:xfrm>
+          <a:prstGeom prst="rect">
+            <a:avLst/>
+          </a:prstGeom>
+          <a:noFill/>
+          <a:ln/>
+        </p:spPr>
+        <p:txBody>
+          <a:bodyPr wrap="square" lIns="0" tIns="0" rIns="0" bIns="0" rtlCol="0" anchor="ctr"/>
+          <a:lstStyle/>
+          <a:p>
+            <a:pPr indent="0" marL="0">
+              <a:buNone/>
+            </a:pPr>
+            <a:r>
+              <a:rPr lang="en-US" sz="1600" b="1" dirty="0">
+                <a:solidFill>
+                  <a:srgbClr val="EDF0E5"/>
+                </a:solidFill>
+                <a:latin typeface="Trade Gothic Next" pitchFamily="34" charset="0"/>
+                <a:ea typeface="Trade Gothic Next" pitchFamily="34" charset="-122"/>
+                <a:cs typeface="Trade Gothic Next" pitchFamily="34" charset="-120"/>
+              </a:rPr>
+              <a:t>Zn</a:t>
+            </a:r>
+            <a:pPr indent="0" marL="0">
+              <a:buNone/>
+            </a:pPr>
+            <a:r>
+              <a:rPr lang="en-US" sz="1600" b="1" baseline="30000" dirty="0">
+                <a:solidFill>
+                  <a:srgbClr val="EDF0E5"/>
+                </a:solidFill>
+                <a:latin typeface="Trade Gothic Next" pitchFamily="34" charset="0"/>
+                <a:ea typeface="Trade Gothic Next" pitchFamily="34" charset="-122"/>
+                <a:cs typeface="Trade Gothic Next" pitchFamily="34" charset="-120"/>
+              </a:rPr>
+              <a:t>2+</a:t>
+            </a:r>
+            <a:pPr indent="0" marL="0">
+              <a:buNone/>
+            </a:pPr>
+            <a:r>
+              <a:rPr lang="en-US" sz="1600" b="1" dirty="0">
+                <a:solidFill>
+                  <a:srgbClr val="EDF0E5"/>
+                </a:solidFill>
+                <a:latin typeface="Trade Gothic Next" pitchFamily="34" charset="0"/>
+                <a:ea typeface="Trade Gothic Next" pitchFamily="34" charset="-122"/>
+                <a:cs typeface="Trade Gothic Next" pitchFamily="34" charset="-120"/>
+              </a:rPr>
+              <a:t> and Cu</a:t>
+            </a:r>
+            <a:pPr indent="0" marL="0">
+              <a:buNone/>
+            </a:pPr>
+            <a:r>
+              <a:rPr lang="en-US" sz="1600" b="1" baseline="30000" dirty="0">
+                <a:solidFill>
+                  <a:srgbClr val="EDF0E5"/>
+                </a:solidFill>
+                <a:latin typeface="Trade Gothic Next" pitchFamily="34" charset="0"/>
+                <a:ea typeface="Trade Gothic Next" pitchFamily="34" charset="-122"/>
+                <a:cs typeface="Trade Gothic Next" pitchFamily="34" charset="-120"/>
+              </a:rPr>
+              <a:t>+</a:t>
+            </a:r>
+            <a:pPr indent="0" marL="0">
+              <a:buNone/>
+            </a:pPr>
+            <a:r>
+              <a:rPr lang="en-US" sz="1600" b="1" dirty="0">
+                <a:solidFill>
+                  <a:srgbClr val="EDF0E5"/>
+                </a:solidFill>
+                <a:latin typeface="Trade Gothic Next" pitchFamily="34" charset="0"/>
+                <a:ea typeface="Trade Gothic Next" pitchFamily="34" charset="-122"/>
+                <a:cs typeface="Trade Gothic Next" pitchFamily="34" charset="-120"/>
+              </a:rPr>
+              <a:t> are both [Ar] 3d</a:t>
+            </a:r>
+            <a:pPr indent="0" marL="0">
+              <a:buNone/>
+            </a:pPr>
+            <a:r>
+              <a:rPr lang="en-US" sz="1600" b="1" baseline="30000" dirty="0">
+                <a:solidFill>
+                  <a:srgbClr val="EDF0E5"/>
+                </a:solidFill>
+                <a:latin typeface="Trade Gothic Next" pitchFamily="34" charset="0"/>
+                <a:ea typeface="Trade Gothic Next" pitchFamily="34" charset="-122"/>
+                <a:cs typeface="Trade Gothic Next" pitchFamily="34" charset="-120"/>
+              </a:rPr>
+              <a:t>10</a:t>
+            </a:r>
+            <a:pPr indent="0" marL="0">
+              <a:buNone/>
+            </a:pPr>
+            <a:r>
+              <a:rPr lang="en-US" sz="1600" b="1" dirty="0">
+                <a:solidFill>
+                  <a:srgbClr val="EDF0E5"/>
+                </a:solidFill>
+                <a:latin typeface="Trade Gothic Next" pitchFamily="34" charset="0"/>
+                <a:ea typeface="Trade Gothic Next" pitchFamily="34" charset="-122"/>
+                <a:cs typeface="Trade Gothic Next" pitchFamily="34" charset="-120"/>
+              </a:rPr>
+              <a:t>. Cu</a:t>
+            </a:r>
+            <a:pPr indent="0" marL="0">
+              <a:buNone/>
+            </a:pPr>
+            <a:r>
+              <a:rPr lang="en-US" sz="1600" b="1" baseline="30000" dirty="0">
+                <a:solidFill>
+                  <a:srgbClr val="EDF0E5"/>
+                </a:solidFill>
+                <a:latin typeface="Trade Gothic Next" pitchFamily="34" charset="0"/>
+                <a:ea typeface="Trade Gothic Next" pitchFamily="34" charset="-122"/>
+                <a:cs typeface="Trade Gothic Next" pitchFamily="34" charset="-120"/>
+              </a:rPr>
+              <a:t>2+</a:t>
+            </a:r>
+            <a:pPr indent="0" marL="0">
+              <a:buNone/>
+            </a:pPr>
+            <a:r>
+              <a:rPr lang="en-US" sz="1600" b="1" dirty="0">
+                <a:solidFill>
+                  <a:srgbClr val="EDF0E5"/>
+                </a:solidFill>
+                <a:latin typeface="Trade Gothic Next" pitchFamily="34" charset="0"/>
+                <a:ea typeface="Trade Gothic Next" pitchFamily="34" charset="-122"/>
+                <a:cs typeface="Trade Gothic Next" pitchFamily="34" charset="-120"/>
+              </a:rPr>
+              <a:t> is [Ar] 3d</a:t>
+            </a:r>
+            <a:pPr indent="0" marL="0">
+              <a:buNone/>
+            </a:pPr>
+            <a:r>
+              <a:rPr lang="en-US" sz="1600" b="1" baseline="30000" dirty="0">
+                <a:solidFill>
+                  <a:srgbClr val="EDF0E5"/>
+                </a:solidFill>
+                <a:latin typeface="Trade Gothic Next" pitchFamily="34" charset="0"/>
+                <a:ea typeface="Trade Gothic Next" pitchFamily="34" charset="-122"/>
+                <a:cs typeface="Trade Gothic Next" pitchFamily="34" charset="-120"/>
+              </a:rPr>
+              <a:t>9</a:t>
+            </a:r>
+            <a:pPr indent="0" marL="0">
+              <a:buNone/>
+            </a:pPr>
+            <a:r>
+              <a:rPr lang="en-US" sz="1600" b="1" dirty="0">
+                <a:solidFill>
+                  <a:srgbClr val="EDF0E5"/>
+                </a:solidFill>
+                <a:latin typeface="Trade Gothic Next" pitchFamily="34" charset="0"/>
+                <a:ea typeface="Trade Gothic Next" pitchFamily="34" charset="-122"/>
+                <a:cs typeface="Trade Gothic Next" pitchFamily="34" charset="-120"/>
+              </a:rPr>
+              <a:t>.</a:t>
+            </a:r>
+            <a:endParaRPr lang="en-US" sz="1600" dirty="0"/>
+          </a:p>
+        </p:txBody>
+      </p:sp>
+      <p:sp>
+        <p:nvSpPr>
+          <p:cNvPr id="8" name="Text 1"/>
+          <p:cNvSpPr txBox="1"/>
+          <p:nvPr>
+            <p:ph idx="101" type="body" hasCustomPrompt="1"/>
+          </p:nvPr>
+        </p:nvSpPr>
+        <p:spPr>
+          <a:xfrm>
+            <a:off x="685800" y="384048"/>
+            <a:ext cx="6400800" cy="237744"/>
+          </a:xfrm>
+          <a:prstGeom prst="rect">
+            <a:avLst/>
+          </a:prstGeom>
+          <a:noFill/>
+          <a:ln/>
+        </p:spPr>
+        <p:txBody>
+          <a:bodyPr wrap="square" lIns="0" tIns="0" rIns="0" bIns="0" rtlCol="0" anchor="ctr"/>
+          <a:lstStyle/>
+          <a:p>
+            <a:pPr indent="0" marL="0">
+              <a:buNone/>
+            </a:pPr>
+            <a:r>
+              <a:rPr lang="en-US" sz="1100" b="1" spc="160" kern="0" dirty="0">
+                <a:solidFill>
+                  <a:srgbClr val="14161B"/>
+                </a:solidFill>
+                <a:latin typeface="Trade Gothic Next" pitchFamily="34" charset="0"/>
+                <a:ea typeface="Trade Gothic Next" pitchFamily="34" charset="-122"/>
+                <a:cs typeface="Trade Gothic Next" pitchFamily="34" charset="-120"/>
+              </a:rPr>
+              <a:t>UNIT 02  •  CHEMISTRY</a:t>
+            </a:r>
+            <a:endParaRPr lang="en-US" sz="1100" dirty="0"/>
+          </a:p>
+        </p:txBody>
+      </p:sp>
+      <p:sp>
+        <p:nvSpPr>
+          <p:cNvPr id="9" name="Text 10"/>
+          <p:cNvSpPr txBox="1"/>
+          <p:nvPr>
+            <p:ph idx="118" type="body" hasCustomPrompt="1"/>
+          </p:nvPr>
+        </p:nvSpPr>
+        <p:spPr>
+          <a:xfrm>
+            <a:off x="8762695" y="6382512"/>
+            <a:ext cx="2743200" cy="237744"/>
+          </a:xfrm>
+          <a:prstGeom prst="rect">
+            <a:avLst/>
+          </a:prstGeom>
+          <a:noFill/>
+          <a:ln/>
+        </p:spPr>
+        <p:txBody>
+          <a:bodyPr wrap="square" lIns="0" tIns="0" rIns="0" bIns="0" rtlCol="0" anchor="ctr"/>
+          <a:lstStyle/>
+          <a:p>
+            <a:pPr algn="r" indent="0" marL="0">
+              <a:buNone/>
+            </a:pPr>
+            <a:r>
+              <a:rPr lang="en-US" sz="1000" b="1" spc="140" kern="0" dirty="0">
+                <a:solidFill>
+                  <a:srgbClr val="2E3338"/>
+                </a:solidFill>
+                <a:latin typeface="Trade Gothic Next" pitchFamily="34" charset="0"/>
+                <a:ea typeface="Trade Gothic Next" pitchFamily="34" charset="-122"/>
+                <a:cs typeface="Trade Gothic Next" pitchFamily="34" charset="-120"/>
+              </a:rPr>
+              <a:t>U02 • S02.4</a:t>
+            </a:r>
+            <a:endParaRPr lang="en-US" sz="1000" dirty="0"/>
+          </a:p>
+        </p:txBody>
+      </p:sp>
+      <p:sp>
+        <p:nvSpPr>
+          <p:cNvPr id="11" name="Text 4"/>
+          <p:cNvSpPr txBox="1"/>
+          <p:nvPr>
+            <p:ph idx="107" hasCustomPrompt="1"/>
+          </p:nvPr>
+        </p:nvSpPr>
+        <p:spPr>
+          <a:xfrm>
+            <a:off x="832104" y="2542032"/>
+            <a:ext cx="3867912" cy="2267712"/>
+          </a:xfrm>
+          <a:prstGeom prst="rect">
+            <a:avLst/>
+          </a:prstGeom>
+          <a:noFill/>
+          <a:ln/>
+        </p:spPr>
+        <p:txBody>
+          <a:bodyPr wrap="square" lIns="0" tIns="0" rIns="0" bIns="0" rtlCol="0" anchor="ctr"/>
+          <a:lstStyle/>
+          <a:p>
+            <a:pPr algn="ctr" indent="0" marL="0">
+              <a:buNone/>
+            </a:pPr>
+            <a:endParaRPr lang="en-US" sz="1200" dirty="0"/>
+          </a:p>
+        </p:txBody>
+      </p:sp>
+    </p:spTree>
+  </p:cSld>
+  <p:clrMapOvr>
+    <a:masterClrMapping/>
+  </p:clrMapOvr>
+</p:sld>
+</file>
+
+<file path=ppt/slides/slide17.xml><?xml version="1.0" encoding="utf-8"?>
+<p:sld xmlns:a="http://schemas.openxmlformats.org/drawingml/2006/main" xmlns:r="http://schemas.openxmlformats.org/officeDocument/2006/relationships" xmlns:p="http://schemas.openxmlformats.org/presentationml/2006/main">
+  <p:cSld name="Slide 17">
+    <p:spTree>
+      <p:nvGrpSpPr>
+        <p:cNvPr id="1" name=""/>
+        <p:cNvGrpSpPr/>
+        <p:nvPr/>
+      </p:nvGrpSpPr>
+      <p:grpSpPr>
+        <a:xfrm>
+          <a:off x="0" y="0"/>
+          <a:ext cx="0" cy="0"/>
+          <a:chOff x="0" y="0"/>
+          <a:chExt cx="0" cy="0"/>
+        </a:xfrm>
+      </p:grpSpPr>
+      <p:sp>
+        <p:nvSpPr>
+          <p:cNvPr id="2" name="Text 2"/>
+          <p:cNvSpPr txBox="1"/>
+          <p:nvPr>
+            <p:ph idx="103" type="title" hasCustomPrompt="1"/>
+          </p:nvPr>
+        </p:nvSpPr>
+        <p:spPr>
+          <a:xfrm>
+            <a:off x="685800" y="932688"/>
+            <a:ext cx="10820095" cy="868680"/>
+          </a:xfrm>
+          <a:prstGeom prst="rect">
+            <a:avLst/>
+          </a:prstGeom>
+          <a:noFill/>
+          <a:ln/>
+        </p:spPr>
+        <p:txBody>
+          <a:bodyPr wrap="square" lIns="0" tIns="0" rIns="0" bIns="0" rtlCol="0" anchor="t"/>
+          <a:lstStyle/>
+          <a:p>
+            <a:pPr algn="l" indent="0" marL="0">
+              <a:buNone/>
+            </a:pPr>
+            <a:r>
+              <a:rPr lang="en-US" sz="2800" b="1" dirty="0">
+                <a:solidFill>
+                  <a:srgbClr val="14161B"/>
+                </a:solidFill>
+                <a:latin typeface="Trade Gothic Next" pitchFamily="34" charset="0"/>
+                <a:ea typeface="Trade Gothic Next" pitchFamily="34" charset="-122"/>
+                <a:cs typeface="Trade Gothic Next" pitchFamily="34" charset="-120"/>
+              </a:rPr>
+              <a:t>Why Calcium Forms Ca</a:t>
+            </a:r>
+            <a:pPr algn="l" indent="0" marL="0">
+              <a:buNone/>
+            </a:pPr>
+            <a:r>
+              <a:rPr lang="en-US" sz="2800" b="1" baseline="30000" dirty="0">
+                <a:solidFill>
+                  <a:srgbClr val="14161B"/>
+                </a:solidFill>
+                <a:latin typeface="Trade Gothic Next" pitchFamily="34" charset="0"/>
+                <a:ea typeface="Trade Gothic Next" pitchFamily="34" charset="-122"/>
+                <a:cs typeface="Trade Gothic Next" pitchFamily="34" charset="-120"/>
+              </a:rPr>
+              <a:t>2+</a:t>
+            </a:r>
+            <a:endParaRPr lang="en-US" sz="2800" dirty="0"/>
+          </a:p>
+        </p:txBody>
+      </p:sp>
+      <p:sp>
+        <p:nvSpPr>
+          <p:cNvPr id="3" name="Text 2"/>
+          <p:cNvSpPr txBox="1"/>
+          <p:nvPr>
+            <p:ph idx="104" type="body" hasCustomPrompt="1"/>
+          </p:nvPr>
+        </p:nvSpPr>
+        <p:spPr>
+          <a:xfrm>
+            <a:off x="685800" y="1847088"/>
+            <a:ext cx="10820095" cy="384048"/>
+          </a:xfrm>
+          <a:prstGeom prst="rect">
+            <a:avLst/>
+          </a:prstGeom>
+          <a:noFill/>
+          <a:ln/>
+        </p:spPr>
+        <p:txBody>
+          <a:bodyPr wrap="square" lIns="0" tIns="0" rIns="0" bIns="0" rtlCol="0"/>
+          <a:lstStyle/>
+          <a:p>
+            <a:pPr indent="0" marL="0">
+              <a:buNone/>
+            </a:pPr>
+            <a:r>
+              <a:rPr lang="en-US" sz="1700" dirty="0">
+                <a:solidFill>
+                  <a:srgbClr val="2E3338"/>
+                </a:solidFill>
+                <a:latin typeface="Trade Gothic Next" pitchFamily="34" charset="0"/>
+                <a:ea typeface="Trade Gothic Next" pitchFamily="34" charset="-122"/>
+                <a:cs typeface="Trade Gothic Next" pitchFamily="34" charset="-120"/>
+              </a:rPr>
+              <a:t>Count valence electrons first. The count tells you the move.</a:t>
+            </a:r>
+            <a:endParaRPr lang="en-US" sz="1700" dirty="0"/>
+          </a:p>
+        </p:txBody>
+      </p:sp>
+      <p:sp>
+        <p:nvSpPr>
+          <p:cNvPr id="4" name="Text 4"/>
+          <p:cNvSpPr txBox="1"/>
+          <p:nvPr>
+            <p:ph idx="108" type="body" hasCustomPrompt="1"/>
+          </p:nvPr>
+        </p:nvSpPr>
+        <p:spPr>
+          <a:xfrm>
+            <a:off x="5733288" y="2542032"/>
+            <a:ext cx="2752344" cy="219456"/>
+          </a:xfrm>
+          <a:prstGeom prst="rect">
+            <a:avLst/>
+          </a:prstGeom>
+          <a:noFill/>
+          <a:ln/>
+        </p:spPr>
+        <p:txBody>
+          <a:bodyPr wrap="square" lIns="0" tIns="0" rIns="0" bIns="0" rtlCol="0"/>
+          <a:lstStyle/>
+          <a:p>
+            <a:pPr indent="0" marL="0">
+              <a:buNone/>
+            </a:pPr>
+            <a:r>
+              <a:rPr lang="en-US" sz="1200" b="1" spc="120" kern="0" dirty="0">
+                <a:solidFill>
+                  <a:srgbClr val="2E3338"/>
+                </a:solidFill>
+                <a:latin typeface="Trade Gothic Next" pitchFamily="34" charset="0"/>
+                <a:ea typeface="Trade Gothic Next" pitchFamily="34" charset="-122"/>
+                <a:cs typeface="Trade Gothic Next" pitchFamily="34" charset="-120"/>
+              </a:rPr>
+              <a:t>THE ATOM</a:t>
+            </a:r>
+            <a:endParaRPr lang="en-US" sz="1200" dirty="0"/>
+          </a:p>
+        </p:txBody>
+      </p:sp>
+      <p:sp>
+        <p:nvSpPr>
+          <p:cNvPr id="5" name="Text 4"/>
+          <p:cNvSpPr txBox="1"/>
+          <p:nvPr>
+            <p:ph idx="109" type="body" hasCustomPrompt="1"/>
+          </p:nvPr>
+        </p:nvSpPr>
+        <p:spPr>
+          <a:xfrm>
+            <a:off x="5733288" y="2834640"/>
+            <a:ext cx="2752344" cy="1965960"/>
+          </a:xfrm>
+          <a:prstGeom prst="rect">
+            <a:avLst/>
+          </a:prstGeom>
+          <a:noFill/>
+          <a:ln/>
+        </p:spPr>
+        <p:txBody>
+          <a:bodyPr wrap="square" lIns="0" tIns="0" rIns="0" bIns="0" rtlCol="0"/>
+          <a:lstStyle/>
+          <a:p>
+            <a:pPr indent="0" marL="0">
+              <a:buNone/>
+            </a:pPr>
+            <a:r>
+              <a:rPr lang="en-US" sz="1600" dirty="0">
+                <a:solidFill>
+                  <a:srgbClr val="14161B"/>
+                </a:solidFill>
+                <a:latin typeface="Trade Gothic Next" pitchFamily="34" charset="0"/>
+                <a:ea typeface="Trade Gothic Next" pitchFamily="34" charset="-122"/>
+                <a:cs typeface="Trade Gothic Next" pitchFamily="34" charset="-120"/>
+              </a:rPr>
+              <a:t>Ca: [Ar] 4s</a:t>
+            </a:r>
+            <a:pPr indent="0" marL="0">
+              <a:buNone/>
+            </a:pPr>
+            <a:r>
+              <a:rPr lang="en-US" sz="1600" baseline="30000" dirty="0">
+                <a:solidFill>
+                  <a:srgbClr val="14161B"/>
+                </a:solidFill>
+                <a:latin typeface="Trade Gothic Next" pitchFamily="34" charset="0"/>
+                <a:ea typeface="Trade Gothic Next" pitchFamily="34" charset="-122"/>
+                <a:cs typeface="Trade Gothic Next" pitchFamily="34" charset="-120"/>
+              </a:rPr>
+              <a:t>2</a:t>
+            </a:r>
+            <a:endParaRPr lang="en-US" sz="1600" dirty="0"/>
+          </a:p>
+          <a:p>
+            <a:pPr indent="0" marL="0">
+              <a:buNone/>
+            </a:pPr>
+            <a:r>
+              <a:rPr lang="en-US" sz="1600" dirty="0">
+                <a:solidFill>
+                  <a:srgbClr val="14161B"/>
+                </a:solidFill>
+                <a:latin typeface="Trade Gothic Next" pitchFamily="34" charset="0"/>
+                <a:ea typeface="Trade Gothic Next" pitchFamily="34" charset="-122"/>
+                <a:cs typeface="Trade Gothic Next" pitchFamily="34" charset="-120"/>
+              </a:rPr>
+              <a:t>2 valence electrons.</a:t>
+            </a:r>
+            <a:endParaRPr lang="en-US" sz="1600" dirty="0"/>
+          </a:p>
+          <a:p>
+            <a:pPr indent="0" marL="0">
+              <a:buNone/>
+            </a:pPr>
+            <a:r>
+              <a:rPr lang="en-US" sz="1600" dirty="0">
+                <a:solidFill>
+                  <a:srgbClr val="14161B"/>
+                </a:solidFill>
+                <a:latin typeface="Trade Gothic Next" pitchFamily="34" charset="0"/>
+                <a:ea typeface="Trade Gothic Next" pitchFamily="34" charset="-122"/>
+                <a:cs typeface="Trade Gothic Next" pitchFamily="34" charset="-120"/>
+              </a:rPr>
+              <a:t>Lose 2, not gain 6: the fewest wins.</a:t>
+            </a:r>
+            <a:endParaRPr lang="en-US" sz="1600" dirty="0"/>
+          </a:p>
+        </p:txBody>
+      </p:sp>
+      <p:sp>
+        <p:nvSpPr>
+          <p:cNvPr id="6" name="Text 5"/>
+          <p:cNvSpPr txBox="1"/>
+          <p:nvPr>
+            <p:ph idx="111" type="body" hasCustomPrompt="1"/>
+          </p:nvPr>
+        </p:nvSpPr>
+        <p:spPr>
+          <a:xfrm>
+            <a:off x="9116568" y="2542032"/>
+            <a:ext cx="2752344" cy="219456"/>
+          </a:xfrm>
+          <a:prstGeom prst="rect">
+            <a:avLst/>
+          </a:prstGeom>
+          <a:noFill/>
+          <a:ln/>
+        </p:spPr>
+        <p:txBody>
+          <a:bodyPr wrap="square" lIns="0" tIns="0" rIns="0" bIns="0" rtlCol="0"/>
+          <a:lstStyle/>
+          <a:p>
+            <a:pPr indent="0" marL="0">
+              <a:buNone/>
+            </a:pPr>
+            <a:r>
+              <a:rPr lang="en-US" sz="1200" b="1" spc="120" kern="0" dirty="0">
+                <a:solidFill>
+                  <a:srgbClr val="BDB6AA"/>
+                </a:solidFill>
+                <a:latin typeface="Trade Gothic Next" pitchFamily="34" charset="0"/>
+                <a:ea typeface="Trade Gothic Next" pitchFamily="34" charset="-122"/>
+                <a:cs typeface="Trade Gothic Next" pitchFamily="34" charset="-120"/>
+              </a:rPr>
+              <a:t>THE ION</a:t>
+            </a:r>
+            <a:endParaRPr lang="en-US" sz="1200" dirty="0"/>
+          </a:p>
+        </p:txBody>
+      </p:sp>
+      <p:sp>
+        <p:nvSpPr>
+          <p:cNvPr id="7" name="Text 5"/>
+          <p:cNvSpPr txBox="1"/>
+          <p:nvPr>
+            <p:ph idx="112" type="body" hasCustomPrompt="1"/>
+          </p:nvPr>
+        </p:nvSpPr>
+        <p:spPr>
+          <a:xfrm>
+            <a:off x="9116568" y="2834640"/>
+            <a:ext cx="2752344" cy="1965960"/>
+          </a:xfrm>
+          <a:prstGeom prst="rect">
+            <a:avLst/>
+          </a:prstGeom>
+          <a:noFill/>
+          <a:ln/>
+        </p:spPr>
+        <p:txBody>
+          <a:bodyPr wrap="square" lIns="0" tIns="0" rIns="0" bIns="0" rtlCol="0"/>
+          <a:lstStyle/>
+          <a:p>
+            <a:pPr indent="0" marL="0">
+              <a:buNone/>
+            </a:pPr>
+            <a:r>
+              <a:rPr lang="en-US" sz="1600" dirty="0">
+                <a:solidFill>
+                  <a:srgbClr val="EDF0E5"/>
+                </a:solidFill>
+                <a:latin typeface="Trade Gothic Next" pitchFamily="34" charset="0"/>
+                <a:ea typeface="Trade Gothic Next" pitchFamily="34" charset="-122"/>
+                <a:cs typeface="Trade Gothic Next" pitchFamily="34" charset="-120"/>
+              </a:rPr>
+              <a:t>Lose both 4s electrons: [Ar].</a:t>
+            </a:r>
+            <a:endParaRPr lang="en-US" sz="1600" dirty="0"/>
+          </a:p>
+          <a:p>
+            <a:pPr indent="0" marL="0">
+              <a:buNone/>
+            </a:pPr>
+            <a:r>
+              <a:rPr lang="en-US" sz="1600" dirty="0">
+                <a:solidFill>
+                  <a:srgbClr val="EDF0E5"/>
+                </a:solidFill>
+                <a:latin typeface="Trade Gothic Next" pitchFamily="34" charset="0"/>
+                <a:ea typeface="Trade Gothic Next" pitchFamily="34" charset="-122"/>
+                <a:cs typeface="Trade Gothic Next" pitchFamily="34" charset="-120"/>
+              </a:rPr>
+              <a:t>18 electrons, 20 protons.</a:t>
+            </a:r>
+            <a:endParaRPr lang="en-US" sz="1600" dirty="0"/>
+          </a:p>
+          <a:p>
+            <a:pPr indent="0" marL="0">
+              <a:buNone/>
+            </a:pPr>
+            <a:r>
+              <a:rPr lang="en-US" sz="1600" dirty="0">
+                <a:solidFill>
+                  <a:srgbClr val="EDF0E5"/>
+                </a:solidFill>
+                <a:latin typeface="Trade Gothic Next" pitchFamily="34" charset="0"/>
+                <a:ea typeface="Trade Gothic Next" pitchFamily="34" charset="-122"/>
+                <a:cs typeface="Trade Gothic Next" pitchFamily="34" charset="-120"/>
+              </a:rPr>
+              <a:t>Charge: 20 − 18 = 2+</a:t>
+            </a:r>
+            <a:endParaRPr lang="en-US" sz="1600" dirty="0"/>
+          </a:p>
+        </p:txBody>
+      </p:sp>
+      <p:sp>
+        <p:nvSpPr>
+          <p:cNvPr id="8" name="Text 7"/>
+          <p:cNvSpPr txBox="1"/>
+          <p:nvPr>
+            <p:ph idx="115" type="body" hasCustomPrompt="1"/>
+          </p:nvPr>
+        </p:nvSpPr>
+        <p:spPr>
+          <a:xfrm>
+            <a:off x="2240280" y="5394960"/>
+            <a:ext cx="8991295" cy="402336"/>
+          </a:xfrm>
+          <a:prstGeom prst="rect">
+            <a:avLst/>
+          </a:prstGeom>
+          <a:noFill/>
+          <a:ln/>
+        </p:spPr>
+        <p:txBody>
+          <a:bodyPr wrap="square" lIns="0" tIns="0" rIns="0" bIns="0" rtlCol="0" anchor="ctr"/>
+          <a:lstStyle/>
+          <a:p>
+            <a:pPr indent="0" marL="0">
+              <a:buNone/>
+            </a:pPr>
+            <a:r>
+              <a:rPr lang="en-US" sz="1600" b="1" dirty="0">
+                <a:solidFill>
+                  <a:srgbClr val="EDF0E5"/>
+                </a:solidFill>
+                <a:latin typeface="Trade Gothic Next" pitchFamily="34" charset="0"/>
+                <a:ea typeface="Trade Gothic Next" pitchFamily="34" charset="-122"/>
+                <a:cs typeface="Trade Gothic Next" pitchFamily="34" charset="-120"/>
+              </a:rPr>
+              <a:t>Ca has 2 valence electrons. Losing both leaves [Ar], so Ca forms Ca</a:t>
+            </a:r>
+            <a:pPr indent="0" marL="0">
+              <a:buNone/>
+            </a:pPr>
+            <a:r>
+              <a:rPr lang="en-US" sz="1600" b="1" baseline="30000" dirty="0">
+                <a:solidFill>
+                  <a:srgbClr val="EDF0E5"/>
+                </a:solidFill>
+                <a:latin typeface="Trade Gothic Next" pitchFamily="34" charset="0"/>
+                <a:ea typeface="Trade Gothic Next" pitchFamily="34" charset="-122"/>
+                <a:cs typeface="Trade Gothic Next" pitchFamily="34" charset="-120"/>
+              </a:rPr>
+              <a:t>2+</a:t>
+            </a:r>
+            <a:pPr indent="0" marL="0">
+              <a:buNone/>
+            </a:pPr>
+            <a:r>
+              <a:rPr lang="en-US" sz="1600" b="1" dirty="0">
+                <a:solidFill>
+                  <a:srgbClr val="EDF0E5"/>
+                </a:solidFill>
+                <a:latin typeface="Trade Gothic Next" pitchFamily="34" charset="0"/>
+                <a:ea typeface="Trade Gothic Next" pitchFamily="34" charset="-122"/>
+                <a:cs typeface="Trade Gothic Next" pitchFamily="34" charset="-120"/>
+              </a:rPr>
+              <a:t>.</a:t>
+            </a:r>
+            <a:endParaRPr lang="en-US" sz="1600" dirty="0"/>
+          </a:p>
+        </p:txBody>
+      </p:sp>
+      <p:sp>
+        <p:nvSpPr>
+          <p:cNvPr id="9" name="Text 1"/>
+          <p:cNvSpPr txBox="1"/>
+          <p:nvPr>
+            <p:ph idx="101" type="body" hasCustomPrompt="1"/>
+          </p:nvPr>
+        </p:nvSpPr>
+        <p:spPr>
+          <a:xfrm>
+            <a:off x="685800" y="384048"/>
+            <a:ext cx="6400800" cy="237744"/>
+          </a:xfrm>
+          <a:prstGeom prst="rect">
+            <a:avLst/>
+          </a:prstGeom>
+          <a:noFill/>
+          <a:ln/>
+        </p:spPr>
+        <p:txBody>
+          <a:bodyPr wrap="square" lIns="0" tIns="0" rIns="0" bIns="0" rtlCol="0" anchor="ctr"/>
+          <a:lstStyle/>
+          <a:p>
+            <a:pPr indent="0" marL="0">
+              <a:buNone/>
+            </a:pPr>
+            <a:r>
+              <a:rPr lang="en-US" sz="1100" b="1" spc="160" kern="0" dirty="0">
+                <a:solidFill>
+                  <a:srgbClr val="14161B"/>
+                </a:solidFill>
+                <a:latin typeface="Trade Gothic Next" pitchFamily="34" charset="0"/>
+                <a:ea typeface="Trade Gothic Next" pitchFamily="34" charset="-122"/>
+                <a:cs typeface="Trade Gothic Next" pitchFamily="34" charset="-120"/>
+              </a:rPr>
+              <a:t>UNIT 02  •  CHEMISTRY</a:t>
+            </a:r>
+            <a:endParaRPr lang="en-US" sz="1100" dirty="0"/>
+          </a:p>
+        </p:txBody>
+      </p:sp>
+      <p:sp>
+        <p:nvSpPr>
+          <p:cNvPr id="10" name="Text 8"/>
+          <p:cNvSpPr txBox="1"/>
+          <p:nvPr>
+            <p:ph idx="117" type="body" hasCustomPrompt="1"/>
+          </p:nvPr>
+        </p:nvSpPr>
+        <p:spPr>
+          <a:xfrm>
+            <a:off x="8762695" y="6382512"/>
+            <a:ext cx="2743200" cy="237744"/>
+          </a:xfrm>
+          <a:prstGeom prst="rect">
+            <a:avLst/>
+          </a:prstGeom>
+          <a:noFill/>
+          <a:ln/>
+        </p:spPr>
+        <p:txBody>
+          <a:bodyPr wrap="square" lIns="0" tIns="0" rIns="0" bIns="0" rtlCol="0" anchor="ctr"/>
+          <a:lstStyle/>
+          <a:p>
+            <a:pPr algn="r" indent="0" marL="0">
+              <a:buNone/>
+            </a:pPr>
+            <a:r>
+              <a:rPr lang="en-US" sz="1000" b="1" spc="140" kern="0" dirty="0">
+                <a:solidFill>
+                  <a:srgbClr val="2E3338"/>
+                </a:solidFill>
+                <a:latin typeface="Trade Gothic Next" pitchFamily="34" charset="0"/>
+                <a:ea typeface="Trade Gothic Next" pitchFamily="34" charset="-122"/>
+                <a:cs typeface="Trade Gothic Next" pitchFamily="34" charset="-120"/>
+              </a:rPr>
+              <a:t>U02 • S02.4</a:t>
+            </a:r>
+            <a:endParaRPr lang="en-US" sz="1000" dirty="0"/>
+          </a:p>
+        </p:txBody>
+      </p:sp>
+      <p:sp>
+        <p:nvSpPr>
+          <p:cNvPr id="12" name="Text 3"/>
+          <p:cNvSpPr txBox="1"/>
+          <p:nvPr>
+            <p:ph idx="106" hasCustomPrompt="1"/>
+          </p:nvPr>
+        </p:nvSpPr>
+        <p:spPr>
+          <a:xfrm>
+            <a:off x="685800" y="2377440"/>
+            <a:ext cx="4663440" cy="2624328"/>
+          </a:xfrm>
+          <a:prstGeom prst="rect">
+            <a:avLst/>
+          </a:prstGeom>
+          <a:noFill/>
+          <a:ln/>
+        </p:spPr>
+        <p:txBody>
+          <a:bodyPr wrap="square" lIns="0" tIns="0" rIns="0" bIns="0" rtlCol="0" anchor="ctr"/>
+          <a:lstStyle/>
+          <a:p>
+            <a:pPr algn="ctr" indent="0" marL="0">
+              <a:buNone/>
+            </a:pPr>
+            <a:endParaRPr lang="en-US" sz="1200" dirty="0"/>
+          </a:p>
+        </p:txBody>
+      </p:sp>
+    </p:spTree>
+  </p:cSld>
+  <p:clrMapOvr>
+    <a:masterClrMapping/>
+  </p:clrMapOvr>
+</p:sld>
+</file>
+
+<file path=ppt/slides/slide18.xml><?xml version="1.0" encoding="utf-8"?>
+<p:sld xmlns:a="http://schemas.openxmlformats.org/drawingml/2006/main" xmlns:r="http://schemas.openxmlformats.org/officeDocument/2006/relationships" xmlns:p="http://schemas.openxmlformats.org/presentationml/2006/main">
+  <p:cSld name="Slide 18">
+    <p:spTree>
+      <p:nvGrpSpPr>
+        <p:cNvPr id="1" name=""/>
+        <p:cNvGrpSpPr/>
+        <p:nvPr/>
+      </p:nvGrpSpPr>
+      <p:grpSpPr>
+        <a:xfrm>
+          <a:off x="0" y="0"/>
+          <a:ext cx="0" cy="0"/>
+          <a:chOff x="0" y="0"/>
+          <a:chExt cx="0" cy="0"/>
+        </a:xfrm>
+      </p:grpSpPr>
+      <p:pic>
+        <p:nvPicPr>
+          <p:cNvPr id="2" name="Image 0" descr="/home/user/WorkWork/templates/slide/assets/chem_u02_s2.4_charge_by_group.png">    </p:cNvPr>
+          <p:cNvPicPr>
+            <a:picLocks noChangeAspect="1"/>
+          </p:cNvPicPr>
+          <p:nvPr/>
+        </p:nvPicPr>
+        <p:blipFill>
+          <a:blip r:embed="rId1"/>
+          <a:stretch>
+            <a:fillRect/>
+          </a:stretch>
+        </p:blipFill>
+        <p:spPr>
+          <a:xfrm>
+            <a:off x="914400" y="2651760"/>
+            <a:ext cx="4617720" cy="2743200"/>
+          </a:xfrm>
+          <a:prstGeom prst="rect">
+            <a:avLst/>
+          </a:prstGeom>
+        </p:spPr>
+      </p:pic>
+      <p:sp>
+        <p:nvSpPr>
+          <p:cNvPr id="3" name="Text 2"/>
+          <p:cNvSpPr txBox="1"/>
+          <p:nvPr>
+            <p:ph idx="103" type="title" hasCustomPrompt="1"/>
+          </p:nvPr>
+        </p:nvSpPr>
+        <p:spPr>
+          <a:xfrm>
+            <a:off x="685800" y="932688"/>
+            <a:ext cx="10820095" cy="868680"/>
+          </a:xfrm>
+          <a:prstGeom prst="rect">
+            <a:avLst/>
+          </a:prstGeom>
+          <a:noFill/>
+          <a:ln/>
+        </p:spPr>
+        <p:txBody>
+          <a:bodyPr wrap="square" lIns="0" tIns="0" rIns="0" bIns="0" rtlCol="0" anchor="t"/>
+          <a:lstStyle/>
+          <a:p>
+            <a:pPr algn="l" indent="0" marL="0">
+              <a:buNone/>
+            </a:pPr>
+            <a:r>
+              <a:rPr lang="en-US" sz="2800" b="1" dirty="0">
+                <a:solidFill>
+                  <a:srgbClr val="14161B"/>
+                </a:solidFill>
+                <a:latin typeface="Trade Gothic Next" pitchFamily="34" charset="0"/>
+                <a:ea typeface="Trade Gothic Next" pitchFamily="34" charset="-122"/>
+                <a:cs typeface="Trade Gothic Next" pitchFamily="34" charset="-120"/>
+              </a:rPr>
+              <a:t>Valence Electrons Predict the Charge</a:t>
+            </a:r>
+            <a:endParaRPr lang="en-US" sz="2800" dirty="0"/>
+          </a:p>
+        </p:txBody>
+      </p:sp>
+      <p:sp>
+        <p:nvSpPr>
+          <p:cNvPr id="4" name="Text 2"/>
+          <p:cNvSpPr txBox="1"/>
+          <p:nvPr>
+            <p:ph idx="104" type="body" hasCustomPrompt="1"/>
+          </p:nvPr>
+        </p:nvSpPr>
+        <p:spPr>
+          <a:xfrm>
+            <a:off x="685800" y="1847088"/>
+            <a:ext cx="10820095" cy="384048"/>
+          </a:xfrm>
+          <a:prstGeom prst="rect">
+            <a:avLst/>
+          </a:prstGeom>
+          <a:noFill/>
+          <a:ln/>
+        </p:spPr>
+        <p:txBody>
+          <a:bodyPr wrap="square" lIns="0" tIns="0" rIns="0" bIns="0" rtlCol="0"/>
+          <a:lstStyle/>
+          <a:p>
+            <a:pPr indent="0" marL="0">
+              <a:buNone/>
+            </a:pPr>
+            <a:r>
+              <a:rPr lang="en-US" sz="1700" dirty="0">
+                <a:solidFill>
+                  <a:srgbClr val="2E3338"/>
+                </a:solidFill>
+                <a:latin typeface="Trade Gothic Next" pitchFamily="34" charset="0"/>
+                <a:ea typeface="Trade Gothic Next" pitchFamily="34" charset="-122"/>
+                <a:cs typeface="Trade Gothic Next" pitchFamily="34" charset="-120"/>
+              </a:rPr>
+              <a:t>Lose or gain the fewest electrons to reach 8. Unit 3 will explain the energy side.</a:t>
+            </a:r>
+            <a:endParaRPr lang="en-US" sz="1700" dirty="0"/>
+          </a:p>
+        </p:txBody>
+      </p:sp>
+      <p:sp>
+        <p:nvSpPr>
+          <p:cNvPr id="5" name="Text 4"/>
+          <p:cNvSpPr txBox="1"/>
+          <p:nvPr>
+            <p:ph idx="108" type="body" hasCustomPrompt="1"/>
+          </p:nvPr>
+        </p:nvSpPr>
+        <p:spPr>
+          <a:xfrm>
+            <a:off x="6327648" y="2560320"/>
+            <a:ext cx="5129784" cy="219456"/>
+          </a:xfrm>
+          <a:prstGeom prst="rect">
+            <a:avLst/>
+          </a:prstGeom>
+          <a:noFill/>
+          <a:ln/>
+        </p:spPr>
+        <p:txBody>
+          <a:bodyPr wrap="square" lIns="0" tIns="0" rIns="0" bIns="0" rtlCol="0"/>
+          <a:lstStyle/>
+          <a:p>
+            <a:pPr indent="0" marL="0">
+              <a:buNone/>
+            </a:pPr>
+            <a:r>
+              <a:rPr lang="en-US" sz="1200" b="1" spc="120" kern="0" dirty="0">
+                <a:solidFill>
+                  <a:srgbClr val="2E3338"/>
+                </a:solidFill>
+                <a:latin typeface="Trade Gothic Next" pitchFamily="34" charset="0"/>
+                <a:ea typeface="Trade Gothic Next" pitchFamily="34" charset="-122"/>
+                <a:cs typeface="Trade Gothic Next" pitchFamily="34" charset="-120"/>
+              </a:rPr>
+              <a:t>LOSE</a:t>
+            </a:r>
+            <a:endParaRPr lang="en-US" sz="1200" dirty="0"/>
+          </a:p>
+        </p:txBody>
+      </p:sp>
+      <p:sp>
+        <p:nvSpPr>
+          <p:cNvPr id="6" name="Text 4"/>
+          <p:cNvSpPr txBox="1"/>
+          <p:nvPr>
+            <p:ph idx="109" type="body" hasCustomPrompt="1"/>
+          </p:nvPr>
+        </p:nvSpPr>
+        <p:spPr>
+          <a:xfrm>
+            <a:off x="6327648" y="2852928"/>
+            <a:ext cx="5129784" cy="329184"/>
+          </a:xfrm>
+          <a:prstGeom prst="rect">
+            <a:avLst/>
+          </a:prstGeom>
+          <a:noFill/>
+          <a:ln/>
+        </p:spPr>
+        <p:txBody>
+          <a:bodyPr wrap="square" lIns="0" tIns="0" rIns="0" bIns="0" rtlCol="0"/>
+          <a:lstStyle/>
+          <a:p>
+            <a:pPr indent="0" marL="0">
+              <a:buNone/>
+            </a:pPr>
+            <a:r>
+              <a:rPr lang="en-US" sz="1600" dirty="0">
+                <a:solidFill>
+                  <a:srgbClr val="14161B"/>
+                </a:solidFill>
+                <a:latin typeface="Trade Gothic Next" pitchFamily="34" charset="0"/>
+                <a:ea typeface="Trade Gothic Next" pitchFamily="34" charset="-122"/>
+                <a:cs typeface="Trade Gothic Next" pitchFamily="34" charset="-120"/>
+              </a:rPr>
+              <a:t>Groups 1, 2, 13 lose all their valence electrons.</a:t>
+            </a:r>
+            <a:endParaRPr lang="en-US" sz="1600" dirty="0"/>
+          </a:p>
+          <a:p>
+            <a:pPr indent="0" marL="0">
+              <a:buNone/>
+            </a:pPr>
+            <a:r>
+              <a:rPr lang="en-US" sz="1600" dirty="0">
+                <a:solidFill>
+                  <a:srgbClr val="14161B"/>
+                </a:solidFill>
+                <a:latin typeface="Trade Gothic Next" pitchFamily="34" charset="0"/>
+                <a:ea typeface="Trade Gothic Next" pitchFamily="34" charset="-122"/>
+                <a:cs typeface="Trade Gothic Next" pitchFamily="34" charset="-120"/>
+              </a:rPr>
+              <a:t>Charges 1+, 2+, 3+.</a:t>
+            </a:r>
+            <a:endParaRPr lang="en-US" sz="1600" dirty="0"/>
+          </a:p>
+        </p:txBody>
+      </p:sp>
+      <p:sp>
+        <p:nvSpPr>
+          <p:cNvPr id="7" name="Text 5"/>
+          <p:cNvSpPr txBox="1"/>
+          <p:nvPr>
+            <p:ph idx="111" type="body" hasCustomPrompt="1"/>
+          </p:nvPr>
+        </p:nvSpPr>
+        <p:spPr>
+          <a:xfrm>
+            <a:off x="6327648" y="3694176"/>
+            <a:ext cx="5129784" cy="219456"/>
+          </a:xfrm>
+          <a:prstGeom prst="rect">
+            <a:avLst/>
+          </a:prstGeom>
+          <a:noFill/>
+          <a:ln/>
+        </p:spPr>
+        <p:txBody>
+          <a:bodyPr wrap="square" lIns="0" tIns="0" rIns="0" bIns="0" rtlCol="0"/>
+          <a:lstStyle/>
+          <a:p>
+            <a:pPr indent="0" marL="0">
+              <a:buNone/>
+            </a:pPr>
+            <a:r>
+              <a:rPr lang="en-US" sz="1200" b="1" spc="120" kern="0" dirty="0">
+                <a:solidFill>
+                  <a:srgbClr val="2E3338"/>
+                </a:solidFill>
+                <a:latin typeface="Trade Gothic Next" pitchFamily="34" charset="0"/>
+                <a:ea typeface="Trade Gothic Next" pitchFamily="34" charset="-122"/>
+                <a:cs typeface="Trade Gothic Next" pitchFamily="34" charset="-120"/>
+              </a:rPr>
+              <a:t>GAIN</a:t>
+            </a:r>
+            <a:endParaRPr lang="en-US" sz="1200" dirty="0"/>
+          </a:p>
+        </p:txBody>
+      </p:sp>
+      <p:sp>
+        <p:nvSpPr>
+          <p:cNvPr id="8" name="Text 5"/>
+          <p:cNvSpPr txBox="1"/>
+          <p:nvPr>
+            <p:ph idx="112" type="body" hasCustomPrompt="1"/>
+          </p:nvPr>
+        </p:nvSpPr>
+        <p:spPr>
+          <a:xfrm>
+            <a:off x="6327648" y="3986784"/>
+            <a:ext cx="5129784" cy="329184"/>
+          </a:xfrm>
+          <a:prstGeom prst="rect">
+            <a:avLst/>
+          </a:prstGeom>
+          <a:noFill/>
+          <a:ln/>
+        </p:spPr>
+        <p:txBody>
+          <a:bodyPr wrap="square" lIns="0" tIns="0" rIns="0" bIns="0" rtlCol="0"/>
+          <a:lstStyle/>
+          <a:p>
+            <a:pPr indent="0" marL="0">
+              <a:buNone/>
+            </a:pPr>
+            <a:r>
+              <a:rPr lang="en-US" sz="1600" dirty="0">
+                <a:solidFill>
+                  <a:srgbClr val="14161B"/>
+                </a:solidFill>
+                <a:latin typeface="Trade Gothic Next" pitchFamily="34" charset="0"/>
+                <a:ea typeface="Trade Gothic Next" pitchFamily="34" charset="-122"/>
+                <a:cs typeface="Trade Gothic Next" pitchFamily="34" charset="-120"/>
+              </a:rPr>
+              <a:t>Groups 15, 16, 17 gain 3, 2, 1 to reach 8.</a:t>
+            </a:r>
+            <a:endParaRPr lang="en-US" sz="1600" dirty="0"/>
+          </a:p>
+          <a:p>
+            <a:pPr indent="0" marL="0">
+              <a:buNone/>
+            </a:pPr>
+            <a:r>
+              <a:rPr lang="en-US" sz="1600" dirty="0">
+                <a:solidFill>
+                  <a:srgbClr val="14161B"/>
+                </a:solidFill>
+                <a:latin typeface="Trade Gothic Next" pitchFamily="34" charset="0"/>
+                <a:ea typeface="Trade Gothic Next" pitchFamily="34" charset="-122"/>
+                <a:cs typeface="Trade Gothic Next" pitchFamily="34" charset="-120"/>
+              </a:rPr>
+              <a:t>Charges 3−, 2−, 1−.</a:t>
+            </a:r>
+            <a:endParaRPr lang="en-US" sz="1600" dirty="0"/>
+          </a:p>
+        </p:txBody>
+      </p:sp>
+      <p:sp>
+        <p:nvSpPr>
+          <p:cNvPr id="9" name="Text 6"/>
+          <p:cNvSpPr txBox="1"/>
+          <p:nvPr>
+            <p:ph idx="114" type="body" hasCustomPrompt="1"/>
+          </p:nvPr>
+        </p:nvSpPr>
+        <p:spPr>
+          <a:xfrm>
+            <a:off x="6327648" y="4828032"/>
+            <a:ext cx="5129784" cy="219456"/>
+          </a:xfrm>
+          <a:prstGeom prst="rect">
+            <a:avLst/>
+          </a:prstGeom>
+          <a:noFill/>
+          <a:ln/>
+        </p:spPr>
+        <p:txBody>
+          <a:bodyPr wrap="square" lIns="0" tIns="0" rIns="0" bIns="0" rtlCol="0"/>
+          <a:lstStyle/>
+          <a:p>
+            <a:pPr indent="0" marL="0">
+              <a:buNone/>
+            </a:pPr>
+            <a:r>
+              <a:rPr lang="en-US" sz="1200" b="1" spc="120" kern="0" dirty="0">
+                <a:solidFill>
+                  <a:srgbClr val="2E3338"/>
+                </a:solidFill>
+                <a:latin typeface="Trade Gothic Next" pitchFamily="34" charset="0"/>
+                <a:ea typeface="Trade Gothic Next" pitchFamily="34" charset="-122"/>
+                <a:cs typeface="Trade Gothic Next" pitchFamily="34" charset="-120"/>
+              </a:rPr>
+              <a:t>NOT PREDICTED HERE</a:t>
+            </a:r>
+            <a:endParaRPr lang="en-US" sz="1200" dirty="0"/>
+          </a:p>
+        </p:txBody>
+      </p:sp>
+      <p:sp>
+        <p:nvSpPr>
+          <p:cNvPr id="10" name="Text 6"/>
+          <p:cNvSpPr txBox="1"/>
+          <p:nvPr>
+            <p:ph idx="115" type="body" hasCustomPrompt="1"/>
+          </p:nvPr>
+        </p:nvSpPr>
+        <p:spPr>
+          <a:xfrm>
+            <a:off x="6327648" y="5120640"/>
+            <a:ext cx="5129784" cy="320040"/>
+          </a:xfrm>
+          <a:prstGeom prst="rect">
+            <a:avLst/>
+          </a:prstGeom>
+          <a:noFill/>
+          <a:ln/>
+        </p:spPr>
+        <p:txBody>
+          <a:bodyPr wrap="square" lIns="0" tIns="0" rIns="0" bIns="0" rtlCol="0"/>
+          <a:lstStyle/>
+          <a:p>
+            <a:pPr indent="0" marL="0">
+              <a:buNone/>
+            </a:pPr>
+            <a:r>
+              <a:rPr lang="en-US" sz="1600" dirty="0">
+                <a:solidFill>
+                  <a:srgbClr val="14161B"/>
+                </a:solidFill>
+                <a:latin typeface="Trade Gothic Next" pitchFamily="34" charset="0"/>
+                <a:ea typeface="Trade Gothic Next" pitchFamily="34" charset="-122"/>
+                <a:cs typeface="Trade Gothic Next" pitchFamily="34" charset="-120"/>
+              </a:rPr>
+              <a:t>Group 14 and the transition metals. Group 18 is already full.</a:t>
+            </a:r>
+            <a:endParaRPr lang="en-US" sz="1600" dirty="0"/>
+          </a:p>
+        </p:txBody>
+      </p:sp>
+      <p:sp>
+        <p:nvSpPr>
+          <p:cNvPr id="11" name="Text 1"/>
+          <p:cNvSpPr txBox="1"/>
+          <p:nvPr>
+            <p:ph idx="101" type="body" hasCustomPrompt="1"/>
+          </p:nvPr>
+        </p:nvSpPr>
+        <p:spPr>
+          <a:xfrm>
+            <a:off x="685800" y="384048"/>
+            <a:ext cx="6400800" cy="237744"/>
+          </a:xfrm>
+          <a:prstGeom prst="rect">
+            <a:avLst/>
+          </a:prstGeom>
+          <a:noFill/>
+          <a:ln/>
+        </p:spPr>
+        <p:txBody>
+          <a:bodyPr wrap="square" lIns="0" tIns="0" rIns="0" bIns="0" rtlCol="0" anchor="ctr"/>
+          <a:lstStyle/>
+          <a:p>
+            <a:pPr indent="0" marL="0">
+              <a:buNone/>
+            </a:pPr>
+            <a:r>
+              <a:rPr lang="en-US" sz="1100" b="1" spc="160" kern="0" dirty="0">
+                <a:solidFill>
+                  <a:srgbClr val="14161B"/>
+                </a:solidFill>
+                <a:latin typeface="Trade Gothic Next" pitchFamily="34" charset="0"/>
+                <a:ea typeface="Trade Gothic Next" pitchFamily="34" charset="-122"/>
+                <a:cs typeface="Trade Gothic Next" pitchFamily="34" charset="-120"/>
+              </a:rPr>
+              <a:t>UNIT 02  •  CHEMISTRY</a:t>
+            </a:r>
+            <a:endParaRPr lang="en-US" sz="1100" dirty="0"/>
+          </a:p>
+        </p:txBody>
+      </p:sp>
+      <p:sp>
+        <p:nvSpPr>
+          <p:cNvPr id="12" name="Text 7"/>
+          <p:cNvSpPr txBox="1"/>
+          <p:nvPr>
+            <p:ph idx="117" type="body" hasCustomPrompt="1"/>
+          </p:nvPr>
+        </p:nvSpPr>
+        <p:spPr>
+          <a:xfrm>
+            <a:off x="8762695" y="6382512"/>
+            <a:ext cx="2743200" cy="237744"/>
+          </a:xfrm>
+          <a:prstGeom prst="rect">
+            <a:avLst/>
+          </a:prstGeom>
+          <a:noFill/>
+          <a:ln/>
+        </p:spPr>
+        <p:txBody>
+          <a:bodyPr wrap="square" lIns="0" tIns="0" rIns="0" bIns="0" rtlCol="0" anchor="ctr"/>
+          <a:lstStyle/>
+          <a:p>
+            <a:pPr algn="r" indent="0" marL="0">
+              <a:buNone/>
+            </a:pPr>
+            <a:r>
+              <a:rPr lang="en-US" sz="1000" b="1" spc="140" kern="0" dirty="0">
+                <a:solidFill>
+                  <a:srgbClr val="2E3338"/>
+                </a:solidFill>
+                <a:latin typeface="Trade Gothic Next" pitchFamily="34" charset="0"/>
+                <a:ea typeface="Trade Gothic Next" pitchFamily="34" charset="-122"/>
+                <a:cs typeface="Trade Gothic Next" pitchFamily="34" charset="-120"/>
+              </a:rPr>
+              <a:t>U02 • S02.4</a:t>
+            </a:r>
+            <a:endParaRPr lang="en-US" sz="1000" dirty="0"/>
+          </a:p>
+        </p:txBody>
+      </p:sp>
+      <p:sp>
+        <p:nvSpPr>
+          <p:cNvPr id="14" name="Text 3"/>
+          <p:cNvSpPr txBox="1"/>
+          <p:nvPr>
+            <p:ph idx="106" type="body" hasCustomPrompt="1"/>
+          </p:nvPr>
+        </p:nvSpPr>
+        <p:spPr>
+          <a:xfrm>
+            <a:off x="914400" y="2651760"/>
+            <a:ext cx="4617720" cy="2743200"/>
+          </a:xfrm>
+          <a:prstGeom prst="rect">
+            <a:avLst/>
+          </a:prstGeom>
+          <a:noFill/>
+          <a:ln/>
+        </p:spPr>
+        <p:txBody>
+          <a:bodyPr wrap="square" lIns="0" tIns="0" rIns="0" bIns="0" rtlCol="0" anchor="ctr"/>
+          <a:lstStyle/>
+          <a:p>
+            <a:pPr algn="ctr" indent="0" marL="0">
+              <a:buNone/>
+            </a:pPr>
+            <a:endParaRPr lang="en-US" sz="2000" dirty="0"/>
+          </a:p>
+        </p:txBody>
+      </p:sp>
+    </p:spTree>
+  </p:cSld>
+  <p:clrMapOvr>
+    <a:masterClrMapping/>
+  </p:clrMapOvr>
+</p:sld>
+</file>
+
 <file path=ppt/slides/slide19.xml><?xml version="1.0" encoding="utf-8"?>
 <p:sld xmlns:a="http://schemas.openxmlformats.org/drawingml/2006/main" xmlns:r="http://schemas.openxmlformats.org/officeDocument/2006/relationships" xmlns:p="http://schemas.openxmlformats.org/presentationml/2006/main">
   <p:cSld name="Slide 19">
@@ -19966,77 +19551,7 @@
                 <a:ea typeface="Trade Gothic Next" pitchFamily="34" charset="-122"/>
                 <a:cs typeface="Trade Gothic Next" pitchFamily="34" charset="-120"/>
               </a:rPr>
-              <a:t>Example: Zn</a:t>
-            </a:r>
-            <a:pPr algn="l" indent="0" marL="0">
-              <a:buNone/>
-            </a:pPr>
-            <a:r>
-              <a:rPr lang="en-US" sz="2800" b="1" baseline="30000" dirty="0">
-                <a:solidFill>
-                  <a:srgbClr val="14161B"/>
-                </a:solidFill>
-                <a:latin typeface="Trade Gothic Next" pitchFamily="34" charset="0"/>
-                <a:ea typeface="Trade Gothic Next" pitchFamily="34" charset="-122"/>
-                <a:cs typeface="Trade Gothic Next" pitchFamily="34" charset="-120"/>
-              </a:rPr>
-              <a:t>2+</a:t>
-            </a:r>
-            <a:pPr algn="l" indent="0" marL="0">
-              <a:buNone/>
-            </a:pPr>
-            <a:r>
-              <a:rPr lang="en-US" sz="2800" b="1" dirty="0">
-                <a:solidFill>
-                  <a:srgbClr val="14161B"/>
-                </a:solidFill>
-                <a:latin typeface="Trade Gothic Next" pitchFamily="34" charset="0"/>
-                <a:ea typeface="Trade Gothic Next" pitchFamily="34" charset="-122"/>
-                <a:cs typeface="Trade Gothic Next" pitchFamily="34" charset="-120"/>
-              </a:rPr>
-              <a:t>, Cu</a:t>
-            </a:r>
-            <a:pPr algn="l" indent="0" marL="0">
-              <a:buNone/>
-            </a:pPr>
-            <a:r>
-              <a:rPr lang="en-US" sz="2800" b="1" baseline="30000" dirty="0">
-                <a:solidFill>
-                  <a:srgbClr val="14161B"/>
-                </a:solidFill>
-                <a:latin typeface="Trade Gothic Next" pitchFamily="34" charset="0"/>
-                <a:ea typeface="Trade Gothic Next" pitchFamily="34" charset="-122"/>
-                <a:cs typeface="Trade Gothic Next" pitchFamily="34" charset="-120"/>
-              </a:rPr>
-              <a:t>+</a:t>
-            </a:r>
-            <a:pPr algn="l" indent="0" marL="0">
-              <a:buNone/>
-            </a:pPr>
-            <a:r>
-              <a:rPr lang="en-US" sz="2800" b="1" dirty="0">
-                <a:solidFill>
-                  <a:srgbClr val="14161B"/>
-                </a:solidFill>
-                <a:latin typeface="Trade Gothic Next" pitchFamily="34" charset="0"/>
-                <a:ea typeface="Trade Gothic Next" pitchFamily="34" charset="-122"/>
-                <a:cs typeface="Trade Gothic Next" pitchFamily="34" charset="-120"/>
-              </a:rPr>
-              <a:t>, and Cu</a:t>
-            </a:r>
-            <a:pPr algn="l" indent="0" marL="0">
-              <a:buNone/>
-            </a:pPr>
-            <a:r>
-              <a:rPr lang="en-US" sz="2800" b="1" baseline="30000" dirty="0">
-                <a:solidFill>
-                  <a:srgbClr val="14161B"/>
-                </a:solidFill>
-                <a:latin typeface="Trade Gothic Next" pitchFamily="34" charset="0"/>
-                <a:ea typeface="Trade Gothic Next" pitchFamily="34" charset="-122"/>
-                <a:cs typeface="Trade Gothic Next" pitchFamily="34" charset="-120"/>
-              </a:rPr>
-              <a:t>2+</a:t>
+              <a:t>Example: Predict the Ions of Mg, Al, S, Br</a:t>
             </a:r>
             <a:endParaRPr lang="en-US" sz="2800" dirty="0"/>
           </a:p>
@@ -20077,7 +19592,7 @@
                 <a:ea typeface="Trade Gothic Next" pitchFamily="34" charset="-122"/>
                 <a:cs typeface="Trade Gothic Next" pitchFamily="34" charset="-120"/>
               </a:rPr>
-              <a:t>Same rule as iron. Copy the setup, not just the answer.</a:t>
+              <a:t>We do this one together. Copy the setup, not just the answer.</a:t>
             </a:r>
             <a:endParaRPr lang="en-US" sz="1700" dirty="0"/>
           </a:p>
@@ -20118,91 +19633,7 @@
                 <a:ea typeface="Trade Gothic Next" pitchFamily="34" charset="-122"/>
                 <a:cs typeface="Trade Gothic Next" pitchFamily="34" charset="-120"/>
               </a:rPr>
-              <a:t>Write the [Ar] shorthand for Zn</a:t>
-            </a:r>
-            <a:pPr indent="0" marL="0">
-              <a:buNone/>
-            </a:pPr>
-            <a:r>
-              <a:rPr lang="en-US" sz="1600" baseline="30000" dirty="0">
-                <a:solidFill>
-                  <a:srgbClr val="EDF0E5"/>
-                </a:solidFill>
-                <a:latin typeface="Trade Gothic Next" pitchFamily="34" charset="0"/>
-                <a:ea typeface="Trade Gothic Next" pitchFamily="34" charset="-122"/>
-                <a:cs typeface="Trade Gothic Next" pitchFamily="34" charset="-120"/>
-              </a:rPr>
-              <a:t>2+</a:t>
-            </a:r>
-            <a:pPr indent="0" marL="0">
-              <a:buNone/>
-            </a:pPr>
-            <a:r>
-              <a:rPr lang="en-US" sz="1600" dirty="0">
-                <a:solidFill>
-                  <a:srgbClr val="EDF0E5"/>
-                </a:solidFill>
-                <a:latin typeface="Trade Gothic Next" pitchFamily="34" charset="0"/>
-                <a:ea typeface="Trade Gothic Next" pitchFamily="34" charset="-122"/>
-                <a:cs typeface="Trade Gothic Next" pitchFamily="34" charset="-120"/>
-              </a:rPr>
-              <a:t>, Cu</a:t>
-            </a:r>
-            <a:pPr indent="0" marL="0">
-              <a:buNone/>
-            </a:pPr>
-            <a:r>
-              <a:rPr lang="en-US" sz="1600" baseline="30000" dirty="0">
-                <a:solidFill>
-                  <a:srgbClr val="EDF0E5"/>
-                </a:solidFill>
-                <a:latin typeface="Trade Gothic Next" pitchFamily="34" charset="0"/>
-                <a:ea typeface="Trade Gothic Next" pitchFamily="34" charset="-122"/>
-                <a:cs typeface="Trade Gothic Next" pitchFamily="34" charset="-120"/>
-              </a:rPr>
-              <a:t>+</a:t>
-            </a:r>
-            <a:pPr indent="0" marL="0">
-              <a:buNone/>
-            </a:pPr>
-            <a:r>
-              <a:rPr lang="en-US" sz="1600" dirty="0">
-                <a:solidFill>
-                  <a:srgbClr val="EDF0E5"/>
-                </a:solidFill>
-                <a:latin typeface="Trade Gothic Next" pitchFamily="34" charset="0"/>
-                <a:ea typeface="Trade Gothic Next" pitchFamily="34" charset="-122"/>
-                <a:cs typeface="Trade Gothic Next" pitchFamily="34" charset="-120"/>
-              </a:rPr>
-              <a:t>, and Cu</a:t>
-            </a:r>
-            <a:pPr indent="0" marL="0">
-              <a:buNone/>
-            </a:pPr>
-            <a:r>
-              <a:rPr lang="en-US" sz="1600" baseline="30000" dirty="0">
-                <a:solidFill>
-                  <a:srgbClr val="EDF0E5"/>
-                </a:solidFill>
-                <a:latin typeface="Trade Gothic Next" pitchFamily="34" charset="0"/>
-                <a:ea typeface="Trade Gothic Next" pitchFamily="34" charset="-122"/>
-                <a:cs typeface="Trade Gothic Next" pitchFamily="34" charset="-120"/>
-              </a:rPr>
-              <a:t>2+</a:t>
-            </a:r>
-            <a:pPr indent="0" marL="0">
-              <a:buNone/>
-            </a:pPr>
-            <a:r>
-              <a:rPr lang="en-US" sz="1600" dirty="0">
-                <a:solidFill>
-                  <a:srgbClr val="EDF0E5"/>
-                </a:solidFill>
-                <a:latin typeface="Trade Gothic Next" pitchFamily="34" charset="0"/>
-                <a:ea typeface="Trade Gothic Next" pitchFamily="34" charset="-122"/>
-                <a:cs typeface="Trade Gothic Next" pitchFamily="34" charset="-120"/>
-              </a:rPr>
-              <a:t>.</a:t>
+              <a:t>Use valence electrons to predict each ion. Give the move, the result, and the charge.</a:t>
             </a:r>
             <a:endParaRPr lang="en-US" sz="1600" dirty="0"/>
           </a:p>
@@ -20284,22 +19715,11 @@
                 <a:ea typeface="Trade Gothic Next" pitchFamily="34" charset="-122"/>
                 <a:cs typeface="Trade Gothic Next" pitchFamily="34" charset="-120"/>
               </a:rPr>
-              <a:t>Zn: [Ar] 4s</a:t>
-            </a:r>
-            <a:pPr indent="0" marL="0">
-              <a:buNone/>
-            </a:pPr>
-            <a:r>
-              <a:rPr lang="en-US" sz="1600" baseline="30000" dirty="0">
-                <a:solidFill>
-                  <a:srgbClr val="14161B"/>
-                </a:solidFill>
-                <a:latin typeface="Trade Gothic Next" pitchFamily="34" charset="0"/>
-                <a:ea typeface="Trade Gothic Next" pitchFamily="34" charset="-122"/>
-                <a:cs typeface="Trade Gothic Next" pitchFamily="34" charset="-120"/>
-              </a:rPr>
-              <a:t>2</a:t>
-            </a:r>
+              <a:t>Mg: group 2</a:t>
+            </a:r>
+            <a:endParaRPr lang="en-US" sz="1600" dirty="0"/>
+          </a:p>
+          <a:p>
             <a:pPr indent="0" marL="0">
               <a:buNone/>
             </a:pPr>
@@ -20312,21 +19732,7 @@
                 <a:ea typeface="Trade Gothic Next" pitchFamily="34" charset="-122"/>
                 <a:cs typeface="Trade Gothic Next" pitchFamily="34" charset="-120"/>
               </a:rPr>
-              <a:t> 3d</a:t>
-            </a:r>
-            <a:pPr indent="0" marL="0">
-              <a:buNone/>
-            </a:pPr>
-            <a:r>
-              <a:rPr lang="en-US" sz="1600" baseline="30000" dirty="0">
-                <a:solidFill>
-                  <a:srgbClr val="14161B"/>
-                </a:solidFill>
-                <a:latin typeface="Trade Gothic Next" pitchFamily="34" charset="0"/>
-                <a:ea typeface="Trade Gothic Next" pitchFamily="34" charset="-122"/>
-                <a:cs typeface="Trade Gothic Next" pitchFamily="34" charset="-120"/>
-              </a:rPr>
-              <a:t>10</a:t>
+              <a:t>Al: group 13</a:t>
             </a:r>
             <a:endParaRPr lang="en-US" sz="1600" dirty="0"/>
           </a:p>
@@ -20343,22 +19749,11 @@
                 <a:ea typeface="Trade Gothic Next" pitchFamily="34" charset="-122"/>
                 <a:cs typeface="Trade Gothic Next" pitchFamily="34" charset="-120"/>
               </a:rPr>
-              <a:t>Cu: [Ar] 4s</a:t>
-            </a:r>
-            <a:pPr indent="0" marL="0">
-              <a:buNone/>
-            </a:pPr>
-            <a:r>
-              <a:rPr lang="en-US" sz="1600" baseline="30000" dirty="0">
-                <a:solidFill>
-                  <a:srgbClr val="14161B"/>
-                </a:solidFill>
-                <a:latin typeface="Trade Gothic Next" pitchFamily="34" charset="0"/>
-                <a:ea typeface="Trade Gothic Next" pitchFamily="34" charset="-122"/>
-                <a:cs typeface="Trade Gothic Next" pitchFamily="34" charset="-120"/>
-              </a:rPr>
-              <a:t>1</a:t>
-            </a:r>
+              <a:t>S: group 16</a:t>
+            </a:r>
+            <a:endParaRPr lang="en-US" sz="1600" dirty="0"/>
+          </a:p>
+          <a:p>
             <a:pPr indent="0" marL="0">
               <a:buNone/>
             </a:pPr>
@@ -20371,21 +19766,7 @@
                 <a:ea typeface="Trade Gothic Next" pitchFamily="34" charset="-122"/>
                 <a:cs typeface="Trade Gothic Next" pitchFamily="34" charset="-120"/>
               </a:rPr>
-              <a:t> 3d</a:t>
-            </a:r>
-            <a:pPr indent="0" marL="0">
-              <a:buNone/>
-            </a:pPr>
-            <a:r>
-              <a:rPr lang="en-US" sz="1600" baseline="30000" dirty="0">
-                <a:solidFill>
-                  <a:srgbClr val="14161B"/>
-                </a:solidFill>
-                <a:latin typeface="Trade Gothic Next" pitchFamily="34" charset="0"/>
-                <a:ea typeface="Trade Gothic Next" pitchFamily="34" charset="-122"/>
-                <a:cs typeface="Trade Gothic Next" pitchFamily="34" charset="-120"/>
-              </a:rPr>
-              <a:t>10</a:t>
+              <a:t>Br: group 17</a:t>
             </a:r>
             <a:endParaRPr lang="en-US" sz="1600" dirty="0"/>
           </a:p>
@@ -20467,7 +19848,7 @@
                 <a:ea typeface="Trade Gothic Next" pitchFamily="34" charset="-122"/>
                 <a:cs typeface="Trade Gothic Next" pitchFamily="34" charset="-120"/>
               </a:rPr>
-              <a:t>Electrons to remove</a:t>
+              <a:t>Valence electrons</a:t>
             </a:r>
             <a:endParaRPr lang="en-US" sz="1600" dirty="0"/>
           </a:p>
@@ -20484,7 +19865,7 @@
                 <a:ea typeface="Trade Gothic Next" pitchFamily="34" charset="-122"/>
                 <a:cs typeface="Trade Gothic Next" pitchFamily="34" charset="-120"/>
               </a:rPr>
-              <a:t>Which sublevel they leave</a:t>
+              <a:t>Lose or gain how many</a:t>
             </a:r>
             <a:endParaRPr lang="en-US" sz="1600" dirty="0"/>
           </a:p>
@@ -20501,7 +19882,7 @@
                 <a:ea typeface="Trade Gothic Next" pitchFamily="34" charset="-122"/>
                 <a:cs typeface="Trade Gothic Next" pitchFamily="34" charset="-120"/>
               </a:rPr>
-              <a:t>Each ion's shorthand</a:t>
+              <a:t>Noble gas and charge</a:t>
             </a:r>
             <a:endParaRPr lang="en-US" sz="1600" dirty="0"/>
           </a:p>
@@ -20572,7 +19953,7 @@
                 <a:ea typeface="Trade Gothic Next" pitchFamily="34" charset="-122"/>
                 <a:cs typeface="Trade Gothic Next" pitchFamily="34" charset="-120"/>
               </a:rPr>
-              <a:t>Take the 4s electrons first. Only then take from 3d.</a:t>
+              <a:t>Lose or gain the fewest electrons to reach 8 valence electrons.</a:t>
             </a:r>
             <a:endParaRPr lang="en-US" sz="1600" dirty="0"/>
           </a:p>
@@ -21010,91 +20391,7 @@
                 <a:ea typeface="Trade Gothic Next" pitchFamily="34" charset="-122"/>
                 <a:cs typeface="Trade Gothic Next" pitchFamily="34" charset="-120"/>
               </a:rPr>
-              <a:t>Zn</a:t>
-            </a:r>
-            <a:pPr algn="l" indent="0" marL="0">
-              <a:buNone/>
-            </a:pPr>
-            <a:r>
-              <a:rPr lang="en-US" sz="2800" b="1" baseline="30000" dirty="0">
-                <a:solidFill>
-                  <a:srgbClr val="14161B"/>
-                </a:solidFill>
-                <a:latin typeface="Trade Gothic Next" pitchFamily="34" charset="0"/>
-                <a:ea typeface="Trade Gothic Next" pitchFamily="34" charset="-122"/>
-                <a:cs typeface="Trade Gothic Next" pitchFamily="34" charset="-120"/>
-              </a:rPr>
-              <a:t>2+</a:t>
-            </a:r>
-            <a:pPr algn="l" indent="0" marL="0">
-              <a:buNone/>
-            </a:pPr>
-            <a:r>
-              <a:rPr lang="en-US" sz="2800" b="1" dirty="0">
-                <a:solidFill>
-                  <a:srgbClr val="14161B"/>
-                </a:solidFill>
-                <a:latin typeface="Trade Gothic Next" pitchFamily="34" charset="0"/>
-                <a:ea typeface="Trade Gothic Next" pitchFamily="34" charset="-122"/>
-                <a:cs typeface="Trade Gothic Next" pitchFamily="34" charset="-120"/>
-              </a:rPr>
-              <a:t>, Cu</a:t>
-            </a:r>
-            <a:pPr algn="l" indent="0" marL="0">
-              <a:buNone/>
-            </a:pPr>
-            <a:r>
-              <a:rPr lang="en-US" sz="2800" b="1" baseline="30000" dirty="0">
-                <a:solidFill>
-                  <a:srgbClr val="14161B"/>
-                </a:solidFill>
-                <a:latin typeface="Trade Gothic Next" pitchFamily="34" charset="0"/>
-                <a:ea typeface="Trade Gothic Next" pitchFamily="34" charset="-122"/>
-                <a:cs typeface="Trade Gothic Next" pitchFamily="34" charset="-120"/>
-              </a:rPr>
-              <a:t>+</a:t>
-            </a:r>
-            <a:pPr algn="l" indent="0" marL="0">
-              <a:buNone/>
-            </a:pPr>
-            <a:r>
-              <a:rPr lang="en-US" sz="2800" b="1" dirty="0">
-                <a:solidFill>
-                  <a:srgbClr val="14161B"/>
-                </a:solidFill>
-                <a:latin typeface="Trade Gothic Next" pitchFamily="34" charset="0"/>
-                <a:ea typeface="Trade Gothic Next" pitchFamily="34" charset="-122"/>
-                <a:cs typeface="Trade Gothic Next" pitchFamily="34" charset="-120"/>
-              </a:rPr>
-              <a:t>, and Cu</a:t>
-            </a:r>
-            <a:pPr algn="l" indent="0" marL="0">
-              <a:buNone/>
-            </a:pPr>
-            <a:r>
-              <a:rPr lang="en-US" sz="2800" b="1" baseline="30000" dirty="0">
-                <a:solidFill>
-                  <a:srgbClr val="14161B"/>
-                </a:solidFill>
-                <a:latin typeface="Trade Gothic Next" pitchFamily="34" charset="0"/>
-                <a:ea typeface="Trade Gothic Next" pitchFamily="34" charset="-122"/>
-                <a:cs typeface="Trade Gothic Next" pitchFamily="34" charset="-120"/>
-              </a:rPr>
-              <a:t>2+</a:t>
-            </a:r>
-            <a:pPr algn="l" indent="0" marL="0">
-              <a:buNone/>
-            </a:pPr>
-            <a:r>
-              <a:rPr lang="en-US" sz="2800" b="1" dirty="0">
-                <a:solidFill>
-                  <a:srgbClr val="14161B"/>
-                </a:solidFill>
-                <a:latin typeface="Trade Gothic Next" pitchFamily="34" charset="0"/>
-                <a:ea typeface="Trade Gothic Next" pitchFamily="34" charset="-122"/>
-                <a:cs typeface="Trade Gothic Next" pitchFamily="34" charset="-120"/>
-              </a:rPr>
-              <a:t>, Worked</a:t>
+              <a:t>Mg, Al, S, and Br Ions, Worked</a:t>
             </a:r>
             <a:endParaRPr lang="en-US" sz="2800" dirty="0"/>
           </a:p>
@@ -21135,7 +20432,7 @@
                 <a:ea typeface="Trade Gothic Next" pitchFamily="34" charset="-122"/>
                 <a:cs typeface="Trade Gothic Next" pitchFamily="34" charset="-120"/>
               </a:rPr>
-              <a:t>None of these ends at a noble gas configuration.</a:t>
+              <a:t>Count, move, result, charge. Check the electron count at the end.</a:t>
             </a:r>
             <a:endParaRPr lang="en-US" sz="1700" dirty="0"/>
           </a:p>
@@ -21217,7 +20514,7 @@
                 <a:ea typeface="Trade Gothic Next" pitchFamily="34" charset="-122"/>
                 <a:cs typeface="Trade Gothic Next" pitchFamily="34" charset="-120"/>
               </a:rPr>
-              <a:t>Take 4s first, then 3d.</a:t>
+              <a:t>Each line reads: valence,</a:t>
             </a:r>
             <a:endParaRPr lang="en-US" sz="1600" dirty="0"/>
           </a:p>
@@ -21234,7 +20531,7 @@
                 <a:ea typeface="Trade Gothic Next" pitchFamily="34" charset="-122"/>
                 <a:cs typeface="Trade Gothic Next" pitchFamily="34" charset="-120"/>
               </a:rPr>
-              <a:t>Zn 30 → 28. Cu 29 → 28 or 27.</a:t>
+              <a:t>move, noble gas, charge.</a:t>
             </a:r>
             <a:endParaRPr lang="en-US" sz="1600" dirty="0"/>
           </a:p>
@@ -21275,22 +20572,11 @@
                 <a:ea typeface="Trade Gothic Next" pitchFamily="34" charset="-122"/>
                 <a:cs typeface="Trade Gothic Next" pitchFamily="34" charset="-120"/>
               </a:rPr>
-              <a:t>Zn</a:t>
-            </a:r>
-            <a:pPr indent="0" marL="0">
-              <a:buNone/>
-            </a:pPr>
-            <a:r>
-              <a:rPr lang="en-US" sz="1900" baseline="30000" dirty="0">
-                <a:solidFill>
-                  <a:srgbClr val="14161B"/>
-                </a:solidFill>
-                <a:latin typeface="Trade Gothic Next" pitchFamily="34" charset="0"/>
-                <a:ea typeface="Trade Gothic Next" pitchFamily="34" charset="-122"/>
-                <a:cs typeface="Trade Gothic Next" pitchFamily="34" charset="-120"/>
-              </a:rPr>
-              <a:t>2+</a:t>
-            </a:r>
+              <a:t>Mg: 2, lose 2, [Ne], 2+</a:t>
+            </a:r>
+            <a:endParaRPr lang="en-US" sz="1900" dirty="0"/>
+          </a:p>
+          <a:p>
             <a:pPr indent="0" marL="0">
               <a:buNone/>
             </a:pPr>
@@ -21303,21 +20589,7 @@
                 <a:ea typeface="Trade Gothic Next" pitchFamily="34" charset="-122"/>
                 <a:cs typeface="Trade Gothic Next" pitchFamily="34" charset="-120"/>
               </a:rPr>
-              <a:t>: [Ar] 3d</a:t>
-            </a:r>
-            <a:pPr indent="0" marL="0">
-              <a:buNone/>
-            </a:pPr>
-            <a:r>
-              <a:rPr lang="en-US" sz="1900" baseline="30000" dirty="0">
-                <a:solidFill>
-                  <a:srgbClr val="14161B"/>
-                </a:solidFill>
-                <a:latin typeface="Trade Gothic Next" pitchFamily="34" charset="0"/>
-                <a:ea typeface="Trade Gothic Next" pitchFamily="34" charset="-122"/>
-                <a:cs typeface="Trade Gothic Next" pitchFamily="34" charset="-120"/>
-              </a:rPr>
-              <a:t>10</a:t>
+              <a:t>Al: 3, lose 3, [Ne], 3+</a:t>
             </a:r>
             <a:endParaRPr lang="en-US" sz="1900" dirty="0"/>
           </a:p>
@@ -21334,22 +20606,11 @@
                 <a:ea typeface="Trade Gothic Next" pitchFamily="34" charset="-122"/>
                 <a:cs typeface="Trade Gothic Next" pitchFamily="34" charset="-120"/>
               </a:rPr>
-              <a:t>Cu</a:t>
-            </a:r>
-            <a:pPr indent="0" marL="0">
-              <a:buNone/>
-            </a:pPr>
-            <a:r>
-              <a:rPr lang="en-US" sz="1900" baseline="30000" dirty="0">
-                <a:solidFill>
-                  <a:srgbClr val="14161B"/>
-                </a:solidFill>
-                <a:latin typeface="Trade Gothic Next" pitchFamily="34" charset="0"/>
-                <a:ea typeface="Trade Gothic Next" pitchFamily="34" charset="-122"/>
-                <a:cs typeface="Trade Gothic Next" pitchFamily="34" charset="-120"/>
-              </a:rPr>
-              <a:t>+</a:t>
-            </a:r>
+              <a:t>S: 6, gain 2, [Ar], 2−</a:t>
+            </a:r>
+            <a:endParaRPr lang="en-US" sz="1900" dirty="0"/>
+          </a:p>
+          <a:p>
             <a:pPr indent="0" marL="0">
               <a:buNone/>
             </a:pPr>
@@ -21362,97 +20623,7 @@
                 <a:ea typeface="Trade Gothic Next" pitchFamily="34" charset="-122"/>
                 <a:cs typeface="Trade Gothic Next" pitchFamily="34" charset="-120"/>
               </a:rPr>
-              <a:t>: [Ar] 3d</a:t>
-            </a:r>
-            <a:pPr indent="0" marL="0">
-              <a:buNone/>
-            </a:pPr>
-            <a:r>
-              <a:rPr lang="en-US" sz="1900" baseline="30000" dirty="0">
-                <a:solidFill>
-                  <a:srgbClr val="14161B"/>
-                </a:solidFill>
-                <a:latin typeface="Trade Gothic Next" pitchFamily="34" charset="0"/>
-                <a:ea typeface="Trade Gothic Next" pitchFamily="34" charset="-122"/>
-                <a:cs typeface="Trade Gothic Next" pitchFamily="34" charset="-120"/>
-              </a:rPr>
-              <a:t>10</a:t>
-            </a:r>
-            <a:endParaRPr lang="en-US" sz="1900" dirty="0"/>
-          </a:p>
-          <a:p>
-            <a:pPr indent="0" marL="0">
-              <a:buNone/>
-            </a:pPr>
-            <a:r>
-              <a:rPr lang="en-US" sz="1900" dirty="0">
-                <a:solidFill>
-                  <a:srgbClr val="14161B"/>
-                </a:solidFill>
-                <a:latin typeface="Trade Gothic Next" pitchFamily="34" charset="0"/>
-                <a:ea typeface="Trade Gothic Next" pitchFamily="34" charset="-122"/>
-                <a:cs typeface="Trade Gothic Next" pitchFamily="34" charset="-120"/>
-              </a:rPr>
-              <a:t>Cu</a:t>
-            </a:r>
-            <a:pPr indent="0" marL="0">
-              <a:buNone/>
-            </a:pPr>
-            <a:r>
-              <a:rPr lang="en-US" sz="1900" baseline="30000" dirty="0">
-                <a:solidFill>
-                  <a:srgbClr val="14161B"/>
-                </a:solidFill>
-                <a:latin typeface="Trade Gothic Next" pitchFamily="34" charset="0"/>
-                <a:ea typeface="Trade Gothic Next" pitchFamily="34" charset="-122"/>
-                <a:cs typeface="Trade Gothic Next" pitchFamily="34" charset="-120"/>
-              </a:rPr>
-              <a:t>2+</a:t>
-            </a:r>
-            <a:pPr indent="0" marL="0">
-              <a:buNone/>
-            </a:pPr>
-            <a:r>
-              <a:rPr lang="en-US" sz="1900" dirty="0">
-                <a:solidFill>
-                  <a:srgbClr val="14161B"/>
-                </a:solidFill>
-                <a:latin typeface="Trade Gothic Next" pitchFamily="34" charset="0"/>
-                <a:ea typeface="Trade Gothic Next" pitchFamily="34" charset="-122"/>
-                <a:cs typeface="Trade Gothic Next" pitchFamily="34" charset="-120"/>
-              </a:rPr>
-              <a:t>: 4s, then one 3d</a:t>
-            </a:r>
-            <a:endParaRPr lang="en-US" sz="1900" dirty="0"/>
-          </a:p>
-          <a:p>
-            <a:pPr indent="0" marL="0">
-              <a:buNone/>
-            </a:pPr>
-            <a:r>
-              <a:rPr lang="en-US" sz="1900" dirty="0">
-                <a:solidFill>
-                  <a:srgbClr val="14161B"/>
-                </a:solidFill>
-                <a:latin typeface="Trade Gothic Next" pitchFamily="34" charset="0"/>
-                <a:ea typeface="Trade Gothic Next" pitchFamily="34" charset="-122"/>
-                <a:cs typeface="Trade Gothic Next" pitchFamily="34" charset="-120"/>
-              </a:rPr>
-              <a:t>→ [Ar] 3d</a:t>
-            </a:r>
-            <a:pPr indent="0" marL="0">
-              <a:buNone/>
-            </a:pPr>
-            <a:r>
-              <a:rPr lang="en-US" sz="1900" baseline="30000" dirty="0">
-                <a:solidFill>
-                  <a:srgbClr val="14161B"/>
-                </a:solidFill>
-                <a:latin typeface="Trade Gothic Next" pitchFamily="34" charset="0"/>
-                <a:ea typeface="Trade Gothic Next" pitchFamily="34" charset="-122"/>
-                <a:cs typeface="Trade Gothic Next" pitchFamily="34" charset="-120"/>
-              </a:rPr>
-              <a:t>9</a:t>
+              <a:t>Br: 7, gain 1, [Kr], 1−</a:t>
             </a:r>
             <a:endParaRPr lang="en-US" sz="1900" dirty="0"/>
           </a:p>
@@ -21493,147 +20664,7 @@
                 <a:ea typeface="Trade Gothic Next" pitchFamily="34" charset="-122"/>
                 <a:cs typeface="Trade Gothic Next" pitchFamily="34" charset="-120"/>
               </a:rPr>
-              <a:t>Zn</a:t>
-            </a:r>
-            <a:pPr indent="0" marL="0">
-              <a:buNone/>
-            </a:pPr>
-            <a:r>
-              <a:rPr lang="en-US" sz="1600" b="1" baseline="30000" dirty="0">
-                <a:solidFill>
-                  <a:srgbClr val="EDF0E5"/>
-                </a:solidFill>
-                <a:latin typeface="Trade Gothic Next" pitchFamily="34" charset="0"/>
-                <a:ea typeface="Trade Gothic Next" pitchFamily="34" charset="-122"/>
-                <a:cs typeface="Trade Gothic Next" pitchFamily="34" charset="-120"/>
-              </a:rPr>
-              <a:t>2+</a:t>
-            </a:r>
-            <a:pPr indent="0" marL="0">
-              <a:buNone/>
-            </a:pPr>
-            <a:r>
-              <a:rPr lang="en-US" sz="1600" b="1" dirty="0">
-                <a:solidFill>
-                  <a:srgbClr val="EDF0E5"/>
-                </a:solidFill>
-                <a:latin typeface="Trade Gothic Next" pitchFamily="34" charset="0"/>
-                <a:ea typeface="Trade Gothic Next" pitchFamily="34" charset="-122"/>
-                <a:cs typeface="Trade Gothic Next" pitchFamily="34" charset="-120"/>
-              </a:rPr>
-              <a:t> and Cu</a:t>
-            </a:r>
-            <a:pPr indent="0" marL="0">
-              <a:buNone/>
-            </a:pPr>
-            <a:r>
-              <a:rPr lang="en-US" sz="1600" b="1" baseline="30000" dirty="0">
-                <a:solidFill>
-                  <a:srgbClr val="EDF0E5"/>
-                </a:solidFill>
-                <a:latin typeface="Trade Gothic Next" pitchFamily="34" charset="0"/>
-                <a:ea typeface="Trade Gothic Next" pitchFamily="34" charset="-122"/>
-                <a:cs typeface="Trade Gothic Next" pitchFamily="34" charset="-120"/>
-              </a:rPr>
-              <a:t>+</a:t>
-            </a:r>
-            <a:pPr indent="0" marL="0">
-              <a:buNone/>
-            </a:pPr>
-            <a:r>
-              <a:rPr lang="en-US" sz="1600" b="1" dirty="0">
-                <a:solidFill>
-                  <a:srgbClr val="EDF0E5"/>
-                </a:solidFill>
-                <a:latin typeface="Trade Gothic Next" pitchFamily="34" charset="0"/>
-                <a:ea typeface="Trade Gothic Next" pitchFamily="34" charset="-122"/>
-                <a:cs typeface="Trade Gothic Next" pitchFamily="34" charset="-120"/>
-              </a:rPr>
-              <a:t> are both [Ar] 3d</a:t>
-            </a:r>
-            <a:pPr indent="0" marL="0">
-              <a:buNone/>
-            </a:pPr>
-            <a:r>
-              <a:rPr lang="en-US" sz="1600" b="1" baseline="30000" dirty="0">
-                <a:solidFill>
-                  <a:srgbClr val="EDF0E5"/>
-                </a:solidFill>
-                <a:latin typeface="Trade Gothic Next" pitchFamily="34" charset="0"/>
-                <a:ea typeface="Trade Gothic Next" pitchFamily="34" charset="-122"/>
-                <a:cs typeface="Trade Gothic Next" pitchFamily="34" charset="-120"/>
-              </a:rPr>
-              <a:t>10</a:t>
-            </a:r>
-            <a:pPr indent="0" marL="0">
-              <a:buNone/>
-            </a:pPr>
-            <a:r>
-              <a:rPr lang="en-US" sz="1600" b="1" dirty="0">
-                <a:solidFill>
-                  <a:srgbClr val="EDF0E5"/>
-                </a:solidFill>
-                <a:latin typeface="Trade Gothic Next" pitchFamily="34" charset="0"/>
-                <a:ea typeface="Trade Gothic Next" pitchFamily="34" charset="-122"/>
-                <a:cs typeface="Trade Gothic Next" pitchFamily="34" charset="-120"/>
-              </a:rPr>
-              <a:t>. Cu</a:t>
-            </a:r>
-            <a:pPr indent="0" marL="0">
-              <a:buNone/>
-            </a:pPr>
-            <a:r>
-              <a:rPr lang="en-US" sz="1600" b="1" baseline="30000" dirty="0">
-                <a:solidFill>
-                  <a:srgbClr val="EDF0E5"/>
-                </a:solidFill>
-                <a:latin typeface="Trade Gothic Next" pitchFamily="34" charset="0"/>
-                <a:ea typeface="Trade Gothic Next" pitchFamily="34" charset="-122"/>
-                <a:cs typeface="Trade Gothic Next" pitchFamily="34" charset="-120"/>
-              </a:rPr>
-              <a:t>2+</a:t>
-            </a:r>
-            <a:pPr indent="0" marL="0">
-              <a:buNone/>
-            </a:pPr>
-            <a:r>
-              <a:rPr lang="en-US" sz="1600" b="1" dirty="0">
-                <a:solidFill>
-                  <a:srgbClr val="EDF0E5"/>
-                </a:solidFill>
-                <a:latin typeface="Trade Gothic Next" pitchFamily="34" charset="0"/>
-                <a:ea typeface="Trade Gothic Next" pitchFamily="34" charset="-122"/>
-                <a:cs typeface="Trade Gothic Next" pitchFamily="34" charset="-120"/>
-              </a:rPr>
-              <a:t> is [Ar] 3d</a:t>
-            </a:r>
-            <a:pPr indent="0" marL="0">
-              <a:buNone/>
-            </a:pPr>
-            <a:r>
-              <a:rPr lang="en-US" sz="1600" b="1" baseline="30000" dirty="0">
-                <a:solidFill>
-                  <a:srgbClr val="EDF0E5"/>
-                </a:solidFill>
-                <a:latin typeface="Trade Gothic Next" pitchFamily="34" charset="0"/>
-                <a:ea typeface="Trade Gothic Next" pitchFamily="34" charset="-122"/>
-                <a:cs typeface="Trade Gothic Next" pitchFamily="34" charset="-120"/>
-              </a:rPr>
-              <a:t>9</a:t>
-            </a:r>
-            <a:pPr indent="0" marL="0">
-              <a:buNone/>
-            </a:pPr>
-            <a:r>
-              <a:rPr lang="en-US" sz="1600" b="1" dirty="0">
-                <a:solidFill>
-                  <a:srgbClr val="EDF0E5"/>
-                </a:solidFill>
-                <a:latin typeface="Trade Gothic Next" pitchFamily="34" charset="0"/>
-                <a:ea typeface="Trade Gothic Next" pitchFamily="34" charset="-122"/>
-                <a:cs typeface="Trade Gothic Next" pitchFamily="34" charset="-120"/>
-              </a:rPr>
-              <a:t>.</a:t>
+              <a:t>Mg 2+, Al 3+, S 2−, Br 1−. Each move ends at a noble gas configuration.</a:t>
             </a:r>
             <a:endParaRPr lang="en-US" sz="1600" dirty="0"/>
           </a:p>
@@ -22071,21 +21102,7 @@
                 <a:ea typeface="Trade Gothic Next" pitchFamily="34" charset="-122"/>
                 <a:cs typeface="Trade Gothic Next" pitchFamily="34" charset="-120"/>
               </a:rPr>
-              <a:t>O</a:t>
-            </a:r>
-            <a:pPr indent="0" marL="0">
-              <a:buNone/>
-            </a:pPr>
-            <a:r>
-              <a:rPr lang="en-US" sz="1200" b="1" baseline="30000" dirty="0">
-                <a:solidFill>
-                  <a:srgbClr val="14161B"/>
-                </a:solidFill>
-                <a:latin typeface="Trade Gothic Next" pitchFamily="34" charset="0"/>
-                <a:ea typeface="Trade Gothic Next" pitchFamily="34" charset="-122"/>
-                <a:cs typeface="Trade Gothic Next" pitchFamily="34" charset="-120"/>
-              </a:rPr>
-              <a:t>2−</a:t>
+              <a:t>Predict</a:t>
             </a:r>
             <a:endParaRPr lang="en-US" sz="1200" dirty="0"/>
           </a:p>
@@ -22126,7 +21143,7 @@
                 <a:ea typeface="Trade Gothic Next" pitchFamily="34" charset="-122"/>
                 <a:cs typeface="Trade Gothic Next" pitchFamily="34" charset="-120"/>
               </a:rPr>
-              <a:t>Write the full configuration.</a:t>
+              <a:t>Predict O's ion. Write its full configuration.</a:t>
             </a:r>
             <a:endParaRPr lang="en-US" sz="1600" dirty="0"/>
           </a:p>
@@ -22575,7 +21592,7 @@
                 <a:ea typeface="Trade Gothic Next" pitchFamily="34" charset="-122"/>
                 <a:cs typeface="Trade Gothic Next" pitchFamily="34" charset="-120"/>
               </a:rPr>
-              <a:t>You can write the configuration of any common ion. Unit 3 asks which charge an element forms and how much energy it takes.</a:t>
+              <a:t>You can predict the charge of a main-group ion from its valence electrons. Unit 3 explains the energy side.</a:t>
             </a:r>
             <a:endParaRPr lang="en-US" sz="1600" dirty="0"/>
           </a:p>
@@ -24175,7 +23192,7 @@
                 <a:ea typeface="Trade Gothic Next" pitchFamily="34" charset="-122"/>
                 <a:cs typeface="Trade Gothic Next" pitchFamily="34" charset="-120"/>
               </a:rPr>
-              <a:t>Groups 3 to 12, the transition metals. Their ions follow the rule on slide 17.</a:t>
+              <a:t>Groups 3 to 12, the transition metals. Their ions follow the rule on slide 13.</a:t>
             </a:r>
             <a:endParaRPr lang="en-US" sz="1600" dirty="0"/>
           </a:p>
@@ -26140,6 +25157,23 @@
             </a:r>
             <a:endParaRPr lang="en-US" sz="1600" dirty="0"/>
           </a:p>
+          <a:p>
+            <a:pPr indent="0" marL="0">
+              <a:buNone/>
+            </a:pPr>
+            <a:r>
+              <a:rPr lang="en-US" sz="1600" dirty="0">
+                <a:solidFill>
+                  <a:srgbClr val="14161B"/>
+                </a:solidFill>
+                <a:latin typeface="Trade Gothic Next" pitchFamily="34" charset="0"/>
+                <a:ea typeface="Trade Gothic Next" pitchFamily="34" charset="-122"/>
+                <a:cs typeface="Trade Gothic Next" pitchFamily="34" charset="-120"/>
+              </a:rPr>
+              <a:t>Charge: 1+</a:t>
+            </a:r>
+            <a:endParaRPr lang="en-US" sz="1600" dirty="0"/>
+          </a:p>
         </p:txBody>
       </p:sp>
       <p:sp>
@@ -26281,6 +25315,23 @@
                 <a:cs typeface="Trade Gothic Next" pitchFamily="34" charset="-120"/>
               </a:rPr>
               <a:t>: 17 electrons become 18.</a:t>
+            </a:r>
+            <a:endParaRPr lang="en-US" sz="1600" dirty="0"/>
+          </a:p>
+          <a:p>
+            <a:pPr indent="0" marL="0">
+              <a:buNone/>
+            </a:pPr>
+            <a:r>
+              <a:rPr lang="en-US" sz="1600" dirty="0">
+                <a:solidFill>
+                  <a:srgbClr val="EDF0E5"/>
+                </a:solidFill>
+                <a:latin typeface="Trade Gothic Next" pitchFamily="34" charset="0"/>
+                <a:ea typeface="Trade Gothic Next" pitchFamily="34" charset="-122"/>
+                <a:cs typeface="Trade Gothic Next" pitchFamily="34" charset="-120"/>
+              </a:rPr>
+              <a:t>Charge: 1−</a:t>
             </a:r>
             <a:endParaRPr lang="en-US" sz="1600" dirty="0"/>
           </a:p>

--- a/deliverables/chem-u02/SHULL_CHEM_Slides_U02_S02.4.pptx
+++ b/deliverables/chem-u02/SHULL_CHEM_Slides_U02_S02.4.pptx
@@ -523,7 +523,7 @@
           <a:p>
             <a:r>
               <a:rPr lang="en-US" dirty="0"/>
-              <a:t>Section title. PROVISIONAL/OPEN: verbatim DECISIONS title now in the panel (see build report for fit). Scope boundary (Matt, 2026-10-04): S2.4 owns what an ion's configuration IS and valence-electron-based charge prediction at the end of the section (main group only). U3.7 and U3.4 own the energetics. PROVISIONAL: group 14 and transition metals are not predicted by the rule here. Not taught here: Lewis dot preview (PROVISIONAL, omitted; belongs to a later unit). Transition-metal valence counting (PROVISIONAL, brief slide 6) also omitted. Image slot empty. Prompt subject: a glass tube of neon gas glowing orange on a dark bench.</a:t>
+              <a:t>Section title. PROVISIONAL/OPEN: verbatim DECISIONS title now in the panel. Scope boundary (Matt, 2026-10-04): S2.4 owns what an ion's configuration IS and valence-electron-based charge prediction at the end of the section (main group only). U3.7 and U3.4 own the energetics. PROVISIONAL: group 14 and transition metals are not predicted by the rule here. Not taught here: Lewis dot preview (PROVISIONAL, omitted; belongs to a later unit). Transition-metal valence counting (PROVISIONAL, brief slide 6) also omitted. Image slot empty. Prompt subject: a glass tube of neon gas glowing orange on a dark bench.</a:t>
             </a:r>
             <a:endParaRPr lang="en-US" dirty="0"/>
           </a:p>
@@ -965,7 +965,7 @@
           <a:lstStyle/>
           <a:p>
             <a:r>
-              <a:t>Fe 26, Fe2+ 24 [Ar]3d6, Fe3+ 23 [Ar]3d5. Present 3d5 as an observed electron count, not proof of a cause. Click build replaces the static figure: one slide carries Fe, Fe2+ and Fe3+ (the 4s arrows leave first, then one 3d). The static PNG chem_u02_s2.4_fe_ions_orbitals.png stays on disk for print.</a:t>
+              <a:t>Fe 26, Fe2+ 24 [Ar]3d6, Fe3+ 23 [Ar]3d5. Present 3d5 as an observed electron count, not proof of a cause. Click build replaces the static figure: one slide carries Fe, Fe2+ and Fe3+ (the 4s arrows leave first, then one 3d). Click 3 passes through Fe+ (25 electrons), named on the slide so no species goes unlabelled. The static PNG chem_u02_s2.4_fe_ions_orbitals.png stays on disk for print.</a:t>
             </a:r>
           </a:p>
           <a:p>
@@ -20428,9 +20428,9 @@
         <p:grpSpPr>
           <a:xfrm>
             <a:off x="1024128" y="2761487"/>
-            <a:ext cx="4398264" cy="1097280"/>
+            <a:ext cx="4398264" cy="1024128"/>
             <a:chOff x="1024128" y="2761487"/>
-            <a:chExt cx="4398264" cy="1097280"/>
+            <a:chExt cx="4398264" cy="1024128"/>
           </a:xfrm>
         </p:grpSpPr>
         <p:sp>
@@ -20476,8 +20476,8 @@
           </p:nvSpPr>
           <p:spPr>
             <a:xfrm>
-              <a:off x="1577339" y="3072383"/>
-              <a:ext cx="475488" cy="475488"/>
+              <a:off x="1796795" y="3072383"/>
+              <a:ext cx="402336" cy="402336"/>
             </a:xfrm>
             <a:prstGeom prst="rect">
               <a:avLst/>
@@ -20522,8 +20522,8 @@
           </p:nvSpPr>
           <p:spPr>
             <a:xfrm>
-              <a:off x="1485899" y="3584447"/>
-              <a:ext cx="658368" cy="274320"/>
+              <a:off x="1705355" y="3511295"/>
+              <a:ext cx="585216" cy="274320"/>
             </a:xfrm>
             <a:prstGeom prst="rect">
               <a:avLst/>
@@ -20557,8 +20557,8 @@
           </p:nvSpPr>
           <p:spPr>
             <a:xfrm>
-              <a:off x="2308859" y="3072383"/>
-              <a:ext cx="475488" cy="475488"/>
+              <a:off x="2455163" y="3072383"/>
+              <a:ext cx="402336" cy="402336"/>
             </a:xfrm>
             <a:prstGeom prst="rect">
               <a:avLst/>
@@ -20603,8 +20603,8 @@
           </p:nvSpPr>
           <p:spPr>
             <a:xfrm>
-              <a:off x="2830068" y="3072383"/>
-              <a:ext cx="475488" cy="475488"/>
+              <a:off x="2903220" y="3072383"/>
+              <a:ext cx="402336" cy="402336"/>
             </a:xfrm>
             <a:prstGeom prst="rect">
               <a:avLst/>
@@ -20650,7 +20650,7 @@
           <p:spPr>
             <a:xfrm>
               <a:off x="3351275" y="3072383"/>
-              <a:ext cx="475488" cy="475488"/>
+              <a:ext cx="402336" cy="402336"/>
             </a:xfrm>
             <a:prstGeom prst="rect">
               <a:avLst/>
@@ -20695,8 +20695,8 @@
           </p:nvSpPr>
           <p:spPr>
             <a:xfrm>
-              <a:off x="3872483" y="3072383"/>
-              <a:ext cx="475488" cy="475488"/>
+              <a:off x="3799331" y="3072383"/>
+              <a:ext cx="402336" cy="402336"/>
             </a:xfrm>
             <a:prstGeom prst="rect">
               <a:avLst/>
@@ -20741,8 +20741,8 @@
           </p:nvSpPr>
           <p:spPr>
             <a:xfrm>
-              <a:off x="4393692" y="3072383"/>
-              <a:ext cx="475488" cy="475488"/>
+              <a:off x="4247388" y="3072383"/>
+              <a:ext cx="402336" cy="402336"/>
             </a:xfrm>
             <a:prstGeom prst="rect">
               <a:avLst/>
@@ -20787,8 +20787,8 @@
           </p:nvSpPr>
           <p:spPr>
             <a:xfrm>
-              <a:off x="2217419" y="3584447"/>
-              <a:ext cx="2743200" cy="274320"/>
+              <a:off x="2363723" y="3511295"/>
+              <a:ext cx="2377440" cy="274320"/>
             </a:xfrm>
             <a:prstGeom prst="rect">
               <a:avLst/>
@@ -20823,8 +20823,8 @@
         </p:nvSpPr>
         <p:spPr>
           <a:xfrm>
-            <a:off x="1660550" y="3162726"/>
-            <a:ext cx="118872" cy="294802"/>
+            <a:off x="1867204" y="3148827"/>
+            <a:ext cx="100584" cy="249448"/>
           </a:xfrm>
           <a:prstGeom prst="upArrow">
             <a:avLst>
@@ -20870,8 +20870,8 @@
         </p:nvSpPr>
         <p:spPr>
           <a:xfrm>
-            <a:off x="1850745" y="3162726"/>
-            <a:ext cx="118872" cy="294802"/>
+            <a:off x="2028139" y="3148827"/>
+            <a:ext cx="100584" cy="249448"/>
           </a:xfrm>
           <a:prstGeom prst="downArrow">
             <a:avLst>
@@ -20917,8 +20917,8 @@
         </p:nvSpPr>
         <p:spPr>
           <a:xfrm>
-            <a:off x="2392070" y="3162726"/>
-            <a:ext cx="118872" cy="294802"/>
+            <a:off x="2525572" y="3148827"/>
+            <a:ext cx="100584" cy="249448"/>
           </a:xfrm>
           <a:prstGeom prst="upArrow">
             <a:avLst>
@@ -20964,8 +20964,8 @@
         </p:nvSpPr>
         <p:spPr>
           <a:xfrm>
-            <a:off x="2913278" y="3162726"/>
-            <a:ext cx="118872" cy="294802"/>
+            <a:off x="2973628" y="3148827"/>
+            <a:ext cx="100584" cy="249448"/>
           </a:xfrm>
           <a:prstGeom prst="upArrow">
             <a:avLst>
@@ -21011,8 +21011,8 @@
         </p:nvSpPr>
         <p:spPr>
           <a:xfrm>
-            <a:off x="3434486" y="3162726"/>
-            <a:ext cx="118872" cy="294802"/>
+            <a:off x="3421684" y="3148827"/>
+            <a:ext cx="100584" cy="249448"/>
           </a:xfrm>
           <a:prstGeom prst="upArrow">
             <a:avLst>
@@ -21058,8 +21058,8 @@
         </p:nvSpPr>
         <p:spPr>
           <a:xfrm>
-            <a:off x="3955694" y="3162726"/>
-            <a:ext cx="118872" cy="294802"/>
+            <a:off x="3869740" y="3148827"/>
+            <a:ext cx="100584" cy="249448"/>
           </a:xfrm>
           <a:prstGeom prst="upArrow">
             <a:avLst>
@@ -21105,8 +21105,8 @@
         </p:nvSpPr>
         <p:spPr>
           <a:xfrm>
-            <a:off x="4476902" y="3162726"/>
-            <a:ext cx="118872" cy="294802"/>
+            <a:off x="4317796" y="3148827"/>
+            <a:ext cx="100584" cy="249448"/>
           </a:xfrm>
           <a:prstGeom prst="upArrow">
             <a:avLst>
@@ -21152,8 +21152,8 @@
         </p:nvSpPr>
         <p:spPr>
           <a:xfrm>
-            <a:off x="2582265" y="3162726"/>
-            <a:ext cx="118872" cy="294802"/>
+            <a:off x="2686507" y="3148827"/>
+            <a:ext cx="100584" cy="249448"/>
           </a:xfrm>
           <a:prstGeom prst="downArrow">
             <a:avLst>
@@ -21199,8 +21199,8 @@
         </p:nvSpPr>
         <p:spPr>
           <a:xfrm>
-            <a:off x="1660550" y="3162726"/>
-            <a:ext cx="118872" cy="294802"/>
+            <a:off x="1867204" y="3148827"/>
+            <a:ext cx="100584" cy="249448"/>
           </a:xfrm>
           <a:prstGeom prst="upArrow">
             <a:avLst>
@@ -21248,8 +21248,8 @@
         </p:nvSpPr>
         <p:spPr>
           <a:xfrm>
-            <a:off x="1850745" y="3162726"/>
-            <a:ext cx="118872" cy="294802"/>
+            <a:off x="2028139" y="3148827"/>
+            <a:ext cx="100584" cy="249448"/>
           </a:xfrm>
           <a:prstGeom prst="downArrow">
             <a:avLst>
@@ -21297,8 +21297,8 @@
         </p:nvSpPr>
         <p:spPr>
           <a:xfrm>
-            <a:off x="1024128" y="3895344"/>
-            <a:ext cx="4398264" cy="512064"/>
+            <a:off x="1024128" y="3822191"/>
+            <a:ext cx="4398264" cy="256032"/>
           </a:xfrm>
           <a:prstGeom prst="rect">
             <a:avLst/>
@@ -21319,21 +21319,21 @@
                 </a:solidFill>
                 <a:latin typeface="Trade Gothic Next"/>
               </a:rPr>
-              <a:t>Highest n is 4: the 4s electrons leave first</a:t>
-            </a:r>
-          </a:p>
-        </p:txBody>
-      </p:sp>
-      <p:sp>
-        <p:nvSpPr>
-          <p:cNvPr id="35" name="BUILD caption"/>
+              <a:t>Highest n is 4: 4s leaves first</a:t>
+            </a:r>
+          </a:p>
+        </p:txBody>
+      </p:sp>
+      <p:sp>
+        <p:nvSpPr>
+          <p:cNvPr id="35" name="BUILD state"/>
           <p:cNvSpPr txBox="1"/>
           <p:nvPr/>
         </p:nvSpPr>
         <p:spPr>
           <a:xfrm>
-            <a:off x="1024128" y="4407408"/>
-            <a:ext cx="4398264" cy="256032"/>
+            <a:off x="1024128" y="4114800"/>
+            <a:ext cx="4398264" cy="292608"/>
           </a:xfrm>
           <a:prstGeom prst="rect">
             <a:avLst/>
@@ -21348,13 +21348,13 @@
           <a:p>
             <a:pPr algn="ctr"/>
             <a:r>
-              <a:rPr sz="1600" b="1">
-                <a:solidFill>
-                  <a:srgbClr val="4D730E"/>
+              <a:rPr sz="1800" b="1">
+                <a:solidFill>
+                  <a:srgbClr val="14161B"/>
                 </a:solidFill>
                 <a:latin typeface="Trade Gothic Next"/>
               </a:rPr>
-              <a:t>Then one 3d electron leaves</a:t>
+              <a:t>Fe: charge 0, 26 electrons</a:t>
             </a:r>
           </a:p>
         </p:txBody>
@@ -21367,7 +21367,7 @@
         </p:nvSpPr>
         <p:spPr>
           <a:xfrm>
-            <a:off x="1024128" y="4700016"/>
+            <a:off x="1024128" y="4407408"/>
             <a:ext cx="4398264" cy="292608"/>
           </a:xfrm>
           <a:prstGeom prst="rect">
@@ -21398,6 +21398,59 @@
                 </a:solidFill>
                 <a:latin typeface="Trade Gothic Next"/>
               </a:rPr>
+              <a:t>+</a:t>
+            </a:r>
+            <a:r>
+              <a:rPr sz="1800" b="1">
+                <a:solidFill>
+                  <a:srgbClr val="14161B"/>
+                </a:solidFill>
+                <a:latin typeface="Trade Gothic Next"/>
+              </a:rPr>
+              <a:t>: charge 1+, 25 electrons</a:t>
+            </a:r>
+          </a:p>
+        </p:txBody>
+      </p:sp>
+      <p:sp>
+        <p:nvSpPr>
+          <p:cNvPr id="37" name="BUILD state"/>
+          <p:cNvSpPr txBox="1"/>
+          <p:nvPr/>
+        </p:nvSpPr>
+        <p:spPr>
+          <a:xfrm>
+            <a:off x="1024128" y="4700016"/>
+            <a:ext cx="4398264" cy="292608"/>
+          </a:xfrm>
+          <a:prstGeom prst="rect">
+            <a:avLst/>
+          </a:prstGeom>
+          <a:noFill/>
+        </p:spPr>
+        <p:txBody>
+          <a:bodyPr wrap="square" lIns="0" rIns="0" tIns="0" bIns="0" anchor="ctr">
+            <a:spAutoFit/>
+          </a:bodyPr>
+          <a:lstStyle/>
+          <a:p>
+            <a:pPr algn="ctr"/>
+            <a:r>
+              <a:rPr sz="1800" b="1">
+                <a:solidFill>
+                  <a:srgbClr val="14161B"/>
+                </a:solidFill>
+                <a:latin typeface="Trade Gothic Next"/>
+              </a:rPr>
+              <a:t>Fe</a:t>
+            </a:r>
+            <a:r>
+              <a:rPr sz="1800" b="1" baseline="30000">
+                <a:solidFill>
+                  <a:srgbClr val="14161B"/>
+                </a:solidFill>
+                <a:latin typeface="Trade Gothic Next"/>
+              </a:rPr>
               <a:t>2+</a:t>
             </a:r>
             <a:r>
@@ -21414,7 +21467,7 @@
       </p:sp>
       <p:sp>
         <p:nvSpPr>
-          <p:cNvPr id="37" name="BUILD state"/>
+          <p:cNvPr id="38" name="BUILD state"/>
           <p:cNvSpPr txBox="1"/>
           <p:nvPr/>
         </p:nvSpPr>
@@ -22147,6 +22200,41 @@
                                   </p:childTnLst>
                                 </p:cTn>
                               </p:par>
+                              <p:par>
+                                <p:cTn id="41" presetID="10" presetClass="entr" presetSubtype="0" fill="hold" grpId="0" nodeType="withEffect">
+                                  <p:stCondLst>
+                                    <p:cond delay="0"/>
+                                  </p:stCondLst>
+                                  <p:childTnLst>
+                                    <p:set>
+                                      <p:cBhvr>
+                                        <p:cTn id="42" dur="1" fill="hold">
+                                          <p:stCondLst>
+                                            <p:cond delay="0"/>
+                                          </p:stCondLst>
+                                        </p:cTn>
+                                        <p:tgtEl>
+                                          <p:spTgt spid="35"/>
+                                        </p:tgtEl>
+                                        <p:attrNameLst>
+                                          <p:attrName>style.visibility</p:attrName>
+                                        </p:attrNameLst>
+                                      </p:cBhvr>
+                                      <p:to>
+                                        <p:strVal val="visible"/>
+                                      </p:to>
+                                    </p:set>
+                                    <p:animEffect transition="in" filter="fade">
+                                      <p:cBhvr>
+                                        <p:cTn id="43" dur="400"/>
+                                        <p:tgtEl>
+                                          <p:spTgt spid="35"/>
+                                        </p:tgtEl>
+                                      </p:cBhvr>
+                                    </p:animEffect>
+                                  </p:childTnLst>
+                                </p:cTn>
+                              </p:par>
                             </p:childTnLst>
                           </p:cTn>
                         </p:par>
@@ -22154,26 +22242,26 @@
                     </p:cTn>
                   </p:par>
                   <p:par>
-                    <p:cTn id="41" fill="hold">
+                    <p:cTn id="44" fill="hold">
                       <p:stCondLst>
                         <p:cond delay="indefinite"/>
                       </p:stCondLst>
                       <p:childTnLst>
                         <p:par>
-                          <p:cTn id="42" fill="hold">
+                          <p:cTn id="45" fill="hold">
                             <p:stCondLst>
                               <p:cond delay="0"/>
                             </p:stCondLst>
                             <p:childTnLst>
                               <p:par>
-                                <p:cTn id="43" presetID="10" presetClass="entr" presetSubtype="0" fill="hold" grpId="0" nodeType="clickEffect">
+                                <p:cTn id="46" presetID="10" presetClass="entr" presetSubtype="0" fill="hold" grpId="0" nodeType="clickEffect">
                                   <p:stCondLst>
                                     <p:cond delay="0"/>
                                   </p:stCondLst>
                                   <p:childTnLst>
                                     <p:set>
                                       <p:cBhvr>
-                                        <p:cTn id="44" dur="1" fill="hold">
+                                        <p:cTn id="47" dur="1" fill="hold">
                                           <p:stCondLst>
                                             <p:cond delay="0"/>
                                           </p:stCondLst>
@@ -22191,44 +22279,9 @@
                                     </p:set>
                                     <p:animEffect transition="in" filter="fade">
                                       <p:cBhvr>
-                                        <p:cTn id="45" dur="400"/>
+                                        <p:cTn id="48" dur="400"/>
                                         <p:tgtEl>
                                           <p:spTgt spid="32"/>
-                                        </p:tgtEl>
-                                      </p:cBhvr>
-                                    </p:animEffect>
-                                  </p:childTnLst>
-                                </p:cTn>
-                              </p:par>
-                              <p:par>
-                                <p:cTn id="46" presetID="10" presetClass="entr" presetSubtype="0" fill="hold" grpId="0" nodeType="withEffect">
-                                  <p:stCondLst>
-                                    <p:cond delay="0"/>
-                                  </p:stCondLst>
-                                  <p:childTnLst>
-                                    <p:set>
-                                      <p:cBhvr>
-                                        <p:cTn id="47" dur="1" fill="hold">
-                                          <p:stCondLst>
-                                            <p:cond delay="0"/>
-                                          </p:stCondLst>
-                                        </p:cTn>
-                                        <p:tgtEl>
-                                          <p:spTgt spid="33"/>
-                                        </p:tgtEl>
-                                        <p:attrNameLst>
-                                          <p:attrName>style.visibility</p:attrName>
-                                        </p:attrNameLst>
-                                      </p:cBhvr>
-                                      <p:to>
-                                        <p:strVal val="visible"/>
-                                      </p:to>
-                                    </p:set>
-                                    <p:animEffect transition="in" filter="fade">
-                                      <p:cBhvr>
-                                        <p:cTn id="48" dur="400"/>
-                                        <p:tgtEl>
-                                          <p:spTgt spid="33"/>
                                         </p:tgtEl>
                                       </p:cBhvr>
                                     </p:animEffect>
@@ -22249,6 +22302,41 @@
                                           </p:stCondLst>
                                         </p:cTn>
                                         <p:tgtEl>
+                                          <p:spTgt spid="33"/>
+                                        </p:tgtEl>
+                                        <p:attrNameLst>
+                                          <p:attrName>style.visibility</p:attrName>
+                                        </p:attrNameLst>
+                                      </p:cBhvr>
+                                      <p:to>
+                                        <p:strVal val="visible"/>
+                                      </p:to>
+                                    </p:set>
+                                    <p:animEffect transition="in" filter="fade">
+                                      <p:cBhvr>
+                                        <p:cTn id="51" dur="400"/>
+                                        <p:tgtEl>
+                                          <p:spTgt spid="33"/>
+                                        </p:tgtEl>
+                                      </p:cBhvr>
+                                    </p:animEffect>
+                                  </p:childTnLst>
+                                </p:cTn>
+                              </p:par>
+                              <p:par>
+                                <p:cTn id="52" presetID="10" presetClass="entr" presetSubtype="0" fill="hold" grpId="0" nodeType="withEffect">
+                                  <p:stCondLst>
+                                    <p:cond delay="0"/>
+                                  </p:stCondLst>
+                                  <p:childTnLst>
+                                    <p:set>
+                                      <p:cBhvr>
+                                        <p:cTn id="53" dur="1" fill="hold">
+                                          <p:stCondLst>
+                                            <p:cond delay="0"/>
+                                          </p:stCondLst>
+                                        </p:cTn>
+                                        <p:tgtEl>
                                           <p:spTgt spid="34"/>
                                         </p:tgtEl>
                                         <p:attrNameLst>
@@ -22261,7 +22349,7 @@
                                     </p:set>
                                     <p:animEffect transition="in" filter="fade">
                                       <p:cBhvr>
-                                        <p:cTn id="51" dur="400"/>
+                                        <p:cTn id="54" dur="400"/>
                                         <p:tgtEl>
                                           <p:spTgt spid="34"/>
                                         </p:tgtEl>
@@ -22277,26 +22365,26 @@
                     </p:cTn>
                   </p:par>
                   <p:par>
-                    <p:cTn id="52" fill="hold">
+                    <p:cTn id="55" fill="hold">
                       <p:stCondLst>
                         <p:cond delay="indefinite"/>
                       </p:stCondLst>
                       <p:childTnLst>
                         <p:par>
-                          <p:cTn id="53" fill="hold">
+                          <p:cTn id="56" fill="hold">
                             <p:stCondLst>
                               <p:cond delay="0"/>
                             </p:stCondLst>
                             <p:childTnLst>
                               <p:par>
-                                <p:cTn id="54" presetID="10" presetClass="exit" presetSubtype="0" fill="hold" grpId="0" nodeType="clickEffect">
+                                <p:cTn id="57" presetID="10" presetClass="exit" presetSubtype="0" fill="hold" grpId="0" nodeType="clickEffect">
                                   <p:stCondLst>
                                     <p:cond delay="0"/>
                                   </p:stCondLst>
                                   <p:childTnLst>
                                     <p:animEffect transition="out" filter="fade">
                                       <p:cBhvr>
-                                        <p:cTn id="55" dur="400"/>
+                                        <p:cTn id="58" dur="400"/>
                                         <p:tgtEl>
                                           <p:spTgt spid="25"/>
                                         </p:tgtEl>
@@ -22304,7 +22392,7 @@
                                     </p:animEffect>
                                     <p:set>
                                       <p:cBhvr>
-                                        <p:cTn id="56" dur="1" fill="hold">
+                                        <p:cTn id="59" dur="1" fill="hold">
                                           <p:stCondLst>
                                             <p:cond delay="399"/>
                                           </p:stCondLst>
@@ -22324,14 +22412,14 @@
                                 </p:cTn>
                               </p:par>
                               <p:par>
-                                <p:cTn id="57" presetID="10" presetClass="exit" presetSubtype="0" fill="hold" grpId="0" nodeType="withEffect">
+                                <p:cTn id="60" presetID="10" presetClass="exit" presetSubtype="0" fill="hold" grpId="0" nodeType="withEffect">
                                   <p:stCondLst>
                                     <p:cond delay="0"/>
                                   </p:stCondLst>
                                   <p:childTnLst>
                                     <p:animEffect transition="out" filter="fade">
                                       <p:cBhvr>
-                                        <p:cTn id="58" dur="400"/>
+                                        <p:cTn id="61" dur="400"/>
                                         <p:tgtEl>
                                           <p:spTgt spid="33"/>
                                         </p:tgtEl>
@@ -22339,7 +22427,7 @@
                                     </p:animEffect>
                                     <p:set>
                                       <p:cBhvr>
-                                        <p:cTn id="59" dur="1" fill="hold">
+                                        <p:cTn id="62" dur="1" fill="hold">
                                           <p:stCondLst>
                                             <p:cond delay="399"/>
                                           </p:stCondLst>
@@ -22358,6 +22446,41 @@
                                   </p:childTnLst>
                                 </p:cTn>
                               </p:par>
+                              <p:par>
+                                <p:cTn id="63" presetID="10" presetClass="entr" presetSubtype="0" fill="hold" grpId="0" nodeType="withEffect">
+                                  <p:stCondLst>
+                                    <p:cond delay="0"/>
+                                  </p:stCondLst>
+                                  <p:childTnLst>
+                                    <p:set>
+                                      <p:cBhvr>
+                                        <p:cTn id="64" dur="1" fill="hold">
+                                          <p:stCondLst>
+                                            <p:cond delay="0"/>
+                                          </p:stCondLst>
+                                        </p:cTn>
+                                        <p:tgtEl>
+                                          <p:spTgt spid="36"/>
+                                        </p:tgtEl>
+                                        <p:attrNameLst>
+                                          <p:attrName>style.visibility</p:attrName>
+                                        </p:attrNameLst>
+                                      </p:cBhvr>
+                                      <p:to>
+                                        <p:strVal val="visible"/>
+                                      </p:to>
+                                    </p:set>
+                                    <p:animEffect transition="in" filter="fade">
+                                      <p:cBhvr>
+                                        <p:cTn id="65" dur="400"/>
+                                        <p:tgtEl>
+                                          <p:spTgt spid="36"/>
+                                        </p:tgtEl>
+                                      </p:cBhvr>
+                                    </p:animEffect>
+                                  </p:childTnLst>
+                                </p:cTn>
+                              </p:par>
                             </p:childTnLst>
                           </p:cTn>
                         </p:par>
@@ -22365,26 +22488,26 @@
                     </p:cTn>
                   </p:par>
                   <p:par>
-                    <p:cTn id="60" fill="hold">
+                    <p:cTn id="66" fill="hold">
                       <p:stCondLst>
                         <p:cond delay="indefinite"/>
                       </p:stCondLst>
                       <p:childTnLst>
                         <p:par>
-                          <p:cTn id="61" fill="hold">
+                          <p:cTn id="67" fill="hold">
                             <p:stCondLst>
                               <p:cond delay="0"/>
                             </p:stCondLst>
                             <p:childTnLst>
                               <p:par>
-                                <p:cTn id="62" presetID="10" presetClass="exit" presetSubtype="0" fill="hold" grpId="0" nodeType="clickEffect">
+                                <p:cTn id="68" presetID="10" presetClass="exit" presetSubtype="0" fill="hold" grpId="0" nodeType="clickEffect">
                                   <p:stCondLst>
                                     <p:cond delay="0"/>
                                   </p:stCondLst>
                                   <p:childTnLst>
                                     <p:animEffect transition="out" filter="fade">
                                       <p:cBhvr>
-                                        <p:cTn id="63" dur="400"/>
+                                        <p:cTn id="69" dur="400"/>
                                         <p:tgtEl>
                                           <p:spTgt spid="24"/>
                                         </p:tgtEl>
@@ -22392,7 +22515,7 @@
                                     </p:animEffect>
                                     <p:set>
                                       <p:cBhvr>
-                                        <p:cTn id="64" dur="1" fill="hold">
+                                        <p:cTn id="70" dur="1" fill="hold">
                                           <p:stCondLst>
                                             <p:cond delay="399"/>
                                           </p:stCondLst>
@@ -22412,14 +22535,14 @@
                                 </p:cTn>
                               </p:par>
                               <p:par>
-                                <p:cTn id="65" presetID="10" presetClass="exit" presetSubtype="0" fill="hold" grpId="0" nodeType="withEffect">
+                                <p:cTn id="71" presetID="10" presetClass="exit" presetSubtype="0" fill="hold" grpId="0" nodeType="withEffect">
                                   <p:stCondLst>
                                     <p:cond delay="0"/>
                                   </p:stCondLst>
                                   <p:childTnLst>
                                     <p:animEffect transition="out" filter="fade">
                                       <p:cBhvr>
-                                        <p:cTn id="66" dur="400"/>
+                                        <p:cTn id="72" dur="400"/>
                                         <p:tgtEl>
                                           <p:spTgt spid="32"/>
                                         </p:tgtEl>
@@ -22427,7 +22550,7 @@
                                     </p:animEffect>
                                     <p:set>
                                       <p:cBhvr>
-                                        <p:cTn id="67" dur="1" fill="hold">
+                                        <p:cTn id="73" dur="1" fill="hold">
                                           <p:stCondLst>
                                             <p:cond delay="399"/>
                                           </p:stCondLst>
@@ -22447,20 +22570,20 @@
                                 </p:cTn>
                               </p:par>
                               <p:par>
-                                <p:cTn id="68" presetID="10" presetClass="entr" presetSubtype="0" fill="hold" grpId="0" nodeType="withEffect">
+                                <p:cTn id="74" presetID="10" presetClass="entr" presetSubtype="0" fill="hold" grpId="0" nodeType="withEffect">
                                   <p:stCondLst>
                                     <p:cond delay="0"/>
                                   </p:stCondLst>
                                   <p:childTnLst>
                                     <p:set>
                                       <p:cBhvr>
-                                        <p:cTn id="69" dur="1" fill="hold">
+                                        <p:cTn id="75" dur="1" fill="hold">
                                           <p:stCondLst>
                                             <p:cond delay="0"/>
                                           </p:stCondLst>
                                         </p:cTn>
                                         <p:tgtEl>
-                                          <p:spTgt spid="36"/>
+                                          <p:spTgt spid="37"/>
                                         </p:tgtEl>
                                         <p:attrNameLst>
                                           <p:attrName>style.visibility</p:attrName>
@@ -22472,9 +22595,9 @@
                                     </p:set>
                                     <p:animEffect transition="in" filter="fade">
                                       <p:cBhvr>
-                                        <p:cTn id="70" dur="400"/>
+                                        <p:cTn id="76" dur="400"/>
                                         <p:tgtEl>
-                                          <p:spTgt spid="36"/>
+                                          <p:spTgt spid="37"/>
                                         </p:tgtEl>
                                       </p:cBhvr>
                                     </p:animEffect>
@@ -22488,26 +22611,26 @@
                     </p:cTn>
                   </p:par>
                   <p:par>
-                    <p:cTn id="71" fill="hold">
+                    <p:cTn id="77" fill="hold">
                       <p:stCondLst>
                         <p:cond delay="indefinite"/>
                       </p:stCondLst>
                       <p:childTnLst>
                         <p:par>
-                          <p:cTn id="72" fill="hold">
+                          <p:cTn id="78" fill="hold">
                             <p:stCondLst>
                               <p:cond delay="0"/>
                             </p:stCondLst>
                             <p:childTnLst>
                               <p:par>
-                                <p:cTn id="73" presetID="10" presetClass="exit" presetSubtype="0" fill="hold" grpId="0" nodeType="clickEffect">
+                                <p:cTn id="79" presetID="10" presetClass="exit" presetSubtype="0" fill="hold" grpId="0" nodeType="clickEffect">
                                   <p:stCondLst>
                                     <p:cond delay="0"/>
                                   </p:stCondLst>
                                   <p:childTnLst>
                                     <p:animEffect transition="out" filter="fade">
                                       <p:cBhvr>
-                                        <p:cTn id="74" dur="400"/>
+                                        <p:cTn id="80" dur="400"/>
                                         <p:tgtEl>
                                           <p:spTgt spid="31"/>
                                         </p:tgtEl>
@@ -22515,7 +22638,7 @@
                                     </p:animEffect>
                                     <p:set>
                                       <p:cBhvr>
-                                        <p:cTn id="75" dur="1" fill="hold">
+                                        <p:cTn id="81" dur="1" fill="hold">
                                           <p:stCondLst>
                                             <p:cond delay="399"/>
                                           </p:stCondLst>
@@ -22535,20 +22658,20 @@
                                 </p:cTn>
                               </p:par>
                               <p:par>
-                                <p:cTn id="76" presetID="10" presetClass="entr" presetSubtype="0" fill="hold" grpId="0" nodeType="withEffect">
+                                <p:cTn id="82" presetID="10" presetClass="entr" presetSubtype="0" fill="hold" grpId="0" nodeType="withEffect">
                                   <p:stCondLst>
                                     <p:cond delay="0"/>
                                   </p:stCondLst>
                                   <p:childTnLst>
                                     <p:set>
                                       <p:cBhvr>
-                                        <p:cTn id="77" dur="1" fill="hold">
+                                        <p:cTn id="83" dur="1" fill="hold">
                                           <p:stCondLst>
                                             <p:cond delay="0"/>
                                           </p:stCondLst>
                                         </p:cTn>
                                         <p:tgtEl>
-                                          <p:spTgt spid="35"/>
+                                          <p:spTgt spid="38"/>
                                         </p:tgtEl>
                                         <p:attrNameLst>
                                           <p:attrName>style.visibility</p:attrName>
@@ -22560,44 +22683,9 @@
                                     </p:set>
                                     <p:animEffect transition="in" filter="fade">
                                       <p:cBhvr>
-                                        <p:cTn id="78" dur="400"/>
+                                        <p:cTn id="84" dur="400"/>
                                         <p:tgtEl>
-                                          <p:spTgt spid="35"/>
-                                        </p:tgtEl>
-                                      </p:cBhvr>
-                                    </p:animEffect>
-                                  </p:childTnLst>
-                                </p:cTn>
-                              </p:par>
-                              <p:par>
-                                <p:cTn id="79" presetID="10" presetClass="entr" presetSubtype="0" fill="hold" grpId="0" nodeType="withEffect">
-                                  <p:stCondLst>
-                                    <p:cond delay="0"/>
-                                  </p:stCondLst>
-                                  <p:childTnLst>
-                                    <p:set>
-                                      <p:cBhvr>
-                                        <p:cTn id="80" dur="1" fill="hold">
-                                          <p:stCondLst>
-                                            <p:cond delay="0"/>
-                                          </p:stCondLst>
-                                        </p:cTn>
-                                        <p:tgtEl>
-                                          <p:spTgt spid="37"/>
-                                        </p:tgtEl>
-                                        <p:attrNameLst>
-                                          <p:attrName>style.visibility</p:attrName>
-                                        </p:attrNameLst>
-                                      </p:cBhvr>
-                                      <p:to>
-                                        <p:strVal val="visible"/>
-                                      </p:to>
-                                    </p:set>
-                                    <p:animEffect transition="in" filter="fade">
-                                      <p:cBhvr>
-                                        <p:cTn id="81" dur="400"/>
-                                        <p:tgtEl>
-                                          <p:spTgt spid="37"/>
+                                          <p:spTgt spid="38"/>
                                         </p:tgtEl>
                                       </p:cBhvr>
                                     </p:animEffect>
@@ -22640,12 +22728,13 @@
       <p:bldP spid="29" grpId="0" animBg="1"/>
       <p:bldP spid="30" grpId="0" animBg="1"/>
       <p:bldP spid="31" grpId="0" animBg="1"/>
+      <p:bldP spid="35" grpId="0"/>
       <p:bldP spid="32" grpId="0" animBg="1"/>
       <p:bldP spid="33" grpId="0" animBg="1"/>
       <p:bldP spid="34" grpId="0"/>
       <p:bldP spid="36" grpId="0"/>
-      <p:bldP spid="35" grpId="0"/>
       <p:bldP spid="37" grpId="0"/>
+      <p:bldP spid="38" grpId="0"/>
     </p:bldLst>
   </p:timing>
 </p:sld>
@@ -28829,7 +28918,119 @@
                 <a:ea typeface="Trade Gothic Next" pitchFamily="34" charset="-122"/>
                 <a:cs typeface="Trade Gothic Next" pitchFamily="34" charset="-120"/>
               </a:rPr>
-              <a:t>Mg 2+, Al 3+, S 2−, Br 1−. Each move ends at a noble gas configuration.</a:t>
+              <a:t>Mg</a:t>
+            </a:r>
+            <a:pPr indent="0" marL="0">
+              <a:buNone/>
+            </a:pPr>
+            <a:r>
+              <a:rPr lang="en-US" sz="1600" b="1" baseline="30000" dirty="0">
+                <a:solidFill>
+                  <a:srgbClr val="EDF0E5"/>
+                </a:solidFill>
+                <a:latin typeface="Trade Gothic Next" pitchFamily="34" charset="0"/>
+                <a:ea typeface="Trade Gothic Next" pitchFamily="34" charset="-122"/>
+                <a:cs typeface="Trade Gothic Next" pitchFamily="34" charset="-120"/>
+              </a:rPr>
+              <a:t>2+</a:t>
+            </a:r>
+            <a:pPr indent="0" marL="0">
+              <a:buNone/>
+            </a:pPr>
+            <a:r>
+              <a:rPr lang="en-US" sz="1600" b="1" dirty="0">
+                <a:solidFill>
+                  <a:srgbClr val="EDF0E5"/>
+                </a:solidFill>
+                <a:latin typeface="Trade Gothic Next" pitchFamily="34" charset="0"/>
+                <a:ea typeface="Trade Gothic Next" pitchFamily="34" charset="-122"/>
+                <a:cs typeface="Trade Gothic Next" pitchFamily="34" charset="-120"/>
+              </a:rPr>
+              <a:t>, Al</a:t>
+            </a:r>
+            <a:pPr indent="0" marL="0">
+              <a:buNone/>
+            </a:pPr>
+            <a:r>
+              <a:rPr lang="en-US" sz="1600" b="1" baseline="30000" dirty="0">
+                <a:solidFill>
+                  <a:srgbClr val="EDF0E5"/>
+                </a:solidFill>
+                <a:latin typeface="Trade Gothic Next" pitchFamily="34" charset="0"/>
+                <a:ea typeface="Trade Gothic Next" pitchFamily="34" charset="-122"/>
+                <a:cs typeface="Trade Gothic Next" pitchFamily="34" charset="-120"/>
+              </a:rPr>
+              <a:t>3+</a:t>
+            </a:r>
+            <a:pPr indent="0" marL="0">
+              <a:buNone/>
+            </a:pPr>
+            <a:r>
+              <a:rPr lang="en-US" sz="1600" b="1" dirty="0">
+                <a:solidFill>
+                  <a:srgbClr val="EDF0E5"/>
+                </a:solidFill>
+                <a:latin typeface="Trade Gothic Next" pitchFamily="34" charset="0"/>
+                <a:ea typeface="Trade Gothic Next" pitchFamily="34" charset="-122"/>
+                <a:cs typeface="Trade Gothic Next" pitchFamily="34" charset="-120"/>
+              </a:rPr>
+              <a:t>, S</a:t>
+            </a:r>
+            <a:pPr indent="0" marL="0">
+              <a:buNone/>
+            </a:pPr>
+            <a:r>
+              <a:rPr lang="en-US" sz="1600" b="1" baseline="30000" dirty="0">
+                <a:solidFill>
+                  <a:srgbClr val="EDF0E5"/>
+                </a:solidFill>
+                <a:latin typeface="Trade Gothic Next" pitchFamily="34" charset="0"/>
+                <a:ea typeface="Trade Gothic Next" pitchFamily="34" charset="-122"/>
+                <a:cs typeface="Trade Gothic Next" pitchFamily="34" charset="-120"/>
+              </a:rPr>
+              <a:t>2−</a:t>
+            </a:r>
+            <a:pPr indent="0" marL="0">
+              <a:buNone/>
+            </a:pPr>
+            <a:r>
+              <a:rPr lang="en-US" sz="1600" b="1" dirty="0">
+                <a:solidFill>
+                  <a:srgbClr val="EDF0E5"/>
+                </a:solidFill>
+                <a:latin typeface="Trade Gothic Next" pitchFamily="34" charset="0"/>
+                <a:ea typeface="Trade Gothic Next" pitchFamily="34" charset="-122"/>
+                <a:cs typeface="Trade Gothic Next" pitchFamily="34" charset="-120"/>
+              </a:rPr>
+              <a:t>, Br</a:t>
+            </a:r>
+            <a:pPr indent="0" marL="0">
+              <a:buNone/>
+            </a:pPr>
+            <a:r>
+              <a:rPr lang="en-US" sz="1600" b="1" baseline="30000" dirty="0">
+                <a:solidFill>
+                  <a:srgbClr val="EDF0E5"/>
+                </a:solidFill>
+                <a:latin typeface="Trade Gothic Next" pitchFamily="34" charset="0"/>
+                <a:ea typeface="Trade Gothic Next" pitchFamily="34" charset="-122"/>
+                <a:cs typeface="Trade Gothic Next" pitchFamily="34" charset="-120"/>
+              </a:rPr>
+              <a:t>−</a:t>
+            </a:r>
+            <a:pPr indent="0" marL="0">
+              <a:buNone/>
+            </a:pPr>
+            <a:r>
+              <a:rPr lang="en-US" sz="1600" b="1" dirty="0">
+                <a:solidFill>
+                  <a:srgbClr val="EDF0E5"/>
+                </a:solidFill>
+                <a:latin typeface="Trade Gothic Next" pitchFamily="34" charset="0"/>
+                <a:ea typeface="Trade Gothic Next" pitchFamily="34" charset="-122"/>
+                <a:cs typeface="Trade Gothic Next" pitchFamily="34" charset="-120"/>
+              </a:rPr>
+              <a:t>. Each move ends at a noble gas configuration.</a:t>
             </a:r>
             <a:endParaRPr lang="en-US" sz="1600" dirty="0"/>
           </a:p>
@@ -30330,15 +30531,68 @@
                                   </p:childTnLst>
                                 </p:cTn>
                               </p:par>
+                            </p:childTnLst>
+                          </p:cTn>
+                        </p:par>
+                      </p:childTnLst>
+                    </p:cTn>
+                  </p:par>
+                  <p:par>
+                    <p:cTn id="38" fill="hold">
+                      <p:stCondLst>
+                        <p:cond delay="indefinite"/>
+                      </p:stCondLst>
+                      <p:childTnLst>
+                        <p:par>
+                          <p:cTn id="39" fill="hold">
+                            <p:stCondLst>
+                              <p:cond delay="0"/>
+                            </p:stCondLst>
+                            <p:childTnLst>
                               <p:par>
-                                <p:cTn id="38" presetID="10" presetClass="entr" presetSubtype="0" fill="hold" grpId="0" nodeType="withEffect">
+                                <p:cTn id="40" presetID="10" presetClass="entr" presetSubtype="0" fill="hold" grpId="0" nodeType="clickEffect">
                                   <p:stCondLst>
                                     <p:cond delay="0"/>
                                   </p:stCondLst>
                                   <p:childTnLst>
                                     <p:set>
                                       <p:cBhvr>
-                                        <p:cTn id="39" dur="1" fill="hold">
+                                        <p:cTn id="41" dur="1" fill="hold">
+                                          <p:stCondLst>
+                                            <p:cond delay="0"/>
+                                          </p:stCondLst>
+                                        </p:cTn>
+                                        <p:tgtEl>
+                                          <p:spTgt spid="27"/>
+                                        </p:tgtEl>
+                                        <p:attrNameLst>
+                                          <p:attrName>style.visibility</p:attrName>
+                                        </p:attrNameLst>
+                                      </p:cBhvr>
+                                      <p:to>
+                                        <p:strVal val="visible"/>
+                                      </p:to>
+                                    </p:set>
+                                    <p:animEffect transition="in" filter="fade">
+                                      <p:cBhvr>
+                                        <p:cTn id="42" dur="400"/>
+                                        <p:tgtEl>
+                                          <p:spTgt spid="27"/>
+                                        </p:tgtEl>
+                                      </p:cBhvr>
+                                    </p:animEffect>
+                                  </p:childTnLst>
+                                </p:cTn>
+                              </p:par>
+                              <p:par>
+                                <p:cTn id="43" presetID="10" presetClass="entr" presetSubtype="0" fill="hold" grpId="0" nodeType="withEffect">
+                                  <p:stCondLst>
+                                    <p:cond delay="0"/>
+                                  </p:stCondLst>
+                                  <p:childTnLst>
+                                    <p:set>
+                                      <p:cBhvr>
+                                        <p:cTn id="44" dur="1" fill="hold">
                                           <p:stCondLst>
                                             <p:cond delay="0"/>
                                           </p:stCondLst>
@@ -30356,62 +30610,9 @@
                                     </p:set>
                                     <p:animEffect transition="in" filter="fade">
                                       <p:cBhvr>
-                                        <p:cTn id="40" dur="400"/>
+                                        <p:cTn id="45" dur="400"/>
                                         <p:tgtEl>
                                           <p:spTgt spid="28"/>
-                                        </p:tgtEl>
-                                      </p:cBhvr>
-                                    </p:animEffect>
-                                  </p:childTnLst>
-                                </p:cTn>
-                              </p:par>
-                            </p:childTnLst>
-                          </p:cTn>
-                        </p:par>
-                      </p:childTnLst>
-                    </p:cTn>
-                  </p:par>
-                  <p:par>
-                    <p:cTn id="41" fill="hold">
-                      <p:stCondLst>
-                        <p:cond delay="indefinite"/>
-                      </p:stCondLst>
-                      <p:childTnLst>
-                        <p:par>
-                          <p:cTn id="42" fill="hold">
-                            <p:stCondLst>
-                              <p:cond delay="0"/>
-                            </p:stCondLst>
-                            <p:childTnLst>
-                              <p:par>
-                                <p:cTn id="43" presetID="10" presetClass="entr" presetSubtype="0" fill="hold" grpId="0" nodeType="clickEffect">
-                                  <p:stCondLst>
-                                    <p:cond delay="0"/>
-                                  </p:stCondLst>
-                                  <p:childTnLst>
-                                    <p:set>
-                                      <p:cBhvr>
-                                        <p:cTn id="44" dur="1" fill="hold">
-                                          <p:stCondLst>
-                                            <p:cond delay="0"/>
-                                          </p:stCondLst>
-                                        </p:cTn>
-                                        <p:tgtEl>
-                                          <p:spTgt spid="27"/>
-                                        </p:tgtEl>
-                                        <p:attrNameLst>
-                                          <p:attrName>style.visibility</p:attrName>
-                                        </p:attrNameLst>
-                                      </p:cBhvr>
-                                      <p:to>
-                                        <p:strVal val="visible"/>
-                                      </p:to>
-                                    </p:set>
-                                    <p:animEffect transition="in" filter="fade">
-                                      <p:cBhvr>
-                                        <p:cTn id="45" dur="400"/>
-                                        <p:tgtEl>
-                                          <p:spTgt spid="27"/>
                                         </p:tgtEl>
                                       </p:cBhvr>
                                     </p:animEffect>
@@ -30488,8 +30689,8 @@
       <p:bldP spid="24" grpId="0" animBg="1"/>
       <p:bldP spid="25" grpId="0" animBg="1"/>
       <p:bldP spid="26" grpId="0" animBg="1"/>
+      <p:bldP spid="27" grpId="0" animBg="1"/>
       <p:bldP spid="28" grpId="0"/>
-      <p:bldP spid="27" grpId="0" animBg="1"/>
       <p:bldP spid="29" grpId="0"/>
     </p:bldLst>
   </p:timing>
